--- a/Documents/Presentation/Capstone Project Presentation.pptx
+++ b/Documents/Presentation/Capstone Project Presentation.pptx
@@ -225,7 +225,7 @@
           <a:p>
             <a:fld id="{01EDE3E3-4DC4-4033-AB14-8C688262196C}" type="datetimeFigureOut">
               <a:rPr lang="en-US" smtClean="0"/>
-              <a:t>5/17/2026</a:t>
+              <a:t>5/19/2026</a:t>
             </a:fld>
             <a:endParaRPr lang="en-US"/>
           </a:p>
@@ -2274,7 +2274,7 @@
           <a:p>
             <a:fld id="{5BCAD085-E8A6-8845-BD4E-CB4CCA059FC4}" type="datetimeFigureOut">
               <a:rPr lang="en-US" smtClean="0"/>
-              <a:t>5/17/2026</a:t>
+              <a:t>5/19/2026</a:t>
             </a:fld>
             <a:endParaRPr lang="en-US"/>
           </a:p>
@@ -2442,7 +2442,7 @@
           <a:p>
             <a:fld id="{5BCAD085-E8A6-8845-BD4E-CB4CCA059FC4}" type="datetimeFigureOut">
               <a:rPr lang="en-US" smtClean="0"/>
-              <a:t>5/17/2026</a:t>
+              <a:t>5/19/2026</a:t>
             </a:fld>
             <a:endParaRPr lang="en-US"/>
           </a:p>
@@ -2620,7 +2620,7 @@
           <a:p>
             <a:fld id="{5BCAD085-E8A6-8845-BD4E-CB4CCA059FC4}" type="datetimeFigureOut">
               <a:rPr lang="en-US" smtClean="0"/>
-              <a:t>5/17/2026</a:t>
+              <a:t>5/19/2026</a:t>
             </a:fld>
             <a:endParaRPr lang="en-US"/>
           </a:p>
@@ -2860,7 +2860,7 @@
           <a:p>
             <a:fld id="{5BCAD085-E8A6-8845-BD4E-CB4CCA059FC4}" type="datetimeFigureOut">
               <a:rPr lang="en-US" smtClean="0"/>
-              <a:t>5/17/2026</a:t>
+              <a:t>5/19/2026</a:t>
             </a:fld>
             <a:endParaRPr lang="en-US"/>
           </a:p>
@@ -3028,7 +3028,7 @@
           <a:p>
             <a:fld id="{5BCAD085-E8A6-8845-BD4E-CB4CCA059FC4}" type="datetimeFigureOut">
               <a:rPr lang="en-US" smtClean="0"/>
-              <a:t>5/17/2026</a:t>
+              <a:t>5/19/2026</a:t>
             </a:fld>
             <a:endParaRPr lang="en-US"/>
           </a:p>
@@ -3273,7 +3273,7 @@
           <a:p>
             <a:fld id="{5BCAD085-E8A6-8845-BD4E-CB4CCA059FC4}" type="datetimeFigureOut">
               <a:rPr lang="en-US" smtClean="0"/>
-              <a:t>5/17/2026</a:t>
+              <a:t>5/19/2026</a:t>
             </a:fld>
             <a:endParaRPr lang="en-US"/>
           </a:p>
@@ -3558,7 +3558,7 @@
           <a:p>
             <a:fld id="{5BCAD085-E8A6-8845-BD4E-CB4CCA059FC4}" type="datetimeFigureOut">
               <a:rPr lang="en-US" smtClean="0"/>
-              <a:t>5/17/2026</a:t>
+              <a:t>5/19/2026</a:t>
             </a:fld>
             <a:endParaRPr lang="en-US"/>
           </a:p>
@@ -3977,7 +3977,7 @@
           <a:p>
             <a:fld id="{5BCAD085-E8A6-8845-BD4E-CB4CCA059FC4}" type="datetimeFigureOut">
               <a:rPr lang="en-US" smtClean="0"/>
-              <a:t>5/17/2026</a:t>
+              <a:t>5/19/2026</a:t>
             </a:fld>
             <a:endParaRPr lang="en-US"/>
           </a:p>
@@ -4094,7 +4094,7 @@
           <a:p>
             <a:fld id="{5BCAD085-E8A6-8845-BD4E-CB4CCA059FC4}" type="datetimeFigureOut">
               <a:rPr lang="en-US" smtClean="0"/>
-              <a:t>5/17/2026</a:t>
+              <a:t>5/19/2026</a:t>
             </a:fld>
             <a:endParaRPr lang="en-US"/>
           </a:p>
@@ -4189,7 +4189,7 @@
           <a:p>
             <a:fld id="{5BCAD085-E8A6-8845-BD4E-CB4CCA059FC4}" type="datetimeFigureOut">
               <a:rPr lang="en-US" smtClean="0"/>
-              <a:t>5/17/2026</a:t>
+              <a:t>5/19/2026</a:t>
             </a:fld>
             <a:endParaRPr lang="en-US"/>
           </a:p>
@@ -4464,7 +4464,7 @@
           <a:p>
             <a:fld id="{5BCAD085-E8A6-8845-BD4E-CB4CCA059FC4}" type="datetimeFigureOut">
               <a:rPr lang="en-US" smtClean="0"/>
-              <a:t>5/17/2026</a:t>
+              <a:t>5/19/2026</a:t>
             </a:fld>
             <a:endParaRPr lang="en-US"/>
           </a:p>
@@ -4632,7 +4632,7 @@
           <a:p>
             <a:fld id="{5BCAD085-E8A6-8845-BD4E-CB4CCA059FC4}" type="datetimeFigureOut">
               <a:rPr lang="en-US" smtClean="0"/>
-              <a:t>5/17/2026</a:t>
+              <a:t>5/19/2026</a:t>
             </a:fld>
             <a:endParaRPr lang="en-US"/>
           </a:p>
@@ -4884,7 +4884,7 @@
           <a:p>
             <a:fld id="{5BCAD085-E8A6-8845-BD4E-CB4CCA059FC4}" type="datetimeFigureOut">
               <a:rPr lang="en-US" smtClean="0"/>
-              <a:t>5/17/2026</a:t>
+              <a:t>5/19/2026</a:t>
             </a:fld>
             <a:endParaRPr lang="en-US"/>
           </a:p>
@@ -5052,7 +5052,7 @@
           <a:p>
             <a:fld id="{5BCAD085-E8A6-8845-BD4E-CB4CCA059FC4}" type="datetimeFigureOut">
               <a:rPr lang="en-US" smtClean="0"/>
-              <a:t>5/17/2026</a:t>
+              <a:t>5/19/2026</a:t>
             </a:fld>
             <a:endParaRPr lang="en-US"/>
           </a:p>
@@ -5230,7 +5230,7 @@
           <a:p>
             <a:fld id="{5BCAD085-E8A6-8845-BD4E-CB4CCA059FC4}" type="datetimeFigureOut">
               <a:rPr lang="en-US" smtClean="0"/>
-              <a:t>5/17/2026</a:t>
+              <a:t>5/19/2026</a:t>
             </a:fld>
             <a:endParaRPr lang="en-US"/>
           </a:p>
@@ -5505,7 +5505,7 @@
           <a:p>
             <a:fld id="{5BCAD085-E8A6-8845-BD4E-CB4CCA059FC4}" type="datetimeFigureOut">
               <a:rPr lang="en-US" smtClean="0"/>
-              <a:t>5/17/2026</a:t>
+              <a:t>5/19/2026</a:t>
             </a:fld>
             <a:endParaRPr lang="en-US"/>
           </a:p>
@@ -5673,7 +5673,7 @@
           <a:p>
             <a:fld id="{5BCAD085-E8A6-8845-BD4E-CB4CCA059FC4}" type="datetimeFigureOut">
               <a:rPr lang="en-US" smtClean="0"/>
-              <a:t>5/17/2026</a:t>
+              <a:t>5/19/2026</a:t>
             </a:fld>
             <a:endParaRPr lang="en-US"/>
           </a:p>
@@ -5918,7 +5918,7 @@
           <a:p>
             <a:fld id="{5BCAD085-E8A6-8845-BD4E-CB4CCA059FC4}" type="datetimeFigureOut">
               <a:rPr lang="en-US" smtClean="0"/>
-              <a:t>5/17/2026</a:t>
+              <a:t>5/19/2026</a:t>
             </a:fld>
             <a:endParaRPr lang="en-US"/>
           </a:p>
@@ -6203,7 +6203,7 @@
           <a:p>
             <a:fld id="{5BCAD085-E8A6-8845-BD4E-CB4CCA059FC4}" type="datetimeFigureOut">
               <a:rPr lang="en-US" smtClean="0"/>
-              <a:t>5/17/2026</a:t>
+              <a:t>5/19/2026</a:t>
             </a:fld>
             <a:endParaRPr lang="en-US"/>
           </a:p>
@@ -6622,7 +6622,7 @@
           <a:p>
             <a:fld id="{5BCAD085-E8A6-8845-BD4E-CB4CCA059FC4}" type="datetimeFigureOut">
               <a:rPr lang="en-US" smtClean="0"/>
-              <a:t>5/17/2026</a:t>
+              <a:t>5/19/2026</a:t>
             </a:fld>
             <a:endParaRPr lang="en-US"/>
           </a:p>
@@ -6739,7 +6739,7 @@
           <a:p>
             <a:fld id="{5BCAD085-E8A6-8845-BD4E-CB4CCA059FC4}" type="datetimeFigureOut">
               <a:rPr lang="en-US" smtClean="0"/>
-              <a:t>5/17/2026</a:t>
+              <a:t>5/19/2026</a:t>
             </a:fld>
             <a:endParaRPr lang="en-US"/>
           </a:p>
@@ -6984,7 +6984,7 @@
           <a:p>
             <a:fld id="{5BCAD085-E8A6-8845-BD4E-CB4CCA059FC4}" type="datetimeFigureOut">
               <a:rPr lang="en-US" smtClean="0"/>
-              <a:t>5/17/2026</a:t>
+              <a:t>5/19/2026</a:t>
             </a:fld>
             <a:endParaRPr lang="en-US"/>
           </a:p>
@@ -7079,7 +7079,7 @@
           <a:p>
             <a:fld id="{5BCAD085-E8A6-8845-BD4E-CB4CCA059FC4}" type="datetimeFigureOut">
               <a:rPr lang="en-US" smtClean="0"/>
-              <a:t>5/17/2026</a:t>
+              <a:t>5/19/2026</a:t>
             </a:fld>
             <a:endParaRPr lang="en-US"/>
           </a:p>
@@ -7354,7 +7354,7 @@
           <a:p>
             <a:fld id="{5BCAD085-E8A6-8845-BD4E-CB4CCA059FC4}" type="datetimeFigureOut">
               <a:rPr lang="en-US" smtClean="0"/>
-              <a:t>5/17/2026</a:t>
+              <a:t>5/19/2026</a:t>
             </a:fld>
             <a:endParaRPr lang="en-US"/>
           </a:p>
@@ -7606,7 +7606,7 @@
           <a:p>
             <a:fld id="{5BCAD085-E8A6-8845-BD4E-CB4CCA059FC4}" type="datetimeFigureOut">
               <a:rPr lang="en-US" smtClean="0"/>
-              <a:t>5/17/2026</a:t>
+              <a:t>5/19/2026</a:t>
             </a:fld>
             <a:endParaRPr lang="en-US"/>
           </a:p>
@@ -7774,7 +7774,7 @@
           <a:p>
             <a:fld id="{5BCAD085-E8A6-8845-BD4E-CB4CCA059FC4}" type="datetimeFigureOut">
               <a:rPr lang="en-US" smtClean="0"/>
-              <a:t>5/17/2026</a:t>
+              <a:t>5/19/2026</a:t>
             </a:fld>
             <a:endParaRPr lang="en-US"/>
           </a:p>
@@ -7952,7 +7952,7 @@
           <a:p>
             <a:fld id="{5BCAD085-E8A6-8845-BD4E-CB4CCA059FC4}" type="datetimeFigureOut">
               <a:rPr lang="en-US" smtClean="0"/>
-              <a:t>5/17/2026</a:t>
+              <a:t>5/19/2026</a:t>
             </a:fld>
             <a:endParaRPr lang="en-US"/>
           </a:p>
@@ -8307,7 +8307,7 @@
           <a:p>
             <a:fld id="{5BCAD085-E8A6-8845-BD4E-CB4CCA059FC4}" type="datetimeFigureOut">
               <a:rPr lang="en-US" smtClean="0"/>
-              <a:t>5/17/2026</a:t>
+              <a:t>5/19/2026</a:t>
             </a:fld>
             <a:endParaRPr lang="en-US"/>
           </a:p>
@@ -8726,7 +8726,7 @@
           <a:p>
             <a:fld id="{5BCAD085-E8A6-8845-BD4E-CB4CCA059FC4}" type="datetimeFigureOut">
               <a:rPr lang="en-US" smtClean="0"/>
-              <a:t>5/17/2026</a:t>
+              <a:t>5/19/2026</a:t>
             </a:fld>
             <a:endParaRPr lang="en-US"/>
           </a:p>
@@ -8843,7 +8843,7 @@
           <a:p>
             <a:fld id="{5BCAD085-E8A6-8845-BD4E-CB4CCA059FC4}" type="datetimeFigureOut">
               <a:rPr lang="en-US" smtClean="0"/>
-              <a:t>5/17/2026</a:t>
+              <a:t>5/19/2026</a:t>
             </a:fld>
             <a:endParaRPr lang="en-US"/>
           </a:p>
@@ -8938,7 +8938,7 @@
           <a:p>
             <a:fld id="{5BCAD085-E8A6-8845-BD4E-CB4CCA059FC4}" type="datetimeFigureOut">
               <a:rPr lang="en-US" smtClean="0"/>
-              <a:t>5/17/2026</a:t>
+              <a:t>5/19/2026</a:t>
             </a:fld>
             <a:endParaRPr lang="en-US"/>
           </a:p>
@@ -9213,7 +9213,7 @@
           <a:p>
             <a:fld id="{5BCAD085-E8A6-8845-BD4E-CB4CCA059FC4}" type="datetimeFigureOut">
               <a:rPr lang="en-US" smtClean="0"/>
-              <a:t>5/17/2026</a:t>
+              <a:t>5/19/2026</a:t>
             </a:fld>
             <a:endParaRPr lang="en-US"/>
           </a:p>
@@ -9465,7 +9465,7 @@
           <a:p>
             <a:fld id="{5BCAD085-E8A6-8845-BD4E-CB4CCA059FC4}" type="datetimeFigureOut">
               <a:rPr lang="en-US" smtClean="0"/>
-              <a:t>5/17/2026</a:t>
+              <a:t>5/19/2026</a:t>
             </a:fld>
             <a:endParaRPr lang="en-US"/>
           </a:p>
@@ -9676,7 +9676,7 @@
           <a:p>
             <a:fld id="{5BCAD085-E8A6-8845-BD4E-CB4CCA059FC4}" type="datetimeFigureOut">
               <a:rPr lang="en-US" smtClean="0"/>
-              <a:t>5/17/2026</a:t>
+              <a:t>5/19/2026</a:t>
             </a:fld>
             <a:endParaRPr lang="en-US"/>
           </a:p>
@@ -10184,7 +10184,7 @@
           <a:p>
             <a:fld id="{5BCAD085-E8A6-8845-BD4E-CB4CCA059FC4}" type="datetimeFigureOut">
               <a:rPr lang="en-US" smtClean="0"/>
-              <a:t>5/17/2026</a:t>
+              <a:t>5/19/2026</a:t>
             </a:fld>
             <a:endParaRPr lang="en-US"/>
           </a:p>
@@ -10693,7 +10693,7 @@
           <a:p>
             <a:fld id="{5BCAD085-E8A6-8845-BD4E-CB4CCA059FC4}" type="datetimeFigureOut">
               <a:rPr lang="en-US" smtClean="0"/>
-              <a:t>5/17/2026</a:t>
+              <a:t>5/19/2026</a:t>
             </a:fld>
             <a:endParaRPr lang="en-US"/>
           </a:p>
@@ -27392,8 +27392,64 @@
                 <a:ea typeface="+mn-ea"/>
                 <a:cs typeface="+mn-cs"/>
               </a:rPr>
-              <a:t> / WebSocket streaming</a:t>
-            </a:r>
+              <a:t> / WebSocket </a:t>
+            </a:r>
+            <a:endParaRPr kumimoji="0" lang="en-US" sz="1400" b="0" i="0" u="none" strike="noStrike" kern="1200" cap="none" spc="0" normalizeH="0" baseline="0" noProof="0" dirty="0">
+              <a:ln>
+                <a:noFill/>
+              </a:ln>
+              <a:solidFill>
+                <a:srgbClr val="7AAB8A"/>
+              </a:solidFill>
+              <a:effectLst/>
+              <a:uLnTx/>
+              <a:uFillTx/>
+              <a:latin typeface="Candara"/>
+              <a:ea typeface="+mn-ea"/>
+              <a:cs typeface="+mn-cs"/>
+            </a:endParaRPr>
+          </a:p>
+          <a:p>
+            <a:pPr marL="0" marR="0" lvl="0" indent="0" algn="l" defTabSz="457200" rtl="0" eaLnBrk="1" fontAlgn="auto" latinLnBrk="0" hangingPunct="1">
+              <a:lnSpc>
+                <a:spcPct val="100000"/>
+              </a:lnSpc>
+              <a:spcBef>
+                <a:spcPts val="0"/>
+              </a:spcBef>
+              <a:spcAft>
+                <a:spcPts val="0"/>
+              </a:spcAft>
+              <a:buClrTx/>
+              <a:buSzTx/>
+              <a:buFontTx/>
+              <a:buNone/>
+              <a:tabLst/>
+              <a:defRPr/>
+            </a:pPr>
+            <a:r>
+              <a:rPr lang="en-US" sz="1400" dirty="0">
+                <a:solidFill>
+                  <a:srgbClr val="7AAB8A"/>
+                </a:solidFill>
+                <a:latin typeface="Candara"/>
+              </a:rPr>
+              <a:t>Realtime Update</a:t>
+            </a:r>
+            <a:endParaRPr kumimoji="0" sz="1400" b="0" i="0" u="none" strike="noStrike" kern="1200" cap="none" spc="0" normalizeH="0" baseline="0" noProof="0" dirty="0">
+              <a:ln>
+                <a:noFill/>
+              </a:ln>
+              <a:solidFill>
+                <a:srgbClr val="7AAB8A"/>
+              </a:solidFill>
+              <a:effectLst/>
+              <a:uLnTx/>
+              <a:uFillTx/>
+              <a:latin typeface="Candara"/>
+              <a:ea typeface="+mn-ea"/>
+              <a:cs typeface="+mn-cs"/>
+            </a:endParaRPr>
           </a:p>
         </p:txBody>
       </p:sp>
@@ -28964,7 +29020,7 @@
         <p:spPr>
           <a:xfrm>
             <a:off x="1856232" y="5359400"/>
-            <a:ext cx="4572000" cy="369332"/>
+            <a:ext cx="4572000" cy="923330"/>
           </a:xfrm>
           <a:prstGeom prst="rect">
             <a:avLst/>
@@ -28995,7 +29051,7 @@
               <a:defRPr/>
             </a:pPr>
             <a:r>
-              <a:rPr kumimoji="0" b="1" i="0" u="none" strike="noStrike" kern="1200" cap="none" spc="0" normalizeH="0" baseline="0" noProof="0">
+              <a:rPr kumimoji="0" b="1" i="0" u="none" strike="noStrike" kern="1200" cap="none" spc="0" normalizeH="0" baseline="0" noProof="0" dirty="0">
                 <a:ln>
                   <a:noFill/>
                 </a:ln>
@@ -29009,32 +29065,18 @@
                 <a:ea typeface="+mn-ea"/>
                 <a:cs typeface="+mn-cs"/>
               </a:rPr>
-              <a:t>Historical Analysis</a:t>
-            </a:r>
-          </a:p>
-        </p:txBody>
-      </p:sp>
-      <p:sp>
-        <p:nvSpPr>
-          <p:cNvPr id="17" name="TextBox 16"/>
-          <p:cNvSpPr txBox="1"/>
-          <p:nvPr/>
-        </p:nvSpPr>
-        <p:spPr>
-          <a:xfrm>
-            <a:off x="1856232" y="5615432"/>
-            <a:ext cx="4572000" cy="307777"/>
-          </a:xfrm>
-          <a:prstGeom prst="rect">
-            <a:avLst/>
-          </a:prstGeom>
-          <a:noFill/>
-        </p:spPr>
-        <p:txBody>
-          <a:bodyPr wrap="square">
-            <a:spAutoFit/>
-          </a:bodyPr>
-          <a:lstStyle/>
+              <a:t>Historical </a:t>
+            </a:r>
+            <a:r>
+              <a:rPr lang="en-US" b="1" dirty="0">
+                <a:solidFill>
+                  <a:srgbClr val="FFFFFF"/>
+                </a:solidFill>
+                <a:latin typeface="Candara" panose="020E0502030303020204" pitchFamily="34" charset="0"/>
+              </a:rPr>
+              <a:t>View</a:t>
+            </a:r>
+          </a:p>
           <a:p>
             <a:pPr marL="0" marR="0" lvl="0" indent="0" algn="l" defTabSz="457200" rtl="0" eaLnBrk="1" fontAlgn="auto" latinLnBrk="0" hangingPunct="1">
               <a:lnSpc>
@@ -29053,23 +29095,118 @@
               <a:tabLst/>
               <a:defRPr/>
             </a:pPr>
-            <a:r>
-              <a:rPr kumimoji="0" sz="1400" b="0" i="0" u="none" strike="noStrike" kern="1200" cap="none" spc="0" normalizeH="0" baseline="0" noProof="0">
-                <a:ln>
-                  <a:noFill/>
-                </a:ln>
+            <a:endParaRPr kumimoji="0" lang="en-US" b="1" i="0" u="none" strike="noStrike" kern="1200" cap="none" spc="0" normalizeH="0" baseline="0" noProof="0" dirty="0">
+              <a:ln>
+                <a:noFill/>
+              </a:ln>
+              <a:solidFill>
+                <a:srgbClr val="FFFFFF"/>
+              </a:solidFill>
+              <a:effectLst/>
+              <a:uLnTx/>
+              <a:uFillTx/>
+              <a:latin typeface="Candara" panose="020E0502030303020204" pitchFamily="34" charset="0"/>
+              <a:ea typeface="+mn-ea"/>
+              <a:cs typeface="+mn-cs"/>
+            </a:endParaRPr>
+          </a:p>
+          <a:p>
+            <a:pPr marL="0" marR="0" lvl="0" indent="0" algn="l" defTabSz="457200" rtl="0" eaLnBrk="1" fontAlgn="auto" latinLnBrk="0" hangingPunct="1">
+              <a:lnSpc>
+                <a:spcPct val="100000"/>
+              </a:lnSpc>
+              <a:spcBef>
+                <a:spcPts val="0"/>
+              </a:spcBef>
+              <a:spcAft>
+                <a:spcPts val="0"/>
+              </a:spcAft>
+              <a:buClrTx/>
+              <a:buSzTx/>
+              <a:buFontTx/>
+              <a:buNone/>
+              <a:tabLst/>
+              <a:defRPr/>
+            </a:pPr>
+            <a:endParaRPr kumimoji="0" b="1" i="0" u="none" strike="noStrike" kern="1200" cap="none" spc="0" normalizeH="0" baseline="0" noProof="0" dirty="0">
+              <a:ln>
+                <a:noFill/>
+              </a:ln>
+              <a:solidFill>
+                <a:srgbClr val="FFFFFF"/>
+              </a:solidFill>
+              <a:effectLst/>
+              <a:uLnTx/>
+              <a:uFillTx/>
+              <a:latin typeface="Candara" panose="020E0502030303020204" pitchFamily="34" charset="0"/>
+              <a:ea typeface="+mn-ea"/>
+              <a:cs typeface="+mn-cs"/>
+            </a:endParaRPr>
+          </a:p>
+        </p:txBody>
+      </p:sp>
+      <p:sp>
+        <p:nvSpPr>
+          <p:cNvPr id="17" name="TextBox 16"/>
+          <p:cNvSpPr txBox="1"/>
+          <p:nvPr/>
+        </p:nvSpPr>
+        <p:spPr>
+          <a:xfrm>
+            <a:off x="1856232" y="5615432"/>
+            <a:ext cx="4572000" cy="307777"/>
+          </a:xfrm>
+          <a:prstGeom prst="rect">
+            <a:avLst/>
+          </a:prstGeom>
+          <a:noFill/>
+        </p:spPr>
+        <p:txBody>
+          <a:bodyPr wrap="square">
+            <a:spAutoFit/>
+          </a:bodyPr>
+          <a:lstStyle/>
+          <a:p>
+            <a:pPr marL="0" marR="0" lvl="0" indent="0" algn="l" defTabSz="457200" rtl="0" eaLnBrk="1" fontAlgn="auto" latinLnBrk="0" hangingPunct="1">
+              <a:lnSpc>
+                <a:spcPct val="100000"/>
+              </a:lnSpc>
+              <a:spcBef>
+                <a:spcPts val="0"/>
+              </a:spcBef>
+              <a:spcAft>
+                <a:spcPts val="0"/>
+              </a:spcAft>
+              <a:buClrTx/>
+              <a:buSzTx/>
+              <a:buFontTx/>
+              <a:buNone/>
+              <a:tabLst/>
+              <a:defRPr/>
+            </a:pPr>
+            <a:r>
+              <a:rPr lang="en-US" sz="1400" dirty="0">
                 <a:solidFill>
                   <a:srgbClr val="7AAB8A"/>
                 </a:solidFill>
-                <a:effectLst/>
-                <a:uLnTx/>
-                <a:uFillTx/>
                 <a:latin typeface="Candara" panose="020E0502030303020204" pitchFamily="34" charset="0"/>
-                <a:ea typeface="+mn-ea"/>
-                <a:cs typeface="+mn-cs"/>
-              </a:rPr>
-              <a:t>Query, filter, and export time-series data</a:t>
-            </a:r>
+              </a:rPr>
+              <a:t>Basic View Of Historical Readings</a:t>
+            </a:r>
+            <a:endParaRPr kumimoji="0" sz="1400" b="0" i="0" u="none" strike="noStrike" kern="1200" cap="none" spc="0" normalizeH="0" baseline="0" noProof="0" dirty="0">
+              <a:ln>
+                <a:noFill/>
+              </a:ln>
+              <a:solidFill>
+                <a:srgbClr val="7AAB8A"/>
+              </a:solidFill>
+              <a:effectLst/>
+              <a:uLnTx/>
+              <a:uFillTx/>
+              <a:latin typeface="Candara" panose="020E0502030303020204" pitchFamily="34" charset="0"/>
+              <a:ea typeface="+mn-ea"/>
+              <a:cs typeface="+mn-cs"/>
+            </a:endParaRPr>
           </a:p>
         </p:txBody>
       </p:sp>

--- a/Documents/Presentation/Capstone Project Presentation.pptx
+++ b/Documents/Presentation/Capstone Project Presentation.pptx
@@ -11893,7 +11893,27 @@
                 <a:latin typeface="Candara" panose="020E0502030303020204" pitchFamily="34" charset="0"/>
                 <a:ea typeface="Cambria Math" panose="02040503050406030204" pitchFamily="18" charset="0"/>
               </a:rPr>
-              <a:t>C#, ASP.net core, Restful </a:t>
+              <a:t>C#, ASP.NET Core, </a:t>
+            </a:r>
+            <a:r>
+              <a:rPr lang="en-US" sz="1400" b="1" dirty="0" err="1">
+                <a:solidFill>
+                  <a:srgbClr val="009A72"/>
+                </a:solidFill>
+                <a:latin typeface="Candara" panose="020E0502030303020204" pitchFamily="34" charset="0"/>
+                <a:ea typeface="Cambria Math" panose="02040503050406030204" pitchFamily="18" charset="0"/>
+              </a:rPr>
+              <a:t>RESt</a:t>
+            </a:r>
+            <a:r>
+              <a:rPr lang="en-US" sz="1400" b="1" dirty="0">
+                <a:solidFill>
+                  <a:srgbClr val="009A72"/>
+                </a:solidFill>
+                <a:latin typeface="Candara" panose="020E0502030303020204" pitchFamily="34" charset="0"/>
+                <a:ea typeface="Cambria Math" panose="02040503050406030204" pitchFamily="18" charset="0"/>
+              </a:rPr>
+              <a:t> </a:t>
             </a:r>
             <a:r>
               <a:rPr lang="en-US" sz="1400" dirty="0">
@@ -14085,52 +14105,9 @@
                 <a:ea typeface="Calibri" pitchFamily="34" charset="-122"/>
                 <a:cs typeface="Calibri" pitchFamily="34" charset="-120"/>
               </a:rPr>
-              <a:t>Engineering Decision Made To Handle specific Technical problems.</a:t>
+              <a:t>Engineering decisions that address specific technical challenges.</a:t>
             </a:r>
             <a:endParaRPr lang="en-US" sz="1600" dirty="0">
-              <a:solidFill>
-                <a:prstClr val="black"/>
-              </a:solidFill>
-              <a:latin typeface="Candara" panose="020E0502030303020204" pitchFamily="34" charset="0"/>
-            </a:endParaRPr>
-          </a:p>
-        </p:txBody>
-      </p:sp>
-      <p:sp>
-        <p:nvSpPr>
-          <p:cNvPr id="4" name="Shape 2"/>
-          <p:cNvSpPr/>
-          <p:nvPr/>
-        </p:nvSpPr>
-        <p:spPr>
-          <a:xfrm>
-            <a:off x="609441" y="1585440"/>
-            <a:ext cx="5399649" cy="2303688"/>
-          </a:xfrm>
-          <a:prstGeom prst="rect">
-            <a:avLst/>
-          </a:prstGeom>
-          <a:solidFill>
-            <a:srgbClr val="0D2318"/>
-          </a:solidFill>
-          <a:ln w="9525">
-            <a:noFill/>
-            <a:prstDash val="solid"/>
-          </a:ln>
-          <a:effectLst>
-            <a:outerShdw blurRad="76200" dist="25400" dir="8100000" algn="bl" rotWithShape="0">
-              <a:srgbClr val="000000">
-                <a:alpha val="25000"/>
-              </a:srgbClr>
-            </a:outerShdw>
-          </a:effectLst>
-        </p:spPr>
-        <p:txBody>
-          <a:bodyPr/>
-          <a:lstStyle/>
-          <a:p>
-            <a:pPr defTabSz="1218895"/>
-            <a:endParaRPr lang="en-US" sz="1600">
               <a:solidFill>
                 <a:prstClr val="black"/>
               </a:solidFill>
@@ -14175,54 +14152,6 @@
           </a:p>
         </p:txBody>
       </p:sp>
-      <p:sp>
-        <p:nvSpPr>
-          <p:cNvPr id="6" name="Text 4"/>
-          <p:cNvSpPr/>
-          <p:nvPr/>
-        </p:nvSpPr>
-        <p:spPr>
-          <a:xfrm>
-            <a:off x="5399649" y="1707329"/>
-            <a:ext cx="609441" cy="390042"/>
-          </a:xfrm>
-          <a:prstGeom prst="rect">
-            <a:avLst/>
-          </a:prstGeom>
-          <a:solidFill>
-            <a:srgbClr val="0D2318"/>
-          </a:solidFill>
-          <a:ln>
-            <a:noFill/>
-          </a:ln>
-        </p:spPr>
-        <p:txBody>
-          <a:bodyPr wrap="square" lIns="0" tIns="0" rIns="0" bIns="0" rtlCol="0" anchor="ctr"/>
-          <a:lstStyle/>
-          <a:p>
-            <a:pPr algn="r" defTabSz="1218895"/>
-            <a:r>
-              <a:rPr lang="en-US" sz="1600" b="1" dirty="0">
-                <a:solidFill>
-                  <a:srgbClr val="3DDB61">
-                    <a:alpha val="40000"/>
-                  </a:srgbClr>
-                </a:solidFill>
-                <a:latin typeface="Candara" panose="020E0502030303020204" pitchFamily="34" charset="0"/>
-                <a:ea typeface="Calibri" pitchFamily="34" charset="-122"/>
-                <a:cs typeface="Calibri" pitchFamily="34" charset="-120"/>
-              </a:rPr>
-              <a:t>01</a:t>
-            </a:r>
-            <a:endParaRPr lang="en-US" sz="1600" dirty="0">
-              <a:solidFill>
-                <a:prstClr val="black"/>
-              </a:solidFill>
-              <a:latin typeface="Candara" panose="020E0502030303020204" pitchFamily="34" charset="0"/>
-            </a:endParaRPr>
-          </a:p>
-        </p:txBody>
-      </p:sp>
       <p:pic>
         <p:nvPicPr>
           <p:cNvPr id="7" name="Image 0" descr="preencoded.png"/>
@@ -14342,7 +14271,7 @@
         <p:spPr>
           <a:xfrm>
             <a:off x="828839" y="2353336"/>
-            <a:ext cx="5107118" cy="792274"/>
+            <a:ext cx="4974802" cy="428349"/>
           </a:xfrm>
           <a:prstGeom prst="rect">
             <a:avLst/>
@@ -14371,7 +14300,7 @@
               <a:t>Challenge  </a:t>
             </a:r>
             <a:r>
-              <a:rPr lang="en-US" sz="1600" dirty="0">
+              <a:rPr lang="en-US" sz="1600" b="1" dirty="0">
                 <a:solidFill>
                   <a:srgbClr val="A8C4B0"/>
                 </a:solidFill>
@@ -14379,7 +14308,18 @@
                 <a:ea typeface="Calibri" pitchFamily="34" charset="-122"/>
                 <a:cs typeface="Calibri" pitchFamily="34" charset="-120"/>
               </a:rPr>
-              <a:t>Keeping multiple browser clients in sync with live sensor data without polling or page refreshes.</a:t>
+              <a:t>Multi-client live sync without polling</a:t>
+            </a:r>
+            <a:r>
+              <a:rPr lang="en-US" sz="1600" dirty="0">
+                <a:solidFill>
+                  <a:srgbClr val="A8C4B0"/>
+                </a:solidFill>
+                <a:latin typeface="Candara" panose="020E0502030303020204" pitchFamily="34" charset="0"/>
+                <a:ea typeface="Calibri" pitchFamily="34" charset="-122"/>
+                <a:cs typeface="Calibri" pitchFamily="34" charset="-120"/>
+              </a:rPr>
+              <a:t>.</a:t>
             </a:r>
             <a:endParaRPr lang="en-US" sz="1600" dirty="0">
               <a:solidFill>
@@ -14398,8 +14338,8 @@
         </p:nvSpPr>
         <p:spPr>
           <a:xfrm>
-            <a:off x="828839" y="3218743"/>
-            <a:ext cx="5107118" cy="914162"/>
+            <a:off x="828838" y="2752058"/>
+            <a:ext cx="5326517" cy="463175"/>
           </a:xfrm>
           <a:prstGeom prst="rect">
             <a:avLst/>
@@ -14428,7 +14368,7 @@
               <a:t>Solution  </a:t>
             </a:r>
             <a:r>
-              <a:rPr lang="en-US" sz="1600" dirty="0">
+              <a:rPr lang="en-US" sz="1600" dirty="0" err="1">
                 <a:solidFill>
                   <a:srgbClr val="C8DDD0"/>
                 </a:solidFill>
@@ -14436,52 +14376,20 @@
                 <a:ea typeface="Calibri" pitchFamily="34" charset="-122"/>
                 <a:cs typeface="Calibri" pitchFamily="34" charset="-120"/>
               </a:rPr>
-              <a:t>SignalR WebSocket hub with device-group subscriptions. Server pushes to groups on data receipt.</a:t>
+              <a:t>SignalR</a:t>
+            </a:r>
+            <a:r>
+              <a:rPr lang="en-US" sz="1600" dirty="0">
+                <a:solidFill>
+                  <a:srgbClr val="C8DDD0"/>
+                </a:solidFill>
+                <a:latin typeface="Candara" panose="020E0502030303020204" pitchFamily="34" charset="0"/>
+                <a:ea typeface="Calibri" pitchFamily="34" charset="-122"/>
+                <a:cs typeface="Calibri" pitchFamily="34" charset="-120"/>
+              </a:rPr>
+              <a:t> groups; push after save.</a:t>
             </a:r>
             <a:endParaRPr lang="en-US" sz="1600" dirty="0">
-              <a:solidFill>
-                <a:prstClr val="black"/>
-              </a:solidFill>
-              <a:latin typeface="Candara" panose="020E0502030303020204" pitchFamily="34" charset="0"/>
-            </a:endParaRPr>
-          </a:p>
-        </p:txBody>
-      </p:sp>
-      <p:sp>
-        <p:nvSpPr>
-          <p:cNvPr id="12" name="Shape 9"/>
-          <p:cNvSpPr/>
-          <p:nvPr/>
-        </p:nvSpPr>
-        <p:spPr>
-          <a:xfrm>
-            <a:off x="6399133" y="1585440"/>
-            <a:ext cx="5424027" cy="2303688"/>
-          </a:xfrm>
-          <a:prstGeom prst="rect">
-            <a:avLst/>
-          </a:prstGeom>
-          <a:solidFill>
-            <a:srgbClr val="0D2318"/>
-          </a:solidFill>
-          <a:ln w="9525">
-            <a:noFill/>
-            <a:prstDash val="solid"/>
-          </a:ln>
-          <a:effectLst>
-            <a:outerShdw blurRad="76200" dist="25400" dir="8100000" algn="bl" rotWithShape="0">
-              <a:srgbClr val="000000">
-                <a:alpha val="25000"/>
-              </a:srgbClr>
-            </a:outerShdw>
-          </a:effectLst>
-        </p:spPr>
-        <p:txBody>
-          <a:bodyPr/>
-          <a:lstStyle/>
-          <a:p>
-            <a:pPr defTabSz="1218895"/>
-            <a:endParaRPr lang="en-US" sz="1600">
               <a:solidFill>
                 <a:prstClr val="black"/>
               </a:solidFill>
@@ -14526,54 +14434,6 @@
           </a:p>
         </p:txBody>
       </p:sp>
-      <p:sp>
-        <p:nvSpPr>
-          <p:cNvPr id="14" name="Text 11"/>
-          <p:cNvSpPr/>
-          <p:nvPr/>
-        </p:nvSpPr>
-        <p:spPr>
-          <a:xfrm>
-            <a:off x="11189341" y="1707329"/>
-            <a:ext cx="609441" cy="390042"/>
-          </a:xfrm>
-          <a:prstGeom prst="rect">
-            <a:avLst/>
-          </a:prstGeom>
-          <a:solidFill>
-            <a:srgbClr val="0D2318"/>
-          </a:solidFill>
-          <a:ln>
-            <a:noFill/>
-          </a:ln>
-        </p:spPr>
-        <p:txBody>
-          <a:bodyPr wrap="square" lIns="0" tIns="0" rIns="0" bIns="0" rtlCol="0" anchor="ctr"/>
-          <a:lstStyle/>
-          <a:p>
-            <a:pPr algn="r" defTabSz="1218895"/>
-            <a:r>
-              <a:rPr lang="en-US" sz="1600" b="1" dirty="0">
-                <a:solidFill>
-                  <a:srgbClr val="00BCD4">
-                    <a:alpha val="40000"/>
-                  </a:srgbClr>
-                </a:solidFill>
-                <a:latin typeface="Candara" panose="020E0502030303020204" pitchFamily="34" charset="0"/>
-                <a:ea typeface="Calibri" pitchFamily="34" charset="-122"/>
-                <a:cs typeface="Calibri" pitchFamily="34" charset="-120"/>
-              </a:rPr>
-              <a:t>02</a:t>
-            </a:r>
-            <a:endParaRPr lang="en-US" sz="1600" dirty="0">
-              <a:solidFill>
-                <a:prstClr val="black"/>
-              </a:solidFill>
-              <a:latin typeface="Candara" panose="020E0502030303020204" pitchFamily="34" charset="0"/>
-            </a:endParaRPr>
-          </a:p>
-        </p:txBody>
-      </p:sp>
       <p:pic>
         <p:nvPicPr>
           <p:cNvPr id="15" name="Image 1" descr="preencoded.png"/>
@@ -14693,7 +14553,7 @@
         <p:spPr>
           <a:xfrm>
             <a:off x="6618531" y="2353336"/>
-            <a:ext cx="5107118" cy="792274"/>
+            <a:ext cx="5107118" cy="479718"/>
           </a:xfrm>
           <a:prstGeom prst="rect">
             <a:avLst/>
@@ -14722,7 +14582,7 @@
               <a:t>Challenge  </a:t>
             </a:r>
             <a:r>
-              <a:rPr lang="en-US" sz="1600" dirty="0">
+              <a:rPr lang="en-US" sz="1600" b="1" dirty="0">
                 <a:solidFill>
                   <a:srgbClr val="A8C4B0"/>
                 </a:solidFill>
@@ -14730,7 +14590,18 @@
                 <a:ea typeface="Calibri" pitchFamily="34" charset="-122"/>
                 <a:cs typeface="Calibri" pitchFamily="34" charset="-120"/>
               </a:rPr>
-              <a:t>SensorReadings grows to thousands of rows per device per day. Queries must stay fast.</a:t>
+              <a:t>Fast queries on growing reading table</a:t>
+            </a:r>
+            <a:r>
+              <a:rPr lang="en-US" sz="1600" dirty="0">
+                <a:solidFill>
+                  <a:srgbClr val="A8C4B0"/>
+                </a:solidFill>
+                <a:latin typeface="Candara" panose="020E0502030303020204" pitchFamily="34" charset="0"/>
+                <a:ea typeface="Calibri" pitchFamily="34" charset="-122"/>
+                <a:cs typeface="Calibri" pitchFamily="34" charset="-120"/>
+              </a:rPr>
+              <a:t>.</a:t>
             </a:r>
             <a:endParaRPr lang="en-US" sz="1600" dirty="0">
               <a:solidFill>
@@ -14749,8 +14620,8 @@
         </p:nvSpPr>
         <p:spPr>
           <a:xfrm>
-            <a:off x="6618531" y="3218743"/>
-            <a:ext cx="5107118" cy="914162"/>
+            <a:off x="6618531" y="2734588"/>
+            <a:ext cx="5107118" cy="463175"/>
           </a:xfrm>
           <a:prstGeom prst="rect">
             <a:avLst/>
@@ -14787,7 +14658,7 @@
                 <a:ea typeface="Calibri" pitchFamily="34" charset="-122"/>
                 <a:cs typeface="Calibri" pitchFamily="34" charset="-120"/>
               </a:rPr>
-              <a:t>BIGINT key, composite indexes on (Timestamp, DeviceId), 30-day detail + aggregated archive policy. Consider to work on MongoDB instead of MSSQL</a:t>
+              <a:t>BIGINT key, indexes, paged date filters</a:t>
             </a:r>
             <a:endParaRPr lang="en-US" sz="1600" dirty="0">
               <a:solidFill>
@@ -14798,16 +14669,24 @@
           </a:p>
         </p:txBody>
       </p:sp>
-      <p:sp>
-        <p:nvSpPr>
-          <p:cNvPr id="20" name="Shape 16"/>
-          <p:cNvSpPr/>
-          <p:nvPr/>
-        </p:nvSpPr>
-        <p:spPr>
-          <a:xfrm>
-            <a:off x="609441" y="4037135"/>
-            <a:ext cx="5545915" cy="2657164"/>
+      <p:pic>
+        <p:nvPicPr>
+          <p:cNvPr id="23" name="Image 2" descr="preencoded.png"/>
+          <p:cNvPicPr>
+            <a:picLocks noChangeAspect="1"/>
+          </p:cNvPicPr>
+          <p:nvPr/>
+        </p:nvPicPr>
+        <p:blipFill>
+          <a:blip r:embed="rId5"/>
+          <a:stretch>
+            <a:fillRect/>
+          </a:stretch>
+        </p:blipFill>
+        <p:spPr>
+          <a:xfrm>
+            <a:off x="828839" y="4301088"/>
+            <a:ext cx="438798" cy="438798"/>
           </a:xfrm>
           <a:prstGeom prst="rect">
             <a:avLst/>
@@ -14815,17 +14694,76 @@
           <a:solidFill>
             <a:srgbClr val="0D2318"/>
           </a:solidFill>
+          <a:ln>
+            <a:noFill/>
+          </a:ln>
+        </p:spPr>
+      </p:pic>
+      <p:sp>
+        <p:nvSpPr>
+          <p:cNvPr id="24" name="Text 19"/>
+          <p:cNvSpPr/>
+          <p:nvPr/>
+        </p:nvSpPr>
+        <p:spPr>
+          <a:xfrm>
+            <a:off x="1389525" y="4276711"/>
+            <a:ext cx="4546432" cy="463175"/>
+          </a:xfrm>
+          <a:prstGeom prst="rect">
+            <a:avLst/>
+          </a:prstGeom>
+          <a:solidFill>
+            <a:srgbClr val="0D2318"/>
+          </a:solidFill>
+          <a:ln>
+            <a:noFill/>
+          </a:ln>
+        </p:spPr>
+        <p:txBody>
+          <a:bodyPr wrap="square" lIns="0" tIns="0" rIns="0" bIns="0" rtlCol="0" anchor="ctr"/>
+          <a:lstStyle/>
+          <a:p>
+            <a:pPr defTabSz="1218895"/>
+            <a:r>
+              <a:rPr lang="en-US" sz="1600" b="1" dirty="0">
+                <a:solidFill>
+                  <a:srgbClr val="FFFFFF"/>
+                </a:solidFill>
+                <a:latin typeface="Candara" panose="020E0502030303020204" pitchFamily="34" charset="0"/>
+                <a:ea typeface="Calibri" pitchFamily="34" charset="-122"/>
+                <a:cs typeface="Calibri" pitchFamily="34" charset="-120"/>
+              </a:rPr>
+              <a:t>Cross-Layer Data Flow Design</a:t>
+            </a:r>
+            <a:endParaRPr lang="en-US" sz="1600" dirty="0">
+              <a:solidFill>
+                <a:prstClr val="black"/>
+              </a:solidFill>
+              <a:latin typeface="Candara" panose="020E0502030303020204" pitchFamily="34" charset="0"/>
+            </a:endParaRPr>
+          </a:p>
+        </p:txBody>
+      </p:sp>
+      <p:sp>
+        <p:nvSpPr>
+          <p:cNvPr id="25" name="Shape 20"/>
+          <p:cNvSpPr/>
+          <p:nvPr/>
+        </p:nvSpPr>
+        <p:spPr>
+          <a:xfrm>
+            <a:off x="828839" y="4813019"/>
+            <a:ext cx="5107118" cy="0"/>
+          </a:xfrm>
+          <a:prstGeom prst="line">
+            <a:avLst/>
+          </a:prstGeom>
+          <a:noFill/>
           <a:ln w="9525">
             <a:noFill/>
             <a:prstDash val="solid"/>
           </a:ln>
-          <a:effectLst>
-            <a:outerShdw blurRad="76200" dist="25400" dir="8100000" algn="bl" rotWithShape="0">
-              <a:srgbClr val="000000">
-                <a:alpha val="25000"/>
-              </a:srgbClr>
-            </a:outerShdw>
-          </a:effectLst>
         </p:spPr>
         <p:txBody>
           <a:bodyPr/>
@@ -14843,13 +14781,149 @@
       </p:sp>
       <p:sp>
         <p:nvSpPr>
-          <p:cNvPr id="21" name="Shape 17"/>
-          <p:cNvSpPr/>
-          <p:nvPr/>
-        </p:nvSpPr>
-        <p:spPr>
-          <a:xfrm>
-            <a:off x="609441" y="4037135"/>
+          <p:cNvPr id="26" name="Text 21"/>
+          <p:cNvSpPr/>
+          <p:nvPr/>
+        </p:nvSpPr>
+        <p:spPr>
+          <a:xfrm>
+            <a:off x="828839" y="4898341"/>
+            <a:ext cx="5107118" cy="345640"/>
+          </a:xfrm>
+          <a:prstGeom prst="rect">
+            <a:avLst/>
+          </a:prstGeom>
+          <a:solidFill>
+            <a:srgbClr val="0D2318"/>
+          </a:solidFill>
+          <a:ln>
+            <a:noFill/>
+          </a:ln>
+        </p:spPr>
+        <p:txBody>
+          <a:bodyPr wrap="square" lIns="0" tIns="0" rIns="0" bIns="0" rtlCol="0" anchor="t"/>
+          <a:lstStyle/>
+          <a:p>
+            <a:pPr defTabSz="1218895"/>
+            <a:r>
+              <a:rPr lang="en-US" sz="1600" b="1" dirty="0">
+                <a:solidFill>
+                  <a:srgbClr val="FF8A65"/>
+                </a:solidFill>
+                <a:latin typeface="Candara" panose="020E0502030303020204" pitchFamily="34" charset="0"/>
+                <a:ea typeface="Calibri" pitchFamily="34" charset="-122"/>
+                <a:cs typeface="Calibri" pitchFamily="34" charset="-120"/>
+              </a:rPr>
+              <a:t>Challenge  </a:t>
+            </a:r>
+            <a:r>
+              <a:rPr lang="en-US" sz="1600" b="1" dirty="0">
+                <a:solidFill>
+                  <a:srgbClr val="A8C4B0"/>
+                </a:solidFill>
+                <a:latin typeface="Candara" panose="020E0502030303020204" pitchFamily="34" charset="0"/>
+                <a:ea typeface="Calibri" pitchFamily="34" charset="-122"/>
+                <a:cs typeface="Calibri" pitchFamily="34" charset="-120"/>
+              </a:rPr>
+              <a:t>Clean path from device to chart</a:t>
+            </a:r>
+            <a:endParaRPr lang="en-US" sz="1600" dirty="0">
+              <a:solidFill>
+                <a:prstClr val="black"/>
+              </a:solidFill>
+              <a:latin typeface="Candara" panose="020E0502030303020204" pitchFamily="34" charset="0"/>
+            </a:endParaRPr>
+          </a:p>
+        </p:txBody>
+      </p:sp>
+      <p:sp>
+        <p:nvSpPr>
+          <p:cNvPr id="27" name="Text 22"/>
+          <p:cNvSpPr/>
+          <p:nvPr/>
+        </p:nvSpPr>
+        <p:spPr>
+          <a:xfrm>
+            <a:off x="828839" y="5271339"/>
+            <a:ext cx="4498941" cy="413122"/>
+          </a:xfrm>
+          <a:prstGeom prst="rect">
+            <a:avLst/>
+          </a:prstGeom>
+          <a:solidFill>
+            <a:srgbClr val="0D2318"/>
+          </a:solidFill>
+          <a:ln>
+            <a:noFill/>
+          </a:ln>
+        </p:spPr>
+        <p:txBody>
+          <a:bodyPr wrap="square" lIns="0" tIns="0" rIns="0" bIns="0" rtlCol="0" anchor="t"/>
+          <a:lstStyle/>
+          <a:p>
+            <a:pPr defTabSz="1218895"/>
+            <a:r>
+              <a:rPr lang="en-US" sz="1600" b="1" dirty="0">
+                <a:solidFill>
+                  <a:srgbClr val="F59E0B"/>
+                </a:solidFill>
+                <a:latin typeface="Candara" panose="020E0502030303020204" pitchFamily="34" charset="0"/>
+                <a:ea typeface="Calibri" pitchFamily="34" charset="-122"/>
+                <a:cs typeface="Calibri" pitchFamily="34" charset="-120"/>
+              </a:rPr>
+              <a:t>Solution  </a:t>
+            </a:r>
+            <a:r>
+              <a:rPr lang="en-US" sz="1600" b="1" dirty="0">
+                <a:solidFill>
+                  <a:srgbClr val="C8DDD0"/>
+                </a:solidFill>
+                <a:latin typeface="Candara" panose="020E0502030303020204" pitchFamily="34" charset="0"/>
+                <a:ea typeface="Calibri" pitchFamily="34" charset="-122"/>
+                <a:cs typeface="Calibri" pitchFamily="34" charset="-120"/>
+              </a:rPr>
+              <a:t>MQTT → API → DB → </a:t>
+            </a:r>
+            <a:r>
+              <a:rPr lang="en-US" sz="1600" b="1" dirty="0" err="1">
+                <a:solidFill>
+                  <a:srgbClr val="C8DDD0"/>
+                </a:solidFill>
+                <a:latin typeface="Candara" panose="020E0502030303020204" pitchFamily="34" charset="0"/>
+                <a:ea typeface="Calibri" pitchFamily="34" charset="-122"/>
+                <a:cs typeface="Calibri" pitchFamily="34" charset="-120"/>
+              </a:rPr>
+              <a:t>SignalR</a:t>
+            </a:r>
+            <a:r>
+              <a:rPr lang="en-US" sz="1600" b="1" dirty="0">
+                <a:solidFill>
+                  <a:srgbClr val="C8DDD0"/>
+                </a:solidFill>
+                <a:latin typeface="Candara" panose="020E0502030303020204" pitchFamily="34" charset="0"/>
+                <a:ea typeface="Calibri" pitchFamily="34" charset="-122"/>
+                <a:cs typeface="Calibri" pitchFamily="34" charset="-120"/>
+              </a:rPr>
+              <a:t> → React</a:t>
+            </a:r>
+            <a:endParaRPr lang="en-US" sz="1600" dirty="0">
+              <a:solidFill>
+                <a:prstClr val="black"/>
+              </a:solidFill>
+              <a:latin typeface="Candara" panose="020E0502030303020204" pitchFamily="34" charset="0"/>
+            </a:endParaRPr>
+          </a:p>
+        </p:txBody>
+      </p:sp>
+      <p:sp>
+        <p:nvSpPr>
+          <p:cNvPr id="29" name="Shape 24"/>
+          <p:cNvSpPr/>
+          <p:nvPr/>
+        </p:nvSpPr>
+        <p:spPr>
+          <a:xfrm>
+            <a:off x="6399133" y="4005792"/>
             <a:ext cx="5545915" cy="60944"/>
           </a:xfrm>
           <a:prstGeom prst="rect">
@@ -14877,405 +14951,6 @@
           </a:p>
         </p:txBody>
       </p:sp>
-      <p:sp>
-        <p:nvSpPr>
-          <p:cNvPr id="22" name="Text 18"/>
-          <p:cNvSpPr/>
-          <p:nvPr/>
-        </p:nvSpPr>
-        <p:spPr>
-          <a:xfrm>
-            <a:off x="5399649" y="4159023"/>
-            <a:ext cx="609441" cy="390042"/>
-          </a:xfrm>
-          <a:prstGeom prst="rect">
-            <a:avLst/>
-          </a:prstGeom>
-          <a:solidFill>
-            <a:srgbClr val="0D2318"/>
-          </a:solidFill>
-          <a:ln>
-            <a:noFill/>
-          </a:ln>
-        </p:spPr>
-        <p:txBody>
-          <a:bodyPr wrap="square" lIns="0" tIns="0" rIns="0" bIns="0" rtlCol="0" anchor="ctr"/>
-          <a:lstStyle/>
-          <a:p>
-            <a:pPr algn="r" defTabSz="1218895"/>
-            <a:r>
-              <a:rPr lang="en-US" sz="1600" b="1" dirty="0">
-                <a:solidFill>
-                  <a:srgbClr val="F59E0B">
-                    <a:alpha val="40000"/>
-                  </a:srgbClr>
-                </a:solidFill>
-                <a:latin typeface="Candara" panose="020E0502030303020204" pitchFamily="34" charset="0"/>
-                <a:ea typeface="Calibri" pitchFamily="34" charset="-122"/>
-                <a:cs typeface="Calibri" pitchFamily="34" charset="-120"/>
-              </a:rPr>
-              <a:t>03</a:t>
-            </a:r>
-            <a:endParaRPr lang="en-US" sz="1600" dirty="0">
-              <a:solidFill>
-                <a:prstClr val="black"/>
-              </a:solidFill>
-              <a:latin typeface="Candara" panose="020E0502030303020204" pitchFamily="34" charset="0"/>
-            </a:endParaRPr>
-          </a:p>
-        </p:txBody>
-      </p:sp>
-      <p:pic>
-        <p:nvPicPr>
-          <p:cNvPr id="23" name="Image 2" descr="preencoded.png"/>
-          <p:cNvPicPr>
-            <a:picLocks noChangeAspect="1"/>
-          </p:cNvPicPr>
-          <p:nvPr/>
-        </p:nvPicPr>
-        <p:blipFill>
-          <a:blip r:embed="rId5"/>
-          <a:stretch>
-            <a:fillRect/>
-          </a:stretch>
-        </p:blipFill>
-        <p:spPr>
-          <a:xfrm>
-            <a:off x="828839" y="4207778"/>
-            <a:ext cx="438798" cy="438798"/>
-          </a:xfrm>
-          <a:prstGeom prst="rect">
-            <a:avLst/>
-          </a:prstGeom>
-          <a:solidFill>
-            <a:srgbClr val="0D2318"/>
-          </a:solidFill>
-          <a:ln>
-            <a:noFill/>
-          </a:ln>
-        </p:spPr>
-      </p:pic>
-      <p:sp>
-        <p:nvSpPr>
-          <p:cNvPr id="24" name="Text 19"/>
-          <p:cNvSpPr/>
-          <p:nvPr/>
-        </p:nvSpPr>
-        <p:spPr>
-          <a:xfrm>
-            <a:off x="1389525" y="4183401"/>
-            <a:ext cx="4546432" cy="463175"/>
-          </a:xfrm>
-          <a:prstGeom prst="rect">
-            <a:avLst/>
-          </a:prstGeom>
-          <a:solidFill>
-            <a:srgbClr val="0D2318"/>
-          </a:solidFill>
-          <a:ln>
-            <a:noFill/>
-          </a:ln>
-        </p:spPr>
-        <p:txBody>
-          <a:bodyPr wrap="square" lIns="0" tIns="0" rIns="0" bIns="0" rtlCol="0" anchor="ctr"/>
-          <a:lstStyle/>
-          <a:p>
-            <a:pPr defTabSz="1218895"/>
-            <a:r>
-              <a:rPr lang="en-US" sz="1600" b="1" dirty="0">
-                <a:solidFill>
-                  <a:srgbClr val="FFFFFF"/>
-                </a:solidFill>
-                <a:latin typeface="Candara" panose="020E0502030303020204" pitchFamily="34" charset="0"/>
-                <a:ea typeface="Calibri" pitchFamily="34" charset="-122"/>
-                <a:cs typeface="Calibri" pitchFamily="34" charset="-120"/>
-              </a:rPr>
-              <a:t>Cross-Layer Data Flow Design</a:t>
-            </a:r>
-            <a:endParaRPr lang="en-US" sz="1600" dirty="0">
-              <a:solidFill>
-                <a:prstClr val="black"/>
-              </a:solidFill>
-              <a:latin typeface="Candara" panose="020E0502030303020204" pitchFamily="34" charset="0"/>
-            </a:endParaRPr>
-          </a:p>
-        </p:txBody>
-      </p:sp>
-      <p:sp>
-        <p:nvSpPr>
-          <p:cNvPr id="25" name="Shape 20"/>
-          <p:cNvSpPr/>
-          <p:nvPr/>
-        </p:nvSpPr>
-        <p:spPr>
-          <a:xfrm>
-            <a:off x="828839" y="4719709"/>
-            <a:ext cx="5107118" cy="0"/>
-          </a:xfrm>
-          <a:prstGeom prst="line">
-            <a:avLst/>
-          </a:prstGeom>
-          <a:noFill/>
-          <a:ln w="9525">
-            <a:noFill/>
-            <a:prstDash val="solid"/>
-          </a:ln>
-        </p:spPr>
-        <p:txBody>
-          <a:bodyPr/>
-          <a:lstStyle/>
-          <a:p>
-            <a:pPr defTabSz="1218895"/>
-            <a:endParaRPr lang="en-US" sz="1600">
-              <a:solidFill>
-                <a:prstClr val="black"/>
-              </a:solidFill>
-              <a:latin typeface="Candara" panose="020E0502030303020204" pitchFamily="34" charset="0"/>
-            </a:endParaRPr>
-          </a:p>
-        </p:txBody>
-      </p:sp>
-      <p:sp>
-        <p:nvSpPr>
-          <p:cNvPr id="26" name="Text 21"/>
-          <p:cNvSpPr/>
-          <p:nvPr/>
-        </p:nvSpPr>
-        <p:spPr>
-          <a:xfrm>
-            <a:off x="828839" y="4805031"/>
-            <a:ext cx="5107118" cy="792274"/>
-          </a:xfrm>
-          <a:prstGeom prst="rect">
-            <a:avLst/>
-          </a:prstGeom>
-          <a:solidFill>
-            <a:srgbClr val="0D2318"/>
-          </a:solidFill>
-          <a:ln>
-            <a:noFill/>
-          </a:ln>
-        </p:spPr>
-        <p:txBody>
-          <a:bodyPr wrap="square" lIns="0" tIns="0" rIns="0" bIns="0" rtlCol="0" anchor="t"/>
-          <a:lstStyle/>
-          <a:p>
-            <a:pPr defTabSz="1218895"/>
-            <a:r>
-              <a:rPr lang="en-US" sz="1600" b="1" dirty="0">
-                <a:solidFill>
-                  <a:srgbClr val="FF8A65"/>
-                </a:solidFill>
-                <a:latin typeface="Candara" panose="020E0502030303020204" pitchFamily="34" charset="0"/>
-                <a:ea typeface="Calibri" pitchFamily="34" charset="-122"/>
-                <a:cs typeface="Calibri" pitchFamily="34" charset="-120"/>
-              </a:rPr>
-              <a:t>Challenge  </a:t>
-            </a:r>
-            <a:r>
-              <a:rPr lang="en-US" sz="1600" dirty="0">
-                <a:solidFill>
-                  <a:srgbClr val="A8C4B0"/>
-                </a:solidFill>
-                <a:latin typeface="Candara" panose="020E0502030303020204" pitchFamily="34" charset="0"/>
-                <a:ea typeface="Calibri" pitchFamily="34" charset="-122"/>
-                <a:cs typeface="Calibri" pitchFamily="34" charset="-120"/>
-              </a:rPr>
-              <a:t>One sensor reading must flow cleanly: edge device → API → DB → SignalR → React chart.</a:t>
-            </a:r>
-            <a:endParaRPr lang="en-US" sz="1600" dirty="0">
-              <a:solidFill>
-                <a:prstClr val="black"/>
-              </a:solidFill>
-              <a:latin typeface="Candara" panose="020E0502030303020204" pitchFamily="34" charset="0"/>
-            </a:endParaRPr>
-          </a:p>
-        </p:txBody>
-      </p:sp>
-      <p:sp>
-        <p:nvSpPr>
-          <p:cNvPr id="27" name="Text 22"/>
-          <p:cNvSpPr/>
-          <p:nvPr/>
-        </p:nvSpPr>
-        <p:spPr>
-          <a:xfrm>
-            <a:off x="828839" y="5670437"/>
-            <a:ext cx="5107118" cy="914162"/>
-          </a:xfrm>
-          <a:prstGeom prst="rect">
-            <a:avLst/>
-          </a:prstGeom>
-          <a:solidFill>
-            <a:srgbClr val="0D2318"/>
-          </a:solidFill>
-          <a:ln>
-            <a:noFill/>
-          </a:ln>
-        </p:spPr>
-        <p:txBody>
-          <a:bodyPr wrap="square" lIns="0" tIns="0" rIns="0" bIns="0" rtlCol="0" anchor="t"/>
-          <a:lstStyle/>
-          <a:p>
-            <a:pPr defTabSz="1218895"/>
-            <a:r>
-              <a:rPr lang="en-US" sz="1600" b="1" dirty="0">
-                <a:solidFill>
-                  <a:srgbClr val="F59E0B"/>
-                </a:solidFill>
-                <a:latin typeface="Candara" panose="020E0502030303020204" pitchFamily="34" charset="0"/>
-                <a:ea typeface="Calibri" pitchFamily="34" charset="-122"/>
-                <a:cs typeface="Calibri" pitchFamily="34" charset="-120"/>
-              </a:rPr>
-              <a:t>Solution  </a:t>
-            </a:r>
-            <a:r>
-              <a:rPr lang="en-US" sz="1600" dirty="0">
-                <a:solidFill>
-                  <a:srgbClr val="C8DDD0"/>
-                </a:solidFill>
-                <a:latin typeface="Candara" panose="020E0502030303020204" pitchFamily="34" charset="0"/>
-                <a:ea typeface="Calibri" pitchFamily="34" charset="-122"/>
-                <a:cs typeface="Calibri" pitchFamily="34" charset="-120"/>
-              </a:rPr>
-              <a:t>Layered architecture (Controller → Service → Repository → DB). SignalR notifies after DB write. DTOs decouple layers.</a:t>
-            </a:r>
-            <a:endParaRPr lang="en-US" sz="1600" dirty="0">
-              <a:solidFill>
-                <a:prstClr val="black"/>
-              </a:solidFill>
-              <a:latin typeface="Candara" panose="020E0502030303020204" pitchFamily="34" charset="0"/>
-            </a:endParaRPr>
-          </a:p>
-        </p:txBody>
-      </p:sp>
-      <p:sp>
-        <p:nvSpPr>
-          <p:cNvPr id="28" name="Shape 23"/>
-          <p:cNvSpPr/>
-          <p:nvPr/>
-        </p:nvSpPr>
-        <p:spPr>
-          <a:xfrm>
-            <a:off x="6399133" y="4005792"/>
-            <a:ext cx="5545915" cy="2657164"/>
-          </a:xfrm>
-          <a:prstGeom prst="rect">
-            <a:avLst/>
-          </a:prstGeom>
-          <a:solidFill>
-            <a:srgbClr val="0D2318"/>
-          </a:solidFill>
-          <a:ln w="9525">
-            <a:noFill/>
-            <a:prstDash val="solid"/>
-          </a:ln>
-          <a:effectLst>
-            <a:outerShdw blurRad="76200" dist="25400" dir="8100000" algn="bl" rotWithShape="0">
-              <a:srgbClr val="000000">
-                <a:alpha val="25000"/>
-              </a:srgbClr>
-            </a:outerShdw>
-          </a:effectLst>
-        </p:spPr>
-        <p:txBody>
-          <a:bodyPr/>
-          <a:lstStyle/>
-          <a:p>
-            <a:pPr defTabSz="1218895"/>
-            <a:endParaRPr lang="en-US" sz="1600">
-              <a:solidFill>
-                <a:prstClr val="black"/>
-              </a:solidFill>
-              <a:latin typeface="Candara" panose="020E0502030303020204" pitchFamily="34" charset="0"/>
-            </a:endParaRPr>
-          </a:p>
-        </p:txBody>
-      </p:sp>
-      <p:sp>
-        <p:nvSpPr>
-          <p:cNvPr id="29" name="Shape 24"/>
-          <p:cNvSpPr/>
-          <p:nvPr/>
-        </p:nvSpPr>
-        <p:spPr>
-          <a:xfrm>
-            <a:off x="6399133" y="4005792"/>
-            <a:ext cx="5545915" cy="60944"/>
-          </a:xfrm>
-          <a:prstGeom prst="rect">
-            <a:avLst/>
-          </a:prstGeom>
-          <a:solidFill>
-            <a:srgbClr val="0D2318"/>
-          </a:solidFill>
-          <a:ln w="12700">
-            <a:noFill/>
-            <a:prstDash val="solid"/>
-          </a:ln>
-        </p:spPr>
-        <p:txBody>
-          <a:bodyPr/>
-          <a:lstStyle/>
-          <a:p>
-            <a:pPr defTabSz="1218895"/>
-            <a:endParaRPr lang="en-US" sz="1600">
-              <a:solidFill>
-                <a:prstClr val="black"/>
-              </a:solidFill>
-              <a:latin typeface="Candara" panose="020E0502030303020204" pitchFamily="34" charset="0"/>
-            </a:endParaRPr>
-          </a:p>
-        </p:txBody>
-      </p:sp>
-      <p:sp>
-        <p:nvSpPr>
-          <p:cNvPr id="30" name="Text 25"/>
-          <p:cNvSpPr/>
-          <p:nvPr/>
-        </p:nvSpPr>
-        <p:spPr>
-          <a:xfrm>
-            <a:off x="11189341" y="4127681"/>
-            <a:ext cx="609441" cy="390042"/>
-          </a:xfrm>
-          <a:prstGeom prst="rect">
-            <a:avLst/>
-          </a:prstGeom>
-          <a:solidFill>
-            <a:srgbClr val="0D2318"/>
-          </a:solidFill>
-          <a:ln>
-            <a:noFill/>
-          </a:ln>
-        </p:spPr>
-        <p:txBody>
-          <a:bodyPr wrap="square" lIns="0" tIns="0" rIns="0" bIns="0" rtlCol="0" anchor="ctr"/>
-          <a:lstStyle/>
-          <a:p>
-            <a:pPr algn="r" defTabSz="1218895"/>
-            <a:r>
-              <a:rPr lang="en-US" sz="1600" b="1" dirty="0">
-                <a:solidFill>
-                  <a:srgbClr val="A78BFA">
-                    <a:alpha val="40000"/>
-                  </a:srgbClr>
-                </a:solidFill>
-                <a:latin typeface="Candara" panose="020E0502030303020204" pitchFamily="34" charset="0"/>
-                <a:ea typeface="Calibri" pitchFamily="34" charset="-122"/>
-                <a:cs typeface="Calibri" pitchFamily="34" charset="-120"/>
-              </a:rPr>
-              <a:t>04</a:t>
-            </a:r>
-            <a:endParaRPr lang="en-US" sz="1600" dirty="0">
-              <a:solidFill>
-                <a:prstClr val="black"/>
-              </a:solidFill>
-              <a:latin typeface="Candara" panose="020E0502030303020204" pitchFamily="34" charset="0"/>
-            </a:endParaRPr>
-          </a:p>
-        </p:txBody>
-      </p:sp>
       <p:pic>
         <p:nvPicPr>
           <p:cNvPr id="31" name="Image 3" descr="preencoded.png"/>
@@ -15395,7 +15070,7 @@
         <p:spPr>
           <a:xfrm>
             <a:off x="6618531" y="4773688"/>
-            <a:ext cx="5107118" cy="792274"/>
+            <a:ext cx="5107118" cy="376983"/>
           </a:xfrm>
           <a:prstGeom prst="rect">
             <a:avLst/>
@@ -15424,7 +15099,7 @@
               <a:t>Challenge  </a:t>
             </a:r>
             <a:r>
-              <a:rPr lang="en-US" sz="1600" dirty="0">
+              <a:rPr lang="en-US" sz="1600" b="1" dirty="0">
                 <a:solidFill>
                   <a:srgbClr val="A8C4B0"/>
                 </a:solidFill>
@@ -15432,7 +15107,7 @@
                 <a:ea typeface="Calibri" pitchFamily="34" charset="-122"/>
                 <a:cs typeface="Calibri" pitchFamily="34" charset="-120"/>
               </a:rPr>
-              <a:t>Supporting Arduino, ESP32, and Raspberry Pi — all with different hardware and communication capabilities.</a:t>
+              <a:t>Same backend API for multiple edge platform</a:t>
             </a:r>
             <a:endParaRPr lang="en-US" sz="1600" dirty="0">
               <a:solidFill>
@@ -15451,7 +15126,7 @@
         </p:nvSpPr>
         <p:spPr>
           <a:xfrm>
-            <a:off x="6618531" y="5639095"/>
+            <a:off x="6618531" y="5167138"/>
             <a:ext cx="5107118" cy="914162"/>
           </a:xfrm>
           <a:prstGeom prst="rect">
@@ -15481,7 +15156,7 @@
               <a:t>Solution  </a:t>
             </a:r>
             <a:r>
-              <a:rPr lang="en-US" sz="1600" dirty="0">
+              <a:rPr lang="en-US" sz="1600" b="1" dirty="0">
                 <a:solidFill>
                   <a:srgbClr val="C8DDD0"/>
                 </a:solidFill>
@@ -15489,7 +15164,7 @@
                 <a:ea typeface="Calibri" pitchFamily="34" charset="-122"/>
                 <a:cs typeface="Calibri" pitchFamily="34" charset="-120"/>
               </a:rPr>
-              <a:t>Flexible JSON payload format. HTTP POST endpoint for all devices. EdgeDeviceId as universal identifier.</a:t>
+              <a:t>MQTT + JSON, REST for tests, shared device model: device/sensor</a:t>
             </a:r>
             <a:endParaRPr lang="en-US" sz="1600" dirty="0">
               <a:solidFill>
@@ -16576,7 +16251,7 @@
         </p:nvSpPr>
         <p:spPr>
           <a:xfrm>
-            <a:off x="3323503" y="4653270"/>
+            <a:off x="2875634" y="4858141"/>
             <a:ext cx="4556117" cy="670385"/>
           </a:xfrm>
           <a:prstGeom prst="rect">
@@ -16840,7 +16515,7 @@
         </p:nvSpPr>
         <p:spPr>
           <a:xfrm>
-            <a:off x="3323503" y="2309161"/>
+            <a:off x="2875634" y="2147498"/>
             <a:ext cx="6702550" cy="1631780"/>
           </a:xfrm>
           <a:prstGeom prst="rect">
@@ -16863,7 +16538,7 @@
               </a:lnSpc>
               <a:defRPr/>
             </a:pPr>
-            <a:endParaRPr lang="en-US" sz="1400" dirty="0">
+            <a:endParaRPr lang="en-US" sz="1600" dirty="0">
               <a:solidFill>
                 <a:schemeClr val="bg1"/>
               </a:solidFill>
@@ -16878,7 +16553,7 @@
               <a:defRPr/>
             </a:pPr>
             <a:r>
-              <a:rPr lang="en-US" sz="1400" dirty="0">
+              <a:rPr lang="en-US" sz="1600" dirty="0">
                 <a:solidFill>
                   <a:schemeClr val="bg1"/>
                 </a:solidFill>
@@ -16886,7 +16561,7 @@
               </a:rPr>
               <a:t>I would like to take this opportunity to express my sincere gratitude to the instructors especially Naser Chowdhury who guided and supported us throughout the program over the past two years, to RTC School for giving me the opportunity to achieve my first educational milestone in the United States, and to my colleagues who worked hard to balance work and study at the same time so that we could achieve this goal together.</a:t>
             </a:r>
-            <a:endParaRPr kumimoji="0" lang="en-US" sz="1400" b="0" u="none" strike="noStrike" kern="1200" cap="none" spc="0" normalizeH="0" baseline="0" noProof="0" dirty="0">
+            <a:endParaRPr kumimoji="0" lang="en-US" sz="1600" b="0" u="none" strike="noStrike" kern="1200" cap="none" spc="0" normalizeH="0" baseline="0" noProof="0" dirty="0">
               <a:ln>
                 <a:noFill/>
               </a:ln>
@@ -16915,8 +16590,8 @@
         </p:nvSpPr>
         <p:spPr>
           <a:xfrm>
-            <a:off x="1744824" y="1302940"/>
-            <a:ext cx="5822302" cy="1569660"/>
+            <a:off x="1530220" y="860041"/>
+            <a:ext cx="5822302" cy="830997"/>
           </a:xfrm>
           <a:prstGeom prst="rect">
             <a:avLst/>
@@ -16938,8 +16613,6 @@
               </a:rPr>
               <a:t>Thank You</a:t>
             </a:r>
-          </a:p>
-          <a:p>
             <a:endParaRPr lang="en-US" sz="4800" i="1" dirty="0">
               <a:latin typeface="Candara" panose="020E0502030303020204" pitchFamily="34" charset="0"/>
             </a:endParaRPr>
@@ -18372,7 +18045,7 @@
               <a:defRPr/>
             </a:pPr>
             <a:r>
-              <a:rPr kumimoji="0" sz="1400" b="0" i="0" u="none" strike="noStrike" kern="1200" cap="none" spc="0" normalizeH="0" baseline="0" noProof="0">
+              <a:rPr kumimoji="0" sz="1400" b="0" i="0" u="none" strike="noStrike" kern="1200" cap="none" spc="0" normalizeH="0" baseline="0" noProof="0" dirty="0">
                 <a:ln>
                   <a:noFill/>
                 </a:ln>
@@ -18386,7 +18059,75 @@
                 <a:ea typeface="+mn-ea"/>
                 <a:cs typeface="+mn-cs"/>
               </a:rPr>
-              <a:t>Edge → API → DB → SignalR → React</a:t>
+              <a:t>Edge</a:t>
+            </a:r>
+            <a:r>
+              <a:rPr kumimoji="0" lang="en-US" sz="1400" b="0" i="0" u="none" strike="noStrike" kern="1200" cap="none" spc="0" normalizeH="0" baseline="0" noProof="0" dirty="0">
+                <a:ln>
+                  <a:noFill/>
+                </a:ln>
+                <a:solidFill>
+                  <a:srgbClr val="7AAB8A"/>
+                </a:solidFill>
+                <a:effectLst/>
+                <a:uLnTx/>
+                <a:uFillTx/>
+                <a:latin typeface="Candara"/>
+                <a:ea typeface="+mn-ea"/>
+                <a:cs typeface="+mn-cs"/>
+              </a:rPr>
+              <a:t> → MQTT</a:t>
+            </a:r>
+            <a:r>
+              <a:rPr kumimoji="0" sz="1400" b="0" i="0" u="none" strike="noStrike" kern="1200" cap="none" spc="0" normalizeH="0" baseline="0" noProof="0" dirty="0">
+                <a:ln>
+                  <a:noFill/>
+                </a:ln>
+                <a:solidFill>
+                  <a:srgbClr val="7AAB8A"/>
+                </a:solidFill>
+                <a:effectLst/>
+                <a:uLnTx/>
+                <a:uFillTx/>
+                <a:latin typeface="Candara"/>
+                <a:ea typeface="+mn-ea"/>
+                <a:cs typeface="+mn-cs"/>
+              </a:rPr>
+              <a:t> → API → DB → </a:t>
+            </a:r>
+            <a:r>
+              <a:rPr kumimoji="0" sz="1400" b="0" i="0" u="none" strike="noStrike" kern="1200" cap="none" spc="0" normalizeH="0" baseline="0" noProof="0" dirty="0" err="1">
+                <a:ln>
+                  <a:noFill/>
+                </a:ln>
+                <a:solidFill>
+                  <a:srgbClr val="7AAB8A"/>
+                </a:solidFill>
+                <a:effectLst/>
+                <a:uLnTx/>
+                <a:uFillTx/>
+                <a:latin typeface="Candara"/>
+                <a:ea typeface="+mn-ea"/>
+                <a:cs typeface="+mn-cs"/>
+              </a:rPr>
+              <a:t>SignalR</a:t>
+            </a:r>
+            <a:r>
+              <a:rPr kumimoji="0" sz="1400" b="0" i="0" u="none" strike="noStrike" kern="1200" cap="none" spc="0" normalizeH="0" baseline="0" noProof="0" dirty="0">
+                <a:ln>
+                  <a:noFill/>
+                </a:ln>
+                <a:solidFill>
+                  <a:srgbClr val="7AAB8A"/>
+                </a:solidFill>
+                <a:effectLst/>
+                <a:uLnTx/>
+                <a:uFillTx/>
+                <a:latin typeface="Candara"/>
+                <a:ea typeface="+mn-ea"/>
+                <a:cs typeface="+mn-cs"/>
+              </a:rPr>
+              <a:t> → React</a:t>
             </a:r>
           </a:p>
         </p:txBody>
@@ -21350,185 +21091,6 @@
               <a:uLnTx/>
               <a:uFillTx/>
               <a:latin typeface="Calibri"/>
-              <a:ea typeface="+mn-ea"/>
-              <a:cs typeface="+mn-cs"/>
-            </a:endParaRPr>
-          </a:p>
-        </p:txBody>
-      </p:sp>
-      <p:sp>
-        <p:nvSpPr>
-          <p:cNvPr id="78" name="Rounded Rectangle 67">
-            <a:extLst>
-              <a:ext uri="{FF2B5EF4-FFF2-40B4-BE49-F238E27FC236}">
-                <a16:creationId xmlns:a16="http://schemas.microsoft.com/office/drawing/2014/main" id="{393D4FDF-306E-5F8B-2AE3-3DC411ACC2EB}"/>
-              </a:ext>
-            </a:extLst>
-          </p:cNvPr>
-          <p:cNvSpPr/>
-          <p:nvPr/>
-        </p:nvSpPr>
-        <p:spPr>
-          <a:xfrm>
-            <a:off x="8014335" y="5427344"/>
-            <a:ext cx="420624" cy="329184"/>
-          </a:xfrm>
-          <a:prstGeom prst="roundRect">
-            <a:avLst>
-              <a:gd name="adj" fmla="val 4000"/>
-            </a:avLst>
-          </a:prstGeom>
-          <a:solidFill>
-            <a:srgbClr val="143A26"/>
-          </a:solidFill>
-          <a:ln w="6350">
-            <a:solidFill>
-              <a:srgbClr val="3ECF80"/>
-            </a:solidFill>
-          </a:ln>
-        </p:spPr>
-        <p:style>
-          <a:lnRef idx="1">
-            <a:schemeClr val="accent1"/>
-          </a:lnRef>
-          <a:fillRef idx="3">
-            <a:schemeClr val="accent1"/>
-          </a:fillRef>
-          <a:effectRef idx="2">
-            <a:schemeClr val="accent1"/>
-          </a:effectRef>
-          <a:fontRef idx="minor">
-            <a:schemeClr val="lt1"/>
-          </a:fontRef>
-        </p:style>
-        <p:txBody>
-          <a:bodyPr rtlCol="0" anchor="ctr"/>
-          <a:lstStyle/>
-          <a:p>
-            <a:pPr marL="0" marR="0" lvl="0" indent="0" algn="ctr" defTabSz="457200" rtl="0" eaLnBrk="1" fontAlgn="auto" latinLnBrk="0" hangingPunct="1">
-              <a:lnSpc>
-                <a:spcPct val="100000"/>
-              </a:lnSpc>
-              <a:spcBef>
-                <a:spcPts val="0"/>
-              </a:spcBef>
-              <a:spcAft>
-                <a:spcPts val="0"/>
-              </a:spcAft>
-              <a:buClrTx/>
-              <a:buSzTx/>
-              <a:buFontTx/>
-              <a:buNone/>
-              <a:tabLst/>
-              <a:defRPr/>
-            </a:pPr>
-            <a:endParaRPr kumimoji="0" sz="1800" b="0" i="0" u="none" strike="noStrike" kern="1200" cap="none" spc="0" normalizeH="0" baseline="0" noProof="0">
-              <a:ln>
-                <a:noFill/>
-              </a:ln>
-              <a:solidFill>
-                <a:prstClr val="white"/>
-              </a:solidFill>
-              <a:effectLst/>
-              <a:uLnTx/>
-              <a:uFillTx/>
-              <a:latin typeface="Calibri"/>
-              <a:ea typeface="+mn-ea"/>
-              <a:cs typeface="+mn-cs"/>
-            </a:endParaRPr>
-          </a:p>
-        </p:txBody>
-      </p:sp>
-      <p:sp>
-        <p:nvSpPr>
-          <p:cNvPr id="79" name="TextBox 78">
-            <a:extLst>
-              <a:ext uri="{FF2B5EF4-FFF2-40B4-BE49-F238E27FC236}">
-                <a16:creationId xmlns:a16="http://schemas.microsoft.com/office/drawing/2014/main" id="{9B8A8FEF-47C5-679C-F49E-19721944EA82}"/>
-              </a:ext>
-            </a:extLst>
-          </p:cNvPr>
-          <p:cNvSpPr txBox="1"/>
-          <p:nvPr/>
-        </p:nvSpPr>
-        <p:spPr>
-          <a:xfrm>
-            <a:off x="8014335" y="5418200"/>
-            <a:ext cx="420624" cy="307777"/>
-          </a:xfrm>
-          <a:prstGeom prst="rect">
-            <a:avLst/>
-          </a:prstGeom>
-          <a:noFill/>
-        </p:spPr>
-        <p:txBody>
-          <a:bodyPr wrap="square">
-            <a:spAutoFit/>
-          </a:bodyPr>
-          <a:lstStyle/>
-          <a:p>
-            <a:pPr marL="0" marR="0" lvl="0" indent="0" algn="ctr" defTabSz="457200" rtl="0" eaLnBrk="1" fontAlgn="auto" latinLnBrk="0" hangingPunct="1">
-              <a:lnSpc>
-                <a:spcPct val="100000"/>
-              </a:lnSpc>
-              <a:spcBef>
-                <a:spcPts val="0"/>
-              </a:spcBef>
-              <a:spcAft>
-                <a:spcPts val="0"/>
-              </a:spcAft>
-              <a:buClrTx/>
-              <a:buSzTx/>
-              <a:buFontTx/>
-              <a:buNone/>
-              <a:tabLst/>
-              <a:defRPr/>
-            </a:pPr>
-            <a:r>
-              <a:rPr kumimoji="0" sz="1400" b="1" i="0" u="none" strike="noStrike" kern="1200" cap="none" spc="0" normalizeH="0" baseline="0" noProof="0" dirty="0">
-                <a:ln>
-                  <a:noFill/>
-                </a:ln>
-                <a:solidFill>
-                  <a:srgbClr val="3ECF80"/>
-                </a:solidFill>
-                <a:effectLst/>
-                <a:uLnTx/>
-                <a:uFillTx/>
-                <a:latin typeface="Candara"/>
-                <a:ea typeface="+mn-ea"/>
-                <a:cs typeface="+mn-cs"/>
-              </a:rPr>
-              <a:t>1</a:t>
-            </a:r>
-            <a:r>
-              <a:rPr kumimoji="0" lang="en-US" sz="1400" b="1" i="0" u="none" strike="noStrike" kern="1200" cap="none" spc="0" normalizeH="0" baseline="0" noProof="0" dirty="0">
-                <a:ln>
-                  <a:noFill/>
-                </a:ln>
-                <a:solidFill>
-                  <a:srgbClr val="3ECF80"/>
-                </a:solidFill>
-                <a:effectLst/>
-                <a:uLnTx/>
-                <a:uFillTx/>
-                <a:latin typeface="Candara"/>
-                <a:ea typeface="+mn-ea"/>
-                <a:cs typeface="+mn-cs"/>
-              </a:rPr>
-              <a:t>2</a:t>
-            </a:r>
-            <a:endParaRPr kumimoji="0" sz="1400" b="1" i="0" u="none" strike="noStrike" kern="1200" cap="none" spc="0" normalizeH="0" baseline="0" noProof="0" dirty="0">
-              <a:ln>
-                <a:noFill/>
-              </a:ln>
-              <a:solidFill>
-                <a:srgbClr val="3ECF80"/>
-              </a:solidFill>
-              <a:effectLst/>
-              <a:uLnTx/>
-              <a:uFillTx/>
-              <a:latin typeface="Candara"/>
               <a:ea typeface="+mn-ea"/>
               <a:cs typeface="+mn-cs"/>
             </a:endParaRPr>
@@ -23075,7 +22637,7 @@
                   <a:schemeClr val="bg1"/>
                 </a:solidFill>
               </a:rPr>
-              <a:t>Traditional systems cost too much and lock</a:t>
+              <a:t>Traditional lock into proprietary hardware and software, cost.</a:t>
             </a:r>
             <a:endParaRPr kumimoji="0" b="1" i="0" u="none" strike="noStrike" kern="1200" cap="none" spc="0" normalizeH="0" baseline="0" noProof="0" dirty="0">
               <a:ln>
@@ -24231,7 +23793,7 @@
                 </a:solidFill>
                 <a:latin typeface="Candara" panose="020E0502030303020204" pitchFamily="34" charset="0"/>
               </a:rPr>
-              <a:t>Live sensor reading &amp; Device On/Offline Status</a:t>
+              <a:t>Live sensor reading &amp; Device on/off-line status</a:t>
             </a:r>
             <a:endParaRPr kumimoji="0" sz="1400" b="0" i="0" u="none" strike="noStrike" kern="1200" cap="none" spc="0" normalizeH="0" baseline="0" noProof="0" dirty="0">
               <a:ln>
@@ -24458,7 +24020,7 @@
                 </a:solidFill>
                 <a:latin typeface="Candara" panose="020E0502030303020204" pitchFamily="34" charset="0"/>
               </a:rPr>
-              <a:t>Store Readings &amp; Rolling Time Windows</a:t>
+              <a:t>Store readings &amp; rolling time windows</a:t>
             </a:r>
             <a:endParaRPr kumimoji="0" sz="1400" b="0" i="0" u="none" strike="noStrike" kern="1200" cap="none" spc="0" normalizeH="0" baseline="0" noProof="0" dirty="0">
               <a:ln>
@@ -24685,7 +24247,7 @@
                 </a:solidFill>
                 <a:latin typeface="Candara" panose="020E0502030303020204" pitchFamily="34" charset="0"/>
               </a:rPr>
-              <a:t>Remote Output Control With Command History</a:t>
+              <a:t>Remote output control with command history</a:t>
             </a:r>
             <a:endParaRPr kumimoji="0" sz="1400" b="0" i="0" u="none" strike="noStrike" kern="1200" cap="none" spc="0" normalizeH="0" baseline="0" noProof="0" dirty="0">
               <a:ln>
@@ -24923,7 +24485,16 @@
                 <a:ea typeface="+mn-ea"/>
                 <a:cs typeface="+mn-cs"/>
               </a:rPr>
-              <a:t>End-to-end pipeline: Device → MQTT → Backend → </a:t>
+              <a:t>Device → MQTT → </a:t>
+            </a:r>
+            <a:r>
+              <a:rPr lang="en-US" sz="1600" b="1" dirty="0">
+                <a:solidFill>
+                  <a:srgbClr val="FFFF00"/>
+                </a:solidFill>
+                <a:latin typeface="Candara" panose="020E0502030303020204" pitchFamily="34" charset="0"/>
+              </a:rPr>
+              <a:t>API → SQL Server . </a:t>
             </a:r>
             <a:r>
               <a:rPr kumimoji="0" sz="1600" b="1" i="0" u="none" strike="noStrike" kern="1200" cap="none" spc="0" normalizeH="0" baseline="0" noProof="0" dirty="0" err="1">
@@ -25606,7 +25177,75 @@
                 <a:ea typeface="+mn-ea"/>
                 <a:cs typeface="+mn-cs"/>
               </a:rPr>
-              <a:t>MQTT + Broker (Mosquito/EMQX)</a:t>
+              <a:t>MQTT + Broker (</a:t>
+            </a:r>
+            <a:r>
+              <a:rPr kumimoji="0" sz="1400" b="0" i="0" u="none" strike="noStrike" kern="1200" cap="none" spc="0" normalizeH="0" baseline="0" noProof="0" dirty="0" err="1">
+                <a:ln>
+                  <a:noFill/>
+                </a:ln>
+                <a:solidFill>
+                  <a:srgbClr val="3ECF80"/>
+                </a:solidFill>
+                <a:effectLst/>
+                <a:uLnTx/>
+                <a:uFillTx/>
+                <a:latin typeface="Candara" panose="020E0502030303020204" pitchFamily="34" charset="0"/>
+                <a:ea typeface="+mn-ea"/>
+                <a:cs typeface="+mn-cs"/>
+              </a:rPr>
+              <a:t>Mosquit</a:t>
+            </a:r>
+            <a:r>
+              <a:rPr kumimoji="0" lang="en-US" sz="1400" b="0" i="0" u="none" strike="noStrike" kern="1200" cap="none" spc="0" normalizeH="0" baseline="0" noProof="0" dirty="0" err="1">
+                <a:ln>
+                  <a:noFill/>
+                </a:ln>
+                <a:solidFill>
+                  <a:srgbClr val="3ECF80"/>
+                </a:solidFill>
+                <a:effectLst/>
+                <a:uLnTx/>
+                <a:uFillTx/>
+                <a:latin typeface="Candara" panose="020E0502030303020204" pitchFamily="34" charset="0"/>
+                <a:ea typeface="+mn-ea"/>
+                <a:cs typeface="+mn-cs"/>
+              </a:rPr>
+              <a:t>t</a:t>
+            </a:r>
+            <a:r>
+              <a:rPr kumimoji="0" sz="1400" b="0" i="0" u="none" strike="noStrike" kern="1200" cap="none" spc="0" normalizeH="0" baseline="0" noProof="0" dirty="0" err="1">
+                <a:ln>
+                  <a:noFill/>
+                </a:ln>
+                <a:solidFill>
+                  <a:srgbClr val="3ECF80"/>
+                </a:solidFill>
+                <a:effectLst/>
+                <a:uLnTx/>
+                <a:uFillTx/>
+                <a:latin typeface="Candara" panose="020E0502030303020204" pitchFamily="34" charset="0"/>
+                <a:ea typeface="+mn-ea"/>
+                <a:cs typeface="+mn-cs"/>
+              </a:rPr>
+              <a:t>o</a:t>
+            </a:r>
+            <a:r>
+              <a:rPr kumimoji="0" sz="1400" b="0" i="0" u="none" strike="noStrike" kern="1200" cap="none" spc="0" normalizeH="0" baseline="0" noProof="0" dirty="0">
+                <a:ln>
+                  <a:noFill/>
+                </a:ln>
+                <a:solidFill>
+                  <a:srgbClr val="3ECF80"/>
+                </a:solidFill>
+                <a:effectLst/>
+                <a:uLnTx/>
+                <a:uFillTx/>
+                <a:latin typeface="Candara" panose="020E0502030303020204" pitchFamily="34" charset="0"/>
+                <a:ea typeface="+mn-ea"/>
+                <a:cs typeface="+mn-cs"/>
+              </a:rPr>
+              <a:t>/EMQX)</a:t>
             </a:r>
           </a:p>
         </p:txBody>
@@ -39848,7 +39487,7 @@
           <a:lstStyle/>
           <a:p>
             <a:r>
-              <a:rPr lang="en-US" sz="3200" b="1" dirty="0">
+              <a:rPr lang="en-US" sz="2800" b="1" dirty="0">
                 <a:solidFill>
                   <a:srgbClr val="FFFFFF"/>
                 </a:solidFill>
@@ -39858,7 +39497,7 @@
               </a:rPr>
               <a:t>Backend &amp; API Design</a:t>
             </a:r>
-            <a:endParaRPr lang="en-US" sz="3200" dirty="0">
+            <a:endParaRPr lang="en-US" sz="2800" dirty="0">
               <a:latin typeface="Candara" panose="020E0502030303020204" pitchFamily="34" charset="0"/>
             </a:endParaRPr>
           </a:p>
@@ -48252,7 +47891,7 @@
                 <a:ea typeface="Calibri" pitchFamily="34" charset="-122"/>
                 <a:cs typeface="Calibri" pitchFamily="34" charset="-120"/>
               </a:rPr>
-              <a:t>Front end Design</a:t>
+              <a:t>Frontend Design</a:t>
             </a:r>
             <a:r>
               <a:rPr lang="en-US" sz="2800" b="1" dirty="0">
@@ -48282,8 +47921,8 @@
         </p:nvSpPr>
         <p:spPr>
           <a:xfrm>
-            <a:off x="365664" y="762702"/>
-            <a:ext cx="11646422" cy="219399"/>
+            <a:off x="365664" y="836875"/>
+            <a:ext cx="6668928" cy="228542"/>
           </a:xfrm>
           <a:prstGeom prst="rect">
             <a:avLst/>
@@ -50432,8 +50071,8 @@
         </p:nvSpPr>
         <p:spPr>
           <a:xfrm>
-            <a:off x="3432678" y="5622988"/>
-            <a:ext cx="1307251" cy="274249"/>
+            <a:off x="3432677" y="5622988"/>
+            <a:ext cx="1643175" cy="274249"/>
           </a:xfrm>
           <a:prstGeom prst="rect">
             <a:avLst/>
@@ -53013,7 +52652,18 @@
                 <a:ea typeface="Calibri" pitchFamily="34" charset="-122"/>
                 <a:cs typeface="Calibri" pitchFamily="34" charset="-120"/>
               </a:rPr>
-              <a:t>Pending → Sent → Completed</a:t>
+              <a:t>Pending → Sent → </a:t>
+            </a:r>
+            <a:r>
+              <a:rPr lang="en-US" sz="1200" b="1" dirty="0" err="1">
+                <a:solidFill>
+                  <a:srgbClr val="FFFF00"/>
+                </a:solidFill>
+                <a:latin typeface="Candara" panose="020E0502030303020204" pitchFamily="34" charset="0"/>
+                <a:ea typeface="Calibri" pitchFamily="34" charset="-122"/>
+                <a:cs typeface="Calibri" pitchFamily="34" charset="-120"/>
+              </a:rPr>
+              <a:t>Acked</a:t>
             </a:r>
             <a:endParaRPr lang="en-US" sz="1200" b="1" dirty="0">
               <a:solidFill>
@@ -53373,57 +53023,6 @@
               </a:solidFill>
               <a:latin typeface="Candara" panose="020E0502030303020204" pitchFamily="34" charset="0"/>
             </a:endParaRPr>
-          </a:p>
-        </p:txBody>
-      </p:sp>
-      <p:sp>
-        <p:nvSpPr>
-          <p:cNvPr id="5" name="Rectangle: Rounded Corners 4">
-            <a:extLst>
-              <a:ext uri="{FF2B5EF4-FFF2-40B4-BE49-F238E27FC236}">
-                <a16:creationId xmlns:a16="http://schemas.microsoft.com/office/drawing/2014/main" id="{717A4F75-0830-66B3-F03E-A96FD6A108D1}"/>
-              </a:ext>
-            </a:extLst>
-          </p:cNvPr>
-          <p:cNvSpPr/>
-          <p:nvPr/>
-        </p:nvSpPr>
-        <p:spPr>
-          <a:xfrm>
-            <a:off x="5443832" y="982101"/>
-            <a:ext cx="6134350" cy="5887197"/>
-          </a:xfrm>
-          <a:prstGeom prst="roundRect">
-            <a:avLst/>
-          </a:prstGeom>
-          <a:solidFill>
-            <a:schemeClr val="accent1">
-              <a:alpha val="23000"/>
-            </a:schemeClr>
-          </a:solidFill>
-        </p:spPr>
-        <p:style>
-          <a:lnRef idx="2">
-            <a:schemeClr val="accent1">
-              <a:shade val="15000"/>
-            </a:schemeClr>
-          </a:lnRef>
-          <a:fillRef idx="1">
-            <a:schemeClr val="accent1"/>
-          </a:fillRef>
-          <a:effectRef idx="0">
-            <a:schemeClr val="accent1"/>
-          </a:effectRef>
-          <a:fontRef idx="minor">
-            <a:schemeClr val="lt1"/>
-          </a:fontRef>
-        </p:style>
-        <p:txBody>
-          <a:bodyPr rtlCol="0" anchor="ctr"/>
-          <a:lstStyle/>
-          <a:p>
-            <a:pPr algn="ctr"/>
-            <a:endParaRPr lang="en-US"/>
           </a:p>
         </p:txBody>
       </p:sp>

--- a/Documents/Presentation/Capstone Project Presentation.pptx
+++ b/Documents/Presentation/Capstone Project Presentation.pptx
@@ -542,6 +542,130 @@
           <a:bodyPr/>
           <a:lstStyle/>
           <a:p>
+            <a:r>
+              <a:rPr lang="en-US" sz="1200" b="0" i="0" kern="1200" dirty="0">
+                <a:solidFill>
+                  <a:schemeClr val="tx1"/>
+                </a:solidFill>
+                <a:effectLst/>
+                <a:latin typeface="+mn-lt"/>
+                <a:ea typeface="+mn-ea"/>
+                <a:cs typeface="+mn-cs"/>
+              </a:rPr>
+              <a:t>Good evening, My name is </a:t>
+            </a:r>
+            <a:r>
+              <a:rPr lang="en-US" sz="1200" b="1" i="0" kern="1200" dirty="0">
+                <a:solidFill>
+                  <a:schemeClr val="tx1"/>
+                </a:solidFill>
+                <a:effectLst/>
+                <a:latin typeface="+mn-lt"/>
+                <a:ea typeface="+mn-ea"/>
+                <a:cs typeface="+mn-cs"/>
+              </a:rPr>
+              <a:t>Quoc Bao Tran</a:t>
+            </a:r>
+            <a:r>
+              <a:rPr lang="en-US" sz="1200" b="0" i="0" kern="1200" dirty="0">
+                <a:solidFill>
+                  <a:schemeClr val="tx1"/>
+                </a:solidFill>
+                <a:effectLst/>
+                <a:latin typeface="+mn-lt"/>
+                <a:ea typeface="+mn-ea"/>
+                <a:cs typeface="+mn-cs"/>
+              </a:rPr>
+              <a:t>, and this is my capstone project for the </a:t>
+            </a:r>
+            <a:r>
+              <a:rPr lang="en-US" sz="1200" b="1" i="0" kern="1200" dirty="0">
+                <a:solidFill>
+                  <a:schemeClr val="tx1"/>
+                </a:solidFill>
+                <a:effectLst/>
+                <a:latin typeface="+mn-lt"/>
+                <a:ea typeface="+mn-ea"/>
+                <a:cs typeface="+mn-cs"/>
+              </a:rPr>
+              <a:t>BAS Application Development</a:t>
+            </a:r>
+            <a:r>
+              <a:rPr lang="en-US" sz="1200" b="0" i="0" kern="1200" dirty="0">
+                <a:solidFill>
+                  <a:schemeClr val="tx1"/>
+                </a:solidFill>
+                <a:effectLst/>
+                <a:latin typeface="+mn-lt"/>
+                <a:ea typeface="+mn-ea"/>
+                <a:cs typeface="+mn-cs"/>
+              </a:rPr>
+              <a:t> program, under instructor </a:t>
+            </a:r>
+            <a:r>
+              <a:rPr lang="en-US" sz="1200" b="1" i="0" kern="1200" dirty="0">
+                <a:solidFill>
+                  <a:schemeClr val="tx1"/>
+                </a:solidFill>
+                <a:effectLst/>
+                <a:latin typeface="+mn-lt"/>
+                <a:ea typeface="+mn-ea"/>
+                <a:cs typeface="+mn-cs"/>
+              </a:rPr>
+              <a:t>Naser Chowdhury</a:t>
+            </a:r>
+            <a:r>
+              <a:rPr lang="en-US" sz="1200" b="0" i="0" kern="1200" dirty="0">
+                <a:solidFill>
+                  <a:schemeClr val="tx1"/>
+                </a:solidFill>
+                <a:effectLst/>
+                <a:latin typeface="+mn-lt"/>
+                <a:ea typeface="+mn-ea"/>
+                <a:cs typeface="+mn-cs"/>
+              </a:rPr>
+              <a:t>.</a:t>
+            </a:r>
+          </a:p>
+          <a:p>
+            <a:r>
+              <a:rPr lang="en-US" sz="1200" b="0" i="0" kern="1200" dirty="0">
+                <a:solidFill>
+                  <a:schemeClr val="tx1"/>
+                </a:solidFill>
+                <a:effectLst/>
+                <a:latin typeface="+mn-lt"/>
+                <a:ea typeface="+mn-ea"/>
+                <a:cs typeface="+mn-cs"/>
+              </a:rPr>
+              <a:t>The project is a </a:t>
+            </a:r>
+            <a:r>
+              <a:rPr lang="en-US" sz="1200" b="1" i="0" kern="1200" dirty="0">
+                <a:solidFill>
+                  <a:schemeClr val="tx1"/>
+                </a:solidFill>
+                <a:effectLst/>
+                <a:latin typeface="+mn-lt"/>
+                <a:ea typeface="+mn-ea"/>
+                <a:cs typeface="+mn-cs"/>
+              </a:rPr>
+              <a:t>Web-Based IoT Device Real-Time Monitoring System</a:t>
+            </a:r>
+            <a:r>
+              <a:rPr lang="en-US" sz="1200" b="0" i="0" kern="1200" dirty="0">
+                <a:solidFill>
+                  <a:schemeClr val="tx1"/>
+                </a:solidFill>
+                <a:effectLst/>
+                <a:latin typeface="+mn-lt"/>
+                <a:ea typeface="+mn-ea"/>
+                <a:cs typeface="+mn-cs"/>
+              </a:rPr>
+              <a:t>: a web application that monitors sensors in real time, stores historical data, raises alerts, and controls actuators remotely. It is aimed at sites that need equipment monitoring without the cost and lock-in of traditional SCADA</a:t>
+            </a:r>
+          </a:p>
+          <a:p>
             <a:endParaRPr lang="en-US" dirty="0"/>
           </a:p>
         </p:txBody>
@@ -625,6 +749,1446 @@
         <p:txBody>
           <a:bodyPr/>
           <a:lstStyle/>
+          <a:p>
+            <a:r>
+              <a:rPr lang="en-US" sz="1200" b="0" i="0" kern="1200" dirty="0">
+                <a:solidFill>
+                  <a:schemeClr val="tx1"/>
+                </a:solidFill>
+                <a:effectLst/>
+                <a:latin typeface="+mn-lt"/>
+                <a:ea typeface="+mn-ea"/>
+                <a:cs typeface="+mn-cs"/>
+              </a:rPr>
+              <a:t>In summary, four areas show what was implemented.</a:t>
+            </a:r>
+          </a:p>
+          <a:p>
+            <a:r>
+              <a:rPr lang="en-US" sz="1200" b="1" i="0" kern="1200" dirty="0">
+                <a:solidFill>
+                  <a:schemeClr val="tx1"/>
+                </a:solidFill>
+                <a:effectLst/>
+                <a:latin typeface="+mn-lt"/>
+                <a:ea typeface="+mn-ea"/>
+                <a:cs typeface="+mn-cs"/>
+              </a:rPr>
+              <a:t>Real-time streaming</a:t>
+            </a:r>
+            <a:r>
+              <a:rPr lang="en-US" sz="1200" b="0" i="0" kern="1200" dirty="0">
+                <a:solidFill>
+                  <a:schemeClr val="tx1"/>
+                </a:solidFill>
+                <a:effectLst/>
+                <a:latin typeface="+mn-lt"/>
+                <a:ea typeface="+mn-ea"/>
+                <a:cs typeface="+mn-cs"/>
+              </a:rPr>
+              <a:t> uses </a:t>
+            </a:r>
+            <a:r>
+              <a:rPr lang="en-US" sz="1200" b="0" i="0" kern="1200" dirty="0" err="1">
+                <a:solidFill>
+                  <a:schemeClr val="tx1"/>
+                </a:solidFill>
+                <a:effectLst/>
+                <a:latin typeface="+mn-lt"/>
+                <a:ea typeface="+mn-ea"/>
+                <a:cs typeface="+mn-cs"/>
+              </a:rPr>
+              <a:t>SignalR</a:t>
+            </a:r>
+            <a:r>
+              <a:rPr lang="en-US" sz="1200" b="0" i="0" kern="1200" dirty="0">
+                <a:solidFill>
+                  <a:schemeClr val="tx1"/>
+                </a:solidFill>
+                <a:effectLst/>
+                <a:latin typeface="+mn-lt"/>
+                <a:ea typeface="+mn-ea"/>
+                <a:cs typeface="+mn-cs"/>
+              </a:rPr>
+              <a:t> with roughly </a:t>
+            </a:r>
+            <a:r>
+              <a:rPr lang="en-US" sz="1200" b="1" i="0" kern="1200" dirty="0">
+                <a:solidFill>
+                  <a:schemeClr val="tx1"/>
+                </a:solidFill>
+                <a:effectLst/>
+                <a:latin typeface="+mn-lt"/>
+                <a:ea typeface="+mn-ea"/>
+                <a:cs typeface="+mn-cs"/>
+              </a:rPr>
+              <a:t>one- to two-second</a:t>
+            </a:r>
+            <a:r>
+              <a:rPr lang="en-US" sz="1200" b="0" i="0" kern="1200" dirty="0">
+                <a:solidFill>
+                  <a:schemeClr val="tx1"/>
+                </a:solidFill>
+                <a:effectLst/>
+                <a:latin typeface="+mn-lt"/>
+                <a:ea typeface="+mn-ea"/>
+                <a:cs typeface="+mn-cs"/>
+              </a:rPr>
+              <a:t> updates, multi-device subscriptions, and rolling live charts from </a:t>
+            </a:r>
+            <a:r>
+              <a:rPr lang="en-US" sz="1200" b="1" i="0" kern="1200" dirty="0">
+                <a:solidFill>
+                  <a:schemeClr val="tx1"/>
+                </a:solidFill>
+                <a:effectLst/>
+                <a:latin typeface="+mn-lt"/>
+                <a:ea typeface="+mn-ea"/>
+                <a:cs typeface="+mn-cs"/>
+              </a:rPr>
+              <a:t>two seconds to thirty minutes</a:t>
+            </a:r>
+            <a:r>
+              <a:rPr lang="en-US" sz="1200" b="0" i="0" kern="1200" dirty="0">
+                <a:solidFill>
+                  <a:schemeClr val="tx1"/>
+                </a:solidFill>
+                <a:effectLst/>
+                <a:latin typeface="+mn-lt"/>
+                <a:ea typeface="+mn-ea"/>
+                <a:cs typeface="+mn-cs"/>
+              </a:rPr>
+              <a:t>.</a:t>
+            </a:r>
+          </a:p>
+          <a:p>
+            <a:r>
+              <a:rPr lang="en-US" sz="1200" b="1" i="0" kern="1200" dirty="0">
+                <a:solidFill>
+                  <a:schemeClr val="tx1"/>
+                </a:solidFill>
+                <a:effectLst/>
+                <a:latin typeface="+mn-lt"/>
+                <a:ea typeface="+mn-ea"/>
+                <a:cs typeface="+mn-cs"/>
+              </a:rPr>
+              <a:t>Visualization</a:t>
+            </a:r>
+            <a:r>
+              <a:rPr lang="en-US" sz="1200" b="0" i="0" kern="1200" dirty="0">
+                <a:solidFill>
+                  <a:schemeClr val="tx1"/>
+                </a:solidFill>
+                <a:effectLst/>
+                <a:latin typeface="+mn-lt"/>
+                <a:ea typeface="+mn-ea"/>
+                <a:cs typeface="+mn-cs"/>
+              </a:rPr>
+              <a:t> includes Recharts line trends, analog gauges, discrete indicators, and flexible history ranges.</a:t>
+            </a:r>
+          </a:p>
+          <a:p>
+            <a:r>
+              <a:rPr lang="en-US" sz="1200" b="1" i="0" kern="1200" dirty="0">
+                <a:solidFill>
+                  <a:schemeClr val="tx1"/>
+                </a:solidFill>
+                <a:effectLst/>
+                <a:latin typeface="+mn-lt"/>
+                <a:ea typeface="+mn-ea"/>
+                <a:cs typeface="+mn-cs"/>
+              </a:rPr>
+              <a:t>Alerting</a:t>
+            </a:r>
+            <a:r>
+              <a:rPr lang="en-US" sz="1200" b="0" i="0" kern="1200" dirty="0">
+                <a:solidFill>
+                  <a:schemeClr val="tx1"/>
+                </a:solidFill>
+                <a:effectLst/>
+                <a:latin typeface="+mn-lt"/>
+                <a:ea typeface="+mn-ea"/>
+                <a:cs typeface="+mn-cs"/>
+              </a:rPr>
+              <a:t> supports threshold, range, and change rules, with live notifications and acknowledge-and-resolve workflow.</a:t>
+            </a:r>
+          </a:p>
+          <a:p>
+            <a:r>
+              <a:rPr lang="en-US" sz="1200" b="1" i="0" kern="1200" dirty="0">
+                <a:solidFill>
+                  <a:schemeClr val="tx1"/>
+                </a:solidFill>
+                <a:effectLst/>
+                <a:latin typeface="+mn-lt"/>
+                <a:ea typeface="+mn-ea"/>
+                <a:cs typeface="+mn-cs"/>
+              </a:rPr>
+              <a:t>Setup and control</a:t>
+            </a:r>
+            <a:r>
+              <a:rPr lang="en-US" sz="1200" b="0" i="0" kern="1200" dirty="0">
+                <a:solidFill>
+                  <a:schemeClr val="tx1"/>
+                </a:solidFill>
+                <a:effectLst/>
+                <a:latin typeface="+mn-lt"/>
+                <a:ea typeface="+mn-ea"/>
+                <a:cs typeface="+mn-cs"/>
+              </a:rPr>
+              <a:t> covers devices, sensors, and actuators, online/offline from last activity, and </a:t>
+            </a:r>
+            <a:r>
+              <a:rPr lang="en-US" sz="1200" b="1" i="0" kern="1200" dirty="0">
+                <a:solidFill>
+                  <a:schemeClr val="tx1"/>
+                </a:solidFill>
+                <a:effectLst/>
+                <a:latin typeface="+mn-lt"/>
+                <a:ea typeface="+mn-ea"/>
+                <a:cs typeface="+mn-cs"/>
+              </a:rPr>
+              <a:t>MQTT commands</a:t>
+            </a:r>
+            <a:r>
+              <a:rPr lang="en-US" sz="1200" b="0" i="0" kern="1200" dirty="0">
+                <a:solidFill>
+                  <a:schemeClr val="tx1"/>
+                </a:solidFill>
+                <a:effectLst/>
+                <a:latin typeface="+mn-lt"/>
+                <a:ea typeface="+mn-ea"/>
+                <a:cs typeface="+mn-cs"/>
+              </a:rPr>
+              <a:t> with history.</a:t>
+            </a:r>
+          </a:p>
+          <a:p>
+            <a:endParaRPr lang="en-US" dirty="0"/>
+          </a:p>
+        </p:txBody>
+      </p:sp>
+      <p:sp>
+        <p:nvSpPr>
+          <p:cNvPr id="4" name="Slide Number Placeholder 3"/>
+          <p:cNvSpPr>
+            <a:spLocks noGrp="1"/>
+          </p:cNvSpPr>
+          <p:nvPr>
+            <p:ph type="sldNum" sz="quarter" idx="10"/>
+          </p:nvPr>
+        </p:nvSpPr>
+        <p:spPr/>
+        <p:txBody>
+          <a:bodyPr/>
+          <a:lstStyle/>
+          <a:p>
+            <a:pPr marL="0" marR="0" lvl="0" indent="0" algn="l" defTabSz="914400" rtl="0" eaLnBrk="1" fontAlgn="auto" latinLnBrk="0" hangingPunct="1">
+              <a:lnSpc>
+                <a:spcPct val="100000"/>
+              </a:lnSpc>
+              <a:spcBef>
+                <a:spcPts val="0"/>
+              </a:spcBef>
+              <a:spcAft>
+                <a:spcPts val="0"/>
+              </a:spcAft>
+              <a:buClrTx/>
+              <a:buSzTx/>
+              <a:buFontTx/>
+              <a:buNone/>
+              <a:tabLst/>
+              <a:defRPr/>
+            </a:pPr>
+            <a:fld id="{F7021451-1387-4CA6-816F-3879F97B5CBC}" type="slidenum">
+              <a:rPr kumimoji="0" lang="en-US" sz="1800" b="0" i="0" u="none" strike="noStrike" kern="1200" cap="none" spc="0" normalizeH="0" baseline="0" noProof="0">
+                <a:ln>
+                  <a:noFill/>
+                </a:ln>
+                <a:solidFill>
+                  <a:prstClr val="black"/>
+                </a:solidFill>
+                <a:effectLst/>
+                <a:uLnTx/>
+                <a:uFillTx/>
+                <a:latin typeface="Aptos" panose="02110004020202020204"/>
+                <a:ea typeface="+mn-ea"/>
+                <a:cs typeface="+mn-cs"/>
+              </a:rPr>
+              <a:pPr marL="0" marR="0" lvl="0" indent="0" algn="l" defTabSz="914400" rtl="0" eaLnBrk="1" fontAlgn="auto" latinLnBrk="0" hangingPunct="1">
+                <a:lnSpc>
+                  <a:spcPct val="100000"/>
+                </a:lnSpc>
+                <a:spcBef>
+                  <a:spcPts val="0"/>
+                </a:spcBef>
+                <a:spcAft>
+                  <a:spcPts val="0"/>
+                </a:spcAft>
+                <a:buClrTx/>
+                <a:buSzTx/>
+                <a:buFontTx/>
+                <a:buNone/>
+                <a:tabLst/>
+                <a:defRPr/>
+              </a:pPr>
+              <a:t>10</a:t>
+            </a:fld>
+            <a:endParaRPr kumimoji="0" lang="en-US" sz="1800" b="0" i="0" u="none" strike="noStrike" kern="1200" cap="none" spc="0" normalizeH="0" baseline="0" noProof="0">
+              <a:ln>
+                <a:noFill/>
+              </a:ln>
+              <a:solidFill>
+                <a:prstClr val="black"/>
+              </a:solidFill>
+              <a:effectLst/>
+              <a:uLnTx/>
+              <a:uFillTx/>
+              <a:latin typeface="Aptos" panose="02110004020202020204"/>
+              <a:ea typeface="+mn-ea"/>
+              <a:cs typeface="+mn-cs"/>
+            </a:endParaRPr>
+          </a:p>
+        </p:txBody>
+      </p:sp>
+    </p:spTree>
+    <p:extLst>
+      <p:ext uri="{BB962C8B-B14F-4D97-AF65-F5344CB8AC3E}">
+        <p14:creationId xmlns:p14="http://schemas.microsoft.com/office/powerpoint/2010/main" val="1024086991"/>
+      </p:ext>
+    </p:extLst>
+  </p:cSld>
+  <p:clrMapOvr>
+    <a:masterClrMapping/>
+  </p:clrMapOvr>
+</p:notes>
+</file>
+
+<file path=ppt/notesSlides/notesSlide11.xml><?xml version="1.0" encoding="utf-8"?>
+<p:notes xmlns:a="http://schemas.openxmlformats.org/drawingml/2006/main" xmlns:r="http://schemas.openxmlformats.org/officeDocument/2006/relationships" xmlns:p="http://schemas.openxmlformats.org/presentationml/2006/main">
+  <p:cSld>
+    <p:spTree>
+      <p:nvGrpSpPr>
+        <p:cNvPr id="1" name="">
+          <a:extLst>
+            <a:ext uri="{FF2B5EF4-FFF2-40B4-BE49-F238E27FC236}">
+              <a16:creationId xmlns:a16="http://schemas.microsoft.com/office/drawing/2014/main" id="{88344A80-399B-01D8-B9E5-8EDE1264388A}"/>
+            </a:ext>
+          </a:extLst>
+        </p:cNvPr>
+        <p:cNvGrpSpPr/>
+        <p:nvPr/>
+      </p:nvGrpSpPr>
+      <p:grpSpPr>
+        <a:xfrm>
+          <a:off x="0" y="0"/>
+          <a:ext cx="0" cy="0"/>
+          <a:chOff x="0" y="0"/>
+          <a:chExt cx="0" cy="0"/>
+        </a:xfrm>
+      </p:grpSpPr>
+      <p:sp>
+        <p:nvSpPr>
+          <p:cNvPr id="2" name="Slide Image Placeholder 1">
+            <a:extLst>
+              <a:ext uri="{FF2B5EF4-FFF2-40B4-BE49-F238E27FC236}">
+                <a16:creationId xmlns:a16="http://schemas.microsoft.com/office/drawing/2014/main" id="{D165DEE9-7FFB-A78F-0322-09522867206F}"/>
+              </a:ext>
+            </a:extLst>
+          </p:cNvPr>
+          <p:cNvSpPr>
+            <a:spLocks noGrp="1" noRot="1" noChangeAspect="1"/>
+          </p:cNvSpPr>
+          <p:nvPr>
+            <p:ph type="sldImg"/>
+          </p:nvPr>
+        </p:nvSpPr>
+        <p:spPr/>
+      </p:sp>
+      <p:sp>
+        <p:nvSpPr>
+          <p:cNvPr id="3" name="Notes Placeholder 2">
+            <a:extLst>
+              <a:ext uri="{FF2B5EF4-FFF2-40B4-BE49-F238E27FC236}">
+                <a16:creationId xmlns:a16="http://schemas.microsoft.com/office/drawing/2014/main" id="{397987AD-CD64-C12D-E630-A409E1E748CD}"/>
+              </a:ext>
+            </a:extLst>
+          </p:cNvPr>
+          <p:cNvSpPr>
+            <a:spLocks noGrp="1"/>
+          </p:cNvSpPr>
+          <p:nvPr>
+            <p:ph type="body" idx="1"/>
+          </p:nvPr>
+        </p:nvSpPr>
+        <p:spPr/>
+        <p:txBody>
+          <a:bodyPr/>
+          <a:lstStyle/>
+          <a:p>
+            <a:r>
+              <a:rPr lang="en-US" sz="1200" b="0" i="0" kern="1200" dirty="0">
+                <a:solidFill>
+                  <a:schemeClr val="tx1"/>
+                </a:solidFill>
+                <a:effectLst/>
+                <a:latin typeface="+mn-lt"/>
+                <a:ea typeface="+mn-ea"/>
+                <a:cs typeface="+mn-cs"/>
+              </a:rPr>
+              <a:t>I will walk through the demo checklist. The device is already registered and connected over MQTT.</a:t>
+            </a:r>
+          </a:p>
+          <a:p>
+            <a:r>
+              <a:rPr lang="en-US" sz="1200" b="1" i="0" kern="1200" dirty="0">
+                <a:solidFill>
+                  <a:schemeClr val="tx1"/>
+                </a:solidFill>
+                <a:effectLst/>
+                <a:latin typeface="+mn-lt"/>
+                <a:ea typeface="+mn-ea"/>
+                <a:cs typeface="+mn-cs"/>
+              </a:rPr>
+              <a:t>Step one:</a:t>
+            </a:r>
+            <a:r>
+              <a:rPr lang="en-US" sz="1200" b="0" i="0" kern="1200" dirty="0">
+                <a:solidFill>
+                  <a:schemeClr val="tx1"/>
+                </a:solidFill>
+                <a:effectLst/>
+                <a:latin typeface="+mn-lt"/>
+                <a:ea typeface="+mn-ea"/>
+                <a:cs typeface="+mn-cs"/>
+              </a:rPr>
+              <a:t> the application is configured with sensors, actuators, and an alert rule.</a:t>
+            </a:r>
+          </a:p>
+          <a:p>
+            <a:r>
+              <a:rPr lang="en-US" sz="1200" b="1" i="0" kern="1200" dirty="0">
+                <a:solidFill>
+                  <a:schemeClr val="tx1"/>
+                </a:solidFill>
+                <a:effectLst/>
+                <a:latin typeface="+mn-lt"/>
+                <a:ea typeface="+mn-ea"/>
+                <a:cs typeface="+mn-cs"/>
+              </a:rPr>
+              <a:t>Step two:</a:t>
+            </a:r>
+            <a:r>
+              <a:rPr lang="en-US" sz="1200" b="0" i="0" kern="1200" dirty="0">
+                <a:solidFill>
+                  <a:schemeClr val="tx1"/>
+                </a:solidFill>
+                <a:effectLst/>
+                <a:latin typeface="+mn-lt"/>
+                <a:ea typeface="+mn-ea"/>
+                <a:cs typeface="+mn-cs"/>
+              </a:rPr>
+              <a:t> the </a:t>
+            </a:r>
+            <a:r>
+              <a:rPr lang="en-US" sz="1200" b="1" i="0" kern="1200" dirty="0">
+                <a:solidFill>
+                  <a:schemeClr val="tx1"/>
+                </a:solidFill>
+                <a:effectLst/>
+                <a:latin typeface="+mn-lt"/>
+                <a:ea typeface="+mn-ea"/>
+                <a:cs typeface="+mn-cs"/>
+              </a:rPr>
+              <a:t>Arduino</a:t>
+            </a:r>
+            <a:r>
+              <a:rPr lang="en-US" sz="1200" b="0" i="0" kern="1200" dirty="0">
+                <a:solidFill>
+                  <a:schemeClr val="tx1"/>
+                </a:solidFill>
+                <a:effectLst/>
+                <a:latin typeface="+mn-lt"/>
+                <a:ea typeface="+mn-ea"/>
+                <a:cs typeface="+mn-cs"/>
+              </a:rPr>
+              <a:t> publishes readings to the local MQTT broker about once per second.</a:t>
+            </a:r>
+          </a:p>
+          <a:p>
+            <a:r>
+              <a:rPr lang="en-US" sz="1200" b="1" i="0" kern="1200" dirty="0">
+                <a:solidFill>
+                  <a:schemeClr val="tx1"/>
+                </a:solidFill>
+                <a:effectLst/>
+                <a:latin typeface="+mn-lt"/>
+                <a:ea typeface="+mn-ea"/>
+                <a:cs typeface="+mn-cs"/>
+              </a:rPr>
+              <a:t>Step three:</a:t>
+            </a:r>
+            <a:r>
+              <a:rPr lang="en-US" sz="1200" b="0" i="0" kern="1200" dirty="0">
+                <a:solidFill>
+                  <a:schemeClr val="tx1"/>
+                </a:solidFill>
+                <a:effectLst/>
+                <a:latin typeface="+mn-lt"/>
+                <a:ea typeface="+mn-ea"/>
+                <a:cs typeface="+mn-cs"/>
+              </a:rPr>
+              <a:t> on </a:t>
+            </a:r>
+            <a:r>
+              <a:rPr lang="en-US" sz="1200" b="1" i="0" kern="1200" dirty="0">
+                <a:solidFill>
+                  <a:schemeClr val="tx1"/>
+                </a:solidFill>
+                <a:effectLst/>
+                <a:latin typeface="+mn-lt"/>
+                <a:ea typeface="+mn-ea"/>
+                <a:cs typeface="+mn-cs"/>
+              </a:rPr>
+              <a:t>device detail</a:t>
+            </a:r>
+            <a:r>
+              <a:rPr lang="en-US" sz="1200" b="0" i="0" kern="1200" dirty="0">
+                <a:solidFill>
+                  <a:schemeClr val="tx1"/>
+                </a:solidFill>
+                <a:effectLst/>
+                <a:latin typeface="+mn-lt"/>
+                <a:ea typeface="+mn-ea"/>
+                <a:cs typeface="+mn-cs"/>
+              </a:rPr>
+              <a:t>, </a:t>
+            </a:r>
+            <a:r>
+              <a:rPr lang="en-US" sz="1200" b="1" i="0" kern="1200" dirty="0">
+                <a:solidFill>
+                  <a:schemeClr val="tx1"/>
+                </a:solidFill>
+                <a:effectLst/>
+                <a:latin typeface="+mn-lt"/>
+                <a:ea typeface="+mn-ea"/>
+                <a:cs typeface="+mn-cs"/>
+              </a:rPr>
+              <a:t>Live readings</a:t>
+            </a:r>
+            <a:r>
+              <a:rPr lang="en-US" sz="1200" b="0" i="0" kern="1200" dirty="0">
+                <a:solidFill>
+                  <a:schemeClr val="tx1"/>
+                </a:solidFill>
+                <a:effectLst/>
+                <a:latin typeface="+mn-lt"/>
+                <a:ea typeface="+mn-ea"/>
+                <a:cs typeface="+mn-cs"/>
+              </a:rPr>
+              <a:t> shows the chart updating </a:t>
+            </a:r>
+            <a:r>
+              <a:rPr lang="en-US" sz="1200" b="1" i="0" kern="1200" dirty="0">
+                <a:solidFill>
+                  <a:schemeClr val="tx1"/>
+                </a:solidFill>
+                <a:effectLst/>
+                <a:latin typeface="+mn-lt"/>
+                <a:ea typeface="+mn-ea"/>
+                <a:cs typeface="+mn-cs"/>
+              </a:rPr>
+              <a:t>without a page refresh</a:t>
+            </a:r>
+            <a:r>
+              <a:rPr lang="en-US" sz="1200" b="0" i="0" kern="1200" dirty="0">
+                <a:solidFill>
+                  <a:schemeClr val="tx1"/>
+                </a:solidFill>
+                <a:effectLst/>
+                <a:latin typeface="+mn-lt"/>
+                <a:ea typeface="+mn-ea"/>
+                <a:cs typeface="+mn-cs"/>
+              </a:rPr>
+              <a:t>—that is </a:t>
+            </a:r>
+            <a:r>
+              <a:rPr lang="en-US" sz="1200" b="0" i="0" kern="1200" dirty="0" err="1">
+                <a:solidFill>
+                  <a:schemeClr val="tx1"/>
+                </a:solidFill>
+                <a:effectLst/>
+                <a:latin typeface="+mn-lt"/>
+                <a:ea typeface="+mn-ea"/>
+                <a:cs typeface="+mn-cs"/>
+              </a:rPr>
+              <a:t>SignalR</a:t>
+            </a:r>
+            <a:r>
+              <a:rPr lang="en-US" sz="1200" b="0" i="0" kern="1200" dirty="0">
+                <a:solidFill>
+                  <a:schemeClr val="tx1"/>
+                </a:solidFill>
+                <a:effectLst/>
+                <a:latin typeface="+mn-lt"/>
+                <a:ea typeface="+mn-ea"/>
+                <a:cs typeface="+mn-cs"/>
+              </a:rPr>
+              <a:t>.</a:t>
+            </a:r>
+          </a:p>
+          <a:p>
+            <a:r>
+              <a:rPr lang="en-US" sz="1200" b="1" i="0" kern="1200" dirty="0">
+                <a:solidFill>
+                  <a:schemeClr val="tx1"/>
+                </a:solidFill>
+                <a:effectLst/>
+                <a:latin typeface="+mn-lt"/>
+                <a:ea typeface="+mn-ea"/>
+                <a:cs typeface="+mn-cs"/>
+              </a:rPr>
+              <a:t>Step four:</a:t>
+            </a:r>
+            <a:r>
+              <a:rPr lang="en-US" sz="1200" b="0" i="0" kern="1200" dirty="0">
+                <a:solidFill>
+                  <a:schemeClr val="tx1"/>
+                </a:solidFill>
+                <a:effectLst/>
+                <a:latin typeface="+mn-lt"/>
+                <a:ea typeface="+mn-ea"/>
+                <a:cs typeface="+mn-cs"/>
+              </a:rPr>
+              <a:t> I send an </a:t>
+            </a:r>
+            <a:r>
+              <a:rPr lang="en-US" sz="1200" b="1" i="0" kern="1200" dirty="0">
+                <a:solidFill>
+                  <a:schemeClr val="tx1"/>
+                </a:solidFill>
+                <a:effectLst/>
+                <a:latin typeface="+mn-lt"/>
+                <a:ea typeface="+mn-ea"/>
+                <a:cs typeface="+mn-cs"/>
+              </a:rPr>
+              <a:t>actuator command</a:t>
+            </a:r>
+            <a:r>
+              <a:rPr lang="en-US" sz="1200" b="0" i="0" kern="1200" dirty="0">
+                <a:solidFill>
+                  <a:schemeClr val="tx1"/>
+                </a:solidFill>
+                <a:effectLst/>
+                <a:latin typeface="+mn-lt"/>
+                <a:ea typeface="+mn-ea"/>
+                <a:cs typeface="+mn-cs"/>
+              </a:rPr>
+              <a:t> to turn the LED on or off. </a:t>
+            </a:r>
+            <a:r>
+              <a:rPr lang="en-US" sz="1200" b="1" i="0" kern="1200" dirty="0">
+                <a:solidFill>
+                  <a:schemeClr val="tx1"/>
+                </a:solidFill>
+                <a:effectLst/>
+                <a:latin typeface="+mn-lt"/>
+                <a:ea typeface="+mn-ea"/>
+                <a:cs typeface="+mn-cs"/>
+              </a:rPr>
+              <a:t>Command history</a:t>
+            </a:r>
+            <a:r>
+              <a:rPr lang="en-US" sz="1200" b="0" i="0" kern="1200" dirty="0">
+                <a:solidFill>
+                  <a:schemeClr val="tx1"/>
+                </a:solidFill>
+                <a:effectLst/>
+                <a:latin typeface="+mn-lt"/>
+                <a:ea typeface="+mn-ea"/>
+                <a:cs typeface="+mn-cs"/>
+              </a:rPr>
+              <a:t> shows </a:t>
+            </a:r>
+            <a:r>
+              <a:rPr lang="en-US" sz="1200" b="1" i="0" kern="1200" dirty="0">
+                <a:solidFill>
+                  <a:schemeClr val="tx1"/>
+                </a:solidFill>
+                <a:effectLst/>
+                <a:latin typeface="+mn-lt"/>
+                <a:ea typeface="+mn-ea"/>
+                <a:cs typeface="+mn-cs"/>
+              </a:rPr>
+              <a:t>Sent</a:t>
+            </a:r>
+            <a:r>
+              <a:rPr lang="en-US" sz="1200" b="0" i="0" kern="1200" dirty="0">
+                <a:solidFill>
+                  <a:schemeClr val="tx1"/>
+                </a:solidFill>
+                <a:effectLst/>
+                <a:latin typeface="+mn-lt"/>
+                <a:ea typeface="+mn-ea"/>
+                <a:cs typeface="+mn-cs"/>
+              </a:rPr>
+              <a:t>, then </a:t>
+            </a:r>
+            <a:r>
+              <a:rPr lang="en-US" sz="1200" b="1" i="0" kern="1200" dirty="0" err="1">
+                <a:solidFill>
+                  <a:schemeClr val="tx1"/>
+                </a:solidFill>
+                <a:effectLst/>
+                <a:latin typeface="+mn-lt"/>
+                <a:ea typeface="+mn-ea"/>
+                <a:cs typeface="+mn-cs"/>
+              </a:rPr>
+              <a:t>Acked</a:t>
+            </a:r>
+            <a:r>
+              <a:rPr lang="en-US" sz="1200" b="0" i="0" kern="1200" dirty="0">
+                <a:solidFill>
+                  <a:schemeClr val="tx1"/>
+                </a:solidFill>
+                <a:effectLst/>
+                <a:latin typeface="+mn-lt"/>
+                <a:ea typeface="+mn-ea"/>
+                <a:cs typeface="+mn-cs"/>
+              </a:rPr>
+              <a:t> when the firmware confirms.</a:t>
+            </a:r>
+          </a:p>
+          <a:p>
+            <a:r>
+              <a:rPr lang="en-US" sz="1200" b="1" i="0" kern="1200" dirty="0">
+                <a:solidFill>
+                  <a:schemeClr val="tx1"/>
+                </a:solidFill>
+                <a:effectLst/>
+                <a:latin typeface="+mn-lt"/>
+                <a:ea typeface="+mn-ea"/>
+                <a:cs typeface="+mn-cs"/>
+              </a:rPr>
+              <a:t>Step five:</a:t>
+            </a:r>
+            <a:r>
+              <a:rPr lang="en-US" sz="1200" b="0" i="0" kern="1200" dirty="0">
+                <a:solidFill>
+                  <a:schemeClr val="tx1"/>
+                </a:solidFill>
+                <a:effectLst/>
+                <a:latin typeface="+mn-lt"/>
+                <a:ea typeface="+mn-ea"/>
+                <a:cs typeface="+mn-cs"/>
+              </a:rPr>
+              <a:t> when a reading crosses the rule, an </a:t>
+            </a:r>
+            <a:r>
+              <a:rPr lang="en-US" sz="1200" b="1" i="0" kern="1200" dirty="0">
+                <a:solidFill>
+                  <a:schemeClr val="tx1"/>
+                </a:solidFill>
+                <a:effectLst/>
+                <a:latin typeface="+mn-lt"/>
+                <a:ea typeface="+mn-ea"/>
+                <a:cs typeface="+mn-cs"/>
+              </a:rPr>
+              <a:t>alert</a:t>
+            </a:r>
+            <a:r>
+              <a:rPr lang="en-US" sz="1200" b="0" i="0" kern="1200" dirty="0">
+                <a:solidFill>
+                  <a:schemeClr val="tx1"/>
+                </a:solidFill>
+                <a:effectLst/>
+                <a:latin typeface="+mn-lt"/>
+                <a:ea typeface="+mn-ea"/>
+                <a:cs typeface="+mn-cs"/>
+              </a:rPr>
+              <a:t> appears in the alerts view.</a:t>
+            </a:r>
+          </a:p>
+          <a:p>
+            <a:r>
+              <a:rPr lang="en-US" sz="1200" b="1" i="0" kern="1200" dirty="0">
+                <a:solidFill>
+                  <a:schemeClr val="tx1"/>
+                </a:solidFill>
+                <a:effectLst/>
+                <a:latin typeface="+mn-lt"/>
+                <a:ea typeface="+mn-ea"/>
+                <a:cs typeface="+mn-cs"/>
+              </a:rPr>
+              <a:t>Step six:</a:t>
+            </a:r>
+            <a:r>
+              <a:rPr lang="en-US" sz="1200" b="0" i="0" kern="1200" dirty="0">
+                <a:solidFill>
+                  <a:schemeClr val="tx1"/>
+                </a:solidFill>
+                <a:effectLst/>
+                <a:latin typeface="+mn-lt"/>
+                <a:ea typeface="+mn-ea"/>
+                <a:cs typeface="+mn-cs"/>
+              </a:rPr>
+              <a:t> switching to a </a:t>
+            </a:r>
+            <a:r>
+              <a:rPr lang="en-US" sz="1200" b="1" i="0" kern="1200" dirty="0">
+                <a:solidFill>
+                  <a:schemeClr val="tx1"/>
+                </a:solidFill>
+                <a:effectLst/>
+                <a:latin typeface="+mn-lt"/>
+                <a:ea typeface="+mn-ea"/>
+                <a:cs typeface="+mn-cs"/>
+              </a:rPr>
+              <a:t>history range</a:t>
+            </a:r>
+            <a:r>
+              <a:rPr lang="en-US" sz="1200" b="0" i="0" kern="1200" dirty="0">
+                <a:solidFill>
+                  <a:schemeClr val="tx1"/>
+                </a:solidFill>
+                <a:effectLst/>
+                <a:latin typeface="+mn-lt"/>
+                <a:ea typeface="+mn-ea"/>
+                <a:cs typeface="+mn-cs"/>
+              </a:rPr>
+              <a:t>, such as ten minutes, shows stored readings from the database.</a:t>
+            </a:r>
+          </a:p>
+          <a:p>
+            <a:r>
+              <a:rPr lang="en-US" sz="1200" b="0" i="0" kern="1200" dirty="0">
+                <a:solidFill>
+                  <a:schemeClr val="tx1"/>
+                </a:solidFill>
+                <a:effectLst/>
+                <a:latin typeface="+mn-lt"/>
+                <a:ea typeface="+mn-ea"/>
+                <a:cs typeface="+mn-cs"/>
+              </a:rPr>
+              <a:t>That completes the path from </a:t>
+            </a:r>
+            <a:r>
+              <a:rPr lang="en-US" sz="1200" b="1" i="0" kern="1200" dirty="0">
+                <a:solidFill>
+                  <a:schemeClr val="tx1"/>
+                </a:solidFill>
+                <a:effectLst/>
+                <a:latin typeface="+mn-lt"/>
+                <a:ea typeface="+mn-ea"/>
+                <a:cs typeface="+mn-cs"/>
+              </a:rPr>
+              <a:t>physical device to live dashboard</a:t>
+            </a:r>
+            <a:r>
+              <a:rPr lang="en-US" sz="1200" b="0" i="0" kern="1200" dirty="0">
+                <a:solidFill>
+                  <a:schemeClr val="tx1"/>
+                </a:solidFill>
+                <a:effectLst/>
+                <a:latin typeface="+mn-lt"/>
+                <a:ea typeface="+mn-ea"/>
+                <a:cs typeface="+mn-cs"/>
+              </a:rPr>
+              <a:t>, including </a:t>
+            </a:r>
+            <a:r>
+              <a:rPr lang="en-US" sz="1200" b="1" i="0" kern="1200" dirty="0">
+                <a:solidFill>
+                  <a:schemeClr val="tx1"/>
+                </a:solidFill>
+                <a:effectLst/>
+                <a:latin typeface="+mn-lt"/>
+                <a:ea typeface="+mn-ea"/>
+                <a:cs typeface="+mn-cs"/>
+              </a:rPr>
+              <a:t>remote control</a:t>
+            </a:r>
+            <a:r>
+              <a:rPr lang="en-US" sz="1200" b="0" i="0" kern="1200" dirty="0">
+                <a:solidFill>
+                  <a:schemeClr val="tx1"/>
+                </a:solidFill>
+                <a:effectLst/>
+                <a:latin typeface="+mn-lt"/>
+                <a:ea typeface="+mn-ea"/>
+                <a:cs typeface="+mn-cs"/>
+              </a:rPr>
+              <a:t>.</a:t>
+            </a:r>
+          </a:p>
+          <a:p>
+            <a:endParaRPr lang="en-US" dirty="0"/>
+          </a:p>
+        </p:txBody>
+      </p:sp>
+      <p:sp>
+        <p:nvSpPr>
+          <p:cNvPr id="4" name="Slide Number Placeholder 3">
+            <a:extLst>
+              <a:ext uri="{FF2B5EF4-FFF2-40B4-BE49-F238E27FC236}">
+                <a16:creationId xmlns:a16="http://schemas.microsoft.com/office/drawing/2014/main" id="{ED94EE0E-FEA5-A27F-3ADB-94C212932BA1}"/>
+              </a:ext>
+            </a:extLst>
+          </p:cNvPr>
+          <p:cNvSpPr>
+            <a:spLocks noGrp="1"/>
+          </p:cNvSpPr>
+          <p:nvPr>
+            <p:ph type="sldNum" sz="quarter" idx="10"/>
+          </p:nvPr>
+        </p:nvSpPr>
+        <p:spPr/>
+        <p:txBody>
+          <a:bodyPr/>
+          <a:lstStyle/>
+          <a:p>
+            <a:pPr marL="0" marR="0" lvl="0" indent="0" algn="l" defTabSz="914400" rtl="0" eaLnBrk="1" fontAlgn="auto" latinLnBrk="0" hangingPunct="1">
+              <a:lnSpc>
+                <a:spcPct val="100000"/>
+              </a:lnSpc>
+              <a:spcBef>
+                <a:spcPts val="0"/>
+              </a:spcBef>
+              <a:spcAft>
+                <a:spcPts val="0"/>
+              </a:spcAft>
+              <a:buClrTx/>
+              <a:buSzTx/>
+              <a:buFontTx/>
+              <a:buNone/>
+              <a:tabLst/>
+              <a:defRPr/>
+            </a:pPr>
+            <a:fld id="{F7021451-1387-4CA6-816F-3879F97B5CBC}" type="slidenum">
+              <a:rPr kumimoji="0" lang="en-US" sz="1800" b="0" i="0" u="none" strike="noStrike" kern="1200" cap="none" spc="0" normalizeH="0" baseline="0" noProof="0">
+                <a:ln>
+                  <a:noFill/>
+                </a:ln>
+                <a:solidFill>
+                  <a:prstClr val="black"/>
+                </a:solidFill>
+                <a:effectLst/>
+                <a:uLnTx/>
+                <a:uFillTx/>
+                <a:latin typeface="Aptos" panose="02110004020202020204"/>
+                <a:ea typeface="+mn-ea"/>
+                <a:cs typeface="+mn-cs"/>
+              </a:rPr>
+              <a:pPr marL="0" marR="0" lvl="0" indent="0" algn="l" defTabSz="914400" rtl="0" eaLnBrk="1" fontAlgn="auto" latinLnBrk="0" hangingPunct="1">
+                <a:lnSpc>
+                  <a:spcPct val="100000"/>
+                </a:lnSpc>
+                <a:spcBef>
+                  <a:spcPts val="0"/>
+                </a:spcBef>
+                <a:spcAft>
+                  <a:spcPts val="0"/>
+                </a:spcAft>
+                <a:buClrTx/>
+                <a:buSzTx/>
+                <a:buFontTx/>
+                <a:buNone/>
+                <a:tabLst/>
+                <a:defRPr/>
+              </a:pPr>
+              <a:t>11</a:t>
+            </a:fld>
+            <a:endParaRPr kumimoji="0" lang="en-US" sz="1800" b="0" i="0" u="none" strike="noStrike" kern="1200" cap="none" spc="0" normalizeH="0" baseline="0" noProof="0">
+              <a:ln>
+                <a:noFill/>
+              </a:ln>
+              <a:solidFill>
+                <a:prstClr val="black"/>
+              </a:solidFill>
+              <a:effectLst/>
+              <a:uLnTx/>
+              <a:uFillTx/>
+              <a:latin typeface="Aptos" panose="02110004020202020204"/>
+              <a:ea typeface="+mn-ea"/>
+              <a:cs typeface="+mn-cs"/>
+            </a:endParaRPr>
+          </a:p>
+        </p:txBody>
+      </p:sp>
+    </p:spTree>
+    <p:extLst>
+      <p:ext uri="{BB962C8B-B14F-4D97-AF65-F5344CB8AC3E}">
+        <p14:creationId xmlns:p14="http://schemas.microsoft.com/office/powerpoint/2010/main" val="3833103652"/>
+      </p:ext>
+    </p:extLst>
+  </p:cSld>
+  <p:clrMapOvr>
+    <a:masterClrMapping/>
+  </p:clrMapOvr>
+</p:notes>
+</file>
+
+<file path=ppt/notesSlides/notesSlide12.xml><?xml version="1.0" encoding="utf-8"?>
+<p:notes xmlns:a="http://schemas.openxmlformats.org/drawingml/2006/main" xmlns:r="http://schemas.openxmlformats.org/officeDocument/2006/relationships" xmlns:p="http://schemas.openxmlformats.org/presentationml/2006/main">
+  <p:cSld>
+    <p:spTree>
+      <p:nvGrpSpPr>
+        <p:cNvPr id="1" name=""/>
+        <p:cNvGrpSpPr/>
+        <p:nvPr/>
+      </p:nvGrpSpPr>
+      <p:grpSpPr>
+        <a:xfrm>
+          <a:off x="0" y="0"/>
+          <a:ext cx="0" cy="0"/>
+          <a:chOff x="0" y="0"/>
+          <a:chExt cx="0" cy="0"/>
+        </a:xfrm>
+      </p:grpSpPr>
+      <p:sp>
+        <p:nvSpPr>
+          <p:cNvPr id="2" name="Slide Image Placeholder 1"/>
+          <p:cNvSpPr>
+            <a:spLocks noGrp="1" noRot="1" noChangeAspect="1"/>
+          </p:cNvSpPr>
+          <p:nvPr>
+            <p:ph type="sldImg"/>
+          </p:nvPr>
+        </p:nvSpPr>
+        <p:spPr/>
+      </p:sp>
+      <p:sp>
+        <p:nvSpPr>
+          <p:cNvPr id="3" name="Notes Placeholder 2"/>
+          <p:cNvSpPr>
+            <a:spLocks noGrp="1"/>
+          </p:cNvSpPr>
+          <p:nvPr>
+            <p:ph type="body" idx="1"/>
+          </p:nvPr>
+        </p:nvSpPr>
+        <p:spPr/>
+        <p:txBody>
+          <a:bodyPr/>
+          <a:lstStyle/>
+          <a:p>
+            <a:r>
+              <a:rPr lang="en-US" sz="1200" b="0" i="0" kern="1200" dirty="0">
+                <a:solidFill>
+                  <a:schemeClr val="tx1"/>
+                </a:solidFill>
+                <a:effectLst/>
+                <a:latin typeface="+mn-lt"/>
+                <a:ea typeface="+mn-ea"/>
+                <a:cs typeface="+mn-cs"/>
+              </a:rPr>
+              <a:t>Four engineering decisions shaped the design.</a:t>
+            </a:r>
+          </a:p>
+          <a:p>
+            <a:r>
+              <a:rPr lang="en-US" sz="1200" b="1" i="0" kern="1200" dirty="0">
+                <a:solidFill>
+                  <a:schemeClr val="tx1"/>
+                </a:solidFill>
+                <a:effectLst/>
+                <a:latin typeface="+mn-lt"/>
+                <a:ea typeface="+mn-ea"/>
+                <a:cs typeface="+mn-cs"/>
+              </a:rPr>
+              <a:t>Real-time synchronization:</a:t>
+            </a:r>
+            <a:r>
+              <a:rPr lang="en-US" sz="1200" b="0" i="0" kern="1200" dirty="0">
+                <a:solidFill>
+                  <a:schemeClr val="tx1"/>
+                </a:solidFill>
+                <a:effectLst/>
+                <a:latin typeface="+mn-lt"/>
+                <a:ea typeface="+mn-ea"/>
+                <a:cs typeface="+mn-cs"/>
+              </a:rPr>
+              <a:t> multiple browsers must stay in sync </a:t>
+            </a:r>
+            <a:r>
+              <a:rPr lang="en-US" sz="1200" b="1" i="0" kern="1200" dirty="0">
+                <a:solidFill>
+                  <a:schemeClr val="tx1"/>
+                </a:solidFill>
+                <a:effectLst/>
+                <a:latin typeface="+mn-lt"/>
+                <a:ea typeface="+mn-ea"/>
+                <a:cs typeface="+mn-cs"/>
+              </a:rPr>
+              <a:t>without polling</a:t>
+            </a:r>
+            <a:r>
+              <a:rPr lang="en-US" sz="1200" b="0" i="0" kern="1200" dirty="0">
+                <a:solidFill>
+                  <a:schemeClr val="tx1"/>
+                </a:solidFill>
+                <a:effectLst/>
+                <a:latin typeface="+mn-lt"/>
+                <a:ea typeface="+mn-ea"/>
+                <a:cs typeface="+mn-cs"/>
+              </a:rPr>
+              <a:t>. We use </a:t>
+            </a:r>
+            <a:r>
+              <a:rPr lang="en-US" sz="1200" b="1" i="0" kern="1200" dirty="0" err="1">
+                <a:solidFill>
+                  <a:schemeClr val="tx1"/>
+                </a:solidFill>
+                <a:effectLst/>
+                <a:latin typeface="+mn-lt"/>
+                <a:ea typeface="+mn-ea"/>
+                <a:cs typeface="+mn-cs"/>
+              </a:rPr>
+              <a:t>SignalR</a:t>
+            </a:r>
+            <a:r>
+              <a:rPr lang="en-US" sz="1200" b="1" i="0" kern="1200" dirty="0">
+                <a:solidFill>
+                  <a:schemeClr val="tx1"/>
+                </a:solidFill>
+                <a:effectLst/>
+                <a:latin typeface="+mn-lt"/>
+                <a:ea typeface="+mn-ea"/>
+                <a:cs typeface="+mn-cs"/>
+              </a:rPr>
+              <a:t> groups</a:t>
+            </a:r>
+            <a:r>
+              <a:rPr lang="en-US" sz="1200" b="0" i="0" kern="1200" dirty="0">
+                <a:solidFill>
+                  <a:schemeClr val="tx1"/>
+                </a:solidFill>
+                <a:effectLst/>
+                <a:latin typeface="+mn-lt"/>
+                <a:ea typeface="+mn-ea"/>
+                <a:cs typeface="+mn-cs"/>
+              </a:rPr>
+              <a:t> and push </a:t>
+            </a:r>
+            <a:r>
+              <a:rPr lang="en-US" sz="1200" b="1" i="0" kern="1200" dirty="0">
+                <a:solidFill>
+                  <a:schemeClr val="tx1"/>
+                </a:solidFill>
+                <a:effectLst/>
+                <a:latin typeface="+mn-lt"/>
+                <a:ea typeface="+mn-ea"/>
+                <a:cs typeface="+mn-cs"/>
+              </a:rPr>
+              <a:t>after each reading is saved</a:t>
+            </a:r>
+            <a:r>
+              <a:rPr lang="en-US" sz="1200" b="0" i="0" kern="1200" dirty="0">
+                <a:solidFill>
+                  <a:schemeClr val="tx1"/>
+                </a:solidFill>
+                <a:effectLst/>
+                <a:latin typeface="+mn-lt"/>
+                <a:ea typeface="+mn-ea"/>
+                <a:cs typeface="+mn-cs"/>
+              </a:rPr>
+              <a:t>.</a:t>
+            </a:r>
+          </a:p>
+          <a:p>
+            <a:r>
+              <a:rPr lang="en-US" sz="1200" b="1" i="0" kern="1200" dirty="0">
+                <a:solidFill>
+                  <a:schemeClr val="tx1"/>
+                </a:solidFill>
+                <a:effectLst/>
+                <a:latin typeface="+mn-lt"/>
+                <a:ea typeface="+mn-ea"/>
+                <a:cs typeface="+mn-cs"/>
+              </a:rPr>
+              <a:t>Time-series storage:</a:t>
+            </a:r>
+            <a:r>
+              <a:rPr lang="en-US" sz="1200" b="0" i="0" kern="1200" dirty="0">
+                <a:solidFill>
+                  <a:schemeClr val="tx1"/>
+                </a:solidFill>
+                <a:effectLst/>
+                <a:latin typeface="+mn-lt"/>
+                <a:ea typeface="+mn-ea"/>
+                <a:cs typeface="+mn-cs"/>
+              </a:rPr>
+              <a:t> readings grow quickly. We use a </a:t>
+            </a:r>
+            <a:r>
+              <a:rPr lang="en-US" sz="1200" b="1" i="0" kern="1200" dirty="0">
+                <a:solidFill>
+                  <a:schemeClr val="tx1"/>
+                </a:solidFill>
+                <a:effectLst/>
+                <a:latin typeface="+mn-lt"/>
+                <a:ea typeface="+mn-ea"/>
+                <a:cs typeface="+mn-cs"/>
+              </a:rPr>
+              <a:t>BIGINT</a:t>
+            </a:r>
+            <a:r>
+              <a:rPr lang="en-US" sz="1200" b="0" i="0" kern="1200" dirty="0">
+                <a:solidFill>
+                  <a:schemeClr val="tx1"/>
+                </a:solidFill>
+                <a:effectLst/>
+                <a:latin typeface="+mn-lt"/>
+                <a:ea typeface="+mn-ea"/>
+                <a:cs typeface="+mn-cs"/>
+              </a:rPr>
+              <a:t> key, </a:t>
+            </a:r>
+            <a:r>
+              <a:rPr lang="en-US" sz="1200" b="1" i="0" kern="1200" dirty="0">
+                <a:solidFill>
+                  <a:schemeClr val="tx1"/>
+                </a:solidFill>
+                <a:effectLst/>
+                <a:latin typeface="+mn-lt"/>
+                <a:ea typeface="+mn-ea"/>
+                <a:cs typeface="+mn-cs"/>
+              </a:rPr>
+              <a:t>composite indexes</a:t>
+            </a:r>
+            <a:r>
+              <a:rPr lang="en-US" sz="1200" b="0" i="0" kern="1200" dirty="0">
+                <a:solidFill>
+                  <a:schemeClr val="tx1"/>
+                </a:solidFill>
+                <a:effectLst/>
+                <a:latin typeface="+mn-lt"/>
+                <a:ea typeface="+mn-ea"/>
+                <a:cs typeface="+mn-cs"/>
+              </a:rPr>
+              <a:t>, and </a:t>
+            </a:r>
+            <a:r>
+              <a:rPr lang="en-US" sz="1200" b="1" i="0" kern="1200" dirty="0">
+                <a:solidFill>
+                  <a:schemeClr val="tx1"/>
+                </a:solidFill>
+                <a:effectLst/>
+                <a:latin typeface="+mn-lt"/>
+                <a:ea typeface="+mn-ea"/>
+                <a:cs typeface="+mn-cs"/>
+              </a:rPr>
+              <a:t>paged date-range queries</a:t>
+            </a:r>
+            <a:r>
+              <a:rPr lang="en-US" sz="1200" b="0" i="0" kern="1200" dirty="0">
+                <a:solidFill>
+                  <a:schemeClr val="tx1"/>
+                </a:solidFill>
+                <a:effectLst/>
+                <a:latin typeface="+mn-lt"/>
+                <a:ea typeface="+mn-ea"/>
+                <a:cs typeface="+mn-cs"/>
+              </a:rPr>
+              <a:t>. Archiving is planned for larger scale.</a:t>
+            </a:r>
+          </a:p>
+          <a:p>
+            <a:r>
+              <a:rPr lang="en-US" sz="1200" b="1" i="0" kern="1200" dirty="0">
+                <a:solidFill>
+                  <a:schemeClr val="tx1"/>
+                </a:solidFill>
+                <a:effectLst/>
+                <a:latin typeface="+mn-lt"/>
+                <a:ea typeface="+mn-ea"/>
+                <a:cs typeface="+mn-cs"/>
+              </a:rPr>
+              <a:t>Cross-layer data flow:</a:t>
+            </a:r>
+            <a:r>
+              <a:rPr lang="en-US" sz="1200" b="0" i="0" kern="1200" dirty="0">
+                <a:solidFill>
+                  <a:schemeClr val="tx1"/>
+                </a:solidFill>
+                <a:effectLst/>
+                <a:latin typeface="+mn-lt"/>
+                <a:ea typeface="+mn-ea"/>
+                <a:cs typeface="+mn-cs"/>
+              </a:rPr>
+              <a:t> each reading follows </a:t>
+            </a:r>
+            <a:r>
+              <a:rPr lang="en-US" sz="1200" b="1" i="0" kern="1200" dirty="0">
+                <a:solidFill>
+                  <a:schemeClr val="tx1"/>
+                </a:solidFill>
+                <a:effectLst/>
+                <a:latin typeface="+mn-lt"/>
+                <a:ea typeface="+mn-ea"/>
+                <a:cs typeface="+mn-cs"/>
+              </a:rPr>
+              <a:t>MQTT → API → database → </a:t>
+            </a:r>
+            <a:r>
+              <a:rPr lang="en-US" sz="1200" b="1" i="0" kern="1200" dirty="0" err="1">
+                <a:solidFill>
+                  <a:schemeClr val="tx1"/>
+                </a:solidFill>
+                <a:effectLst/>
+                <a:latin typeface="+mn-lt"/>
+                <a:ea typeface="+mn-ea"/>
+                <a:cs typeface="+mn-cs"/>
+              </a:rPr>
+              <a:t>SignalR</a:t>
+            </a:r>
+            <a:r>
+              <a:rPr lang="en-US" sz="1200" b="1" i="0" kern="1200" dirty="0">
+                <a:solidFill>
+                  <a:schemeClr val="tx1"/>
+                </a:solidFill>
+                <a:effectLst/>
+                <a:latin typeface="+mn-lt"/>
+                <a:ea typeface="+mn-ea"/>
+                <a:cs typeface="+mn-cs"/>
+              </a:rPr>
+              <a:t> → React</a:t>
+            </a:r>
+            <a:r>
+              <a:rPr lang="en-US" sz="1200" b="0" i="0" kern="1200" dirty="0">
+                <a:solidFill>
+                  <a:schemeClr val="tx1"/>
+                </a:solidFill>
+                <a:effectLst/>
+                <a:latin typeface="+mn-lt"/>
+                <a:ea typeface="+mn-ea"/>
+                <a:cs typeface="+mn-cs"/>
+              </a:rPr>
+              <a:t>, with layered services and DTOs to keep that path reliable.</a:t>
+            </a:r>
+          </a:p>
+          <a:p>
+            <a:r>
+              <a:rPr lang="en-US" sz="1200" b="1" i="0" kern="1200" dirty="0">
+                <a:solidFill>
+                  <a:schemeClr val="tx1"/>
+                </a:solidFill>
+                <a:effectLst/>
+                <a:latin typeface="+mn-lt"/>
+                <a:ea typeface="+mn-ea"/>
+                <a:cs typeface="+mn-cs"/>
+              </a:rPr>
+              <a:t>Edge compatibility:</a:t>
+            </a:r>
+            <a:r>
+              <a:rPr lang="en-US" sz="1200" b="0" i="0" kern="1200" dirty="0">
+                <a:solidFill>
+                  <a:schemeClr val="tx1"/>
+                </a:solidFill>
+                <a:effectLst/>
+                <a:latin typeface="+mn-lt"/>
+                <a:ea typeface="+mn-ea"/>
+                <a:cs typeface="+mn-cs"/>
+              </a:rPr>
+              <a:t> </a:t>
+            </a:r>
+            <a:r>
+              <a:rPr lang="en-US" sz="1200" b="1" i="0" kern="1200" dirty="0">
+                <a:solidFill>
+                  <a:schemeClr val="tx1"/>
+                </a:solidFill>
+                <a:effectLst/>
+                <a:latin typeface="+mn-lt"/>
+                <a:ea typeface="+mn-ea"/>
+                <a:cs typeface="+mn-cs"/>
+              </a:rPr>
+              <a:t>Arduino, ESP32, and Raspberry Pi</a:t>
+            </a:r>
+            <a:r>
+              <a:rPr lang="en-US" sz="1200" b="0" i="0" kern="1200" dirty="0">
+                <a:solidFill>
+                  <a:schemeClr val="tx1"/>
+                </a:solidFill>
+                <a:effectLst/>
+                <a:latin typeface="+mn-lt"/>
+                <a:ea typeface="+mn-ea"/>
+                <a:cs typeface="+mn-cs"/>
+              </a:rPr>
+              <a:t> can share the same backend—</a:t>
+            </a:r>
+            <a:r>
+              <a:rPr lang="en-US" sz="1200" b="1" i="0" kern="1200" dirty="0">
+                <a:solidFill>
+                  <a:schemeClr val="tx1"/>
+                </a:solidFill>
+                <a:effectLst/>
+                <a:latin typeface="+mn-lt"/>
+                <a:ea typeface="+mn-ea"/>
+                <a:cs typeface="+mn-cs"/>
+              </a:rPr>
+              <a:t>MQTT and JSON</a:t>
+            </a:r>
+            <a:r>
+              <a:rPr lang="en-US" sz="1200" b="0" i="0" kern="1200" dirty="0">
+                <a:solidFill>
+                  <a:schemeClr val="tx1"/>
+                </a:solidFill>
+                <a:effectLst/>
+                <a:latin typeface="+mn-lt"/>
+                <a:ea typeface="+mn-ea"/>
+                <a:cs typeface="+mn-cs"/>
+              </a:rPr>
+              <a:t> for devices, </a:t>
+            </a:r>
+            <a:r>
+              <a:rPr lang="en-US" sz="1200" b="1" i="0" kern="1200" dirty="0">
+                <a:solidFill>
+                  <a:schemeClr val="tx1"/>
+                </a:solidFill>
+                <a:effectLst/>
+                <a:latin typeface="+mn-lt"/>
+                <a:ea typeface="+mn-ea"/>
+                <a:cs typeface="+mn-cs"/>
+              </a:rPr>
+              <a:t>REST</a:t>
+            </a:r>
+            <a:r>
+              <a:rPr lang="en-US" sz="1200" b="0" i="0" kern="1200" dirty="0">
+                <a:solidFill>
+                  <a:schemeClr val="tx1"/>
+                </a:solidFill>
+                <a:effectLst/>
+                <a:latin typeface="+mn-lt"/>
+                <a:ea typeface="+mn-ea"/>
+                <a:cs typeface="+mn-cs"/>
+              </a:rPr>
+              <a:t> for tests and simulators, and a </a:t>
+            </a:r>
+            <a:r>
+              <a:rPr lang="en-US" sz="1200" b="1" i="0" kern="1200" dirty="0">
+                <a:solidFill>
+                  <a:schemeClr val="tx1"/>
+                </a:solidFill>
+                <a:effectLst/>
+                <a:latin typeface="+mn-lt"/>
+                <a:ea typeface="+mn-ea"/>
+                <a:cs typeface="+mn-cs"/>
+              </a:rPr>
+              <a:t>shared device, sensor, and actuator model</a:t>
+            </a:r>
+            <a:r>
+              <a:rPr lang="en-US" sz="1200" b="0" i="0" kern="1200" dirty="0">
+                <a:solidFill>
+                  <a:schemeClr val="tx1"/>
+                </a:solidFill>
+                <a:effectLst/>
+                <a:latin typeface="+mn-lt"/>
+                <a:ea typeface="+mn-ea"/>
+                <a:cs typeface="+mn-cs"/>
+              </a:rPr>
+              <a:t> in the database.</a:t>
+            </a:r>
+          </a:p>
           <a:p>
             <a:endParaRPr lang="en-US" dirty="0"/>
           </a:p>
@@ -726,7 +2290,7 @@
 </p:notes>
 </file>
 
-<file path=ppt/notesSlides/notesSlide11.xml><?xml version="1.0" encoding="utf-8"?>
+<file path=ppt/notesSlides/notesSlide13.xml><?xml version="1.0" encoding="utf-8"?>
 <p:notes xmlns:a="http://schemas.openxmlformats.org/drawingml/2006/main" xmlns:r="http://schemas.openxmlformats.org/officeDocument/2006/relationships" xmlns:p="http://schemas.openxmlformats.org/presentationml/2006/main">
   <p:cSld>
     <p:spTree>
@@ -769,6 +2333,312 @@
         <p:txBody>
           <a:bodyPr/>
           <a:lstStyle/>
+          <a:p>
+            <a:r>
+              <a:rPr lang="en-US" sz="1200" b="0" i="0" kern="1200" dirty="0">
+                <a:solidFill>
+                  <a:schemeClr val="tx1"/>
+                </a:solidFill>
+                <a:effectLst/>
+                <a:latin typeface="+mn-lt"/>
+                <a:ea typeface="+mn-ea"/>
+                <a:cs typeface="+mn-cs"/>
+              </a:rPr>
+              <a:t>We delivered an end-to-end system: </a:t>
+            </a:r>
+            <a:r>
+              <a:rPr lang="en-US" sz="1200" b="1" i="0" kern="1200" dirty="0">
+                <a:solidFill>
+                  <a:schemeClr val="tx1"/>
+                </a:solidFill>
+                <a:effectLst/>
+                <a:latin typeface="+mn-lt"/>
+                <a:ea typeface="+mn-ea"/>
+                <a:cs typeface="+mn-cs"/>
+              </a:rPr>
+              <a:t>MQTT, API, SQL Server, </a:t>
+            </a:r>
+            <a:r>
+              <a:rPr lang="en-US" sz="1200" b="1" i="0" kern="1200" dirty="0" err="1">
+                <a:solidFill>
+                  <a:schemeClr val="tx1"/>
+                </a:solidFill>
+                <a:effectLst/>
+                <a:latin typeface="+mn-lt"/>
+                <a:ea typeface="+mn-ea"/>
+                <a:cs typeface="+mn-cs"/>
+              </a:rPr>
+              <a:t>SignalR</a:t>
+            </a:r>
+            <a:r>
+              <a:rPr lang="en-US" sz="1200" b="1" i="0" kern="1200" dirty="0">
+                <a:solidFill>
+                  <a:schemeClr val="tx1"/>
+                </a:solidFill>
+                <a:effectLst/>
+                <a:latin typeface="+mn-lt"/>
+                <a:ea typeface="+mn-ea"/>
+                <a:cs typeface="+mn-cs"/>
+              </a:rPr>
+              <a:t>, and React</a:t>
+            </a:r>
+            <a:r>
+              <a:rPr lang="en-US" sz="1200" b="0" i="0" kern="1200" dirty="0">
+                <a:solidFill>
+                  <a:schemeClr val="tx1"/>
+                </a:solidFill>
+                <a:effectLst/>
+                <a:latin typeface="+mn-lt"/>
+                <a:ea typeface="+mn-ea"/>
+                <a:cs typeface="+mn-cs"/>
+              </a:rPr>
+              <a:t>; an eleven-table schema; JWT roles; a full UI including actuators and command history; </a:t>
+            </a:r>
+            <a:r>
+              <a:rPr lang="en-US" sz="1200" b="1" i="0" kern="1200" dirty="0">
+                <a:solidFill>
+                  <a:schemeClr val="tx1"/>
+                </a:solidFill>
+                <a:effectLst/>
+                <a:latin typeface="+mn-lt"/>
+                <a:ea typeface="+mn-ea"/>
+                <a:cs typeface="+mn-cs"/>
+              </a:rPr>
+              <a:t>Arduino firmware</a:t>
+            </a:r>
+            <a:r>
+              <a:rPr lang="en-US" sz="1200" b="0" i="0" kern="1200" dirty="0">
+                <a:solidFill>
+                  <a:schemeClr val="tx1"/>
+                </a:solidFill>
+                <a:effectLst/>
+                <a:latin typeface="+mn-lt"/>
+                <a:ea typeface="+mn-ea"/>
+                <a:cs typeface="+mn-cs"/>
+              </a:rPr>
+              <a:t> with a live demo; and </a:t>
+            </a:r>
+            <a:r>
+              <a:rPr lang="en-US" sz="1200" b="1" i="0" kern="1200" dirty="0">
+                <a:solidFill>
+                  <a:schemeClr val="tx1"/>
+                </a:solidFill>
+                <a:effectLst/>
+                <a:latin typeface="+mn-lt"/>
+                <a:ea typeface="+mn-ea"/>
+                <a:cs typeface="+mn-cs"/>
+              </a:rPr>
+              <a:t>GitHub and Azure</a:t>
+            </a:r>
+            <a:r>
+              <a:rPr lang="en-US" sz="1200" b="0" i="0" kern="1200" dirty="0">
+                <a:solidFill>
+                  <a:schemeClr val="tx1"/>
+                </a:solidFill>
+                <a:effectLst/>
+                <a:latin typeface="+mn-lt"/>
+                <a:ea typeface="+mn-ea"/>
+                <a:cs typeface="+mn-cs"/>
+              </a:rPr>
+              <a:t> deployment.</a:t>
+            </a:r>
+          </a:p>
+          <a:p>
+            <a:r>
+              <a:rPr lang="en-US" sz="1200" b="0" i="0" kern="1200" dirty="0">
+                <a:solidFill>
+                  <a:schemeClr val="tx1"/>
+                </a:solidFill>
+                <a:effectLst/>
+                <a:latin typeface="+mn-lt"/>
+                <a:ea typeface="+mn-ea"/>
+                <a:cs typeface="+mn-cs"/>
+              </a:rPr>
+              <a:t>Future work includes </a:t>
+            </a:r>
+            <a:r>
+              <a:rPr lang="en-US" sz="1200" b="1" i="0" kern="1200" dirty="0">
+                <a:solidFill>
+                  <a:schemeClr val="tx1"/>
+                </a:solidFill>
+                <a:effectLst/>
+                <a:latin typeface="+mn-lt"/>
+                <a:ea typeface="+mn-ea"/>
+                <a:cs typeface="+mn-cs"/>
+              </a:rPr>
+              <a:t>data retention and archiving</a:t>
+            </a:r>
+            <a:r>
+              <a:rPr lang="en-US" sz="1200" b="0" i="0" kern="1200" dirty="0">
+                <a:solidFill>
+                  <a:schemeClr val="tx1"/>
+                </a:solidFill>
+                <a:effectLst/>
+                <a:latin typeface="+mn-lt"/>
+                <a:ea typeface="+mn-ea"/>
+                <a:cs typeface="+mn-cs"/>
+              </a:rPr>
+              <a:t>, </a:t>
+            </a:r>
+            <a:r>
+              <a:rPr lang="en-US" sz="1200" b="1" i="0" kern="1200" dirty="0">
+                <a:solidFill>
+                  <a:schemeClr val="tx1"/>
+                </a:solidFill>
+                <a:effectLst/>
+                <a:latin typeface="+mn-lt"/>
+                <a:ea typeface="+mn-ea"/>
+                <a:cs typeface="+mn-cs"/>
+              </a:rPr>
+              <a:t>multi-tenant</a:t>
+            </a:r>
+            <a:r>
+              <a:rPr lang="en-US" sz="1200" b="0" i="0" kern="1200" dirty="0">
+                <a:solidFill>
+                  <a:schemeClr val="tx1"/>
+                </a:solidFill>
+                <a:effectLst/>
+                <a:latin typeface="+mn-lt"/>
+                <a:ea typeface="+mn-ea"/>
+                <a:cs typeface="+mn-cs"/>
+              </a:rPr>
+              <a:t> support, a </a:t>
+            </a:r>
+            <a:r>
+              <a:rPr lang="en-US" sz="1200" b="1" i="0" kern="1200" dirty="0">
+                <a:solidFill>
+                  <a:schemeClr val="tx1"/>
+                </a:solidFill>
+                <a:effectLst/>
+                <a:latin typeface="+mn-lt"/>
+                <a:ea typeface="+mn-ea"/>
+                <a:cs typeface="+mn-cs"/>
+              </a:rPr>
+              <a:t>mobile app</a:t>
+            </a:r>
+            <a:r>
+              <a:rPr lang="en-US" sz="1200" b="0" i="0" kern="1200" dirty="0">
+                <a:solidFill>
+                  <a:schemeClr val="tx1"/>
+                </a:solidFill>
+                <a:effectLst/>
+                <a:latin typeface="+mn-lt"/>
+                <a:ea typeface="+mn-ea"/>
+                <a:cs typeface="+mn-cs"/>
+              </a:rPr>
+              <a:t>, </a:t>
+            </a:r>
+            <a:r>
+              <a:rPr lang="en-US" sz="1200" b="1" i="0" kern="1200" dirty="0">
+                <a:solidFill>
+                  <a:schemeClr val="tx1"/>
+                </a:solidFill>
+                <a:effectLst/>
+                <a:latin typeface="+mn-lt"/>
+                <a:ea typeface="+mn-ea"/>
+                <a:cs typeface="+mn-cs"/>
+              </a:rPr>
+              <a:t>machine learning</a:t>
+            </a:r>
+            <a:r>
+              <a:rPr lang="en-US" sz="1200" b="0" i="0" kern="1200" dirty="0">
+                <a:solidFill>
+                  <a:schemeClr val="tx1"/>
+                </a:solidFill>
+                <a:effectLst/>
+                <a:latin typeface="+mn-lt"/>
+                <a:ea typeface="+mn-ea"/>
+                <a:cs typeface="+mn-cs"/>
+              </a:rPr>
+              <a:t> for anomalies, broader </a:t>
+            </a:r>
+            <a:r>
+              <a:rPr lang="en-US" sz="1200" b="1" i="0" kern="1200" dirty="0">
+                <a:solidFill>
+                  <a:schemeClr val="tx1"/>
+                </a:solidFill>
+                <a:effectLst/>
+                <a:latin typeface="+mn-lt"/>
+                <a:ea typeface="+mn-ea"/>
+                <a:cs typeface="+mn-cs"/>
+              </a:rPr>
+              <a:t>edge integrations</a:t>
+            </a:r>
+            <a:r>
+              <a:rPr lang="en-US" sz="1200" b="0" i="0" kern="1200" dirty="0">
+                <a:solidFill>
+                  <a:schemeClr val="tx1"/>
+                </a:solidFill>
+                <a:effectLst/>
+                <a:latin typeface="+mn-lt"/>
+                <a:ea typeface="+mn-ea"/>
+                <a:cs typeface="+mn-cs"/>
+              </a:rPr>
+              <a:t>, and production </a:t>
+            </a:r>
+            <a:r>
+              <a:rPr lang="en-US" sz="1200" b="1" i="0" kern="1200" dirty="0">
+                <a:solidFill>
+                  <a:schemeClr val="tx1"/>
+                </a:solidFill>
+                <a:effectLst/>
+                <a:latin typeface="+mn-lt"/>
+                <a:ea typeface="+mn-ea"/>
+                <a:cs typeface="+mn-cs"/>
+              </a:rPr>
+              <a:t>hardening</a:t>
+            </a:r>
+            <a:r>
+              <a:rPr lang="en-US" sz="1200" b="0" i="0" kern="1200" dirty="0">
+                <a:solidFill>
+                  <a:schemeClr val="tx1"/>
+                </a:solidFill>
+                <a:effectLst/>
+                <a:latin typeface="+mn-lt"/>
+                <a:ea typeface="+mn-ea"/>
+                <a:cs typeface="+mn-cs"/>
+              </a:rPr>
+              <a:t>.</a:t>
+            </a:r>
+          </a:p>
+          <a:p>
+            <a:r>
+              <a:rPr lang="en-US" sz="1200" b="0" i="0" kern="1200" dirty="0">
+                <a:solidFill>
+                  <a:schemeClr val="tx1"/>
+                </a:solidFill>
+                <a:effectLst/>
+                <a:latin typeface="+mn-lt"/>
+                <a:ea typeface="+mn-ea"/>
+                <a:cs typeface="+mn-cs"/>
+              </a:rPr>
+              <a:t>This project demonstrates a </a:t>
+            </a:r>
+            <a:r>
+              <a:rPr lang="en-US" sz="1200" b="1" i="0" kern="1200" dirty="0">
+                <a:solidFill>
+                  <a:schemeClr val="tx1"/>
+                </a:solidFill>
+                <a:effectLst/>
+                <a:latin typeface="+mn-lt"/>
+                <a:ea typeface="+mn-ea"/>
+                <a:cs typeface="+mn-cs"/>
+              </a:rPr>
+              <a:t>full stack from physical sensor to cloud dashboard</a:t>
+            </a:r>
+            <a:r>
+              <a:rPr lang="en-US" sz="1200" b="0" i="0" kern="1200" dirty="0">
+                <a:solidFill>
+                  <a:schemeClr val="tx1"/>
+                </a:solidFill>
+                <a:effectLst/>
+                <a:latin typeface="+mn-lt"/>
+                <a:ea typeface="+mn-ea"/>
+                <a:cs typeface="+mn-cs"/>
+              </a:rPr>
+              <a:t> and applies the BAS Application Development program in a practical IoT solution.</a:t>
+            </a:r>
+          </a:p>
           <a:p>
             <a:endParaRPr lang="en-US" dirty="0"/>
           </a:p>
@@ -870,7 +2740,7 @@
 </p:notes>
 </file>
 
-<file path=ppt/notesSlides/notesSlide12.xml><?xml version="1.0" encoding="utf-8"?>
+<file path=ppt/notesSlides/notesSlide14.xml><?xml version="1.0" encoding="utf-8"?>
 <p:notes xmlns:a="http://schemas.openxmlformats.org/drawingml/2006/main" xmlns:r="http://schemas.openxmlformats.org/officeDocument/2006/relationships" xmlns:p="http://schemas.openxmlformats.org/presentationml/2006/main">
   <p:cSld>
     <p:spTree>
@@ -1082,6 +2952,298 @@
           <a:bodyPr/>
           <a:lstStyle/>
           <a:p>
+            <a:r>
+              <a:rPr lang="en-US" sz="1200" b="0" i="0" kern="1200" dirty="0">
+                <a:solidFill>
+                  <a:schemeClr val="tx1"/>
+                </a:solidFill>
+                <a:effectLst/>
+                <a:latin typeface="+mn-lt"/>
+                <a:ea typeface="+mn-ea"/>
+                <a:cs typeface="+mn-cs"/>
+              </a:rPr>
+              <a:t>Here is how the presentation is organized.</a:t>
+            </a:r>
+          </a:p>
+          <a:p>
+            <a:r>
+              <a:rPr lang="en-US" sz="1200" b="0" i="0" kern="1200" dirty="0">
+                <a:solidFill>
+                  <a:schemeClr val="tx1"/>
+                </a:solidFill>
+                <a:effectLst/>
+                <a:latin typeface="+mn-lt"/>
+                <a:ea typeface="+mn-ea"/>
+                <a:cs typeface="+mn-cs"/>
+              </a:rPr>
+              <a:t>I will begin with the </a:t>
+            </a:r>
+            <a:r>
+              <a:rPr lang="en-US" sz="1200" b="1" i="0" kern="1200" dirty="0">
+                <a:solidFill>
+                  <a:schemeClr val="tx1"/>
+                </a:solidFill>
+                <a:effectLst/>
+                <a:latin typeface="+mn-lt"/>
+                <a:ea typeface="+mn-ea"/>
+                <a:cs typeface="+mn-cs"/>
+              </a:rPr>
+              <a:t>problem</a:t>
+            </a:r>
+            <a:r>
+              <a:rPr lang="en-US" sz="1200" b="0" i="0" kern="1200" dirty="0">
+                <a:solidFill>
+                  <a:schemeClr val="tx1"/>
+                </a:solidFill>
+                <a:effectLst/>
+                <a:latin typeface="+mn-lt"/>
+                <a:ea typeface="+mn-ea"/>
+                <a:cs typeface="+mn-cs"/>
+              </a:rPr>
+              <a:t> and </a:t>
+            </a:r>
+            <a:r>
+              <a:rPr lang="en-US" sz="1200" b="1" i="0" kern="1200" dirty="0">
+                <a:solidFill>
+                  <a:schemeClr val="tx1"/>
+                </a:solidFill>
+                <a:effectLst/>
+                <a:latin typeface="+mn-lt"/>
+                <a:ea typeface="+mn-ea"/>
+                <a:cs typeface="+mn-cs"/>
+              </a:rPr>
+              <a:t>project goals</a:t>
+            </a:r>
+            <a:r>
+              <a:rPr lang="en-US" sz="1200" b="0" i="0" kern="1200" dirty="0">
+                <a:solidFill>
+                  <a:schemeClr val="tx1"/>
+                </a:solidFill>
+                <a:effectLst/>
+                <a:latin typeface="+mn-lt"/>
+                <a:ea typeface="+mn-ea"/>
+                <a:cs typeface="+mn-cs"/>
+              </a:rPr>
+              <a:t>, then cover the </a:t>
+            </a:r>
+            <a:r>
+              <a:rPr lang="en-US" sz="1200" b="1" i="0" kern="1200" dirty="0">
+                <a:solidFill>
+                  <a:schemeClr val="tx1"/>
+                </a:solidFill>
+                <a:effectLst/>
+                <a:latin typeface="+mn-lt"/>
+                <a:ea typeface="+mn-ea"/>
+                <a:cs typeface="+mn-cs"/>
+              </a:rPr>
+              <a:t>technology stack</a:t>
+            </a:r>
+            <a:r>
+              <a:rPr lang="en-US" sz="1200" b="0" i="0" kern="1200" dirty="0">
+                <a:solidFill>
+                  <a:schemeClr val="tx1"/>
+                </a:solidFill>
+                <a:effectLst/>
+                <a:latin typeface="+mn-lt"/>
+                <a:ea typeface="+mn-ea"/>
+                <a:cs typeface="+mn-cs"/>
+              </a:rPr>
+              <a:t> and </a:t>
+            </a:r>
+            <a:r>
+              <a:rPr lang="en-US" sz="1200" b="1" i="0" kern="1200" dirty="0">
+                <a:solidFill>
+                  <a:schemeClr val="tx1"/>
+                </a:solidFill>
+                <a:effectLst/>
+                <a:latin typeface="+mn-lt"/>
+                <a:ea typeface="+mn-ea"/>
+                <a:cs typeface="+mn-cs"/>
+              </a:rPr>
+              <a:t>system architecture</a:t>
+            </a:r>
+            <a:r>
+              <a:rPr lang="en-US" sz="1200" b="0" i="0" kern="1200" dirty="0">
+                <a:solidFill>
+                  <a:schemeClr val="tx1"/>
+                </a:solidFill>
+                <a:effectLst/>
+                <a:latin typeface="+mn-lt"/>
+                <a:ea typeface="+mn-ea"/>
+                <a:cs typeface="+mn-cs"/>
+              </a:rPr>
+              <a:t>. From there we move into </a:t>
+            </a:r>
+            <a:r>
+              <a:rPr lang="en-US" sz="1200" b="1" i="0" kern="1200" dirty="0">
+                <a:solidFill>
+                  <a:schemeClr val="tx1"/>
+                </a:solidFill>
+                <a:effectLst/>
+                <a:latin typeface="+mn-lt"/>
+                <a:ea typeface="+mn-ea"/>
+                <a:cs typeface="+mn-cs"/>
+              </a:rPr>
+              <a:t>database design</a:t>
+            </a:r>
+            <a:r>
+              <a:rPr lang="en-US" sz="1200" b="0" i="0" kern="1200" dirty="0">
+                <a:solidFill>
+                  <a:schemeClr val="tx1"/>
+                </a:solidFill>
+                <a:effectLst/>
+                <a:latin typeface="+mn-lt"/>
+                <a:ea typeface="+mn-ea"/>
+                <a:cs typeface="+mn-cs"/>
+              </a:rPr>
+              <a:t>, the </a:t>
+            </a:r>
+            <a:r>
+              <a:rPr lang="en-US" sz="1200" b="1" i="0" kern="1200" dirty="0">
+                <a:solidFill>
+                  <a:schemeClr val="tx1"/>
+                </a:solidFill>
+                <a:effectLst/>
+                <a:latin typeface="+mn-lt"/>
+                <a:ea typeface="+mn-ea"/>
+                <a:cs typeface="+mn-cs"/>
+              </a:rPr>
+              <a:t>backend API</a:t>
+            </a:r>
+            <a:r>
+              <a:rPr lang="en-US" sz="1200" b="0" i="0" kern="1200" dirty="0">
+                <a:solidFill>
+                  <a:schemeClr val="tx1"/>
+                </a:solidFill>
+                <a:effectLst/>
+                <a:latin typeface="+mn-lt"/>
+                <a:ea typeface="+mn-ea"/>
+                <a:cs typeface="+mn-cs"/>
+              </a:rPr>
+              <a:t>, and </a:t>
+            </a:r>
+            <a:r>
+              <a:rPr lang="en-US" sz="1200" b="1" i="0" kern="1200" dirty="0">
+                <a:solidFill>
+                  <a:schemeClr val="tx1"/>
+                </a:solidFill>
+                <a:effectLst/>
+                <a:latin typeface="+mn-lt"/>
+                <a:ea typeface="+mn-ea"/>
+                <a:cs typeface="+mn-cs"/>
+              </a:rPr>
+              <a:t>frontend design</a:t>
+            </a:r>
+            <a:r>
+              <a:rPr lang="en-US" sz="1200" b="0" i="0" kern="1200" dirty="0">
+                <a:solidFill>
+                  <a:schemeClr val="tx1"/>
+                </a:solidFill>
+                <a:effectLst/>
+                <a:latin typeface="+mn-lt"/>
+                <a:ea typeface="+mn-ea"/>
+                <a:cs typeface="+mn-cs"/>
+              </a:rPr>
+              <a:t>. After that I will summarize </a:t>
+            </a:r>
+            <a:r>
+              <a:rPr lang="en-US" sz="1200" b="1" i="0" kern="1200" dirty="0">
+                <a:solidFill>
+                  <a:schemeClr val="tx1"/>
+                </a:solidFill>
+                <a:effectLst/>
+                <a:latin typeface="+mn-lt"/>
+                <a:ea typeface="+mn-ea"/>
+                <a:cs typeface="+mn-cs"/>
+              </a:rPr>
+              <a:t>key features</a:t>
+            </a:r>
+            <a:r>
+              <a:rPr lang="en-US" sz="1200" b="0" i="0" kern="1200" dirty="0">
+                <a:solidFill>
+                  <a:schemeClr val="tx1"/>
+                </a:solidFill>
+                <a:effectLst/>
+                <a:latin typeface="+mn-lt"/>
+                <a:ea typeface="+mn-ea"/>
+                <a:cs typeface="+mn-cs"/>
+              </a:rPr>
+              <a:t>, show a </a:t>
+            </a:r>
+            <a:r>
+              <a:rPr lang="en-US" sz="1200" b="1" i="0" kern="1200" dirty="0">
+                <a:solidFill>
+                  <a:schemeClr val="tx1"/>
+                </a:solidFill>
+                <a:effectLst/>
+                <a:latin typeface="+mn-lt"/>
+                <a:ea typeface="+mn-ea"/>
+                <a:cs typeface="+mn-cs"/>
+              </a:rPr>
+              <a:t>live demo</a:t>
+            </a:r>
+            <a:r>
+              <a:rPr lang="en-US" sz="1200" b="0" i="0" kern="1200" dirty="0">
+                <a:solidFill>
+                  <a:schemeClr val="tx1"/>
+                </a:solidFill>
+                <a:effectLst/>
+                <a:latin typeface="+mn-lt"/>
+                <a:ea typeface="+mn-ea"/>
+                <a:cs typeface="+mn-cs"/>
+              </a:rPr>
+              <a:t>, discuss </a:t>
+            </a:r>
+            <a:r>
+              <a:rPr lang="en-US" sz="1200" b="1" i="0" kern="1200" dirty="0">
+                <a:solidFill>
+                  <a:schemeClr val="tx1"/>
+                </a:solidFill>
+                <a:effectLst/>
+                <a:latin typeface="+mn-lt"/>
+                <a:ea typeface="+mn-ea"/>
+                <a:cs typeface="+mn-cs"/>
+              </a:rPr>
+              <a:t>challenges and solutions</a:t>
+            </a:r>
+            <a:r>
+              <a:rPr lang="en-US" sz="1200" b="0" i="0" kern="1200" dirty="0">
+                <a:solidFill>
+                  <a:schemeClr val="tx1"/>
+                </a:solidFill>
+                <a:effectLst/>
+                <a:latin typeface="+mn-lt"/>
+                <a:ea typeface="+mn-ea"/>
+                <a:cs typeface="+mn-cs"/>
+              </a:rPr>
+              <a:t>, and close with </a:t>
+            </a:r>
+            <a:r>
+              <a:rPr lang="en-US" sz="1200" b="1" i="0" kern="1200" dirty="0">
+                <a:solidFill>
+                  <a:schemeClr val="tx1"/>
+                </a:solidFill>
+                <a:effectLst/>
+                <a:latin typeface="+mn-lt"/>
+                <a:ea typeface="+mn-ea"/>
+                <a:cs typeface="+mn-cs"/>
+              </a:rPr>
+              <a:t>conclusion and future work</a:t>
+            </a:r>
+            <a:r>
+              <a:rPr lang="en-US" sz="1200" b="0" i="0" kern="1200" dirty="0">
+                <a:solidFill>
+                  <a:schemeClr val="tx1"/>
+                </a:solidFill>
+                <a:effectLst/>
+                <a:latin typeface="+mn-lt"/>
+                <a:ea typeface="+mn-ea"/>
+                <a:cs typeface="+mn-cs"/>
+              </a:rPr>
+              <a:t>.</a:t>
+            </a:r>
+          </a:p>
+          <a:p>
             <a:endParaRPr lang="en-US" dirty="0"/>
           </a:p>
         </p:txBody>
@@ -1165,6 +3327,278 @@
         <p:txBody>
           <a:bodyPr/>
           <a:lstStyle/>
+          <a:p>
+            <a:r>
+              <a:rPr lang="en-US" sz="1200" b="0" i="0" kern="1200" dirty="0">
+                <a:solidFill>
+                  <a:schemeClr val="tx1"/>
+                </a:solidFill>
+                <a:effectLst/>
+                <a:latin typeface="+mn-lt"/>
+                <a:ea typeface="+mn-ea"/>
+                <a:cs typeface="+mn-cs"/>
+              </a:rPr>
+              <a:t>Industrial and commercial facilities need </a:t>
+            </a:r>
+            <a:r>
+              <a:rPr lang="en-US" sz="1200" b="1" i="0" kern="1200" dirty="0">
+                <a:solidFill>
+                  <a:schemeClr val="tx1"/>
+                </a:solidFill>
+                <a:effectLst/>
+                <a:latin typeface="+mn-lt"/>
+                <a:ea typeface="+mn-ea"/>
+                <a:cs typeface="+mn-cs"/>
+              </a:rPr>
+              <a:t>continuous monitoring</a:t>
+            </a:r>
+            <a:r>
+              <a:rPr lang="en-US" sz="1200" b="0" i="0" kern="1200" dirty="0">
+                <a:solidFill>
+                  <a:schemeClr val="tx1"/>
+                </a:solidFill>
+                <a:effectLst/>
+                <a:latin typeface="+mn-lt"/>
+                <a:ea typeface="+mn-ea"/>
+                <a:cs typeface="+mn-cs"/>
+              </a:rPr>
+              <a:t> of equipment—temperature, pressure, level, speed, status, and faults—often across more than one location.</a:t>
+            </a:r>
+          </a:p>
+          <a:p>
+            <a:r>
+              <a:rPr lang="en-US" sz="1200" b="0" i="0" kern="1200" dirty="0">
+                <a:solidFill>
+                  <a:schemeClr val="tx1"/>
+                </a:solidFill>
+                <a:effectLst/>
+                <a:latin typeface="+mn-lt"/>
+                <a:ea typeface="+mn-ea"/>
+                <a:cs typeface="+mn-cs"/>
+              </a:rPr>
+              <a:t>Traditional systems solve that, but they are usually </a:t>
+            </a:r>
+            <a:r>
+              <a:rPr lang="en-US" sz="1200" b="1" i="0" kern="1200" dirty="0">
+                <a:solidFill>
+                  <a:schemeClr val="tx1"/>
+                </a:solidFill>
+                <a:effectLst/>
+                <a:latin typeface="+mn-lt"/>
+                <a:ea typeface="+mn-ea"/>
+                <a:cs typeface="+mn-cs"/>
+              </a:rPr>
+              <a:t>expensive</a:t>
+            </a:r>
+            <a:r>
+              <a:rPr lang="en-US" sz="1200" b="0" i="0" kern="1200" dirty="0">
+                <a:solidFill>
+                  <a:schemeClr val="tx1"/>
+                </a:solidFill>
+                <a:effectLst/>
+                <a:latin typeface="+mn-lt"/>
+                <a:ea typeface="+mn-ea"/>
+                <a:cs typeface="+mn-cs"/>
+              </a:rPr>
+              <a:t> and </a:t>
+            </a:r>
+            <a:r>
+              <a:rPr lang="en-US" sz="1200" b="1" i="0" kern="1200" dirty="0">
+                <a:solidFill>
+                  <a:schemeClr val="tx1"/>
+                </a:solidFill>
+                <a:effectLst/>
+                <a:latin typeface="+mn-lt"/>
+                <a:ea typeface="+mn-ea"/>
+                <a:cs typeface="+mn-cs"/>
+              </a:rPr>
+              <a:t>lock organizations into proprietary hardware and software</a:t>
+            </a:r>
+            <a:r>
+              <a:rPr lang="en-US" sz="1200" b="0" i="0" kern="1200" dirty="0">
+                <a:solidFill>
+                  <a:schemeClr val="tx1"/>
+                </a:solidFill>
+                <a:effectLst/>
+                <a:latin typeface="+mn-lt"/>
+                <a:ea typeface="+mn-ea"/>
+                <a:cs typeface="+mn-cs"/>
+              </a:rPr>
+              <a:t>.</a:t>
+            </a:r>
+          </a:p>
+          <a:p>
+            <a:r>
+              <a:rPr lang="en-US" sz="1200" b="0" i="0" kern="1200" dirty="0">
+                <a:solidFill>
+                  <a:schemeClr val="tx1"/>
+                </a:solidFill>
+                <a:effectLst/>
+                <a:latin typeface="+mn-lt"/>
+                <a:ea typeface="+mn-ea"/>
+                <a:cs typeface="+mn-cs"/>
+              </a:rPr>
+              <a:t>This approach is a </a:t>
+            </a:r>
+            <a:r>
+              <a:rPr lang="en-US" sz="1200" b="1" i="0" kern="1200" dirty="0">
+                <a:solidFill>
+                  <a:schemeClr val="tx1"/>
+                </a:solidFill>
+                <a:effectLst/>
+                <a:latin typeface="+mn-lt"/>
+                <a:ea typeface="+mn-ea"/>
+                <a:cs typeface="+mn-cs"/>
+              </a:rPr>
+              <a:t>web-based dashboard</a:t>
+            </a:r>
+            <a:r>
+              <a:rPr lang="en-US" sz="1200" b="0" i="0" kern="1200" dirty="0">
+                <a:solidFill>
+                  <a:schemeClr val="tx1"/>
+                </a:solidFill>
+                <a:effectLst/>
+                <a:latin typeface="+mn-lt"/>
+                <a:ea typeface="+mn-ea"/>
+                <a:cs typeface="+mn-cs"/>
+              </a:rPr>
+              <a:t> that runs in </a:t>
+            </a:r>
+            <a:r>
+              <a:rPr lang="en-US" sz="1200" b="1" i="0" kern="1200" dirty="0">
+                <a:solidFill>
+                  <a:schemeClr val="tx1"/>
+                </a:solidFill>
+                <a:effectLst/>
+                <a:latin typeface="+mn-lt"/>
+                <a:ea typeface="+mn-ea"/>
+                <a:cs typeface="+mn-cs"/>
+              </a:rPr>
+              <a:t>any browser</a:t>
+            </a:r>
+            <a:r>
+              <a:rPr lang="en-US" sz="1200" b="0" i="0" kern="1200" dirty="0">
+                <a:solidFill>
+                  <a:schemeClr val="tx1"/>
+                </a:solidFill>
+                <a:effectLst/>
+                <a:latin typeface="+mn-lt"/>
+                <a:ea typeface="+mn-ea"/>
+                <a:cs typeface="+mn-cs"/>
+              </a:rPr>
+              <a:t>, built with a standard stack—ASP.NET Core, React, SQL Server, MQTT, and </a:t>
+            </a:r>
+            <a:r>
+              <a:rPr lang="en-US" sz="1200" b="0" i="0" kern="1200" dirty="0" err="1">
+                <a:solidFill>
+                  <a:schemeClr val="tx1"/>
+                </a:solidFill>
+                <a:effectLst/>
+                <a:latin typeface="+mn-lt"/>
+                <a:ea typeface="+mn-ea"/>
+                <a:cs typeface="+mn-cs"/>
+              </a:rPr>
+              <a:t>SignalR</a:t>
+            </a:r>
+            <a:r>
+              <a:rPr lang="en-US" sz="1200" b="0" i="0" kern="1200" dirty="0">
+                <a:solidFill>
+                  <a:schemeClr val="tx1"/>
+                </a:solidFill>
+                <a:effectLst/>
+                <a:latin typeface="+mn-lt"/>
+                <a:ea typeface="+mn-ea"/>
+                <a:cs typeface="+mn-cs"/>
+              </a:rPr>
+              <a:t>—and common IoT hardware such as Arduino, ESP32, and Raspberry Pi.</a:t>
+            </a:r>
+          </a:p>
+          <a:p>
+            <a:r>
+              <a:rPr lang="en-US" sz="1200" b="0" i="0" kern="1200" dirty="0">
+                <a:solidFill>
+                  <a:schemeClr val="tx1"/>
+                </a:solidFill>
+                <a:effectLst/>
+                <a:latin typeface="+mn-lt"/>
+                <a:ea typeface="+mn-ea"/>
+                <a:cs typeface="+mn-cs"/>
+              </a:rPr>
+              <a:t>The result is </a:t>
+            </a:r>
+            <a:r>
+              <a:rPr lang="en-US" sz="1200" b="1" i="0" kern="1200" dirty="0">
+                <a:solidFill>
+                  <a:schemeClr val="tx1"/>
+                </a:solidFill>
+                <a:effectLst/>
+                <a:latin typeface="+mn-lt"/>
+                <a:ea typeface="+mn-ea"/>
+                <a:cs typeface="+mn-cs"/>
+              </a:rPr>
+              <a:t>real-time visibility</a:t>
+            </a:r>
+            <a:r>
+              <a:rPr lang="en-US" sz="1200" b="0" i="0" kern="1200" dirty="0">
+                <a:solidFill>
+                  <a:schemeClr val="tx1"/>
+                </a:solidFill>
+                <a:effectLst/>
+                <a:latin typeface="+mn-lt"/>
+                <a:ea typeface="+mn-ea"/>
+                <a:cs typeface="+mn-cs"/>
+              </a:rPr>
+              <a:t>, </a:t>
+            </a:r>
+            <a:r>
+              <a:rPr lang="en-US" sz="1200" b="1" i="0" kern="1200" dirty="0">
+                <a:solidFill>
+                  <a:schemeClr val="tx1"/>
+                </a:solidFill>
+                <a:effectLst/>
+                <a:latin typeface="+mn-lt"/>
+                <a:ea typeface="+mn-ea"/>
+                <a:cs typeface="+mn-cs"/>
+              </a:rPr>
+              <a:t>historical storage in SQL Server</a:t>
+            </a:r>
+            <a:r>
+              <a:rPr lang="en-US" sz="1200" b="0" i="0" kern="1200" dirty="0">
+                <a:solidFill>
+                  <a:schemeClr val="tx1"/>
+                </a:solidFill>
+                <a:effectLst/>
+                <a:latin typeface="+mn-lt"/>
+                <a:ea typeface="+mn-ea"/>
+                <a:cs typeface="+mn-cs"/>
+              </a:rPr>
+              <a:t>, and a </a:t>
+            </a:r>
+            <a:r>
+              <a:rPr lang="en-US" sz="1200" b="1" i="0" kern="1200" dirty="0">
+                <a:solidFill>
+                  <a:schemeClr val="tx1"/>
+                </a:solidFill>
+                <a:effectLst/>
+                <a:latin typeface="+mn-lt"/>
+                <a:ea typeface="+mn-ea"/>
+                <a:cs typeface="+mn-cs"/>
+              </a:rPr>
+              <a:t>practical, cost-effective</a:t>
+            </a:r>
+            <a:r>
+              <a:rPr lang="en-US" sz="1200" b="0" i="0" kern="1200" dirty="0">
+                <a:solidFill>
+                  <a:schemeClr val="tx1"/>
+                </a:solidFill>
+                <a:effectLst/>
+                <a:latin typeface="+mn-lt"/>
+                <a:ea typeface="+mn-ea"/>
+                <a:cs typeface="+mn-cs"/>
+              </a:rPr>
+              <a:t> alternative to full SCADA for capstone-scale deployment.</a:t>
+            </a:r>
+          </a:p>
           <a:p>
             <a:endParaRPr lang="en-US" dirty="0"/>
           </a:p>
@@ -1310,6 +3744,286 @@
           <a:bodyPr/>
           <a:lstStyle/>
           <a:p>
+            <a:r>
+              <a:rPr lang="en-US" sz="1200" b="0" i="0" kern="1200" dirty="0">
+                <a:solidFill>
+                  <a:schemeClr val="tx1"/>
+                </a:solidFill>
+                <a:effectLst/>
+                <a:latin typeface="+mn-lt"/>
+                <a:ea typeface="+mn-ea"/>
+                <a:cs typeface="+mn-cs"/>
+              </a:rPr>
+              <a:t>These six capabilities define what the system does.</a:t>
+            </a:r>
+          </a:p>
+          <a:p>
+            <a:r>
+              <a:rPr lang="en-US" sz="1200" b="0" i="0" kern="1200" dirty="0">
+                <a:solidFill>
+                  <a:schemeClr val="tx1"/>
+                </a:solidFill>
+                <a:effectLst/>
+                <a:latin typeface="+mn-lt"/>
+                <a:ea typeface="+mn-ea"/>
+                <a:cs typeface="+mn-cs"/>
+              </a:rPr>
+              <a:t>First, </a:t>
+            </a:r>
+            <a:r>
+              <a:rPr lang="en-US" sz="1200" b="1" i="0" kern="1200" dirty="0">
+                <a:solidFill>
+                  <a:schemeClr val="tx1"/>
+                </a:solidFill>
+                <a:effectLst/>
+                <a:latin typeface="+mn-lt"/>
+                <a:ea typeface="+mn-ea"/>
+                <a:cs typeface="+mn-cs"/>
+              </a:rPr>
+              <a:t>device and sensor setup</a:t>
+            </a:r>
+            <a:r>
+              <a:rPr lang="en-US" sz="1200" b="0" i="0" kern="1200" dirty="0">
+                <a:solidFill>
+                  <a:schemeClr val="tx1"/>
+                </a:solidFill>
+                <a:effectLst/>
+                <a:latin typeface="+mn-lt"/>
+                <a:ea typeface="+mn-ea"/>
+                <a:cs typeface="+mn-cs"/>
+              </a:rPr>
+              <a:t>: register IoT devices and configure sensors and actuators in the application.</a:t>
+            </a:r>
+          </a:p>
+          <a:p>
+            <a:r>
+              <a:rPr lang="en-US" sz="1200" b="1" i="0" kern="1200" dirty="0">
+                <a:solidFill>
+                  <a:schemeClr val="tx1"/>
+                </a:solidFill>
+                <a:effectLst/>
+                <a:latin typeface="+mn-lt"/>
+                <a:ea typeface="+mn-ea"/>
+                <a:cs typeface="+mn-cs"/>
+              </a:rPr>
+              <a:t>Real-time monitoring</a:t>
+            </a:r>
+            <a:r>
+              <a:rPr lang="en-US" sz="1200" b="0" i="0" kern="1200" dirty="0">
+                <a:solidFill>
+                  <a:schemeClr val="tx1"/>
+                </a:solidFill>
+                <a:effectLst/>
+                <a:latin typeface="+mn-lt"/>
+                <a:ea typeface="+mn-ea"/>
+                <a:cs typeface="+mn-cs"/>
+              </a:rPr>
+              <a:t> delivers live readings and </a:t>
+            </a:r>
+            <a:r>
+              <a:rPr lang="en-US" sz="1200" b="1" i="0" kern="1200" dirty="0">
+                <a:solidFill>
+                  <a:schemeClr val="tx1"/>
+                </a:solidFill>
+                <a:effectLst/>
+                <a:latin typeface="+mn-lt"/>
+                <a:ea typeface="+mn-ea"/>
+                <a:cs typeface="+mn-cs"/>
+              </a:rPr>
+              <a:t>online/offline</a:t>
+            </a:r>
+            <a:r>
+              <a:rPr lang="en-US" sz="1200" b="0" i="0" kern="1200" dirty="0">
+                <a:solidFill>
+                  <a:schemeClr val="tx1"/>
+                </a:solidFill>
+                <a:effectLst/>
+                <a:latin typeface="+mn-lt"/>
+                <a:ea typeface="+mn-ea"/>
+                <a:cs typeface="+mn-cs"/>
+              </a:rPr>
+              <a:t> status based on device activity.</a:t>
+            </a:r>
+          </a:p>
+          <a:p>
+            <a:r>
+              <a:rPr lang="en-US" sz="1200" b="1" i="0" kern="1200" dirty="0">
+                <a:solidFill>
+                  <a:schemeClr val="tx1"/>
+                </a:solidFill>
+                <a:effectLst/>
+                <a:latin typeface="+mn-lt"/>
+                <a:ea typeface="+mn-ea"/>
+                <a:cs typeface="+mn-cs"/>
+              </a:rPr>
+              <a:t>Dashboards and charts</a:t>
+            </a:r>
+            <a:r>
+              <a:rPr lang="en-US" sz="1200" b="0" i="0" kern="1200" dirty="0">
+                <a:solidFill>
+                  <a:schemeClr val="tx1"/>
+                </a:solidFill>
+                <a:effectLst/>
+                <a:latin typeface="+mn-lt"/>
+                <a:ea typeface="+mn-ea"/>
+                <a:cs typeface="+mn-cs"/>
+              </a:rPr>
+              <a:t> show line trends, analog gauges, and discrete on/off indicators.</a:t>
+            </a:r>
+          </a:p>
+          <a:p>
+            <a:r>
+              <a:rPr lang="en-US" sz="1200" b="1" i="0" kern="1200" dirty="0">
+                <a:solidFill>
+                  <a:schemeClr val="tx1"/>
+                </a:solidFill>
+                <a:effectLst/>
+                <a:latin typeface="+mn-lt"/>
+                <a:ea typeface="+mn-ea"/>
+                <a:cs typeface="+mn-cs"/>
+              </a:rPr>
+              <a:t>Live and history windows</a:t>
+            </a:r>
+            <a:r>
+              <a:rPr lang="en-US" sz="1200" b="0" i="0" kern="1200" dirty="0">
+                <a:solidFill>
+                  <a:schemeClr val="tx1"/>
+                </a:solidFill>
+                <a:effectLst/>
+                <a:latin typeface="+mn-lt"/>
+                <a:ea typeface="+mn-ea"/>
+                <a:cs typeface="+mn-cs"/>
+              </a:rPr>
+              <a:t> support rolling live charts and history at ten minutes, one hour, twenty-four hours, or a custom range.</a:t>
+            </a:r>
+          </a:p>
+          <a:p>
+            <a:r>
+              <a:rPr lang="en-US" sz="1200" b="1" i="0" kern="1200" dirty="0">
+                <a:solidFill>
+                  <a:schemeClr val="tx1"/>
+                </a:solidFill>
+                <a:effectLst/>
+                <a:latin typeface="+mn-lt"/>
+                <a:ea typeface="+mn-ea"/>
+                <a:cs typeface="+mn-cs"/>
+              </a:rPr>
+              <a:t>Threshold alerting</a:t>
+            </a:r>
+            <a:r>
+              <a:rPr lang="en-US" sz="1200" b="0" i="0" kern="1200" dirty="0">
+                <a:solidFill>
+                  <a:schemeClr val="tx1"/>
+                </a:solidFill>
+                <a:effectLst/>
+                <a:latin typeface="+mn-lt"/>
+                <a:ea typeface="+mn-ea"/>
+                <a:cs typeface="+mn-cs"/>
+              </a:rPr>
+              <a:t> provides rule-based notifications when limits are exceeded.</a:t>
+            </a:r>
+          </a:p>
+          <a:p>
+            <a:r>
+              <a:rPr lang="en-US" sz="1200" b="0" i="0" kern="1200" dirty="0">
+                <a:solidFill>
+                  <a:schemeClr val="tx1"/>
+                </a:solidFill>
+                <a:effectLst/>
+                <a:latin typeface="+mn-lt"/>
+                <a:ea typeface="+mn-ea"/>
+                <a:cs typeface="+mn-cs"/>
+              </a:rPr>
+              <a:t>Finally, </a:t>
+            </a:r>
+            <a:r>
+              <a:rPr lang="en-US" sz="1200" b="1" i="0" kern="1200" dirty="0">
+                <a:solidFill>
+                  <a:schemeClr val="tx1"/>
+                </a:solidFill>
+                <a:effectLst/>
+                <a:latin typeface="+mn-lt"/>
+                <a:ea typeface="+mn-ea"/>
+                <a:cs typeface="+mn-cs"/>
+              </a:rPr>
+              <a:t>actuator commands</a:t>
+            </a:r>
+            <a:r>
+              <a:rPr lang="en-US" sz="1200" b="0" i="0" kern="1200" dirty="0">
+                <a:solidFill>
+                  <a:schemeClr val="tx1"/>
+                </a:solidFill>
+                <a:effectLst/>
+                <a:latin typeface="+mn-lt"/>
+                <a:ea typeface="+mn-ea"/>
+                <a:cs typeface="+mn-cs"/>
+              </a:rPr>
+              <a:t> allow remote control—for example an LED—with </a:t>
+            </a:r>
+            <a:r>
+              <a:rPr lang="en-US" sz="1200" b="1" i="0" kern="1200" dirty="0">
+                <a:solidFill>
+                  <a:schemeClr val="tx1"/>
+                </a:solidFill>
+                <a:effectLst/>
+                <a:latin typeface="+mn-lt"/>
+                <a:ea typeface="+mn-ea"/>
+                <a:cs typeface="+mn-cs"/>
+              </a:rPr>
+              <a:t>command history</a:t>
+            </a:r>
+            <a:r>
+              <a:rPr lang="en-US" sz="1200" b="0" i="0" kern="1200" dirty="0">
+                <a:solidFill>
+                  <a:schemeClr val="tx1"/>
+                </a:solidFill>
+                <a:effectLst/>
+                <a:latin typeface="+mn-lt"/>
+                <a:ea typeface="+mn-ea"/>
+                <a:cs typeface="+mn-cs"/>
+              </a:rPr>
+              <a:t> for traceability.</a:t>
+            </a:r>
+          </a:p>
+          <a:p>
+            <a:r>
+              <a:rPr lang="en-US" sz="1200" b="0" i="0" kern="1200" dirty="0">
+                <a:solidFill>
+                  <a:schemeClr val="tx1"/>
+                </a:solidFill>
+                <a:effectLst/>
+                <a:latin typeface="+mn-lt"/>
+                <a:ea typeface="+mn-ea"/>
+                <a:cs typeface="+mn-cs"/>
+              </a:rPr>
+              <a:t>Together, the system supports </a:t>
+            </a:r>
+            <a:r>
+              <a:rPr lang="en-US" sz="1200" b="1" i="0" kern="1200" dirty="0">
+                <a:solidFill>
+                  <a:schemeClr val="tx1"/>
+                </a:solidFill>
+                <a:effectLst/>
+                <a:latin typeface="+mn-lt"/>
+                <a:ea typeface="+mn-ea"/>
+                <a:cs typeface="+mn-cs"/>
+              </a:rPr>
+              <a:t>configure, observe, and respond</a:t>
+            </a:r>
+            <a:r>
+              <a:rPr lang="en-US" sz="1200" b="0" i="0" kern="1200" dirty="0">
+                <a:solidFill>
+                  <a:schemeClr val="tx1"/>
+                </a:solidFill>
+                <a:effectLst/>
+                <a:latin typeface="+mn-lt"/>
+                <a:ea typeface="+mn-ea"/>
+                <a:cs typeface="+mn-cs"/>
+              </a:rPr>
+              <a:t> from one web application.</a:t>
+            </a:r>
+          </a:p>
+          <a:p>
             <a:endParaRPr lang="en-US" dirty="0"/>
           </a:p>
         </p:txBody>
@@ -1321,7 +4035,7 @@
             <a:spLocks noGrp="1"/>
           </p:cNvSpPr>
           <p:nvPr>
-            <p:ph type="sldNum" sz="quarter" idx="10"/>
+            <p:ph type="sldNum" sz="quarter" idx="5"/>
           </p:nvPr>
         </p:nvSpPr>
         <p:spPr/>
@@ -1329,9 +4043,9 @@
           <a:bodyPr/>
           <a:lstStyle/>
           <a:p>
-            <a:fld id="{F7021451-1387-4CA6-816F-3879F97B5CBC}" type="slidenum">
-              <a:rPr lang="en-US"/>
-              <a:t>6</a:t>
+            <a:fld id="{DF1C98F2-B9F0-4148-8C0F-A19261494B1A}" type="slidenum">
+              <a:rPr lang="en-US" smtClean="0"/>
+              <a:t>4</a:t>
             </a:fld>
             <a:endParaRPr lang="en-US"/>
           </a:p>
@@ -1340,7 +4054,7 @@
     </p:spTree>
     <p:extLst>
       <p:ext uri="{BB962C8B-B14F-4D97-AF65-F5344CB8AC3E}">
-        <p14:creationId xmlns:p14="http://schemas.microsoft.com/office/powerpoint/2010/main" val="1024086991"/>
+        <p14:creationId xmlns:p14="http://schemas.microsoft.com/office/powerpoint/2010/main" val="4054587751"/>
       </p:ext>
     </p:extLst>
   </p:cSld>
@@ -1394,6 +4108,358 @@
           <a:bodyPr/>
           <a:lstStyle/>
           <a:p>
+            <a:r>
+              <a:rPr lang="en-US" sz="1200" b="0" i="0" kern="1200" dirty="0">
+                <a:solidFill>
+                  <a:schemeClr val="tx1"/>
+                </a:solidFill>
+                <a:effectLst/>
+                <a:latin typeface="+mn-lt"/>
+                <a:ea typeface="+mn-ea"/>
+                <a:cs typeface="+mn-cs"/>
+              </a:rPr>
+              <a:t>This slide shows how those capabilities are built.</a:t>
+            </a:r>
+          </a:p>
+          <a:p>
+            <a:r>
+              <a:rPr lang="en-US" sz="1200" b="0" i="0" kern="1200" dirty="0">
+                <a:solidFill>
+                  <a:schemeClr val="tx1"/>
+                </a:solidFill>
+                <a:effectLst/>
+                <a:latin typeface="+mn-lt"/>
+                <a:ea typeface="+mn-ea"/>
+                <a:cs typeface="+mn-cs"/>
+              </a:rPr>
+              <a:t>Data flows from the </a:t>
+            </a:r>
+            <a:r>
+              <a:rPr lang="en-US" sz="1200" b="1" i="0" kern="1200" dirty="0">
+                <a:solidFill>
+                  <a:schemeClr val="tx1"/>
+                </a:solidFill>
+                <a:effectLst/>
+                <a:latin typeface="+mn-lt"/>
+                <a:ea typeface="+mn-ea"/>
+                <a:cs typeface="+mn-cs"/>
+              </a:rPr>
+              <a:t>device through MQTT to the API, into SQL Server, and to the React UI via </a:t>
+            </a:r>
+            <a:r>
+              <a:rPr lang="en-US" sz="1200" b="1" i="0" kern="1200" dirty="0" err="1">
+                <a:solidFill>
+                  <a:schemeClr val="tx1"/>
+                </a:solidFill>
+                <a:effectLst/>
+                <a:latin typeface="+mn-lt"/>
+                <a:ea typeface="+mn-ea"/>
+                <a:cs typeface="+mn-cs"/>
+              </a:rPr>
+              <a:t>SignalR</a:t>
+            </a:r>
+            <a:r>
+              <a:rPr lang="en-US" sz="1200" b="0" i="0" kern="1200" dirty="0">
+                <a:solidFill>
+                  <a:schemeClr val="tx1"/>
+                </a:solidFill>
+                <a:effectLst/>
+                <a:latin typeface="+mn-lt"/>
+                <a:ea typeface="+mn-ea"/>
+                <a:cs typeface="+mn-cs"/>
+              </a:rPr>
+              <a:t>.</a:t>
+            </a:r>
+          </a:p>
+          <a:p>
+            <a:r>
+              <a:rPr lang="en-US" sz="1200" b="0" i="0" kern="1200" dirty="0">
+                <a:solidFill>
+                  <a:schemeClr val="tx1"/>
+                </a:solidFill>
+                <a:effectLst/>
+                <a:latin typeface="+mn-lt"/>
+                <a:ea typeface="+mn-ea"/>
+                <a:cs typeface="+mn-cs"/>
+              </a:rPr>
+              <a:t>The </a:t>
+            </a:r>
+            <a:r>
+              <a:rPr lang="en-US" sz="1200" b="1" i="0" kern="1200" dirty="0">
+                <a:solidFill>
+                  <a:schemeClr val="tx1"/>
+                </a:solidFill>
+                <a:effectLst/>
+                <a:latin typeface="+mn-lt"/>
+                <a:ea typeface="+mn-ea"/>
+                <a:cs typeface="+mn-cs"/>
+              </a:rPr>
+              <a:t>backend</a:t>
+            </a:r>
+            <a:r>
+              <a:rPr lang="en-US" sz="1200" b="0" i="0" kern="1200" dirty="0">
+                <a:solidFill>
+                  <a:schemeClr val="tx1"/>
+                </a:solidFill>
+                <a:effectLst/>
+                <a:latin typeface="+mn-lt"/>
+                <a:ea typeface="+mn-ea"/>
+                <a:cs typeface="+mn-cs"/>
+              </a:rPr>
+              <a:t> is </a:t>
+            </a:r>
+            <a:r>
+              <a:rPr lang="en-US" sz="1200" b="1" i="0" kern="1200" dirty="0">
+                <a:solidFill>
+                  <a:schemeClr val="tx1"/>
+                </a:solidFill>
+                <a:effectLst/>
+                <a:latin typeface="+mn-lt"/>
+                <a:ea typeface="+mn-ea"/>
+                <a:cs typeface="+mn-cs"/>
+              </a:rPr>
+              <a:t>C# and ASP.NET Core 8</a:t>
+            </a:r>
+            <a:r>
+              <a:rPr lang="en-US" sz="1200" b="0" i="0" kern="1200" dirty="0">
+                <a:solidFill>
+                  <a:schemeClr val="tx1"/>
+                </a:solidFill>
+                <a:effectLst/>
+                <a:latin typeface="+mn-lt"/>
+                <a:ea typeface="+mn-ea"/>
+                <a:cs typeface="+mn-cs"/>
+              </a:rPr>
+              <a:t>, providing REST APIs, MQTT ingest, and JWT authentication.</a:t>
+            </a:r>
+          </a:p>
+          <a:p>
+            <a:r>
+              <a:rPr lang="en-US" sz="1200" b="1" i="0" kern="1200" dirty="0">
+                <a:solidFill>
+                  <a:schemeClr val="tx1"/>
+                </a:solidFill>
+                <a:effectLst/>
+                <a:latin typeface="+mn-lt"/>
+                <a:ea typeface="+mn-ea"/>
+                <a:cs typeface="+mn-cs"/>
+              </a:rPr>
+              <a:t>IoT messaging</a:t>
+            </a:r>
+            <a:r>
+              <a:rPr lang="en-US" sz="1200" b="0" i="0" kern="1200" dirty="0">
+                <a:solidFill>
+                  <a:schemeClr val="tx1"/>
+                </a:solidFill>
+                <a:effectLst/>
+                <a:latin typeface="+mn-lt"/>
+                <a:ea typeface="+mn-ea"/>
+                <a:cs typeface="+mn-cs"/>
+              </a:rPr>
+              <a:t> uses </a:t>
+            </a:r>
+            <a:r>
+              <a:rPr lang="en-US" sz="1200" b="1" i="0" kern="1200" dirty="0">
+                <a:solidFill>
+                  <a:schemeClr val="tx1"/>
+                </a:solidFill>
+                <a:effectLst/>
+                <a:latin typeface="+mn-lt"/>
+                <a:ea typeface="+mn-ea"/>
+                <a:cs typeface="+mn-cs"/>
+              </a:rPr>
+              <a:t>MQTT</a:t>
+            </a:r>
+            <a:r>
+              <a:rPr lang="en-US" sz="1200" b="0" i="0" kern="1200" dirty="0">
+                <a:solidFill>
+                  <a:schemeClr val="tx1"/>
+                </a:solidFill>
+                <a:effectLst/>
+                <a:latin typeface="+mn-lt"/>
+                <a:ea typeface="+mn-ea"/>
+                <a:cs typeface="+mn-cs"/>
+              </a:rPr>
+              <a:t> with a </a:t>
+            </a:r>
+            <a:r>
+              <a:rPr lang="en-US" sz="1200" b="1" i="0" kern="1200" dirty="0" err="1">
+                <a:solidFill>
+                  <a:schemeClr val="tx1"/>
+                </a:solidFill>
+                <a:effectLst/>
+                <a:latin typeface="+mn-lt"/>
+                <a:ea typeface="+mn-ea"/>
+                <a:cs typeface="+mn-cs"/>
+              </a:rPr>
+              <a:t>Mosquitto</a:t>
+            </a:r>
+            <a:r>
+              <a:rPr lang="en-US" sz="1200" b="0" i="0" kern="1200" dirty="0">
+                <a:solidFill>
+                  <a:schemeClr val="tx1"/>
+                </a:solidFill>
+                <a:effectLst/>
+                <a:latin typeface="+mn-lt"/>
+                <a:ea typeface="+mn-ea"/>
+                <a:cs typeface="+mn-cs"/>
+              </a:rPr>
+              <a:t> broker; commands to actuators use the same path in reverse.</a:t>
+            </a:r>
+          </a:p>
+          <a:p>
+            <a:r>
+              <a:rPr lang="en-US" sz="1200" b="1" i="0" kern="1200" dirty="0" err="1">
+                <a:solidFill>
+                  <a:schemeClr val="tx1"/>
+                </a:solidFill>
+                <a:effectLst/>
+                <a:latin typeface="+mn-lt"/>
+                <a:ea typeface="+mn-ea"/>
+                <a:cs typeface="+mn-cs"/>
+              </a:rPr>
+              <a:t>SignalR</a:t>
+            </a:r>
+            <a:r>
+              <a:rPr lang="en-US" sz="1200" b="0" i="0" kern="1200" dirty="0">
+                <a:solidFill>
+                  <a:schemeClr val="tx1"/>
+                </a:solidFill>
+                <a:effectLst/>
+                <a:latin typeface="+mn-lt"/>
+                <a:ea typeface="+mn-ea"/>
+                <a:cs typeface="+mn-cs"/>
+              </a:rPr>
+              <a:t> handles server-to-client live updates for readings and alerts.</a:t>
+            </a:r>
+          </a:p>
+          <a:p>
+            <a:r>
+              <a:rPr lang="en-US" sz="1200" b="0" i="0" kern="1200" dirty="0">
+                <a:solidFill>
+                  <a:schemeClr val="tx1"/>
+                </a:solidFill>
+                <a:effectLst/>
+                <a:latin typeface="+mn-lt"/>
+                <a:ea typeface="+mn-ea"/>
+                <a:cs typeface="+mn-cs"/>
+              </a:rPr>
+              <a:t>The </a:t>
+            </a:r>
+            <a:r>
+              <a:rPr lang="en-US" sz="1200" b="1" i="0" kern="1200" dirty="0">
+                <a:solidFill>
+                  <a:schemeClr val="tx1"/>
+                </a:solidFill>
+                <a:effectLst/>
+                <a:latin typeface="+mn-lt"/>
+                <a:ea typeface="+mn-ea"/>
+                <a:cs typeface="+mn-cs"/>
+              </a:rPr>
+              <a:t>frontend</a:t>
+            </a:r>
+            <a:r>
+              <a:rPr lang="en-US" sz="1200" b="0" i="0" kern="1200" dirty="0">
+                <a:solidFill>
+                  <a:schemeClr val="tx1"/>
+                </a:solidFill>
+                <a:effectLst/>
+                <a:latin typeface="+mn-lt"/>
+                <a:ea typeface="+mn-ea"/>
+                <a:cs typeface="+mn-cs"/>
+              </a:rPr>
+              <a:t> is </a:t>
+            </a:r>
+            <a:r>
+              <a:rPr lang="en-US" sz="1200" b="1" i="0" kern="1200" dirty="0">
+                <a:solidFill>
+                  <a:schemeClr val="tx1"/>
+                </a:solidFill>
+                <a:effectLst/>
+                <a:latin typeface="+mn-lt"/>
+                <a:ea typeface="+mn-ea"/>
+                <a:cs typeface="+mn-cs"/>
+              </a:rPr>
+              <a:t>React with TypeScript</a:t>
+            </a:r>
+            <a:r>
+              <a:rPr lang="en-US" sz="1200" b="0" i="0" kern="1200" dirty="0">
+                <a:solidFill>
+                  <a:schemeClr val="tx1"/>
+                </a:solidFill>
+                <a:effectLst/>
+                <a:latin typeface="+mn-lt"/>
+                <a:ea typeface="+mn-ea"/>
+                <a:cs typeface="+mn-cs"/>
+              </a:rPr>
+              <a:t> and Material-UI.</a:t>
+            </a:r>
+          </a:p>
+          <a:p>
+            <a:r>
+              <a:rPr lang="en-US" sz="1200" b="1" i="0" kern="1200" dirty="0">
+                <a:solidFill>
+                  <a:schemeClr val="tx1"/>
+                </a:solidFill>
+                <a:effectLst/>
+                <a:latin typeface="+mn-lt"/>
+                <a:ea typeface="+mn-ea"/>
+                <a:cs typeface="+mn-cs"/>
+              </a:rPr>
+              <a:t>SQL Server with Entity Framework Core</a:t>
+            </a:r>
+            <a:r>
+              <a:rPr lang="en-US" sz="1200" b="0" i="0" kern="1200" dirty="0">
+                <a:solidFill>
+                  <a:schemeClr val="tx1"/>
+                </a:solidFill>
+                <a:effectLst/>
+                <a:latin typeface="+mn-lt"/>
+                <a:ea typeface="+mn-ea"/>
+                <a:cs typeface="+mn-cs"/>
+              </a:rPr>
+              <a:t> stores configuration, readings, alerts, and commands.</a:t>
+            </a:r>
+          </a:p>
+          <a:p>
+            <a:r>
+              <a:rPr lang="en-US" sz="1200" b="0" i="0" kern="1200" dirty="0">
+                <a:solidFill>
+                  <a:schemeClr val="tx1"/>
+                </a:solidFill>
+                <a:effectLst/>
+                <a:latin typeface="+mn-lt"/>
+                <a:ea typeface="+mn-ea"/>
+                <a:cs typeface="+mn-cs"/>
+              </a:rPr>
+              <a:t>For delivery we use </a:t>
+            </a:r>
+            <a:r>
+              <a:rPr lang="en-US" sz="1200" b="1" i="0" kern="1200" dirty="0">
+                <a:solidFill>
+                  <a:schemeClr val="tx1"/>
+                </a:solidFill>
+                <a:effectLst/>
+                <a:latin typeface="+mn-lt"/>
+                <a:ea typeface="+mn-ea"/>
+                <a:cs typeface="+mn-cs"/>
+              </a:rPr>
+              <a:t>Git, GitHub, and Azure</a:t>
+            </a:r>
+            <a:r>
+              <a:rPr lang="en-US" sz="1200" b="0" i="0" kern="1200" dirty="0">
+                <a:solidFill>
+                  <a:schemeClr val="tx1"/>
+                </a:solidFill>
+                <a:effectLst/>
+                <a:latin typeface="+mn-lt"/>
+                <a:ea typeface="+mn-ea"/>
+                <a:cs typeface="+mn-cs"/>
+              </a:rPr>
+              <a:t>—the API on Azure Web App and the SPA on Static Web Apps.</a:t>
+            </a:r>
+          </a:p>
+          <a:p>
             <a:endParaRPr lang="en-US" dirty="0"/>
           </a:p>
         </p:txBody>
@@ -1405,7 +4471,7 @@
             <a:spLocks noGrp="1"/>
           </p:cNvSpPr>
           <p:nvPr>
-            <p:ph type="sldNum" sz="quarter" idx="10"/>
+            <p:ph type="sldNum" sz="quarter" idx="5"/>
           </p:nvPr>
         </p:nvSpPr>
         <p:spPr/>
@@ -1413,9 +4479,9 @@
           <a:bodyPr/>
           <a:lstStyle/>
           <a:p>
-            <a:fld id="{F7021451-1387-4CA6-816F-3879F97B5CBC}" type="slidenum">
-              <a:rPr lang="en-US"/>
-              <a:t>7</a:t>
+            <a:fld id="{DF1C98F2-B9F0-4148-8C0F-A19261494B1A}" type="slidenum">
+              <a:rPr lang="en-US" smtClean="0"/>
+              <a:t>5</a:t>
             </a:fld>
             <a:endParaRPr lang="en-US"/>
           </a:p>
@@ -1424,7 +4490,7 @@
     </p:spTree>
     <p:extLst>
       <p:ext uri="{BB962C8B-B14F-4D97-AF65-F5344CB8AC3E}">
-        <p14:creationId xmlns:p14="http://schemas.microsoft.com/office/powerpoint/2010/main" val="1024086991"/>
+        <p14:creationId xmlns:p14="http://schemas.microsoft.com/office/powerpoint/2010/main" val="2975276955"/>
       </p:ext>
     </p:extLst>
   </p:cSld>
@@ -1478,6 +4544,450 @@
           <a:bodyPr/>
           <a:lstStyle/>
           <a:p>
+            <a:r>
+              <a:rPr lang="en-US" sz="1200" b="0" i="0" kern="1200" dirty="0">
+                <a:solidFill>
+                  <a:schemeClr val="tx1"/>
+                </a:solidFill>
+                <a:effectLst/>
+                <a:latin typeface="+mn-lt"/>
+                <a:ea typeface="+mn-ea"/>
+                <a:cs typeface="+mn-cs"/>
+              </a:rPr>
+              <a:t>The architecture separates concerns so each layer has a clear role.</a:t>
+            </a:r>
+          </a:p>
+          <a:p>
+            <a:r>
+              <a:rPr lang="en-US" sz="1200" b="1" i="0" kern="1200" dirty="0">
+                <a:solidFill>
+                  <a:schemeClr val="tx1"/>
+                </a:solidFill>
+                <a:effectLst/>
+                <a:latin typeface="+mn-lt"/>
+                <a:ea typeface="+mn-ea"/>
+                <a:cs typeface="+mn-cs"/>
+              </a:rPr>
+              <a:t>IoT devices</a:t>
+            </a:r>
+            <a:r>
+              <a:rPr lang="en-US" sz="1200" b="0" i="0" kern="1200" dirty="0">
+                <a:solidFill>
+                  <a:schemeClr val="tx1"/>
+                </a:solidFill>
+                <a:effectLst/>
+                <a:latin typeface="+mn-lt"/>
+                <a:ea typeface="+mn-ea"/>
+                <a:cs typeface="+mn-cs"/>
+              </a:rPr>
+              <a:t> publish to an </a:t>
+            </a:r>
+            <a:r>
+              <a:rPr lang="en-US" sz="1200" b="1" i="0" kern="1200" dirty="0">
+                <a:solidFill>
+                  <a:schemeClr val="tx1"/>
+                </a:solidFill>
+                <a:effectLst/>
+                <a:latin typeface="+mn-lt"/>
+                <a:ea typeface="+mn-ea"/>
+                <a:cs typeface="+mn-cs"/>
+              </a:rPr>
+              <a:t>MQTT broker</a:t>
+            </a:r>
+            <a:r>
+              <a:rPr lang="en-US" sz="1200" b="0" i="0" kern="1200" dirty="0">
+                <a:solidFill>
+                  <a:schemeClr val="tx1"/>
+                </a:solidFill>
+                <a:effectLst/>
+                <a:latin typeface="+mn-lt"/>
+                <a:ea typeface="+mn-ea"/>
+                <a:cs typeface="+mn-cs"/>
+              </a:rPr>
+              <a:t>. The backend </a:t>
+            </a:r>
+            <a:r>
+              <a:rPr lang="en-US" sz="1200" b="1" i="0" kern="1200" dirty="0" err="1">
+                <a:solidFill>
+                  <a:schemeClr val="tx1"/>
+                </a:solidFill>
+                <a:effectLst/>
+                <a:latin typeface="+mn-lt"/>
+                <a:ea typeface="+mn-ea"/>
+                <a:cs typeface="+mn-cs"/>
+              </a:rPr>
+              <a:t>MqttService</a:t>
+            </a:r>
+            <a:r>
+              <a:rPr lang="en-US" sz="1200" b="0" i="0" kern="1200" dirty="0">
+                <a:solidFill>
+                  <a:schemeClr val="tx1"/>
+                </a:solidFill>
+                <a:effectLst/>
+                <a:latin typeface="+mn-lt"/>
+                <a:ea typeface="+mn-ea"/>
+                <a:cs typeface="+mn-cs"/>
+              </a:rPr>
+              <a:t> subscribes, parses JSON, and passes data to application services.</a:t>
+            </a:r>
+          </a:p>
+          <a:p>
+            <a:r>
+              <a:rPr lang="en-US" sz="1200" b="0" i="0" kern="1200" dirty="0">
+                <a:solidFill>
+                  <a:schemeClr val="tx1"/>
+                </a:solidFill>
+                <a:effectLst/>
+                <a:latin typeface="+mn-lt"/>
+                <a:ea typeface="+mn-ea"/>
+                <a:cs typeface="+mn-cs"/>
+              </a:rPr>
+              <a:t>In the </a:t>
+            </a:r>
+            <a:r>
+              <a:rPr lang="en-US" sz="1200" b="1" i="0" kern="1200" dirty="0">
+                <a:solidFill>
+                  <a:schemeClr val="tx1"/>
+                </a:solidFill>
+                <a:effectLst/>
+                <a:latin typeface="+mn-lt"/>
+                <a:ea typeface="+mn-ea"/>
+                <a:cs typeface="+mn-cs"/>
+              </a:rPr>
+              <a:t>backend</a:t>
+            </a:r>
+            <a:r>
+              <a:rPr lang="en-US" sz="1200" b="0" i="0" kern="1200" dirty="0">
+                <a:solidFill>
+                  <a:schemeClr val="tx1"/>
+                </a:solidFill>
+                <a:effectLst/>
+                <a:latin typeface="+mn-lt"/>
+                <a:ea typeface="+mn-ea"/>
+                <a:cs typeface="+mn-cs"/>
+              </a:rPr>
+              <a:t>, REST </a:t>
+            </a:r>
+            <a:r>
+              <a:rPr lang="en-US" sz="1200" b="1" i="0" kern="1200" dirty="0">
+                <a:solidFill>
+                  <a:schemeClr val="tx1"/>
+                </a:solidFill>
+                <a:effectLst/>
+                <a:latin typeface="+mn-lt"/>
+                <a:ea typeface="+mn-ea"/>
+                <a:cs typeface="+mn-cs"/>
+              </a:rPr>
+              <a:t>controllers</a:t>
+            </a:r>
+            <a:r>
+              <a:rPr lang="en-US" sz="1200" b="0" i="0" kern="1200" dirty="0">
+                <a:solidFill>
+                  <a:schemeClr val="tx1"/>
+                </a:solidFill>
+                <a:effectLst/>
+                <a:latin typeface="+mn-lt"/>
+                <a:ea typeface="+mn-ea"/>
+                <a:cs typeface="+mn-cs"/>
+              </a:rPr>
+              <a:t> call </a:t>
+            </a:r>
+            <a:r>
+              <a:rPr lang="en-US" sz="1200" b="1" i="0" kern="1200" dirty="0">
+                <a:solidFill>
+                  <a:schemeClr val="tx1"/>
+                </a:solidFill>
+                <a:effectLst/>
+                <a:latin typeface="+mn-lt"/>
+                <a:ea typeface="+mn-ea"/>
+                <a:cs typeface="+mn-cs"/>
+              </a:rPr>
+              <a:t>services</a:t>
+            </a:r>
+            <a:r>
+              <a:rPr lang="en-US" sz="1200" b="0" i="0" kern="1200" dirty="0">
+                <a:solidFill>
+                  <a:schemeClr val="tx1"/>
+                </a:solidFill>
+                <a:effectLst/>
+                <a:latin typeface="+mn-lt"/>
+                <a:ea typeface="+mn-ea"/>
+                <a:cs typeface="+mn-cs"/>
+              </a:rPr>
+              <a:t> and </a:t>
+            </a:r>
+            <a:r>
+              <a:rPr lang="en-US" sz="1200" b="1" i="0" kern="1200" dirty="0">
+                <a:solidFill>
+                  <a:schemeClr val="tx1"/>
+                </a:solidFill>
+                <a:effectLst/>
+                <a:latin typeface="+mn-lt"/>
+                <a:ea typeface="+mn-ea"/>
+                <a:cs typeface="+mn-cs"/>
+              </a:rPr>
+              <a:t>repositories</a:t>
+            </a:r>
+            <a:r>
+              <a:rPr lang="en-US" sz="1200" b="0" i="0" kern="1200" dirty="0">
+                <a:solidFill>
+                  <a:schemeClr val="tx1"/>
+                </a:solidFill>
+                <a:effectLst/>
+                <a:latin typeface="+mn-lt"/>
+                <a:ea typeface="+mn-ea"/>
+                <a:cs typeface="+mn-cs"/>
+              </a:rPr>
+              <a:t>. The </a:t>
+            </a:r>
+            <a:r>
+              <a:rPr lang="en-US" sz="1200" b="1" i="0" kern="1200" dirty="0" err="1">
+                <a:solidFill>
+                  <a:schemeClr val="tx1"/>
+                </a:solidFill>
+                <a:effectLst/>
+                <a:latin typeface="+mn-lt"/>
+                <a:ea typeface="+mn-ea"/>
+                <a:cs typeface="+mn-cs"/>
+              </a:rPr>
+              <a:t>MonitoringHub</a:t>
+            </a:r>
+            <a:r>
+              <a:rPr lang="en-US" sz="1200" b="0" i="0" kern="1200" dirty="0">
+                <a:solidFill>
+                  <a:schemeClr val="tx1"/>
+                </a:solidFill>
+                <a:effectLst/>
+                <a:latin typeface="+mn-lt"/>
+                <a:ea typeface="+mn-ea"/>
+                <a:cs typeface="+mn-cs"/>
+              </a:rPr>
+              <a:t> and </a:t>
+            </a:r>
+            <a:r>
+              <a:rPr lang="en-US" sz="1200" b="1" i="0" kern="1200" dirty="0" err="1">
+                <a:solidFill>
+                  <a:schemeClr val="tx1"/>
+                </a:solidFill>
+                <a:effectLst/>
+                <a:latin typeface="+mn-lt"/>
+                <a:ea typeface="+mn-ea"/>
+                <a:cs typeface="+mn-cs"/>
+              </a:rPr>
+              <a:t>SignalR</a:t>
+            </a:r>
+            <a:r>
+              <a:rPr lang="en-US" sz="1200" b="1" i="0" kern="1200" dirty="0">
+                <a:solidFill>
+                  <a:schemeClr val="tx1"/>
+                </a:solidFill>
+                <a:effectLst/>
+                <a:latin typeface="+mn-lt"/>
+                <a:ea typeface="+mn-ea"/>
+                <a:cs typeface="+mn-cs"/>
+              </a:rPr>
+              <a:t> notification service</a:t>
+            </a:r>
+            <a:r>
+              <a:rPr lang="en-US" sz="1200" b="0" i="0" kern="1200" dirty="0">
+                <a:solidFill>
+                  <a:schemeClr val="tx1"/>
+                </a:solidFill>
+                <a:effectLst/>
+                <a:latin typeface="+mn-lt"/>
+                <a:ea typeface="+mn-ea"/>
+                <a:cs typeface="+mn-cs"/>
+              </a:rPr>
+              <a:t> push events to clients </a:t>
+            </a:r>
+            <a:r>
+              <a:rPr lang="en-US" sz="1200" b="1" i="0" kern="1200" dirty="0">
+                <a:solidFill>
+                  <a:schemeClr val="tx1"/>
+                </a:solidFill>
+                <a:effectLst/>
+                <a:latin typeface="+mn-lt"/>
+                <a:ea typeface="+mn-ea"/>
+                <a:cs typeface="+mn-cs"/>
+              </a:rPr>
+              <a:t>after</a:t>
+            </a:r>
+            <a:r>
+              <a:rPr lang="en-US" sz="1200" b="0" i="0" kern="1200" dirty="0">
+                <a:solidFill>
+                  <a:schemeClr val="tx1"/>
+                </a:solidFill>
+                <a:effectLst/>
+                <a:latin typeface="+mn-lt"/>
+                <a:ea typeface="+mn-ea"/>
+                <a:cs typeface="+mn-cs"/>
+              </a:rPr>
+              <a:t> data is persisted.</a:t>
+            </a:r>
+          </a:p>
+          <a:p>
+            <a:r>
+              <a:rPr lang="en-US" sz="1200" b="0" i="0" kern="1200" dirty="0">
+                <a:solidFill>
+                  <a:schemeClr val="tx1"/>
+                </a:solidFill>
+                <a:effectLst/>
+                <a:latin typeface="+mn-lt"/>
+                <a:ea typeface="+mn-ea"/>
+                <a:cs typeface="+mn-cs"/>
+              </a:rPr>
+              <a:t>On the </a:t>
+            </a:r>
+            <a:r>
+              <a:rPr lang="en-US" sz="1200" b="1" i="0" kern="1200" dirty="0">
+                <a:solidFill>
+                  <a:schemeClr val="tx1"/>
+                </a:solidFill>
+                <a:effectLst/>
+                <a:latin typeface="+mn-lt"/>
+                <a:ea typeface="+mn-ea"/>
+                <a:cs typeface="+mn-cs"/>
+              </a:rPr>
+              <a:t>frontend</a:t>
+            </a:r>
+            <a:r>
+              <a:rPr lang="en-US" sz="1200" b="0" i="0" kern="1200" dirty="0">
+                <a:solidFill>
+                  <a:schemeClr val="tx1"/>
+                </a:solidFill>
+                <a:effectLst/>
+                <a:latin typeface="+mn-lt"/>
+                <a:ea typeface="+mn-ea"/>
+                <a:cs typeface="+mn-cs"/>
+              </a:rPr>
+              <a:t>, the React SPA uses a REST client for configuration and history, and a </a:t>
+            </a:r>
+            <a:r>
+              <a:rPr lang="en-US" sz="1200" b="0" i="0" kern="1200" dirty="0" err="1">
+                <a:solidFill>
+                  <a:schemeClr val="tx1"/>
+                </a:solidFill>
+                <a:effectLst/>
+                <a:latin typeface="+mn-lt"/>
+                <a:ea typeface="+mn-ea"/>
+                <a:cs typeface="+mn-cs"/>
+              </a:rPr>
+              <a:t>SignalR</a:t>
+            </a:r>
+            <a:r>
+              <a:rPr lang="en-US" sz="1200" b="0" i="0" kern="1200" dirty="0">
+                <a:solidFill>
+                  <a:schemeClr val="tx1"/>
+                </a:solidFill>
+                <a:effectLst/>
+                <a:latin typeface="+mn-lt"/>
+                <a:ea typeface="+mn-ea"/>
+                <a:cs typeface="+mn-cs"/>
+              </a:rPr>
+              <a:t> client for live updates.</a:t>
+            </a:r>
+          </a:p>
+          <a:p>
+            <a:r>
+              <a:rPr lang="en-US" sz="1200" b="0" i="0" kern="1200" dirty="0">
+                <a:solidFill>
+                  <a:schemeClr val="tx1"/>
+                </a:solidFill>
+                <a:effectLst/>
+                <a:latin typeface="+mn-lt"/>
+                <a:ea typeface="+mn-ea"/>
+                <a:cs typeface="+mn-cs"/>
+              </a:rPr>
+              <a:t>All durable data is stored in </a:t>
+            </a:r>
+            <a:r>
+              <a:rPr lang="en-US" sz="1200" b="1" i="0" kern="1200" dirty="0">
+                <a:solidFill>
+                  <a:schemeClr val="tx1"/>
+                </a:solidFill>
+                <a:effectLst/>
+                <a:latin typeface="+mn-lt"/>
+                <a:ea typeface="+mn-ea"/>
+                <a:cs typeface="+mn-cs"/>
+              </a:rPr>
+              <a:t>SQL Server</a:t>
+            </a:r>
+            <a:r>
+              <a:rPr lang="en-US" sz="1200" b="0" i="0" kern="1200" dirty="0">
+                <a:solidFill>
+                  <a:schemeClr val="tx1"/>
+                </a:solidFill>
+                <a:effectLst/>
+                <a:latin typeface="+mn-lt"/>
+                <a:ea typeface="+mn-ea"/>
+                <a:cs typeface="+mn-cs"/>
+              </a:rPr>
+              <a:t> through </a:t>
+            </a:r>
+            <a:r>
+              <a:rPr lang="en-US" sz="1200" b="1" i="0" kern="1200" dirty="0" err="1">
+                <a:solidFill>
+                  <a:schemeClr val="tx1"/>
+                </a:solidFill>
+                <a:effectLst/>
+                <a:latin typeface="+mn-lt"/>
+                <a:ea typeface="+mn-ea"/>
+                <a:cs typeface="+mn-cs"/>
+              </a:rPr>
+              <a:t>ApplicationDbContext</a:t>
+            </a:r>
+            <a:r>
+              <a:rPr lang="en-US" sz="1200" b="0" i="0" kern="1200" dirty="0">
+                <a:solidFill>
+                  <a:schemeClr val="tx1"/>
+                </a:solidFill>
+                <a:effectLst/>
+                <a:latin typeface="+mn-lt"/>
+                <a:ea typeface="+mn-ea"/>
+                <a:cs typeface="+mn-cs"/>
+              </a:rPr>
+              <a:t>.</a:t>
+            </a:r>
+          </a:p>
+          <a:p>
+            <a:r>
+              <a:rPr lang="en-US" sz="1200" b="0" i="0" kern="1200" dirty="0">
+                <a:solidFill>
+                  <a:schemeClr val="tx1"/>
+                </a:solidFill>
+                <a:effectLst/>
+                <a:latin typeface="+mn-lt"/>
+                <a:ea typeface="+mn-ea"/>
+                <a:cs typeface="+mn-cs"/>
+              </a:rPr>
+              <a:t>The operator only needs a </a:t>
+            </a:r>
+            <a:r>
+              <a:rPr lang="en-US" sz="1200" b="1" i="0" kern="1200" dirty="0">
+                <a:solidFill>
+                  <a:schemeClr val="tx1"/>
+                </a:solidFill>
+                <a:effectLst/>
+                <a:latin typeface="+mn-lt"/>
+                <a:ea typeface="+mn-ea"/>
+                <a:cs typeface="+mn-cs"/>
+              </a:rPr>
+              <a:t>web browser</a:t>
+            </a:r>
+            <a:r>
+              <a:rPr lang="en-US" sz="1200" b="0" i="0" kern="1200" dirty="0">
+                <a:solidFill>
+                  <a:schemeClr val="tx1"/>
+                </a:solidFill>
+                <a:effectLst/>
+                <a:latin typeface="+mn-lt"/>
+                <a:ea typeface="+mn-ea"/>
+                <a:cs typeface="+mn-cs"/>
+              </a:rPr>
+              <a:t>—no dedicated SCADA client.</a:t>
+            </a:r>
+          </a:p>
+          <a:p>
             <a:endParaRPr lang="en-US" dirty="0"/>
           </a:p>
         </p:txBody>
@@ -1499,7 +5009,7 @@
           <a:p>
             <a:fld id="{F7021451-1387-4CA6-816F-3879F97B5CBC}" type="slidenum">
               <a:rPr lang="en-US"/>
-              <a:t>8</a:t>
+              <a:t>6</a:t>
             </a:fld>
             <a:endParaRPr lang="en-US"/>
           </a:p>
@@ -1561,6 +5071,1264 @@
         <p:txBody>
           <a:bodyPr/>
           <a:lstStyle/>
+          <a:p>
+            <a:r>
+              <a:rPr lang="en-US" sz="1200" b="0" i="0" kern="1200" dirty="0">
+                <a:solidFill>
+                  <a:schemeClr val="tx1"/>
+                </a:solidFill>
+                <a:effectLst/>
+                <a:latin typeface="+mn-lt"/>
+                <a:ea typeface="+mn-ea"/>
+                <a:cs typeface="+mn-cs"/>
+              </a:rPr>
+              <a:t>The database has </a:t>
+            </a:r>
+            <a:r>
+              <a:rPr lang="en-US" sz="1200" b="1" i="0" kern="1200" dirty="0">
+                <a:solidFill>
+                  <a:schemeClr val="tx1"/>
+                </a:solidFill>
+                <a:effectLst/>
+                <a:latin typeface="+mn-lt"/>
+                <a:ea typeface="+mn-ea"/>
+                <a:cs typeface="+mn-cs"/>
+              </a:rPr>
+              <a:t>eleven normalized tables</a:t>
+            </a:r>
+            <a:r>
+              <a:rPr lang="en-US" sz="1200" b="0" i="0" kern="1200" dirty="0">
+                <a:solidFill>
+                  <a:schemeClr val="tx1"/>
+                </a:solidFill>
+                <a:effectLst/>
+                <a:latin typeface="+mn-lt"/>
+                <a:ea typeface="+mn-ea"/>
+                <a:cs typeface="+mn-cs"/>
+              </a:rPr>
+              <a:t>. </a:t>
+            </a:r>
+            <a:r>
+              <a:rPr lang="en-US" sz="1200" b="1" i="0" kern="1200" dirty="0">
+                <a:solidFill>
+                  <a:schemeClr val="tx1"/>
+                </a:solidFill>
+                <a:effectLst/>
+                <a:latin typeface="+mn-lt"/>
+                <a:ea typeface="+mn-ea"/>
+                <a:cs typeface="+mn-cs"/>
+              </a:rPr>
+              <a:t>Devices</a:t>
+            </a:r>
+            <a:r>
+              <a:rPr lang="en-US" sz="1200" b="0" i="0" kern="1200" dirty="0">
+                <a:solidFill>
+                  <a:schemeClr val="tx1"/>
+                </a:solidFill>
+                <a:effectLst/>
+                <a:latin typeface="+mn-lt"/>
+                <a:ea typeface="+mn-ea"/>
+                <a:cs typeface="+mn-cs"/>
+              </a:rPr>
+              <a:t> is the central hub.</a:t>
+            </a:r>
+          </a:p>
+          <a:p>
+            <a:r>
+              <a:rPr lang="en-US" sz="1200" b="0" i="0" kern="1200" dirty="0">
+                <a:solidFill>
+                  <a:schemeClr val="tx1"/>
+                </a:solidFill>
+                <a:effectLst/>
+                <a:latin typeface="+mn-lt"/>
+                <a:ea typeface="+mn-ea"/>
+                <a:cs typeface="+mn-cs"/>
+              </a:rPr>
+              <a:t>Each device has </a:t>
+            </a:r>
+            <a:r>
+              <a:rPr lang="en-US" sz="1200" b="1" i="0" kern="1200" dirty="0">
+                <a:solidFill>
+                  <a:schemeClr val="tx1"/>
+                </a:solidFill>
+                <a:effectLst/>
+                <a:latin typeface="+mn-lt"/>
+                <a:ea typeface="+mn-ea"/>
+                <a:cs typeface="+mn-cs"/>
+              </a:rPr>
+              <a:t>sensors</a:t>
+            </a:r>
+            <a:r>
+              <a:rPr lang="en-US" sz="1200" b="0" i="0" kern="1200" dirty="0">
+                <a:solidFill>
+                  <a:schemeClr val="tx1"/>
+                </a:solidFill>
+                <a:effectLst/>
+                <a:latin typeface="+mn-lt"/>
+                <a:ea typeface="+mn-ea"/>
+                <a:cs typeface="+mn-cs"/>
+              </a:rPr>
+              <a:t> for inputs and </a:t>
+            </a:r>
+            <a:r>
+              <a:rPr lang="en-US" sz="1200" b="1" i="0" kern="1200" dirty="0">
+                <a:solidFill>
+                  <a:schemeClr val="tx1"/>
+                </a:solidFill>
+                <a:effectLst/>
+                <a:latin typeface="+mn-lt"/>
+                <a:ea typeface="+mn-ea"/>
+                <a:cs typeface="+mn-cs"/>
+              </a:rPr>
+              <a:t>actuators</a:t>
+            </a:r>
+            <a:r>
+              <a:rPr lang="en-US" sz="1200" b="0" i="0" kern="1200" dirty="0">
+                <a:solidFill>
+                  <a:schemeClr val="tx1"/>
+                </a:solidFill>
+                <a:effectLst/>
+                <a:latin typeface="+mn-lt"/>
+                <a:ea typeface="+mn-ea"/>
+                <a:cs typeface="+mn-cs"/>
+              </a:rPr>
+              <a:t> for outputs. </a:t>
+            </a:r>
+            <a:r>
+              <a:rPr lang="en-US" sz="1200" b="1" i="0" kern="1200" dirty="0" err="1">
+                <a:solidFill>
+                  <a:schemeClr val="tx1"/>
+                </a:solidFill>
+                <a:effectLst/>
+                <a:latin typeface="+mn-lt"/>
+                <a:ea typeface="+mn-ea"/>
+                <a:cs typeface="+mn-cs"/>
+              </a:rPr>
+              <a:t>SensorReadings</a:t>
+            </a:r>
+            <a:r>
+              <a:rPr lang="en-US" sz="1200" b="0" i="0" kern="1200" dirty="0">
+                <a:solidFill>
+                  <a:schemeClr val="tx1"/>
+                </a:solidFill>
+                <a:effectLst/>
+                <a:latin typeface="+mn-lt"/>
+                <a:ea typeface="+mn-ea"/>
+                <a:cs typeface="+mn-cs"/>
+              </a:rPr>
+              <a:t> holds time-series data with a </a:t>
+            </a:r>
+            <a:r>
+              <a:rPr lang="en-US" sz="1200" b="1" i="0" kern="1200" dirty="0">
+                <a:solidFill>
+                  <a:schemeClr val="tx1"/>
+                </a:solidFill>
+                <a:effectLst/>
+                <a:latin typeface="+mn-lt"/>
+                <a:ea typeface="+mn-ea"/>
+                <a:cs typeface="+mn-cs"/>
+              </a:rPr>
+              <a:t>BIGINT</a:t>
+            </a:r>
+            <a:r>
+              <a:rPr lang="en-US" sz="1200" b="0" i="0" kern="1200" dirty="0">
+                <a:solidFill>
+                  <a:schemeClr val="tx1"/>
+                </a:solidFill>
+                <a:effectLst/>
+                <a:latin typeface="+mn-lt"/>
+                <a:ea typeface="+mn-ea"/>
+                <a:cs typeface="+mn-cs"/>
+              </a:rPr>
+              <a:t> primary key. </a:t>
+            </a:r>
+            <a:r>
+              <a:rPr lang="en-US" sz="1200" b="1" i="0" kern="1200" dirty="0" err="1">
+                <a:solidFill>
+                  <a:schemeClr val="tx1"/>
+                </a:solidFill>
+                <a:effectLst/>
+                <a:latin typeface="+mn-lt"/>
+                <a:ea typeface="+mn-ea"/>
+                <a:cs typeface="+mn-cs"/>
+              </a:rPr>
+              <a:t>AlertRules</a:t>
+            </a:r>
+            <a:r>
+              <a:rPr lang="en-US" sz="1200" b="0" i="0" kern="1200" dirty="0">
+                <a:solidFill>
+                  <a:schemeClr val="tx1"/>
+                </a:solidFill>
+                <a:effectLst/>
+                <a:latin typeface="+mn-lt"/>
+                <a:ea typeface="+mn-ea"/>
+                <a:cs typeface="+mn-cs"/>
+              </a:rPr>
+              <a:t> and </a:t>
+            </a:r>
+            <a:r>
+              <a:rPr lang="en-US" sz="1200" b="1" i="0" kern="1200" dirty="0">
+                <a:solidFill>
+                  <a:schemeClr val="tx1"/>
+                </a:solidFill>
+                <a:effectLst/>
+                <a:latin typeface="+mn-lt"/>
+                <a:ea typeface="+mn-ea"/>
+                <a:cs typeface="+mn-cs"/>
+              </a:rPr>
+              <a:t>Alerts</a:t>
+            </a:r>
+            <a:r>
+              <a:rPr lang="en-US" sz="1200" b="0" i="0" kern="1200" dirty="0">
+                <a:solidFill>
+                  <a:schemeClr val="tx1"/>
+                </a:solidFill>
+                <a:effectLst/>
+                <a:latin typeface="+mn-lt"/>
+                <a:ea typeface="+mn-ea"/>
+                <a:cs typeface="+mn-cs"/>
+              </a:rPr>
+              <a:t> support alerting. </a:t>
+            </a:r>
+            <a:r>
+              <a:rPr lang="en-US" sz="1200" b="1" i="0" kern="1200" dirty="0" err="1">
+                <a:solidFill>
+                  <a:schemeClr val="tx1"/>
+                </a:solidFill>
+                <a:effectLst/>
+                <a:latin typeface="+mn-lt"/>
+                <a:ea typeface="+mn-ea"/>
+                <a:cs typeface="+mn-cs"/>
+              </a:rPr>
+              <a:t>DeviceCommands</a:t>
+            </a:r>
+            <a:r>
+              <a:rPr lang="en-US" sz="1200" b="0" i="0" kern="1200" dirty="0">
+                <a:solidFill>
+                  <a:schemeClr val="tx1"/>
+                </a:solidFill>
+                <a:effectLst/>
+                <a:latin typeface="+mn-lt"/>
+                <a:ea typeface="+mn-ea"/>
+                <a:cs typeface="+mn-cs"/>
+              </a:rPr>
+              <a:t> records command history. </a:t>
+            </a:r>
+            <a:r>
+              <a:rPr lang="en-US" sz="1200" b="1" i="0" kern="1200" dirty="0">
+                <a:solidFill>
+                  <a:schemeClr val="tx1"/>
+                </a:solidFill>
+                <a:effectLst/>
+                <a:latin typeface="+mn-lt"/>
+                <a:ea typeface="+mn-ea"/>
+                <a:cs typeface="+mn-cs"/>
+              </a:rPr>
+              <a:t>Users</a:t>
+            </a:r>
+            <a:r>
+              <a:rPr lang="en-US" sz="1200" b="0" i="0" kern="1200" dirty="0">
+                <a:solidFill>
+                  <a:schemeClr val="tx1"/>
+                </a:solidFill>
+                <a:effectLst/>
+                <a:latin typeface="+mn-lt"/>
+                <a:ea typeface="+mn-ea"/>
+                <a:cs typeface="+mn-cs"/>
+              </a:rPr>
+              <a:t> supports JWT and role-based access.</a:t>
+            </a:r>
+          </a:p>
+          <a:p>
+            <a:r>
+              <a:rPr lang="en-US" sz="1200" b="0" i="0" kern="1200" dirty="0">
+                <a:solidFill>
+                  <a:schemeClr val="tx1"/>
+                </a:solidFill>
+                <a:effectLst/>
+                <a:latin typeface="+mn-lt"/>
+                <a:ea typeface="+mn-ea"/>
+                <a:cs typeface="+mn-cs"/>
+              </a:rPr>
+              <a:t>One schema supports </a:t>
+            </a:r>
+            <a:r>
+              <a:rPr lang="en-US" sz="1200" b="1" i="0" kern="1200" dirty="0">
+                <a:solidFill>
+                  <a:schemeClr val="tx1"/>
+                </a:solidFill>
+                <a:effectLst/>
+                <a:latin typeface="+mn-lt"/>
+                <a:ea typeface="+mn-ea"/>
+                <a:cs typeface="+mn-cs"/>
+              </a:rPr>
+              <a:t>monitoring, alerting, and control</a:t>
+            </a:r>
+            <a:r>
+              <a:rPr lang="en-US" sz="1200" b="0" i="0" kern="1200" dirty="0">
+                <a:solidFill>
+                  <a:schemeClr val="tx1"/>
+                </a:solidFill>
+                <a:effectLst/>
+                <a:latin typeface="+mn-lt"/>
+                <a:ea typeface="+mn-ea"/>
+                <a:cs typeface="+mn-cs"/>
+              </a:rPr>
+              <a:t> for multiple devices.</a:t>
+            </a:r>
+          </a:p>
+          <a:p>
+            <a:endParaRPr lang="en-US" dirty="0"/>
+          </a:p>
+        </p:txBody>
+      </p:sp>
+      <p:sp>
+        <p:nvSpPr>
+          <p:cNvPr id="4" name="Slide Number Placeholder 3"/>
+          <p:cNvSpPr>
+            <a:spLocks noGrp="1"/>
+          </p:cNvSpPr>
+          <p:nvPr>
+            <p:ph type="sldNum" sz="quarter" idx="10"/>
+          </p:nvPr>
+        </p:nvSpPr>
+        <p:spPr/>
+        <p:txBody>
+          <a:bodyPr/>
+          <a:lstStyle/>
+          <a:p>
+            <a:fld id="{F7021451-1387-4CA6-816F-3879F97B5CBC}" type="slidenum">
+              <a:rPr lang="en-US"/>
+              <a:t>7</a:t>
+            </a:fld>
+            <a:endParaRPr lang="en-US"/>
+          </a:p>
+        </p:txBody>
+      </p:sp>
+    </p:spTree>
+    <p:extLst>
+      <p:ext uri="{BB962C8B-B14F-4D97-AF65-F5344CB8AC3E}">
+        <p14:creationId xmlns:p14="http://schemas.microsoft.com/office/powerpoint/2010/main" val="1024086991"/>
+      </p:ext>
+    </p:extLst>
+  </p:cSld>
+  <p:clrMapOvr>
+    <a:masterClrMapping/>
+  </p:clrMapOvr>
+</p:notes>
+</file>
+
+<file path=ppt/notesSlides/notesSlide8.xml><?xml version="1.0" encoding="utf-8"?>
+<p:notes xmlns:a="http://schemas.openxmlformats.org/drawingml/2006/main" xmlns:r="http://schemas.openxmlformats.org/officeDocument/2006/relationships" xmlns:p="http://schemas.openxmlformats.org/presentationml/2006/main">
+  <p:cSld>
+    <p:spTree>
+      <p:nvGrpSpPr>
+        <p:cNvPr id="1" name=""/>
+        <p:cNvGrpSpPr/>
+        <p:nvPr/>
+      </p:nvGrpSpPr>
+      <p:grpSpPr>
+        <a:xfrm>
+          <a:off x="0" y="0"/>
+          <a:ext cx="0" cy="0"/>
+          <a:chOff x="0" y="0"/>
+          <a:chExt cx="0" cy="0"/>
+        </a:xfrm>
+      </p:grpSpPr>
+      <p:sp>
+        <p:nvSpPr>
+          <p:cNvPr id="2" name="Slide Image Placeholder 1"/>
+          <p:cNvSpPr>
+            <a:spLocks noGrp="1" noRot="1" noChangeAspect="1"/>
+          </p:cNvSpPr>
+          <p:nvPr>
+            <p:ph type="sldImg"/>
+          </p:nvPr>
+        </p:nvSpPr>
+        <p:spPr/>
+      </p:sp>
+      <p:sp>
+        <p:nvSpPr>
+          <p:cNvPr id="3" name="Notes Placeholder 2"/>
+          <p:cNvSpPr>
+            <a:spLocks noGrp="1"/>
+          </p:cNvSpPr>
+          <p:nvPr>
+            <p:ph type="body" idx="1"/>
+          </p:nvPr>
+        </p:nvSpPr>
+        <p:spPr/>
+        <p:txBody>
+          <a:bodyPr/>
+          <a:lstStyle/>
+          <a:p>
+            <a:r>
+              <a:rPr lang="en-US" sz="1200" b="0" i="0" kern="1200" dirty="0">
+                <a:solidFill>
+                  <a:schemeClr val="tx1"/>
+                </a:solidFill>
+                <a:effectLst/>
+                <a:latin typeface="+mn-lt"/>
+                <a:ea typeface="+mn-ea"/>
+                <a:cs typeface="+mn-cs"/>
+              </a:rPr>
+              <a:t>The backend follows </a:t>
+            </a:r>
+            <a:r>
+              <a:rPr lang="en-US" sz="1200" b="1" i="0" kern="1200" dirty="0">
+                <a:solidFill>
+                  <a:schemeClr val="tx1"/>
+                </a:solidFill>
+                <a:effectLst/>
+                <a:latin typeface="+mn-lt"/>
+                <a:ea typeface="+mn-ea"/>
+                <a:cs typeface="+mn-cs"/>
+              </a:rPr>
+              <a:t>layered architecture</a:t>
+            </a:r>
+            <a:r>
+              <a:rPr lang="en-US" sz="1200" b="0" i="0" kern="1200" dirty="0">
+                <a:solidFill>
+                  <a:schemeClr val="tx1"/>
+                </a:solidFill>
+                <a:effectLst/>
+                <a:latin typeface="+mn-lt"/>
+                <a:ea typeface="+mn-ea"/>
+                <a:cs typeface="+mn-cs"/>
+              </a:rPr>
+              <a:t> under </a:t>
+            </a:r>
+            <a:r>
+              <a:rPr lang="en-US" sz="1200" b="1" i="0" kern="1200" dirty="0">
+                <a:solidFill>
+                  <a:schemeClr val="tx1"/>
+                </a:solidFill>
+                <a:effectLst/>
+                <a:latin typeface="+mn-lt"/>
+                <a:ea typeface="+mn-ea"/>
+                <a:cs typeface="+mn-cs"/>
+              </a:rPr>
+              <a:t>/</a:t>
+            </a:r>
+            <a:r>
+              <a:rPr lang="en-US" sz="1200" b="1" i="0" kern="1200" dirty="0" err="1">
+                <a:solidFill>
+                  <a:schemeClr val="tx1"/>
+                </a:solidFill>
+                <a:effectLst/>
+                <a:latin typeface="+mn-lt"/>
+                <a:ea typeface="+mn-ea"/>
+                <a:cs typeface="+mn-cs"/>
+              </a:rPr>
+              <a:t>api</a:t>
+            </a:r>
+            <a:r>
+              <a:rPr lang="en-US" sz="1200" b="1" i="0" kern="1200" dirty="0">
+                <a:solidFill>
+                  <a:schemeClr val="tx1"/>
+                </a:solidFill>
+                <a:effectLst/>
+                <a:latin typeface="+mn-lt"/>
+                <a:ea typeface="+mn-ea"/>
+                <a:cs typeface="+mn-cs"/>
+              </a:rPr>
+              <a:t>/v1</a:t>
+            </a:r>
+            <a:r>
+              <a:rPr lang="en-US" sz="1200" b="0" i="0" kern="1200" dirty="0">
+                <a:solidFill>
+                  <a:schemeClr val="tx1"/>
+                </a:solidFill>
+                <a:effectLst/>
+                <a:latin typeface="+mn-lt"/>
+                <a:ea typeface="+mn-ea"/>
+                <a:cs typeface="+mn-cs"/>
+              </a:rPr>
+              <a:t>.</a:t>
+            </a:r>
+          </a:p>
+          <a:p>
+            <a:r>
+              <a:rPr lang="en-US" sz="1200" b="0" i="0" kern="1200" dirty="0">
+                <a:solidFill>
+                  <a:schemeClr val="tx1"/>
+                </a:solidFill>
+                <a:effectLst/>
+                <a:latin typeface="+mn-lt"/>
+                <a:ea typeface="+mn-ea"/>
+                <a:cs typeface="+mn-cs"/>
+              </a:rPr>
+              <a:t>Three API groups matter most for the demo: </a:t>
+            </a:r>
+            <a:r>
+              <a:rPr lang="en-US" sz="1200" b="1" i="0" kern="1200" dirty="0">
+                <a:solidFill>
+                  <a:schemeClr val="tx1"/>
+                </a:solidFill>
+                <a:effectLst/>
+                <a:latin typeface="+mn-lt"/>
+                <a:ea typeface="+mn-ea"/>
+                <a:cs typeface="+mn-cs"/>
+              </a:rPr>
+              <a:t>sensor readings</a:t>
+            </a:r>
+            <a:r>
+              <a:rPr lang="en-US" sz="1200" b="0" i="0" kern="1200" dirty="0">
+                <a:solidFill>
+                  <a:schemeClr val="tx1"/>
+                </a:solidFill>
+                <a:effectLst/>
+                <a:latin typeface="+mn-lt"/>
+                <a:ea typeface="+mn-ea"/>
+                <a:cs typeface="+mn-cs"/>
+              </a:rPr>
+              <a:t> for ingest and historical queries; </a:t>
+            </a:r>
+            <a:r>
+              <a:rPr lang="en-US" sz="1200" b="1" i="0" kern="1200" dirty="0">
+                <a:solidFill>
+                  <a:schemeClr val="tx1"/>
+                </a:solidFill>
+                <a:effectLst/>
+                <a:latin typeface="+mn-lt"/>
+                <a:ea typeface="+mn-ea"/>
+                <a:cs typeface="+mn-cs"/>
+              </a:rPr>
+              <a:t>alerts and alert rules</a:t>
+            </a:r>
+            <a:r>
+              <a:rPr lang="en-US" sz="1200" b="0" i="0" kern="1200" dirty="0">
+                <a:solidFill>
+                  <a:schemeClr val="tx1"/>
+                </a:solidFill>
+                <a:effectLst/>
+                <a:latin typeface="+mn-lt"/>
+                <a:ea typeface="+mn-ea"/>
+                <a:cs typeface="+mn-cs"/>
+              </a:rPr>
+              <a:t> including acknowledge and resolve; and </a:t>
+            </a:r>
+            <a:r>
+              <a:rPr lang="en-US" sz="1200" b="1" i="0" kern="1200" dirty="0">
+                <a:solidFill>
+                  <a:schemeClr val="tx1"/>
+                </a:solidFill>
+                <a:effectLst/>
+                <a:latin typeface="+mn-lt"/>
+                <a:ea typeface="+mn-ea"/>
+                <a:cs typeface="+mn-cs"/>
+              </a:rPr>
+              <a:t>actuators and commands</a:t>
+            </a:r>
+            <a:r>
+              <a:rPr lang="en-US" sz="1200" b="0" i="0" kern="1200" dirty="0">
+                <a:solidFill>
+                  <a:schemeClr val="tx1"/>
+                </a:solidFill>
+                <a:effectLst/>
+                <a:latin typeface="+mn-lt"/>
+                <a:ea typeface="+mn-ea"/>
+                <a:cs typeface="+mn-cs"/>
+              </a:rPr>
+              <a:t> sent to the device over MQTT.</a:t>
+            </a:r>
+          </a:p>
+          <a:p>
+            <a:r>
+              <a:rPr lang="en-US" sz="1200" b="0" i="0" kern="1200" dirty="0">
+                <a:solidFill>
+                  <a:schemeClr val="tx1"/>
+                </a:solidFill>
+                <a:effectLst/>
+                <a:latin typeface="+mn-lt"/>
+                <a:ea typeface="+mn-ea"/>
+                <a:cs typeface="+mn-cs"/>
+              </a:rPr>
+              <a:t>Most endpoints require </a:t>
+            </a:r>
+            <a:r>
+              <a:rPr lang="en-US" sz="1200" b="1" i="0" kern="1200" dirty="0">
+                <a:solidFill>
+                  <a:schemeClr val="tx1"/>
+                </a:solidFill>
+                <a:effectLst/>
+                <a:latin typeface="+mn-lt"/>
+                <a:ea typeface="+mn-ea"/>
+                <a:cs typeface="+mn-cs"/>
+              </a:rPr>
+              <a:t>JWT</a:t>
+            </a:r>
+            <a:r>
+              <a:rPr lang="en-US" sz="1200" b="0" i="0" kern="1200" dirty="0">
+                <a:solidFill>
+                  <a:schemeClr val="tx1"/>
+                </a:solidFill>
+                <a:effectLst/>
+                <a:latin typeface="+mn-lt"/>
+                <a:ea typeface="+mn-ea"/>
+                <a:cs typeface="+mn-cs"/>
+              </a:rPr>
+              <a:t>. </a:t>
+            </a:r>
+            <a:r>
+              <a:rPr lang="en-US" sz="1200" b="1" i="0" kern="1200" dirty="0">
+                <a:solidFill>
+                  <a:schemeClr val="tx1"/>
+                </a:solidFill>
+                <a:effectLst/>
+                <a:latin typeface="+mn-lt"/>
+                <a:ea typeface="+mn-ea"/>
+                <a:cs typeface="+mn-cs"/>
+              </a:rPr>
+              <a:t>Admin</a:t>
+            </a:r>
+            <a:r>
+              <a:rPr lang="en-US" sz="1200" b="0" i="0" kern="1200" dirty="0">
+                <a:solidFill>
+                  <a:schemeClr val="tx1"/>
+                </a:solidFill>
+                <a:effectLst/>
+                <a:latin typeface="+mn-lt"/>
+                <a:ea typeface="+mn-ea"/>
+                <a:cs typeface="+mn-cs"/>
+              </a:rPr>
+              <a:t> and </a:t>
+            </a:r>
+            <a:r>
+              <a:rPr lang="en-US" sz="1200" b="1" i="0" kern="1200" dirty="0">
+                <a:solidFill>
+                  <a:schemeClr val="tx1"/>
+                </a:solidFill>
+                <a:effectLst/>
+                <a:latin typeface="+mn-lt"/>
+                <a:ea typeface="+mn-ea"/>
+                <a:cs typeface="+mn-cs"/>
+              </a:rPr>
+              <a:t>Operator</a:t>
+            </a:r>
+            <a:r>
+              <a:rPr lang="en-US" sz="1200" b="0" i="0" kern="1200" dirty="0">
+                <a:solidFill>
+                  <a:schemeClr val="tx1"/>
+                </a:solidFill>
+                <a:effectLst/>
+                <a:latin typeface="+mn-lt"/>
+                <a:ea typeface="+mn-ea"/>
+                <a:cs typeface="+mn-cs"/>
+              </a:rPr>
+              <a:t> can write; </a:t>
+            </a:r>
+            <a:r>
+              <a:rPr lang="en-US" sz="1200" b="1" i="0" kern="1200" dirty="0">
+                <a:solidFill>
+                  <a:schemeClr val="tx1"/>
+                </a:solidFill>
+                <a:effectLst/>
+                <a:latin typeface="+mn-lt"/>
+                <a:ea typeface="+mn-ea"/>
+                <a:cs typeface="+mn-cs"/>
+              </a:rPr>
+              <a:t>Viewer</a:t>
+            </a:r>
+            <a:r>
+              <a:rPr lang="en-US" sz="1200" b="0" i="0" kern="1200" dirty="0">
+                <a:solidFill>
+                  <a:schemeClr val="tx1"/>
+                </a:solidFill>
+                <a:effectLst/>
+                <a:latin typeface="+mn-lt"/>
+                <a:ea typeface="+mn-ea"/>
+                <a:cs typeface="+mn-cs"/>
+              </a:rPr>
+              <a:t> is read-only. </a:t>
+            </a:r>
+            <a:r>
+              <a:rPr lang="en-US" sz="1200" b="0" i="0" kern="1200" dirty="0" err="1">
+                <a:solidFill>
+                  <a:schemeClr val="tx1"/>
+                </a:solidFill>
+                <a:effectLst/>
+                <a:latin typeface="+mn-lt"/>
+                <a:ea typeface="+mn-ea"/>
+                <a:cs typeface="+mn-cs"/>
+              </a:rPr>
+              <a:t>SignalR</a:t>
+            </a:r>
+            <a:r>
+              <a:rPr lang="en-US" sz="1200" b="0" i="0" kern="1200" dirty="0">
+                <a:solidFill>
+                  <a:schemeClr val="tx1"/>
+                </a:solidFill>
+                <a:effectLst/>
+                <a:latin typeface="+mn-lt"/>
+                <a:ea typeface="+mn-ea"/>
+                <a:cs typeface="+mn-cs"/>
+              </a:rPr>
+              <a:t> uses the same token.</a:t>
+            </a:r>
+          </a:p>
+          <a:p>
+            <a:r>
+              <a:rPr lang="en-US" sz="1200" b="0" i="0" kern="1200" dirty="0">
+                <a:solidFill>
+                  <a:schemeClr val="tx1"/>
+                </a:solidFill>
+                <a:effectLst/>
+                <a:latin typeface="+mn-lt"/>
+                <a:ea typeface="+mn-ea"/>
+                <a:cs typeface="+mn-cs"/>
+              </a:rPr>
+              <a:t>For live data, the path is </a:t>
+            </a:r>
+            <a:r>
+              <a:rPr lang="en-US" sz="1200" b="1" i="0" kern="1200" dirty="0">
+                <a:solidFill>
+                  <a:schemeClr val="tx1"/>
+                </a:solidFill>
+                <a:effectLst/>
+                <a:latin typeface="+mn-lt"/>
+                <a:ea typeface="+mn-ea"/>
+                <a:cs typeface="+mn-cs"/>
+              </a:rPr>
+              <a:t>MQTT through the broker to the API, then </a:t>
+            </a:r>
+            <a:r>
+              <a:rPr lang="en-US" sz="1200" b="1" i="0" kern="1200" dirty="0" err="1">
+                <a:solidFill>
+                  <a:schemeClr val="tx1"/>
+                </a:solidFill>
+                <a:effectLst/>
+                <a:latin typeface="+mn-lt"/>
+                <a:ea typeface="+mn-ea"/>
+                <a:cs typeface="+mn-cs"/>
+              </a:rPr>
+              <a:t>SignalR</a:t>
+            </a:r>
+            <a:r>
+              <a:rPr lang="en-US" sz="1200" b="1" i="0" kern="1200" dirty="0">
+                <a:solidFill>
+                  <a:schemeClr val="tx1"/>
+                </a:solidFill>
+                <a:effectLst/>
+                <a:latin typeface="+mn-lt"/>
+                <a:ea typeface="+mn-ea"/>
+                <a:cs typeface="+mn-cs"/>
+              </a:rPr>
+              <a:t> to the frontend</a:t>
+            </a:r>
+            <a:r>
+              <a:rPr lang="en-US" sz="1200" b="0" i="0" kern="1200" dirty="0">
+                <a:solidFill>
+                  <a:schemeClr val="tx1"/>
+                </a:solidFill>
+                <a:effectLst/>
+                <a:latin typeface="+mn-lt"/>
+                <a:ea typeface="+mn-ea"/>
+                <a:cs typeface="+mn-cs"/>
+              </a:rPr>
+              <a:t>, with updates typically within about </a:t>
+            </a:r>
+            <a:r>
+              <a:rPr lang="en-US" sz="1200" b="1" i="0" kern="1200" dirty="0">
+                <a:solidFill>
+                  <a:schemeClr val="tx1"/>
+                </a:solidFill>
+                <a:effectLst/>
+                <a:latin typeface="+mn-lt"/>
+                <a:ea typeface="+mn-ea"/>
+                <a:cs typeface="+mn-cs"/>
+              </a:rPr>
+              <a:t>one to two seconds</a:t>
+            </a:r>
+            <a:r>
+              <a:rPr lang="en-US" sz="1200" b="0" i="0" kern="1200" dirty="0">
+                <a:solidFill>
+                  <a:schemeClr val="tx1"/>
+                </a:solidFill>
+                <a:effectLst/>
+                <a:latin typeface="+mn-lt"/>
+                <a:ea typeface="+mn-ea"/>
+                <a:cs typeface="+mn-cs"/>
+              </a:rPr>
+              <a:t>.</a:t>
+            </a:r>
+          </a:p>
+          <a:p>
+            <a:endParaRPr lang="en-US" dirty="0"/>
+          </a:p>
+        </p:txBody>
+      </p:sp>
+      <p:sp>
+        <p:nvSpPr>
+          <p:cNvPr id="4" name="Slide Number Placeholder 3"/>
+          <p:cNvSpPr>
+            <a:spLocks noGrp="1"/>
+          </p:cNvSpPr>
+          <p:nvPr>
+            <p:ph type="sldNum" sz="quarter" idx="10"/>
+          </p:nvPr>
+        </p:nvSpPr>
+        <p:spPr/>
+        <p:txBody>
+          <a:bodyPr/>
+          <a:lstStyle/>
+          <a:p>
+            <a:fld id="{F7021451-1387-4CA6-816F-3879F97B5CBC}" type="slidenum">
+              <a:rPr lang="en-US"/>
+              <a:t>8</a:t>
+            </a:fld>
+            <a:endParaRPr lang="en-US"/>
+          </a:p>
+        </p:txBody>
+      </p:sp>
+    </p:spTree>
+    <p:extLst>
+      <p:ext uri="{BB962C8B-B14F-4D97-AF65-F5344CB8AC3E}">
+        <p14:creationId xmlns:p14="http://schemas.microsoft.com/office/powerpoint/2010/main" val="1024086991"/>
+      </p:ext>
+    </p:extLst>
+  </p:cSld>
+  <p:clrMapOvr>
+    <a:masterClrMapping/>
+  </p:clrMapOvr>
+</p:notes>
+</file>
+
+<file path=ppt/notesSlides/notesSlide9.xml><?xml version="1.0" encoding="utf-8"?>
+<p:notes xmlns:a="http://schemas.openxmlformats.org/drawingml/2006/main" xmlns:r="http://schemas.openxmlformats.org/officeDocument/2006/relationships" xmlns:p="http://schemas.openxmlformats.org/presentationml/2006/main">
+  <p:cSld>
+    <p:spTree>
+      <p:nvGrpSpPr>
+        <p:cNvPr id="1" name=""/>
+        <p:cNvGrpSpPr/>
+        <p:nvPr/>
+      </p:nvGrpSpPr>
+      <p:grpSpPr>
+        <a:xfrm>
+          <a:off x="0" y="0"/>
+          <a:ext cx="0" cy="0"/>
+          <a:chOff x="0" y="0"/>
+          <a:chExt cx="0" cy="0"/>
+        </a:xfrm>
+      </p:grpSpPr>
+      <p:sp>
+        <p:nvSpPr>
+          <p:cNvPr id="2" name="Slide Image Placeholder 1"/>
+          <p:cNvSpPr>
+            <a:spLocks noGrp="1" noRot="1" noChangeAspect="1"/>
+          </p:cNvSpPr>
+          <p:nvPr>
+            <p:ph type="sldImg"/>
+          </p:nvPr>
+        </p:nvSpPr>
+        <p:spPr/>
+      </p:sp>
+      <p:sp>
+        <p:nvSpPr>
+          <p:cNvPr id="3" name="Notes Placeholder 2"/>
+          <p:cNvSpPr>
+            <a:spLocks noGrp="1"/>
+          </p:cNvSpPr>
+          <p:nvPr>
+            <p:ph type="body" idx="1"/>
+          </p:nvPr>
+        </p:nvSpPr>
+        <p:spPr/>
+        <p:txBody>
+          <a:bodyPr/>
+          <a:lstStyle/>
+          <a:p>
+            <a:r>
+              <a:rPr lang="en-US" sz="1200" b="0" i="0" kern="1200" dirty="0">
+                <a:solidFill>
+                  <a:schemeClr val="tx1"/>
+                </a:solidFill>
+                <a:effectLst/>
+                <a:latin typeface="+mn-lt"/>
+                <a:ea typeface="+mn-ea"/>
+                <a:cs typeface="+mn-cs"/>
+              </a:rPr>
+              <a:t>The frontend is a </a:t>
+            </a:r>
+            <a:r>
+              <a:rPr lang="en-US" sz="1200" b="1" i="0" kern="1200" dirty="0">
+                <a:solidFill>
+                  <a:schemeClr val="tx1"/>
+                </a:solidFill>
+                <a:effectLst/>
+                <a:latin typeface="+mn-lt"/>
+                <a:ea typeface="+mn-ea"/>
+                <a:cs typeface="+mn-cs"/>
+              </a:rPr>
+              <a:t>React single-page application</a:t>
+            </a:r>
+            <a:r>
+              <a:rPr lang="en-US" sz="1200" b="0" i="0" kern="1200" dirty="0">
+                <a:solidFill>
+                  <a:schemeClr val="tx1"/>
+                </a:solidFill>
+                <a:effectLst/>
+                <a:latin typeface="+mn-lt"/>
+                <a:ea typeface="+mn-ea"/>
+                <a:cs typeface="+mn-cs"/>
+              </a:rPr>
+              <a:t> with protected routes after login.</a:t>
+            </a:r>
+          </a:p>
+          <a:p>
+            <a:r>
+              <a:rPr lang="en-US" sz="1200" b="0" i="0" kern="1200" dirty="0">
+                <a:solidFill>
+                  <a:schemeClr val="tx1"/>
+                </a:solidFill>
+                <a:effectLst/>
+                <a:latin typeface="+mn-lt"/>
+                <a:ea typeface="+mn-ea"/>
+                <a:cs typeface="+mn-cs"/>
+              </a:rPr>
+              <a:t>The </a:t>
+            </a:r>
+            <a:r>
+              <a:rPr lang="en-US" sz="1200" b="1" i="0" kern="1200" dirty="0">
+                <a:solidFill>
+                  <a:schemeClr val="tx1"/>
+                </a:solidFill>
+                <a:effectLst/>
+                <a:latin typeface="+mn-lt"/>
+                <a:ea typeface="+mn-ea"/>
+                <a:cs typeface="+mn-cs"/>
+              </a:rPr>
+              <a:t>dashboard</a:t>
+            </a:r>
+            <a:r>
+              <a:rPr lang="en-US" sz="1200" b="0" i="0" kern="1200" dirty="0">
+                <a:solidFill>
+                  <a:schemeClr val="tx1"/>
+                </a:solidFill>
+                <a:effectLst/>
+                <a:latin typeface="+mn-lt"/>
+                <a:ea typeface="+mn-ea"/>
+                <a:cs typeface="+mn-cs"/>
+              </a:rPr>
+              <a:t> gives an overview with live </a:t>
+            </a:r>
+            <a:r>
+              <a:rPr lang="en-US" sz="1200" b="0" i="0" kern="1200" dirty="0" err="1">
+                <a:solidFill>
+                  <a:schemeClr val="tx1"/>
+                </a:solidFill>
+                <a:effectLst/>
+                <a:latin typeface="+mn-lt"/>
+                <a:ea typeface="+mn-ea"/>
+                <a:cs typeface="+mn-cs"/>
+              </a:rPr>
+              <a:t>SignalR</a:t>
+            </a:r>
+            <a:r>
+              <a:rPr lang="en-US" sz="1200" b="0" i="0" kern="1200" dirty="0">
+                <a:solidFill>
+                  <a:schemeClr val="tx1"/>
+                </a:solidFill>
+                <a:effectLst/>
+                <a:latin typeface="+mn-lt"/>
+                <a:ea typeface="+mn-ea"/>
+                <a:cs typeface="+mn-cs"/>
+              </a:rPr>
+              <a:t> updates. </a:t>
+            </a:r>
+            <a:r>
+              <a:rPr lang="en-US" sz="1200" b="1" i="0" kern="1200" dirty="0">
+                <a:solidFill>
+                  <a:schemeClr val="tx1"/>
+                </a:solidFill>
+                <a:effectLst/>
+                <a:latin typeface="+mn-lt"/>
+                <a:ea typeface="+mn-ea"/>
+                <a:cs typeface="+mn-cs"/>
+              </a:rPr>
+              <a:t>Devices</a:t>
+            </a:r>
+            <a:r>
+              <a:rPr lang="en-US" sz="1200" b="0" i="0" kern="1200" dirty="0">
+                <a:solidFill>
+                  <a:schemeClr val="tx1"/>
+                </a:solidFill>
+                <a:effectLst/>
+                <a:latin typeface="+mn-lt"/>
+                <a:ea typeface="+mn-ea"/>
+                <a:cs typeface="+mn-cs"/>
+              </a:rPr>
+              <a:t> and </a:t>
+            </a:r>
+            <a:r>
+              <a:rPr lang="en-US" sz="1200" b="1" i="0" kern="1200" dirty="0">
+                <a:solidFill>
+                  <a:schemeClr val="tx1"/>
+                </a:solidFill>
+                <a:effectLst/>
+                <a:latin typeface="+mn-lt"/>
+                <a:ea typeface="+mn-ea"/>
+                <a:cs typeface="+mn-cs"/>
+              </a:rPr>
+              <a:t>device detail</a:t>
+            </a:r>
+            <a:r>
+              <a:rPr lang="en-US" sz="1200" b="0" i="0" kern="1200" dirty="0">
+                <a:solidFill>
+                  <a:schemeClr val="tx1"/>
+                </a:solidFill>
+                <a:effectLst/>
+                <a:latin typeface="+mn-lt"/>
+                <a:ea typeface="+mn-ea"/>
+                <a:cs typeface="+mn-cs"/>
+              </a:rPr>
+              <a:t> support charts and commands. </a:t>
+            </a:r>
+            <a:r>
+              <a:rPr lang="en-US" sz="1200" b="1" i="0" kern="1200" dirty="0">
+                <a:solidFill>
+                  <a:schemeClr val="tx1"/>
+                </a:solidFill>
+                <a:effectLst/>
+                <a:latin typeface="+mn-lt"/>
+                <a:ea typeface="+mn-ea"/>
+                <a:cs typeface="+mn-cs"/>
+              </a:rPr>
+              <a:t>Sensors</a:t>
+            </a:r>
+            <a:r>
+              <a:rPr lang="en-US" sz="1200" b="0" i="0" kern="1200" dirty="0">
+                <a:solidFill>
+                  <a:schemeClr val="tx1"/>
+                </a:solidFill>
+                <a:effectLst/>
+                <a:latin typeface="+mn-lt"/>
+                <a:ea typeface="+mn-ea"/>
+                <a:cs typeface="+mn-cs"/>
+              </a:rPr>
+              <a:t> and </a:t>
+            </a:r>
+            <a:r>
+              <a:rPr lang="en-US" sz="1200" b="1" i="0" kern="1200" dirty="0">
+                <a:solidFill>
+                  <a:schemeClr val="tx1"/>
+                </a:solidFill>
+                <a:effectLst/>
+                <a:latin typeface="+mn-lt"/>
+                <a:ea typeface="+mn-ea"/>
+                <a:cs typeface="+mn-cs"/>
+              </a:rPr>
+              <a:t>actuators</a:t>
+            </a:r>
+            <a:r>
+              <a:rPr lang="en-US" sz="1200" b="0" i="0" kern="1200" dirty="0">
+                <a:solidFill>
+                  <a:schemeClr val="tx1"/>
+                </a:solidFill>
+                <a:effectLst/>
+                <a:latin typeface="+mn-lt"/>
+                <a:ea typeface="+mn-ea"/>
+                <a:cs typeface="+mn-cs"/>
+              </a:rPr>
+              <a:t> manage inputs and outputs. </a:t>
+            </a:r>
+            <a:r>
+              <a:rPr lang="en-US" sz="1200" b="1" i="0" kern="1200" dirty="0">
+                <a:solidFill>
+                  <a:schemeClr val="tx1"/>
+                </a:solidFill>
+                <a:effectLst/>
+                <a:latin typeface="+mn-lt"/>
+                <a:ea typeface="+mn-ea"/>
+                <a:cs typeface="+mn-cs"/>
+              </a:rPr>
+              <a:t>Alert rules</a:t>
+            </a:r>
+            <a:r>
+              <a:rPr lang="en-US" sz="1200" b="0" i="0" kern="1200" dirty="0">
+                <a:solidFill>
+                  <a:schemeClr val="tx1"/>
+                </a:solidFill>
+                <a:effectLst/>
+                <a:latin typeface="+mn-lt"/>
+                <a:ea typeface="+mn-ea"/>
+                <a:cs typeface="+mn-cs"/>
+              </a:rPr>
+              <a:t> and </a:t>
+            </a:r>
+            <a:r>
+              <a:rPr lang="en-US" sz="1200" b="1" i="0" kern="1200" dirty="0">
+                <a:solidFill>
+                  <a:schemeClr val="tx1"/>
+                </a:solidFill>
+                <a:effectLst/>
+                <a:latin typeface="+mn-lt"/>
+                <a:ea typeface="+mn-ea"/>
+                <a:cs typeface="+mn-cs"/>
+              </a:rPr>
+              <a:t>alerts</a:t>
+            </a:r>
+            <a:r>
+              <a:rPr lang="en-US" sz="1200" b="0" i="0" kern="1200" dirty="0">
+                <a:solidFill>
+                  <a:schemeClr val="tx1"/>
+                </a:solidFill>
+                <a:effectLst/>
+                <a:latin typeface="+mn-lt"/>
+                <a:ea typeface="+mn-ea"/>
+                <a:cs typeface="+mn-cs"/>
+              </a:rPr>
+              <a:t> handle configuration and response. </a:t>
+            </a:r>
+            <a:r>
+              <a:rPr lang="en-US" sz="1200" b="1" i="0" kern="1200" dirty="0">
+                <a:solidFill>
+                  <a:schemeClr val="tx1"/>
+                </a:solidFill>
+                <a:effectLst/>
+                <a:latin typeface="+mn-lt"/>
+                <a:ea typeface="+mn-ea"/>
+                <a:cs typeface="+mn-cs"/>
+              </a:rPr>
+              <a:t>Command history</a:t>
+            </a:r>
+            <a:r>
+              <a:rPr lang="en-US" sz="1200" b="0" i="0" kern="1200" dirty="0">
+                <a:solidFill>
+                  <a:schemeClr val="tx1"/>
+                </a:solidFill>
+                <a:effectLst/>
+                <a:latin typeface="+mn-lt"/>
+                <a:ea typeface="+mn-ea"/>
+                <a:cs typeface="+mn-cs"/>
+              </a:rPr>
+              <a:t> shows status from </a:t>
+            </a:r>
+            <a:r>
+              <a:rPr lang="en-US" sz="1200" b="1" i="0" kern="1200" dirty="0">
+                <a:solidFill>
+                  <a:schemeClr val="tx1"/>
+                </a:solidFill>
+                <a:effectLst/>
+                <a:latin typeface="+mn-lt"/>
+                <a:ea typeface="+mn-ea"/>
+                <a:cs typeface="+mn-cs"/>
+              </a:rPr>
+              <a:t>Pending through Sent to </a:t>
+            </a:r>
+            <a:r>
+              <a:rPr lang="en-US" sz="1200" b="1" i="0" kern="1200" dirty="0" err="1">
+                <a:solidFill>
+                  <a:schemeClr val="tx1"/>
+                </a:solidFill>
+                <a:effectLst/>
+                <a:latin typeface="+mn-lt"/>
+                <a:ea typeface="+mn-ea"/>
+                <a:cs typeface="+mn-cs"/>
+              </a:rPr>
+              <a:t>Acked</a:t>
+            </a:r>
+            <a:r>
+              <a:rPr lang="en-US" sz="1200" b="0" i="0" kern="1200" dirty="0">
+                <a:solidFill>
+                  <a:schemeClr val="tx1"/>
+                </a:solidFill>
+                <a:effectLst/>
+                <a:latin typeface="+mn-lt"/>
+                <a:ea typeface="+mn-ea"/>
+                <a:cs typeface="+mn-cs"/>
+              </a:rPr>
+              <a:t>. </a:t>
+            </a:r>
+            <a:r>
+              <a:rPr lang="en-US" sz="1200" b="1" i="0" kern="1200" dirty="0">
+                <a:solidFill>
+                  <a:schemeClr val="tx1"/>
+                </a:solidFill>
+                <a:effectLst/>
+                <a:latin typeface="+mn-lt"/>
+                <a:ea typeface="+mn-ea"/>
+                <a:cs typeface="+mn-cs"/>
+              </a:rPr>
+              <a:t>Users</a:t>
+            </a:r>
+            <a:r>
+              <a:rPr lang="en-US" sz="1200" b="0" i="0" kern="1200" dirty="0">
+                <a:solidFill>
+                  <a:schemeClr val="tx1"/>
+                </a:solidFill>
+                <a:effectLst/>
+                <a:latin typeface="+mn-lt"/>
+                <a:ea typeface="+mn-ea"/>
+                <a:cs typeface="+mn-cs"/>
+              </a:rPr>
+              <a:t> is restricted to administrators.</a:t>
+            </a:r>
+          </a:p>
+          <a:p>
+            <a:r>
+              <a:rPr lang="en-US" sz="1200" b="1" i="0" kern="1200" dirty="0" err="1">
+                <a:solidFill>
+                  <a:schemeClr val="tx1"/>
+                </a:solidFill>
+                <a:effectLst/>
+                <a:latin typeface="+mn-lt"/>
+                <a:ea typeface="+mn-ea"/>
+                <a:cs typeface="+mn-cs"/>
+              </a:rPr>
+              <a:t>ProtectedRoute</a:t>
+            </a:r>
+            <a:r>
+              <a:rPr lang="en-US" sz="1200" b="0" i="0" kern="1200" dirty="0">
+                <a:solidFill>
+                  <a:schemeClr val="tx1"/>
+                </a:solidFill>
+                <a:effectLst/>
+                <a:latin typeface="+mn-lt"/>
+                <a:ea typeface="+mn-ea"/>
+                <a:cs typeface="+mn-cs"/>
+              </a:rPr>
+              <a:t> enforces authentication, and role checks gate admin functions.</a:t>
+            </a:r>
+          </a:p>
+          <a:p>
+            <a:r>
+              <a:rPr lang="en-US" sz="1200" b="0" i="0" kern="1200" dirty="0">
+                <a:solidFill>
+                  <a:schemeClr val="tx1"/>
+                </a:solidFill>
+                <a:effectLst/>
+                <a:latin typeface="+mn-lt"/>
+                <a:ea typeface="+mn-ea"/>
+                <a:cs typeface="+mn-cs"/>
+              </a:rPr>
+              <a:t>The UI keeps </a:t>
+            </a:r>
+            <a:r>
+              <a:rPr lang="en-US" sz="1200" b="1" i="0" kern="1200" dirty="0">
+                <a:solidFill>
+                  <a:schemeClr val="tx1"/>
+                </a:solidFill>
+                <a:effectLst/>
+                <a:latin typeface="+mn-lt"/>
+                <a:ea typeface="+mn-ea"/>
+                <a:cs typeface="+mn-cs"/>
+              </a:rPr>
+              <a:t>monitoring, configuration, and control</a:t>
+            </a:r>
+            <a:r>
+              <a:rPr lang="en-US" sz="1200" b="0" i="0" kern="1200" dirty="0">
+                <a:solidFill>
+                  <a:schemeClr val="tx1"/>
+                </a:solidFill>
+                <a:effectLst/>
+                <a:latin typeface="+mn-lt"/>
+                <a:ea typeface="+mn-ea"/>
+                <a:cs typeface="+mn-cs"/>
+              </a:rPr>
+              <a:t> in one consistent experience.</a:t>
+            </a:r>
+          </a:p>
           <a:p>
             <a:endParaRPr lang="en-US" dirty="0"/>
           </a:p>
@@ -1653,318 +6421,6 @@
     <p:extLst>
       <p:ext uri="{BB962C8B-B14F-4D97-AF65-F5344CB8AC3E}">
         <p14:creationId xmlns:p14="http://schemas.microsoft.com/office/powerpoint/2010/main" val="1024086991"/>
-      </p:ext>
-    </p:extLst>
-  </p:cSld>
-  <p:clrMapOvr>
-    <a:masterClrMapping/>
-  </p:clrMapOvr>
-</p:notes>
-</file>
-
-<file path=ppt/notesSlides/notesSlide8.xml><?xml version="1.0" encoding="utf-8"?>
-<p:notes xmlns:a="http://schemas.openxmlformats.org/drawingml/2006/main" xmlns:r="http://schemas.openxmlformats.org/officeDocument/2006/relationships" xmlns:p="http://schemas.openxmlformats.org/presentationml/2006/main">
-  <p:cSld>
-    <p:spTree>
-      <p:nvGrpSpPr>
-        <p:cNvPr id="1" name=""/>
-        <p:cNvGrpSpPr/>
-        <p:nvPr/>
-      </p:nvGrpSpPr>
-      <p:grpSpPr>
-        <a:xfrm>
-          <a:off x="0" y="0"/>
-          <a:ext cx="0" cy="0"/>
-          <a:chOff x="0" y="0"/>
-          <a:chExt cx="0" cy="0"/>
-        </a:xfrm>
-      </p:grpSpPr>
-      <p:sp>
-        <p:nvSpPr>
-          <p:cNvPr id="2" name="Slide Image Placeholder 1"/>
-          <p:cNvSpPr>
-            <a:spLocks noGrp="1" noRot="1" noChangeAspect="1"/>
-          </p:cNvSpPr>
-          <p:nvPr>
-            <p:ph type="sldImg"/>
-          </p:nvPr>
-        </p:nvSpPr>
-        <p:spPr/>
-      </p:sp>
-      <p:sp>
-        <p:nvSpPr>
-          <p:cNvPr id="3" name="Notes Placeholder 2"/>
-          <p:cNvSpPr>
-            <a:spLocks noGrp="1"/>
-          </p:cNvSpPr>
-          <p:nvPr>
-            <p:ph type="body" idx="1"/>
-          </p:nvPr>
-        </p:nvSpPr>
-        <p:spPr/>
-        <p:txBody>
-          <a:bodyPr/>
-          <a:lstStyle/>
-          <a:p>
-            <a:endParaRPr lang="en-US" dirty="0"/>
-          </a:p>
-        </p:txBody>
-      </p:sp>
-      <p:sp>
-        <p:nvSpPr>
-          <p:cNvPr id="4" name="Slide Number Placeholder 3"/>
-          <p:cNvSpPr>
-            <a:spLocks noGrp="1"/>
-          </p:cNvSpPr>
-          <p:nvPr>
-            <p:ph type="sldNum" sz="quarter" idx="10"/>
-          </p:nvPr>
-        </p:nvSpPr>
-        <p:spPr/>
-        <p:txBody>
-          <a:bodyPr/>
-          <a:lstStyle/>
-          <a:p>
-            <a:pPr marL="0" marR="0" lvl="0" indent="0" algn="l" defTabSz="914400" rtl="0" eaLnBrk="1" fontAlgn="auto" latinLnBrk="0" hangingPunct="1">
-              <a:lnSpc>
-                <a:spcPct val="100000"/>
-              </a:lnSpc>
-              <a:spcBef>
-                <a:spcPts val="0"/>
-              </a:spcBef>
-              <a:spcAft>
-                <a:spcPts val="0"/>
-              </a:spcAft>
-              <a:buClrTx/>
-              <a:buSzTx/>
-              <a:buFontTx/>
-              <a:buNone/>
-              <a:tabLst/>
-              <a:defRPr/>
-            </a:pPr>
-            <a:fld id="{F7021451-1387-4CA6-816F-3879F97B5CBC}" type="slidenum">
-              <a:rPr kumimoji="0" lang="en-US" sz="1800" b="0" i="0" u="none" strike="noStrike" kern="1200" cap="none" spc="0" normalizeH="0" baseline="0" noProof="0">
-                <a:ln>
-                  <a:noFill/>
-                </a:ln>
-                <a:solidFill>
-                  <a:prstClr val="black"/>
-                </a:solidFill>
-                <a:effectLst/>
-                <a:uLnTx/>
-                <a:uFillTx/>
-                <a:latin typeface="Aptos" panose="02110004020202020204"/>
-                <a:ea typeface="+mn-ea"/>
-                <a:cs typeface="+mn-cs"/>
-              </a:rPr>
-              <a:pPr marL="0" marR="0" lvl="0" indent="0" algn="l" defTabSz="914400" rtl="0" eaLnBrk="1" fontAlgn="auto" latinLnBrk="0" hangingPunct="1">
-                <a:lnSpc>
-                  <a:spcPct val="100000"/>
-                </a:lnSpc>
-                <a:spcBef>
-                  <a:spcPts val="0"/>
-                </a:spcBef>
-                <a:spcAft>
-                  <a:spcPts val="0"/>
-                </a:spcAft>
-                <a:buClrTx/>
-                <a:buSzTx/>
-                <a:buFontTx/>
-                <a:buNone/>
-                <a:tabLst/>
-                <a:defRPr/>
-              </a:pPr>
-              <a:t>10</a:t>
-            </a:fld>
-            <a:endParaRPr kumimoji="0" lang="en-US" sz="1800" b="0" i="0" u="none" strike="noStrike" kern="1200" cap="none" spc="0" normalizeH="0" baseline="0" noProof="0">
-              <a:ln>
-                <a:noFill/>
-              </a:ln>
-              <a:solidFill>
-                <a:prstClr val="black"/>
-              </a:solidFill>
-              <a:effectLst/>
-              <a:uLnTx/>
-              <a:uFillTx/>
-              <a:latin typeface="Aptos" panose="02110004020202020204"/>
-              <a:ea typeface="+mn-ea"/>
-              <a:cs typeface="+mn-cs"/>
-            </a:endParaRPr>
-          </a:p>
-        </p:txBody>
-      </p:sp>
-    </p:spTree>
-    <p:extLst>
-      <p:ext uri="{BB962C8B-B14F-4D97-AF65-F5344CB8AC3E}">
-        <p14:creationId xmlns:p14="http://schemas.microsoft.com/office/powerpoint/2010/main" val="1024086991"/>
-      </p:ext>
-    </p:extLst>
-  </p:cSld>
-  <p:clrMapOvr>
-    <a:masterClrMapping/>
-  </p:clrMapOvr>
-</p:notes>
-</file>
-
-<file path=ppt/notesSlides/notesSlide9.xml><?xml version="1.0" encoding="utf-8"?>
-<p:notes xmlns:a="http://schemas.openxmlformats.org/drawingml/2006/main" xmlns:r="http://schemas.openxmlformats.org/officeDocument/2006/relationships" xmlns:p="http://schemas.openxmlformats.org/presentationml/2006/main">
-  <p:cSld>
-    <p:spTree>
-      <p:nvGrpSpPr>
-        <p:cNvPr id="1" name="">
-          <a:extLst>
-            <a:ext uri="{FF2B5EF4-FFF2-40B4-BE49-F238E27FC236}">
-              <a16:creationId xmlns:a16="http://schemas.microsoft.com/office/drawing/2014/main" id="{88344A80-399B-01D8-B9E5-8EDE1264388A}"/>
-            </a:ext>
-          </a:extLst>
-        </p:cNvPr>
-        <p:cNvGrpSpPr/>
-        <p:nvPr/>
-      </p:nvGrpSpPr>
-      <p:grpSpPr>
-        <a:xfrm>
-          <a:off x="0" y="0"/>
-          <a:ext cx="0" cy="0"/>
-          <a:chOff x="0" y="0"/>
-          <a:chExt cx="0" cy="0"/>
-        </a:xfrm>
-      </p:grpSpPr>
-      <p:sp>
-        <p:nvSpPr>
-          <p:cNvPr id="2" name="Slide Image Placeholder 1">
-            <a:extLst>
-              <a:ext uri="{FF2B5EF4-FFF2-40B4-BE49-F238E27FC236}">
-                <a16:creationId xmlns:a16="http://schemas.microsoft.com/office/drawing/2014/main" id="{D165DEE9-7FFB-A78F-0322-09522867206F}"/>
-              </a:ext>
-            </a:extLst>
-          </p:cNvPr>
-          <p:cNvSpPr>
-            <a:spLocks noGrp="1" noRot="1" noChangeAspect="1"/>
-          </p:cNvSpPr>
-          <p:nvPr>
-            <p:ph type="sldImg"/>
-          </p:nvPr>
-        </p:nvSpPr>
-        <p:spPr/>
-      </p:sp>
-      <p:sp>
-        <p:nvSpPr>
-          <p:cNvPr id="3" name="Notes Placeholder 2">
-            <a:extLst>
-              <a:ext uri="{FF2B5EF4-FFF2-40B4-BE49-F238E27FC236}">
-                <a16:creationId xmlns:a16="http://schemas.microsoft.com/office/drawing/2014/main" id="{397987AD-CD64-C12D-E630-A409E1E748CD}"/>
-              </a:ext>
-            </a:extLst>
-          </p:cNvPr>
-          <p:cNvSpPr>
-            <a:spLocks noGrp="1"/>
-          </p:cNvSpPr>
-          <p:nvPr>
-            <p:ph type="body" idx="1"/>
-          </p:nvPr>
-        </p:nvSpPr>
-        <p:spPr/>
-        <p:txBody>
-          <a:bodyPr/>
-          <a:lstStyle/>
-          <a:p>
-            <a:endParaRPr lang="en-US" dirty="0"/>
-          </a:p>
-        </p:txBody>
-      </p:sp>
-      <p:sp>
-        <p:nvSpPr>
-          <p:cNvPr id="4" name="Slide Number Placeholder 3">
-            <a:extLst>
-              <a:ext uri="{FF2B5EF4-FFF2-40B4-BE49-F238E27FC236}">
-                <a16:creationId xmlns:a16="http://schemas.microsoft.com/office/drawing/2014/main" id="{ED94EE0E-FEA5-A27F-3ADB-94C212932BA1}"/>
-              </a:ext>
-            </a:extLst>
-          </p:cNvPr>
-          <p:cNvSpPr>
-            <a:spLocks noGrp="1"/>
-          </p:cNvSpPr>
-          <p:nvPr>
-            <p:ph type="sldNum" sz="quarter" idx="10"/>
-          </p:nvPr>
-        </p:nvSpPr>
-        <p:spPr/>
-        <p:txBody>
-          <a:bodyPr/>
-          <a:lstStyle/>
-          <a:p>
-            <a:pPr marL="0" marR="0" lvl="0" indent="0" algn="l" defTabSz="914400" rtl="0" eaLnBrk="1" fontAlgn="auto" latinLnBrk="0" hangingPunct="1">
-              <a:lnSpc>
-                <a:spcPct val="100000"/>
-              </a:lnSpc>
-              <a:spcBef>
-                <a:spcPts val="0"/>
-              </a:spcBef>
-              <a:spcAft>
-                <a:spcPts val="0"/>
-              </a:spcAft>
-              <a:buClrTx/>
-              <a:buSzTx/>
-              <a:buFontTx/>
-              <a:buNone/>
-              <a:tabLst/>
-              <a:defRPr/>
-            </a:pPr>
-            <a:fld id="{F7021451-1387-4CA6-816F-3879F97B5CBC}" type="slidenum">
-              <a:rPr kumimoji="0" lang="en-US" sz="1800" b="0" i="0" u="none" strike="noStrike" kern="1200" cap="none" spc="0" normalizeH="0" baseline="0" noProof="0">
-                <a:ln>
-                  <a:noFill/>
-                </a:ln>
-                <a:solidFill>
-                  <a:prstClr val="black"/>
-                </a:solidFill>
-                <a:effectLst/>
-                <a:uLnTx/>
-                <a:uFillTx/>
-                <a:latin typeface="Aptos" panose="02110004020202020204"/>
-                <a:ea typeface="+mn-ea"/>
-                <a:cs typeface="+mn-cs"/>
-              </a:rPr>
-              <a:pPr marL="0" marR="0" lvl="0" indent="0" algn="l" defTabSz="914400" rtl="0" eaLnBrk="1" fontAlgn="auto" latinLnBrk="0" hangingPunct="1">
-                <a:lnSpc>
-                  <a:spcPct val="100000"/>
-                </a:lnSpc>
-                <a:spcBef>
-                  <a:spcPts val="0"/>
-                </a:spcBef>
-                <a:spcAft>
-                  <a:spcPts val="0"/>
-                </a:spcAft>
-                <a:buClrTx/>
-                <a:buSzTx/>
-                <a:buFontTx/>
-                <a:buNone/>
-                <a:tabLst/>
-                <a:defRPr/>
-              </a:pPr>
-              <a:t>11</a:t>
-            </a:fld>
-            <a:endParaRPr kumimoji="0" lang="en-US" sz="1800" b="0" i="0" u="none" strike="noStrike" kern="1200" cap="none" spc="0" normalizeH="0" baseline="0" noProof="0">
-              <a:ln>
-                <a:noFill/>
-              </a:ln>
-              <a:solidFill>
-                <a:prstClr val="black"/>
-              </a:solidFill>
-              <a:effectLst/>
-              <a:uLnTx/>
-              <a:uFillTx/>
-              <a:latin typeface="Aptos" panose="02110004020202020204"/>
-              <a:ea typeface="+mn-ea"/>
-              <a:cs typeface="+mn-cs"/>
-            </a:endParaRPr>
-          </a:p>
-        </p:txBody>
-      </p:sp>
-    </p:spTree>
-    <p:extLst>
-      <p:ext uri="{BB962C8B-B14F-4D97-AF65-F5344CB8AC3E}">
-        <p14:creationId xmlns:p14="http://schemas.microsoft.com/office/powerpoint/2010/main" val="3833103652"/>
       </p:ext>
     </p:extLst>
   </p:cSld>
@@ -11995,11 +16451,205 @@
           </a:p>
         </p:txBody>
       </p:sp>
+      <p:pic>
+        <p:nvPicPr>
+          <p:cNvPr id="13" name="Video 12">
+            <a:hlinkClick r:id="" action="ppaction://media"/>
+            <a:extLst>
+              <a:ext uri="{FF2B5EF4-FFF2-40B4-BE49-F238E27FC236}">
+                <a16:creationId xmlns:a16="http://schemas.microsoft.com/office/drawing/2014/main" id="{5D28CF58-B785-A60E-A2A3-031E49122832}"/>
+              </a:ext>
+            </a:extLst>
+          </p:cNvPr>
+          <p:cNvPicPr>
+            <a:picLocks noChangeAspect="1"/>
+          </p:cNvPicPr>
+          <p:nvPr>
+            <a:videoFile r:link="rId2"/>
+            <p:extLst>
+              <p:ext uri="{DAA4B4D4-6D71-4841-9C94-3DE7FCFB9230}">
+                <p14:media xmlns:p14="http://schemas.microsoft.com/office/powerpoint/2010/main" r:embed="rId1"/>
+              </p:ext>
+              <p:ext uri="{42D2F446-02D8-4167-A562-619A0277C38B}">
+                <p15:isNarration xmlns:p15="http://schemas.microsoft.com/office/powerpoint/2012/main" val="1"/>
+              </p:ext>
+            </p:extLst>
+          </p:nvPr>
+        </p:nvPicPr>
+        <p:blipFill>
+          <a:blip r:embed="rId5"/>
+          <a:srcRect l="21875" r="21875"/>
+          <a:stretch>
+            <a:fillRect/>
+          </a:stretch>
+        </p:blipFill>
+        <p:spPr>
+          <a:xfrm>
+            <a:off x="10049129" y="4718304"/>
+            <a:ext cx="2057400" cy="2057400"/>
+          </a:xfrm>
+          <a:prstGeom prst="ellipse">
+            <a:avLst/>
+          </a:prstGeom>
+          <a:ln>
+            <a:noFill/>
+          </a:ln>
+          <a:effectLst>
+            <a:softEdge rad="127000"/>
+          </a:effectLst>
+        </p:spPr>
+      </p:pic>
     </p:spTree>
   </p:cSld>
   <p:clrMapOvr>
     <a:masterClrMapping/>
   </p:clrMapOvr>
+  <mc:AlternateContent xmlns:mc="http://schemas.openxmlformats.org/markup-compatibility/2006">
+    <mc:Choice xmlns:p14="http://schemas.microsoft.com/office/powerpoint/2010/main" Requires="p14">
+      <p:transition spd="slow" p14:dur="2000" advTm="23957"/>
+    </mc:Choice>
+    <mc:Fallback>
+      <p:transition spd="slow" advTm="23957"/>
+    </mc:Fallback>
+  </mc:AlternateContent>
+  <p:timing>
+    <p:tnLst>
+      <p:par>
+        <p:cTn id="1" dur="indefinite" restart="never" nodeType="tmRoot">
+          <p:childTnLst>
+            <p:seq concurrent="1" nextAc="seek">
+              <p:cTn id="2" dur="indefinite" nodeType="mainSeq">
+                <p:childTnLst>
+                  <p:par>
+                    <p:cTn id="3" fill="hold">
+                      <p:stCondLst>
+                        <p:cond delay="indefinite"/>
+                        <p:cond evt="onBegin" delay="0">
+                          <p:tn val="2"/>
+                        </p:cond>
+                      </p:stCondLst>
+                      <p:childTnLst>
+                        <p:par>
+                          <p:cTn id="4" fill="hold">
+                            <p:stCondLst>
+                              <p:cond delay="0"/>
+                            </p:stCondLst>
+                            <p:childTnLst>
+                              <p:par>
+                                <p:cTn id="5" presetID="1" presetClass="mediacall" presetSubtype="0" fill="hold" nodeType="afterEffect">
+                                  <p:stCondLst>
+                                    <p:cond delay="0"/>
+                                  </p:stCondLst>
+                                  <p:childTnLst>
+                                    <p:cmd type="call" cmd="playFrom(0.0)">
+                                      <p:cBhvr>
+                                        <p:cTn id="6" dur="1" fill="hold"/>
+                                        <p:tgtEl>
+                                          <p:spTgt spid="13"/>
+                                        </p:tgtEl>
+                                      </p:cBhvr>
+                                    </p:cmd>
+                                  </p:childTnLst>
+                                </p:cTn>
+                              </p:par>
+                            </p:childTnLst>
+                          </p:cTn>
+                        </p:par>
+                      </p:childTnLst>
+                    </p:cTn>
+                  </p:par>
+                </p:childTnLst>
+              </p:cTn>
+              <p:prevCondLst>
+                <p:cond evt="onPrev" delay="0">
+                  <p:tgtEl>
+                    <p:sldTgt/>
+                  </p:tgtEl>
+                </p:cond>
+              </p:prevCondLst>
+              <p:nextCondLst>
+                <p:cond evt="onNext" delay="0">
+                  <p:tgtEl>
+                    <p:sldTgt/>
+                  </p:tgtEl>
+                </p:cond>
+              </p:nextCondLst>
+            </p:seq>
+            <p:video>
+              <p:cMediaNode vol="80000">
+                <p:cTn id="7" fill="hold" display="0">
+                  <p:stCondLst>
+                    <p:cond delay="indefinite"/>
+                  </p:stCondLst>
+                </p:cTn>
+                <p:tgtEl>
+                  <p:spTgt spid="13"/>
+                </p:tgtEl>
+              </p:cMediaNode>
+            </p:video>
+            <p:seq concurrent="1" nextAc="seek">
+              <p:cTn id="8" restart="whenNotActive" fill="hold" evtFilter="cancelBubble" nodeType="interactiveSeq">
+                <p:stCondLst>
+                  <p:cond evt="onClick" delay="0">
+                    <p:tgtEl>
+                      <p:spTgt spid="13"/>
+                    </p:tgtEl>
+                  </p:cond>
+                </p:stCondLst>
+                <p:endSync evt="end" delay="0">
+                  <p:rtn val="all"/>
+                </p:endSync>
+                <p:childTnLst>
+                  <p:par>
+                    <p:cTn id="9" fill="hold">
+                      <p:stCondLst>
+                        <p:cond delay="0"/>
+                      </p:stCondLst>
+                      <p:childTnLst>
+                        <p:par>
+                          <p:cTn id="10" fill="hold">
+                            <p:stCondLst>
+                              <p:cond delay="0"/>
+                            </p:stCondLst>
+                            <p:childTnLst>
+                              <p:par>
+                                <p:cTn id="11" presetID="2" presetClass="mediacall" presetSubtype="0" fill="hold" nodeType="clickEffect">
+                                  <p:stCondLst>
+                                    <p:cond delay="0"/>
+                                  </p:stCondLst>
+                                  <p:childTnLst>
+                                    <p:cmd type="call" cmd="togglePause">
+                                      <p:cBhvr>
+                                        <p:cTn id="12" dur="1" fill="hold"/>
+                                        <p:tgtEl>
+                                          <p:spTgt spid="13"/>
+                                        </p:tgtEl>
+                                      </p:cBhvr>
+                                    </p:cmd>
+                                  </p:childTnLst>
+                                </p:cTn>
+                              </p:par>
+                            </p:childTnLst>
+                          </p:cTn>
+                        </p:par>
+                      </p:childTnLst>
+                    </p:cTn>
+                  </p:par>
+                </p:childTnLst>
+              </p:cTn>
+              <p:nextCondLst>
+                <p:cond evt="onClick" delay="0">
+                  <p:tgtEl>
+                    <p:spTgt spid="13"/>
+                  </p:tgtEl>
+                </p:cond>
+              </p:nextCondLst>
+            </p:seq>
+          </p:childTnLst>
+        </p:cTn>
+      </p:par>
+    </p:tnLst>
+  </p:timing>
 </p:sld>
 </file>
 
@@ -22953,7 +27603,7 @@
           <p:nvPr/>
         </p:nvPicPr>
         <p:blipFill>
-          <a:blip r:embed="rId2"/>
+          <a:blip r:embed="rId3"/>
           <a:stretch>
             <a:fillRect/>
           </a:stretch>
@@ -23158,7 +27808,7 @@
           <p:nvPr/>
         </p:nvPicPr>
         <p:blipFill>
-          <a:blip r:embed="rId3"/>
+          <a:blip r:embed="rId4"/>
           <a:stretch>
             <a:fillRect/>
           </a:stretch>
@@ -23410,7 +28060,7 @@
           <p:nvPr/>
         </p:nvPicPr>
         <p:blipFill>
-          <a:blip r:embed="rId4"/>
+          <a:blip r:embed="rId5"/>
           <a:stretch>
             <a:fillRect/>
           </a:stretch>
@@ -23667,7 +28317,7 @@
           <p:nvPr/>
         </p:nvPicPr>
         <p:blipFill>
-          <a:blip r:embed="rId5"/>
+          <a:blip r:embed="rId6"/>
           <a:stretch>
             <a:fillRect/>
           </a:stretch>
@@ -23894,7 +28544,7 @@
           <p:nvPr/>
         </p:nvPicPr>
         <p:blipFill>
-          <a:blip r:embed="rId6"/>
+          <a:blip r:embed="rId7"/>
           <a:stretch>
             <a:fillRect/>
           </a:stretch>
@@ -24121,7 +28771,7 @@
           <p:nvPr/>
         </p:nvPicPr>
         <p:blipFill>
-          <a:blip r:embed="rId7"/>
+          <a:blip r:embed="rId8"/>
           <a:stretch>
             <a:fillRect/>
           </a:stretch>
@@ -24619,7 +29269,7 @@
           <p:nvPr/>
         </p:nvPicPr>
         <p:blipFill>
-          <a:blip r:embed="rId2"/>
+          <a:blip r:embed="rId3"/>
           <a:stretch>
             <a:fillRect/>
           </a:stretch>
@@ -25049,7 +29699,7 @@
           <p:nvPr/>
         </p:nvPicPr>
         <p:blipFill>
-          <a:blip r:embed="rId3"/>
+          <a:blip r:embed="rId4"/>
           <a:stretch>
             <a:fillRect/>
           </a:stretch>
@@ -25499,7 +30149,7 @@
           <p:nvPr/>
         </p:nvPicPr>
         <p:blipFill>
-          <a:blip r:embed="rId4"/>
+          <a:blip r:embed="rId5"/>
           <a:stretch>
             <a:fillRect/>
           </a:stretch>
@@ -25811,7 +30461,7 @@
           <p:nvPr/>
         </p:nvPicPr>
         <p:blipFill>
-          <a:blip r:embed="rId5"/>
+          <a:blip r:embed="rId6"/>
           <a:stretch>
             <a:fillRect/>
           </a:stretch>
@@ -26103,7 +30753,7 @@
           <p:nvPr/>
         </p:nvPicPr>
         <p:blipFill>
-          <a:blip r:embed="rId6"/>
+          <a:blip r:embed="rId7"/>
           <a:stretch>
             <a:fillRect/>
           </a:stretch>
@@ -26395,7 +31045,7 @@
           <p:nvPr/>
         </p:nvPicPr>
         <p:blipFill>
-          <a:blip r:embed="rId7"/>
+          <a:blip r:embed="rId8"/>
           <a:stretch>
             <a:fillRect/>
           </a:stretch>

--- a/Documents/Presentation/Capstone Project Presentation.pptx
+++ b/Documents/Presentation/Capstone Project Presentation.pptx
@@ -224,7 +224,7 @@
           <a:p>
             <a:fld id="{01EDE3E3-4DC4-4033-AB14-8C688262196C}" type="datetimeFigureOut">
               <a:rPr lang="en-US" smtClean="0"/>
-              <a:t>5/23/2026</a:t>
+              <a:t>6/10/2026</a:t>
             </a:fld>
             <a:endParaRPr lang="en-US"/>
           </a:p>
@@ -662,7 +662,7 @@
                 <a:ea typeface="+mn-ea"/>
                 <a:cs typeface="+mn-cs"/>
               </a:rPr>
-              <a:t>: a web application that monitors sensors in real time, stores historical data, raises alerts, and controls actuators remotely. It is aimed at sites that need equipment monitoring without the cost and lock-in of traditional SCADA</a:t>
+              <a:t>: a web application that monitors sensors in real time, stores historical data, raises alerts, and controls actuators remotely. It is aimed at sites that need equipment monitoring without the cost and lock-in of traditional SCADA (Supervisory Control and Data Acquisition) software</a:t>
             </a:r>
           </a:p>
           <a:p>
@@ -751,220 +751,39 @@
           <a:lstStyle/>
           <a:p>
             <a:r>
-              <a:rPr lang="en-US" sz="1200" b="0" i="0" kern="1200" dirty="0">
-                <a:solidFill>
-                  <a:schemeClr val="tx1"/>
-                </a:solidFill>
-                <a:effectLst/>
-                <a:latin typeface="+mn-lt"/>
-                <a:ea typeface="+mn-ea"/>
-                <a:cs typeface="+mn-cs"/>
-              </a:rPr>
-              <a:t>In summary, four areas show what was implemented.</a:t>
-            </a:r>
-          </a:p>
-          <a:p>
-            <a:r>
-              <a:rPr lang="en-US" sz="1200" b="1" i="0" kern="1200" dirty="0">
-                <a:solidFill>
-                  <a:schemeClr val="tx1"/>
-                </a:solidFill>
-                <a:effectLst/>
-                <a:latin typeface="+mn-lt"/>
-                <a:ea typeface="+mn-ea"/>
-                <a:cs typeface="+mn-cs"/>
-              </a:rPr>
-              <a:t>Real-time streaming</a:t>
-            </a:r>
-            <a:r>
-              <a:rPr lang="en-US" sz="1200" b="0" i="0" kern="1200" dirty="0">
-                <a:solidFill>
-                  <a:schemeClr val="tx1"/>
-                </a:solidFill>
-                <a:effectLst/>
-                <a:latin typeface="+mn-lt"/>
-                <a:ea typeface="+mn-ea"/>
-                <a:cs typeface="+mn-cs"/>
-              </a:rPr>
-              <a:t> uses </a:t>
-            </a:r>
-            <a:r>
-              <a:rPr lang="en-US" sz="1200" b="0" i="0" kern="1200" dirty="0" err="1">
-                <a:solidFill>
-                  <a:schemeClr val="tx1"/>
-                </a:solidFill>
-                <a:effectLst/>
-                <a:latin typeface="+mn-lt"/>
-                <a:ea typeface="+mn-ea"/>
-                <a:cs typeface="+mn-cs"/>
-              </a:rPr>
-              <a:t>SignalR</a:t>
-            </a:r>
-            <a:r>
-              <a:rPr lang="en-US" sz="1200" b="0" i="0" kern="1200" dirty="0">
-                <a:solidFill>
-                  <a:schemeClr val="tx1"/>
-                </a:solidFill>
-                <a:effectLst/>
-                <a:latin typeface="+mn-lt"/>
-                <a:ea typeface="+mn-ea"/>
-                <a:cs typeface="+mn-cs"/>
-              </a:rPr>
-              <a:t> with roughly </a:t>
-            </a:r>
-            <a:r>
-              <a:rPr lang="en-US" sz="1200" b="1" i="0" kern="1200" dirty="0">
-                <a:solidFill>
-                  <a:schemeClr val="tx1"/>
-                </a:solidFill>
-                <a:effectLst/>
-                <a:latin typeface="+mn-lt"/>
-                <a:ea typeface="+mn-ea"/>
-                <a:cs typeface="+mn-cs"/>
-              </a:rPr>
-              <a:t>one- to two-second</a:t>
-            </a:r>
-            <a:r>
-              <a:rPr lang="en-US" sz="1200" b="0" i="0" kern="1200" dirty="0">
-                <a:solidFill>
-                  <a:schemeClr val="tx1"/>
-                </a:solidFill>
-                <a:effectLst/>
-                <a:latin typeface="+mn-lt"/>
-                <a:ea typeface="+mn-ea"/>
-                <a:cs typeface="+mn-cs"/>
-              </a:rPr>
-              <a:t> updates, multi-device subscriptions, and rolling live charts from </a:t>
-            </a:r>
-            <a:r>
-              <a:rPr lang="en-US" sz="1200" b="1" i="0" kern="1200" dirty="0">
-                <a:solidFill>
-                  <a:schemeClr val="tx1"/>
-                </a:solidFill>
-                <a:effectLst/>
-                <a:latin typeface="+mn-lt"/>
-                <a:ea typeface="+mn-ea"/>
-                <a:cs typeface="+mn-cs"/>
-              </a:rPr>
-              <a:t>two seconds to thirty minutes</a:t>
-            </a:r>
-            <a:r>
-              <a:rPr lang="en-US" sz="1200" b="0" i="0" kern="1200" dirty="0">
-                <a:solidFill>
-                  <a:schemeClr val="tx1"/>
-                </a:solidFill>
-                <a:effectLst/>
-                <a:latin typeface="+mn-lt"/>
-                <a:ea typeface="+mn-ea"/>
-                <a:cs typeface="+mn-cs"/>
-              </a:rPr>
-              <a:t>.</a:t>
-            </a:r>
-          </a:p>
-          <a:p>
-            <a:r>
-              <a:rPr lang="en-US" sz="1200" b="1" i="0" kern="1200" dirty="0">
-                <a:solidFill>
-                  <a:schemeClr val="tx1"/>
-                </a:solidFill>
-                <a:effectLst/>
-                <a:latin typeface="+mn-lt"/>
-                <a:ea typeface="+mn-ea"/>
-                <a:cs typeface="+mn-cs"/>
-              </a:rPr>
-              <a:t>Visualization</a:t>
-            </a:r>
-            <a:r>
-              <a:rPr lang="en-US" sz="1200" b="0" i="0" kern="1200" dirty="0">
-                <a:solidFill>
-                  <a:schemeClr val="tx1"/>
-                </a:solidFill>
-                <a:effectLst/>
-                <a:latin typeface="+mn-lt"/>
-                <a:ea typeface="+mn-ea"/>
-                <a:cs typeface="+mn-cs"/>
-              </a:rPr>
-              <a:t> includes Recharts line trends, analog gauges, discrete indicators, and flexible history ranges.</a:t>
-            </a:r>
-          </a:p>
-          <a:p>
-            <a:r>
-              <a:rPr lang="en-US" sz="1200" b="1" i="0" kern="1200" dirty="0">
-                <a:solidFill>
-                  <a:schemeClr val="tx1"/>
-                </a:solidFill>
-                <a:effectLst/>
-                <a:latin typeface="+mn-lt"/>
-                <a:ea typeface="+mn-ea"/>
-                <a:cs typeface="+mn-cs"/>
-              </a:rPr>
-              <a:t>Alerting</a:t>
-            </a:r>
-            <a:r>
-              <a:rPr lang="en-US" sz="1200" b="0" i="0" kern="1200" dirty="0">
-                <a:solidFill>
-                  <a:schemeClr val="tx1"/>
-                </a:solidFill>
-                <a:effectLst/>
-                <a:latin typeface="+mn-lt"/>
-                <a:ea typeface="+mn-ea"/>
-                <a:cs typeface="+mn-cs"/>
-              </a:rPr>
-              <a:t> supports threshold, range, and change rules, with live notifications and acknowledge-and-resolve workflow.</a:t>
-            </a:r>
-          </a:p>
-          <a:p>
-            <a:r>
-              <a:rPr lang="en-US" sz="1200" b="1" i="0" kern="1200" dirty="0">
-                <a:solidFill>
-                  <a:schemeClr val="tx1"/>
-                </a:solidFill>
-                <a:effectLst/>
-                <a:latin typeface="+mn-lt"/>
-                <a:ea typeface="+mn-ea"/>
-                <a:cs typeface="+mn-cs"/>
-              </a:rPr>
-              <a:t>Setup and control</a:t>
-            </a:r>
-            <a:r>
-              <a:rPr lang="en-US" sz="1200" b="0" i="0" kern="1200" dirty="0">
-                <a:solidFill>
-                  <a:schemeClr val="tx1"/>
-                </a:solidFill>
-                <a:effectLst/>
-                <a:latin typeface="+mn-lt"/>
-                <a:ea typeface="+mn-ea"/>
-                <a:cs typeface="+mn-cs"/>
-              </a:rPr>
-              <a:t> covers devices, sensors, and actuators, online/offline from last activity, and </a:t>
-            </a:r>
-            <a:r>
-              <a:rPr lang="en-US" sz="1200" b="1" i="0" kern="1200" dirty="0">
-                <a:solidFill>
-                  <a:schemeClr val="tx1"/>
-                </a:solidFill>
-                <a:effectLst/>
-                <a:latin typeface="+mn-lt"/>
-                <a:ea typeface="+mn-ea"/>
-                <a:cs typeface="+mn-cs"/>
-              </a:rPr>
-              <a:t>MQTT commands</a:t>
-            </a:r>
-            <a:r>
-              <a:rPr lang="en-US" sz="1200" b="0" i="0" kern="1200" dirty="0">
-                <a:solidFill>
-                  <a:schemeClr val="tx1"/>
-                </a:solidFill>
-                <a:effectLst/>
-                <a:latin typeface="+mn-lt"/>
-                <a:ea typeface="+mn-ea"/>
-                <a:cs typeface="+mn-cs"/>
-              </a:rPr>
-              <a:t> with history.</a:t>
-            </a:r>
-          </a:p>
-          <a:p>
-            <a:endParaRPr lang="en-US" dirty="0"/>
+              <a:rPr lang="en-US" dirty="0"/>
+              <a:t>This slide summarizes the key capabilities delivered by the system.</a:t>
+            </a:r>
+          </a:p>
+          <a:p>
+            <a:r>
+              <a:rPr lang="en-US" dirty="0"/>
+              <a:t>The first area is setup and control, where users can configure devices, sensors, and actuators, monitor device connectivity, and send commands with full command history tracking.</a:t>
+            </a:r>
+          </a:p>
+          <a:p>
+            <a:r>
+              <a:rPr lang="en-US" dirty="0"/>
+              <a:t>The second area is real-time monitoring. Sensor readings and alerts are streamed to the dashboard with near real-time updates, allowing users to monitor multiple devices without refreshing the page.</a:t>
+            </a:r>
+          </a:p>
+          <a:p>
+            <a:r>
+              <a:rPr lang="en-US" dirty="0"/>
+              <a:t>The third area is dashboard visualization. Users can view live charts, analog gauges, discrete status indicators, and historical data across multiple time ranges.</a:t>
+            </a:r>
+          </a:p>
+          <a:p>
+            <a:r>
+              <a:rPr lang="en-US" dirty="0"/>
+              <a:t>Finally, the alerting feature supports threshold, range, and change-based rules, with live notifications, acknowledgment workflows, and historical alert tracking.</a:t>
+            </a:r>
+          </a:p>
+          <a:p>
+            <a:r>
+              <a:rPr lang="en-US" dirty="0"/>
+              <a:t>Together, these features provide a complete solution for monitoring, alerting, and controlling IoT devices through a single web application.</a:t>
+            </a:r>
           </a:p>
         </p:txBody>
       </p:sp>
@@ -1127,502 +946,21 @@
           <a:lstStyle/>
           <a:p>
             <a:r>
-              <a:rPr lang="en-US" sz="1200" b="0" i="0" kern="1200" dirty="0">
-                <a:solidFill>
-                  <a:schemeClr val="tx1"/>
-                </a:solidFill>
-                <a:effectLst/>
-                <a:latin typeface="+mn-lt"/>
-                <a:ea typeface="+mn-ea"/>
-                <a:cs typeface="+mn-cs"/>
-              </a:rPr>
-              <a:t>I will walk through the demo checklist. The device is already registered and connected over MQTT.</a:t>
-            </a:r>
-          </a:p>
-          <a:p>
-            <a:r>
-              <a:rPr lang="en-US" sz="1200" b="1" i="0" kern="1200" dirty="0">
-                <a:solidFill>
-                  <a:schemeClr val="tx1"/>
-                </a:solidFill>
-                <a:effectLst/>
-                <a:latin typeface="+mn-lt"/>
-                <a:ea typeface="+mn-ea"/>
-                <a:cs typeface="+mn-cs"/>
-              </a:rPr>
-              <a:t>Step one:</a:t>
-            </a:r>
-            <a:r>
-              <a:rPr lang="en-US" sz="1200" b="0" i="0" kern="1200" dirty="0">
-                <a:solidFill>
-                  <a:schemeClr val="tx1"/>
-                </a:solidFill>
-                <a:effectLst/>
-                <a:latin typeface="+mn-lt"/>
-                <a:ea typeface="+mn-ea"/>
-                <a:cs typeface="+mn-cs"/>
-              </a:rPr>
-              <a:t> the application is configured with sensors, actuators, and an alert rule.</a:t>
-            </a:r>
-          </a:p>
-          <a:p>
-            <a:r>
-              <a:rPr lang="en-US" sz="1200" b="1" i="0" kern="1200" dirty="0">
-                <a:solidFill>
-                  <a:schemeClr val="tx1"/>
-                </a:solidFill>
-                <a:effectLst/>
-                <a:latin typeface="+mn-lt"/>
-                <a:ea typeface="+mn-ea"/>
-                <a:cs typeface="+mn-cs"/>
-              </a:rPr>
-              <a:t>Step two:</a:t>
-            </a:r>
-            <a:r>
-              <a:rPr lang="en-US" sz="1200" b="0" i="0" kern="1200" dirty="0">
-                <a:solidFill>
-                  <a:schemeClr val="tx1"/>
-                </a:solidFill>
-                <a:effectLst/>
-                <a:latin typeface="+mn-lt"/>
-                <a:ea typeface="+mn-ea"/>
-                <a:cs typeface="+mn-cs"/>
-              </a:rPr>
-              <a:t> the </a:t>
-            </a:r>
-            <a:r>
-              <a:rPr lang="en-US" sz="1200" b="1" i="0" kern="1200" dirty="0">
-                <a:solidFill>
-                  <a:schemeClr val="tx1"/>
-                </a:solidFill>
-                <a:effectLst/>
-                <a:latin typeface="+mn-lt"/>
-                <a:ea typeface="+mn-ea"/>
-                <a:cs typeface="+mn-cs"/>
-              </a:rPr>
-              <a:t>Arduino</a:t>
-            </a:r>
-            <a:r>
-              <a:rPr lang="en-US" sz="1200" b="0" i="0" kern="1200" dirty="0">
-                <a:solidFill>
-                  <a:schemeClr val="tx1"/>
-                </a:solidFill>
-                <a:effectLst/>
-                <a:latin typeface="+mn-lt"/>
-                <a:ea typeface="+mn-ea"/>
-                <a:cs typeface="+mn-cs"/>
-              </a:rPr>
-              <a:t> publishes readings to the local MQTT broker about once per second.</a:t>
-            </a:r>
-          </a:p>
-          <a:p>
-            <a:r>
-              <a:rPr lang="en-US" sz="1200" b="1" i="0" kern="1200" dirty="0">
-                <a:solidFill>
-                  <a:schemeClr val="tx1"/>
-                </a:solidFill>
-                <a:effectLst/>
-                <a:latin typeface="+mn-lt"/>
-                <a:ea typeface="+mn-ea"/>
-                <a:cs typeface="+mn-cs"/>
-              </a:rPr>
-              <a:t>Step three:</a:t>
-            </a:r>
-            <a:r>
-              <a:rPr lang="en-US" sz="1200" b="0" i="0" kern="1200" dirty="0">
-                <a:solidFill>
-                  <a:schemeClr val="tx1"/>
-                </a:solidFill>
-                <a:effectLst/>
-                <a:latin typeface="+mn-lt"/>
-                <a:ea typeface="+mn-ea"/>
-                <a:cs typeface="+mn-cs"/>
-              </a:rPr>
-              <a:t> on </a:t>
-            </a:r>
-            <a:r>
-              <a:rPr lang="en-US" sz="1200" b="1" i="0" kern="1200" dirty="0">
-                <a:solidFill>
-                  <a:schemeClr val="tx1"/>
-                </a:solidFill>
-                <a:effectLst/>
-                <a:latin typeface="+mn-lt"/>
-                <a:ea typeface="+mn-ea"/>
-                <a:cs typeface="+mn-cs"/>
-              </a:rPr>
-              <a:t>device detail</a:t>
-            </a:r>
-            <a:r>
-              <a:rPr lang="en-US" sz="1200" b="0" i="0" kern="1200" dirty="0">
-                <a:solidFill>
-                  <a:schemeClr val="tx1"/>
-                </a:solidFill>
-                <a:effectLst/>
-                <a:latin typeface="+mn-lt"/>
-                <a:ea typeface="+mn-ea"/>
-                <a:cs typeface="+mn-cs"/>
-              </a:rPr>
-              <a:t>, </a:t>
-            </a:r>
-            <a:r>
-              <a:rPr lang="en-US" sz="1200" b="1" i="0" kern="1200" dirty="0">
-                <a:solidFill>
-                  <a:schemeClr val="tx1"/>
-                </a:solidFill>
-                <a:effectLst/>
-                <a:latin typeface="+mn-lt"/>
-                <a:ea typeface="+mn-ea"/>
-                <a:cs typeface="+mn-cs"/>
-              </a:rPr>
-              <a:t>Live readings</a:t>
-            </a:r>
-            <a:r>
-              <a:rPr lang="en-US" sz="1200" b="0" i="0" kern="1200" dirty="0">
-                <a:solidFill>
-                  <a:schemeClr val="tx1"/>
-                </a:solidFill>
-                <a:effectLst/>
-                <a:latin typeface="+mn-lt"/>
-                <a:ea typeface="+mn-ea"/>
-                <a:cs typeface="+mn-cs"/>
-              </a:rPr>
-              <a:t> shows the chart updating </a:t>
-            </a:r>
-            <a:r>
-              <a:rPr lang="en-US" sz="1200" b="1" i="0" kern="1200" dirty="0">
-                <a:solidFill>
-                  <a:schemeClr val="tx1"/>
-                </a:solidFill>
-                <a:effectLst/>
-                <a:latin typeface="+mn-lt"/>
-                <a:ea typeface="+mn-ea"/>
-                <a:cs typeface="+mn-cs"/>
-              </a:rPr>
-              <a:t>without a page refresh</a:t>
-            </a:r>
-            <a:r>
-              <a:rPr lang="en-US" sz="1200" b="0" i="0" kern="1200" dirty="0">
-                <a:solidFill>
-                  <a:schemeClr val="tx1"/>
-                </a:solidFill>
-                <a:effectLst/>
-                <a:latin typeface="+mn-lt"/>
-                <a:ea typeface="+mn-ea"/>
-                <a:cs typeface="+mn-cs"/>
-              </a:rPr>
-              <a:t>—that is </a:t>
-            </a:r>
-            <a:r>
-              <a:rPr lang="en-US" sz="1200" b="0" i="0" kern="1200" dirty="0" err="1">
-                <a:solidFill>
-                  <a:schemeClr val="tx1"/>
-                </a:solidFill>
-                <a:effectLst/>
-                <a:latin typeface="+mn-lt"/>
-                <a:ea typeface="+mn-ea"/>
-                <a:cs typeface="+mn-cs"/>
-              </a:rPr>
-              <a:t>SignalR</a:t>
-            </a:r>
-            <a:r>
-              <a:rPr lang="en-US" sz="1200" b="0" i="0" kern="1200" dirty="0">
-                <a:solidFill>
-                  <a:schemeClr val="tx1"/>
-                </a:solidFill>
-                <a:effectLst/>
-                <a:latin typeface="+mn-lt"/>
-                <a:ea typeface="+mn-ea"/>
-                <a:cs typeface="+mn-cs"/>
-              </a:rPr>
-              <a:t>.</a:t>
-            </a:r>
-          </a:p>
-          <a:p>
-            <a:r>
-              <a:rPr lang="en-US" sz="1200" b="1" i="0" kern="1200" dirty="0">
-                <a:solidFill>
-                  <a:schemeClr val="tx1"/>
-                </a:solidFill>
-                <a:effectLst/>
-                <a:latin typeface="+mn-lt"/>
-                <a:ea typeface="+mn-ea"/>
-                <a:cs typeface="+mn-cs"/>
-              </a:rPr>
-              <a:t>Step four:</a:t>
-            </a:r>
-            <a:r>
-              <a:rPr lang="en-US" sz="1200" b="0" i="0" kern="1200" dirty="0">
-                <a:solidFill>
-                  <a:schemeClr val="tx1"/>
-                </a:solidFill>
-                <a:effectLst/>
-                <a:latin typeface="+mn-lt"/>
-                <a:ea typeface="+mn-ea"/>
-                <a:cs typeface="+mn-cs"/>
-              </a:rPr>
-              <a:t> I send an </a:t>
-            </a:r>
-            <a:r>
-              <a:rPr lang="en-US" sz="1200" b="1" i="0" kern="1200" dirty="0">
-                <a:solidFill>
-                  <a:schemeClr val="tx1"/>
-                </a:solidFill>
-                <a:effectLst/>
-                <a:latin typeface="+mn-lt"/>
-                <a:ea typeface="+mn-ea"/>
-                <a:cs typeface="+mn-cs"/>
-              </a:rPr>
-              <a:t>actuator command</a:t>
-            </a:r>
-            <a:r>
-              <a:rPr lang="en-US" sz="1200" b="0" i="0" kern="1200" dirty="0">
-                <a:solidFill>
-                  <a:schemeClr val="tx1"/>
-                </a:solidFill>
-                <a:effectLst/>
-                <a:latin typeface="+mn-lt"/>
-                <a:ea typeface="+mn-ea"/>
-                <a:cs typeface="+mn-cs"/>
-              </a:rPr>
-              <a:t> to turn the LED on or off. </a:t>
-            </a:r>
-            <a:r>
-              <a:rPr lang="en-US" sz="1200" b="1" i="0" kern="1200" dirty="0">
-                <a:solidFill>
-                  <a:schemeClr val="tx1"/>
-                </a:solidFill>
-                <a:effectLst/>
-                <a:latin typeface="+mn-lt"/>
-                <a:ea typeface="+mn-ea"/>
-                <a:cs typeface="+mn-cs"/>
-              </a:rPr>
-              <a:t>Command history</a:t>
-            </a:r>
-            <a:r>
-              <a:rPr lang="en-US" sz="1200" b="0" i="0" kern="1200" dirty="0">
-                <a:solidFill>
-                  <a:schemeClr val="tx1"/>
-                </a:solidFill>
-                <a:effectLst/>
-                <a:latin typeface="+mn-lt"/>
-                <a:ea typeface="+mn-ea"/>
-                <a:cs typeface="+mn-cs"/>
-              </a:rPr>
-              <a:t> shows </a:t>
-            </a:r>
-            <a:r>
-              <a:rPr lang="en-US" sz="1200" b="1" i="0" kern="1200" dirty="0">
-                <a:solidFill>
-                  <a:schemeClr val="tx1"/>
-                </a:solidFill>
-                <a:effectLst/>
-                <a:latin typeface="+mn-lt"/>
-                <a:ea typeface="+mn-ea"/>
-                <a:cs typeface="+mn-cs"/>
-              </a:rPr>
-              <a:t>Sent</a:t>
-            </a:r>
-            <a:r>
-              <a:rPr lang="en-US" sz="1200" b="0" i="0" kern="1200" dirty="0">
-                <a:solidFill>
-                  <a:schemeClr val="tx1"/>
-                </a:solidFill>
-                <a:effectLst/>
-                <a:latin typeface="+mn-lt"/>
-                <a:ea typeface="+mn-ea"/>
-                <a:cs typeface="+mn-cs"/>
-              </a:rPr>
-              <a:t>, then </a:t>
-            </a:r>
-            <a:r>
-              <a:rPr lang="en-US" sz="1200" b="1" i="0" kern="1200" dirty="0" err="1">
-                <a:solidFill>
-                  <a:schemeClr val="tx1"/>
-                </a:solidFill>
-                <a:effectLst/>
-                <a:latin typeface="+mn-lt"/>
-                <a:ea typeface="+mn-ea"/>
-                <a:cs typeface="+mn-cs"/>
-              </a:rPr>
-              <a:t>Acked</a:t>
-            </a:r>
-            <a:r>
-              <a:rPr lang="en-US" sz="1200" b="0" i="0" kern="1200" dirty="0">
-                <a:solidFill>
-                  <a:schemeClr val="tx1"/>
-                </a:solidFill>
-                <a:effectLst/>
-                <a:latin typeface="+mn-lt"/>
-                <a:ea typeface="+mn-ea"/>
-                <a:cs typeface="+mn-cs"/>
-              </a:rPr>
-              <a:t> when the firmware confirms.</a:t>
-            </a:r>
-          </a:p>
-          <a:p>
-            <a:r>
-              <a:rPr lang="en-US" sz="1200" b="1" i="0" kern="1200" dirty="0">
-                <a:solidFill>
-                  <a:schemeClr val="tx1"/>
-                </a:solidFill>
-                <a:effectLst/>
-                <a:latin typeface="+mn-lt"/>
-                <a:ea typeface="+mn-ea"/>
-                <a:cs typeface="+mn-cs"/>
-              </a:rPr>
-              <a:t>Step five:</a:t>
-            </a:r>
-            <a:r>
-              <a:rPr lang="en-US" sz="1200" b="0" i="0" kern="1200" dirty="0">
-                <a:solidFill>
-                  <a:schemeClr val="tx1"/>
-                </a:solidFill>
-                <a:effectLst/>
-                <a:latin typeface="+mn-lt"/>
-                <a:ea typeface="+mn-ea"/>
-                <a:cs typeface="+mn-cs"/>
-              </a:rPr>
-              <a:t> when a reading crosses the rule, an </a:t>
-            </a:r>
-            <a:r>
-              <a:rPr lang="en-US" sz="1200" b="1" i="0" kern="1200" dirty="0">
-                <a:solidFill>
-                  <a:schemeClr val="tx1"/>
-                </a:solidFill>
-                <a:effectLst/>
-                <a:latin typeface="+mn-lt"/>
-                <a:ea typeface="+mn-ea"/>
-                <a:cs typeface="+mn-cs"/>
-              </a:rPr>
-              <a:t>alert</a:t>
-            </a:r>
-            <a:r>
-              <a:rPr lang="en-US" sz="1200" b="0" i="0" kern="1200" dirty="0">
-                <a:solidFill>
-                  <a:schemeClr val="tx1"/>
-                </a:solidFill>
-                <a:effectLst/>
-                <a:latin typeface="+mn-lt"/>
-                <a:ea typeface="+mn-ea"/>
-                <a:cs typeface="+mn-cs"/>
-              </a:rPr>
-              <a:t> appears in the alerts view.</a:t>
-            </a:r>
-          </a:p>
-          <a:p>
-            <a:r>
-              <a:rPr lang="en-US" sz="1200" b="1" i="0" kern="1200" dirty="0">
-                <a:solidFill>
-                  <a:schemeClr val="tx1"/>
-                </a:solidFill>
-                <a:effectLst/>
-                <a:latin typeface="+mn-lt"/>
-                <a:ea typeface="+mn-ea"/>
-                <a:cs typeface="+mn-cs"/>
-              </a:rPr>
-              <a:t>Step six:</a:t>
-            </a:r>
-            <a:r>
-              <a:rPr lang="en-US" sz="1200" b="0" i="0" kern="1200" dirty="0">
-                <a:solidFill>
-                  <a:schemeClr val="tx1"/>
-                </a:solidFill>
-                <a:effectLst/>
-                <a:latin typeface="+mn-lt"/>
-                <a:ea typeface="+mn-ea"/>
-                <a:cs typeface="+mn-cs"/>
-              </a:rPr>
-              <a:t> switching to a </a:t>
-            </a:r>
-            <a:r>
-              <a:rPr lang="en-US" sz="1200" b="1" i="0" kern="1200" dirty="0">
-                <a:solidFill>
-                  <a:schemeClr val="tx1"/>
-                </a:solidFill>
-                <a:effectLst/>
-                <a:latin typeface="+mn-lt"/>
-                <a:ea typeface="+mn-ea"/>
-                <a:cs typeface="+mn-cs"/>
-              </a:rPr>
-              <a:t>history range</a:t>
-            </a:r>
-            <a:r>
-              <a:rPr lang="en-US" sz="1200" b="0" i="0" kern="1200" dirty="0">
-                <a:solidFill>
-                  <a:schemeClr val="tx1"/>
-                </a:solidFill>
-                <a:effectLst/>
-                <a:latin typeface="+mn-lt"/>
-                <a:ea typeface="+mn-ea"/>
-                <a:cs typeface="+mn-cs"/>
-              </a:rPr>
-              <a:t>, such as ten minutes, shows stored readings from the database.</a:t>
-            </a:r>
-          </a:p>
-          <a:p>
-            <a:r>
-              <a:rPr lang="en-US" sz="1200" b="0" i="0" kern="1200" dirty="0">
-                <a:solidFill>
-                  <a:schemeClr val="tx1"/>
-                </a:solidFill>
-                <a:effectLst/>
-                <a:latin typeface="+mn-lt"/>
-                <a:ea typeface="+mn-ea"/>
-                <a:cs typeface="+mn-cs"/>
-              </a:rPr>
-              <a:t>That completes the path from </a:t>
-            </a:r>
-            <a:r>
-              <a:rPr lang="en-US" sz="1200" b="1" i="0" kern="1200" dirty="0">
-                <a:solidFill>
-                  <a:schemeClr val="tx1"/>
-                </a:solidFill>
-                <a:effectLst/>
-                <a:latin typeface="+mn-lt"/>
-                <a:ea typeface="+mn-ea"/>
-                <a:cs typeface="+mn-cs"/>
-              </a:rPr>
-              <a:t>physical device to live dashboard</a:t>
-            </a:r>
-            <a:r>
-              <a:rPr lang="en-US" sz="1200" b="0" i="0" kern="1200" dirty="0">
-                <a:solidFill>
-                  <a:schemeClr val="tx1"/>
-                </a:solidFill>
-                <a:effectLst/>
-                <a:latin typeface="+mn-lt"/>
-                <a:ea typeface="+mn-ea"/>
-                <a:cs typeface="+mn-cs"/>
-              </a:rPr>
-              <a:t>, including </a:t>
-            </a:r>
-            <a:r>
-              <a:rPr lang="en-US" sz="1200" b="1" i="0" kern="1200" dirty="0">
-                <a:solidFill>
-                  <a:schemeClr val="tx1"/>
-                </a:solidFill>
-                <a:effectLst/>
-                <a:latin typeface="+mn-lt"/>
-                <a:ea typeface="+mn-ea"/>
-                <a:cs typeface="+mn-cs"/>
-              </a:rPr>
-              <a:t>remote control</a:t>
-            </a:r>
-            <a:r>
-              <a:rPr lang="en-US" sz="1200" b="0" i="0" kern="1200" dirty="0">
-                <a:solidFill>
-                  <a:schemeClr val="tx1"/>
-                </a:solidFill>
-                <a:effectLst/>
-                <a:latin typeface="+mn-lt"/>
-                <a:ea typeface="+mn-ea"/>
-                <a:cs typeface="+mn-cs"/>
-              </a:rPr>
-              <a:t>.</a:t>
-            </a:r>
-          </a:p>
-          <a:p>
-            <a:endParaRPr lang="en-US" dirty="0"/>
+              <a:rPr lang="en-US" dirty="0"/>
+              <a:t>I will now demonstrate the complete workflow of the system.</a:t>
+            </a:r>
+          </a:p>
+          <a:p>
+            <a:r>
+              <a:rPr lang="en-US" dirty="0"/>
+              <a:t>The demo will begin with a configured device connected through MQTT. I will then show live sensor readings updating on the dashboard, send a command to an actuator, trigger an alert condition, and finally review the historical data stored in the database.</a:t>
+            </a:r>
+          </a:p>
+          <a:p>
+            <a:r>
+              <a:rPr lang="en-US" dirty="0"/>
+              <a:t>This demonstrates the full path from the physical device to real-time visualization, alerting, and remote control within the application.</a:t>
+            </a:r>
           </a:p>
         </p:txBody>
       </p:sp>
@@ -1773,424 +1111,55 @@
           <a:lstStyle/>
           <a:p>
             <a:r>
-              <a:rPr lang="en-US" sz="1200" b="0" i="0" kern="1200" dirty="0">
-                <a:solidFill>
-                  <a:schemeClr val="tx1"/>
-                </a:solidFill>
-                <a:effectLst/>
-                <a:latin typeface="+mn-lt"/>
-                <a:ea typeface="+mn-ea"/>
-                <a:cs typeface="+mn-cs"/>
-              </a:rPr>
-              <a:t>Four engineering decisions shaped the design.</a:t>
-            </a:r>
-          </a:p>
-          <a:p>
-            <a:r>
-              <a:rPr lang="en-US" sz="1200" b="1" i="0" kern="1200" dirty="0">
-                <a:solidFill>
-                  <a:schemeClr val="tx1"/>
-                </a:solidFill>
-                <a:effectLst/>
-                <a:latin typeface="+mn-lt"/>
-                <a:ea typeface="+mn-ea"/>
-                <a:cs typeface="+mn-cs"/>
-              </a:rPr>
-              <a:t>Real-time synchronization:</a:t>
-            </a:r>
-            <a:r>
-              <a:rPr lang="en-US" sz="1200" b="0" i="0" kern="1200" dirty="0">
-                <a:solidFill>
-                  <a:schemeClr val="tx1"/>
-                </a:solidFill>
-                <a:effectLst/>
-                <a:latin typeface="+mn-lt"/>
-                <a:ea typeface="+mn-ea"/>
-                <a:cs typeface="+mn-cs"/>
-              </a:rPr>
-              <a:t> multiple browsers must stay in sync </a:t>
-            </a:r>
-            <a:r>
-              <a:rPr lang="en-US" sz="1200" b="1" i="0" kern="1200" dirty="0">
-                <a:solidFill>
-                  <a:schemeClr val="tx1"/>
-                </a:solidFill>
-                <a:effectLst/>
-                <a:latin typeface="+mn-lt"/>
-                <a:ea typeface="+mn-ea"/>
-                <a:cs typeface="+mn-cs"/>
-              </a:rPr>
-              <a:t>without polling</a:t>
-            </a:r>
-            <a:r>
-              <a:rPr lang="en-US" sz="1200" b="0" i="0" kern="1200" dirty="0">
-                <a:solidFill>
-                  <a:schemeClr val="tx1"/>
-                </a:solidFill>
-                <a:effectLst/>
-                <a:latin typeface="+mn-lt"/>
-                <a:ea typeface="+mn-ea"/>
-                <a:cs typeface="+mn-cs"/>
-              </a:rPr>
-              <a:t>. We use </a:t>
-            </a:r>
-            <a:r>
-              <a:rPr lang="en-US" sz="1200" b="1" i="0" kern="1200" dirty="0" err="1">
-                <a:solidFill>
-                  <a:schemeClr val="tx1"/>
-                </a:solidFill>
-                <a:effectLst/>
-                <a:latin typeface="+mn-lt"/>
-                <a:ea typeface="+mn-ea"/>
-                <a:cs typeface="+mn-cs"/>
-              </a:rPr>
+              <a:rPr lang="en-US" dirty="0"/>
+              <a:t>During development, several technical challenges influenced the system design.</a:t>
+            </a:r>
+          </a:p>
+          <a:p>
+            <a:r>
+              <a:rPr lang="en-US" dirty="0"/>
+              <a:t>The first challenge was real-time synchronization. Multiple users may monitor the same devices at the same time, so the system needs to keep all clients updated without constant polling. This was addressed using </a:t>
+            </a:r>
+            <a:r>
+              <a:rPr lang="en-US" dirty="0" err="1"/>
               <a:t>SignalR</a:t>
             </a:r>
             <a:r>
-              <a:rPr lang="en-US" sz="1200" b="1" i="0" kern="1200" dirty="0">
-                <a:solidFill>
-                  <a:schemeClr val="tx1"/>
-                </a:solidFill>
-                <a:effectLst/>
-                <a:latin typeface="+mn-lt"/>
-                <a:ea typeface="+mn-ea"/>
-                <a:cs typeface="+mn-cs"/>
-              </a:rPr>
-              <a:t> groups</a:t>
-            </a:r>
-            <a:r>
-              <a:rPr lang="en-US" sz="1200" b="0" i="0" kern="1200" dirty="0">
-                <a:solidFill>
-                  <a:schemeClr val="tx1"/>
-                </a:solidFill>
-                <a:effectLst/>
-                <a:latin typeface="+mn-lt"/>
-                <a:ea typeface="+mn-ea"/>
-                <a:cs typeface="+mn-cs"/>
-              </a:rPr>
-              <a:t> and push </a:t>
-            </a:r>
-            <a:r>
-              <a:rPr lang="en-US" sz="1200" b="1" i="0" kern="1200" dirty="0">
-                <a:solidFill>
-                  <a:schemeClr val="tx1"/>
-                </a:solidFill>
-                <a:effectLst/>
-                <a:latin typeface="+mn-lt"/>
-                <a:ea typeface="+mn-ea"/>
-                <a:cs typeface="+mn-cs"/>
-              </a:rPr>
-              <a:t>after each reading is saved</a:t>
-            </a:r>
-            <a:r>
-              <a:rPr lang="en-US" sz="1200" b="0" i="0" kern="1200" dirty="0">
-                <a:solidFill>
-                  <a:schemeClr val="tx1"/>
-                </a:solidFill>
-                <a:effectLst/>
-                <a:latin typeface="+mn-lt"/>
-                <a:ea typeface="+mn-ea"/>
-                <a:cs typeface="+mn-cs"/>
-              </a:rPr>
-              <a:t>.</a:t>
-            </a:r>
-          </a:p>
-          <a:p>
-            <a:r>
-              <a:rPr lang="en-US" sz="1200" b="1" i="0" kern="1200" dirty="0">
-                <a:solidFill>
-                  <a:schemeClr val="tx1"/>
-                </a:solidFill>
-                <a:effectLst/>
-                <a:latin typeface="+mn-lt"/>
-                <a:ea typeface="+mn-ea"/>
-                <a:cs typeface="+mn-cs"/>
-              </a:rPr>
-              <a:t>Time-series storage:</a:t>
-            </a:r>
-            <a:r>
-              <a:rPr lang="en-US" sz="1200" b="0" i="0" kern="1200" dirty="0">
-                <a:solidFill>
-                  <a:schemeClr val="tx1"/>
-                </a:solidFill>
-                <a:effectLst/>
-                <a:latin typeface="+mn-lt"/>
-                <a:ea typeface="+mn-ea"/>
-                <a:cs typeface="+mn-cs"/>
-              </a:rPr>
-              <a:t> readings grow quickly. We use a </a:t>
-            </a:r>
-            <a:r>
-              <a:rPr lang="en-US" sz="1200" b="1" i="0" kern="1200" dirty="0">
-                <a:solidFill>
-                  <a:schemeClr val="tx1"/>
-                </a:solidFill>
-                <a:effectLst/>
-                <a:latin typeface="+mn-lt"/>
-                <a:ea typeface="+mn-ea"/>
-                <a:cs typeface="+mn-cs"/>
-              </a:rPr>
-              <a:t>BIGINT</a:t>
-            </a:r>
-            <a:r>
-              <a:rPr lang="en-US" sz="1200" b="0" i="0" kern="1200" dirty="0">
-                <a:solidFill>
-                  <a:schemeClr val="tx1"/>
-                </a:solidFill>
-                <a:effectLst/>
-                <a:latin typeface="+mn-lt"/>
-                <a:ea typeface="+mn-ea"/>
-                <a:cs typeface="+mn-cs"/>
-              </a:rPr>
-              <a:t> key, </a:t>
-            </a:r>
-            <a:r>
-              <a:rPr lang="en-US" sz="1200" b="1" i="0" kern="1200" dirty="0">
-                <a:solidFill>
-                  <a:schemeClr val="tx1"/>
-                </a:solidFill>
-                <a:effectLst/>
-                <a:latin typeface="+mn-lt"/>
-                <a:ea typeface="+mn-ea"/>
-                <a:cs typeface="+mn-cs"/>
-              </a:rPr>
-              <a:t>composite indexes</a:t>
-            </a:r>
-            <a:r>
-              <a:rPr lang="en-US" sz="1200" b="0" i="0" kern="1200" dirty="0">
-                <a:solidFill>
-                  <a:schemeClr val="tx1"/>
-                </a:solidFill>
-                <a:effectLst/>
-                <a:latin typeface="+mn-lt"/>
-                <a:ea typeface="+mn-ea"/>
-                <a:cs typeface="+mn-cs"/>
-              </a:rPr>
-              <a:t>, and </a:t>
-            </a:r>
-            <a:r>
-              <a:rPr lang="en-US" sz="1200" b="1" i="0" kern="1200" dirty="0">
-                <a:solidFill>
-                  <a:schemeClr val="tx1"/>
-                </a:solidFill>
-                <a:effectLst/>
-                <a:latin typeface="+mn-lt"/>
-                <a:ea typeface="+mn-ea"/>
-                <a:cs typeface="+mn-cs"/>
-              </a:rPr>
-              <a:t>paged date-range queries</a:t>
-            </a:r>
-            <a:r>
-              <a:rPr lang="en-US" sz="1200" b="0" i="0" kern="1200" dirty="0">
-                <a:solidFill>
-                  <a:schemeClr val="tx1"/>
-                </a:solidFill>
-                <a:effectLst/>
-                <a:latin typeface="+mn-lt"/>
-                <a:ea typeface="+mn-ea"/>
-                <a:cs typeface="+mn-cs"/>
-              </a:rPr>
-              <a:t>. Archiving is planned for larger scale.</a:t>
-            </a:r>
-          </a:p>
-          <a:p>
-            <a:r>
-              <a:rPr lang="en-US" sz="1200" b="1" i="0" kern="1200" dirty="0">
-                <a:solidFill>
-                  <a:schemeClr val="tx1"/>
-                </a:solidFill>
-                <a:effectLst/>
-                <a:latin typeface="+mn-lt"/>
-                <a:ea typeface="+mn-ea"/>
-                <a:cs typeface="+mn-cs"/>
-              </a:rPr>
-              <a:t>Cross-layer data flow:</a:t>
-            </a:r>
-            <a:r>
-              <a:rPr lang="en-US" sz="1200" b="0" i="0" kern="1200" dirty="0">
-                <a:solidFill>
-                  <a:schemeClr val="tx1"/>
-                </a:solidFill>
-                <a:effectLst/>
-                <a:latin typeface="+mn-lt"/>
-                <a:ea typeface="+mn-ea"/>
-                <a:cs typeface="+mn-cs"/>
-              </a:rPr>
-              <a:t> each reading follows </a:t>
-            </a:r>
-            <a:r>
-              <a:rPr lang="en-US" sz="1200" b="1" i="0" kern="1200" dirty="0">
-                <a:solidFill>
-                  <a:schemeClr val="tx1"/>
-                </a:solidFill>
-                <a:effectLst/>
-                <a:latin typeface="+mn-lt"/>
-                <a:ea typeface="+mn-ea"/>
-                <a:cs typeface="+mn-cs"/>
-              </a:rPr>
-              <a:t>MQTT → API → database → </a:t>
-            </a:r>
-            <a:r>
-              <a:rPr lang="en-US" sz="1200" b="1" i="0" kern="1200" dirty="0" err="1">
-                <a:solidFill>
-                  <a:schemeClr val="tx1"/>
-                </a:solidFill>
-                <a:effectLst/>
-                <a:latin typeface="+mn-lt"/>
-                <a:ea typeface="+mn-ea"/>
-                <a:cs typeface="+mn-cs"/>
-              </a:rPr>
+              <a:rPr lang="en-US" dirty="0"/>
+              <a:t>, which pushes updates to connected clients whenever new data is received.</a:t>
+            </a:r>
+          </a:p>
+          <a:p>
+            <a:r>
+              <a:rPr lang="en-US" dirty="0"/>
+              <a:t>The second challenge was storing and querying large volumes of sensor data efficiently. To support historical analysis, the database was designed with appropriate indexing and query strategies to maintain performance as the number of readings grows.</a:t>
+            </a:r>
+          </a:p>
+          <a:p>
+            <a:r>
+              <a:rPr lang="en-US" dirty="0"/>
+              <a:t>Another challenge was maintaining a clear and reliable data flow across multiple layers of the system. A consistent pipeline from MQTT to the API, database, </a:t>
+            </a:r>
+            <a:r>
+              <a:rPr lang="en-US" dirty="0" err="1"/>
               <a:t>SignalR</a:t>
             </a:r>
             <a:r>
-              <a:rPr lang="en-US" sz="1200" b="1" i="0" kern="1200" dirty="0">
-                <a:solidFill>
-                  <a:schemeClr val="tx1"/>
-                </a:solidFill>
-                <a:effectLst/>
-                <a:latin typeface="+mn-lt"/>
-                <a:ea typeface="+mn-ea"/>
-                <a:cs typeface="+mn-cs"/>
-              </a:rPr>
-              <a:t> → React</a:t>
-            </a:r>
-            <a:r>
-              <a:rPr lang="en-US" sz="1200" b="0" i="0" kern="1200" dirty="0">
-                <a:solidFill>
-                  <a:schemeClr val="tx1"/>
-                </a:solidFill>
-                <a:effectLst/>
-                <a:latin typeface="+mn-lt"/>
-                <a:ea typeface="+mn-ea"/>
-                <a:cs typeface="+mn-cs"/>
-              </a:rPr>
-              <a:t>, with layered services and DTOs to keep that path reliable.</a:t>
-            </a:r>
-          </a:p>
-          <a:p>
-            <a:r>
-              <a:rPr lang="en-US" sz="1200" b="1" i="0" kern="1200" dirty="0">
-                <a:solidFill>
-                  <a:schemeClr val="tx1"/>
-                </a:solidFill>
-                <a:effectLst/>
-                <a:latin typeface="+mn-lt"/>
-                <a:ea typeface="+mn-ea"/>
-                <a:cs typeface="+mn-cs"/>
-              </a:rPr>
-              <a:t>Edge compatibility:</a:t>
-            </a:r>
-            <a:r>
-              <a:rPr lang="en-US" sz="1200" b="0" i="0" kern="1200" dirty="0">
-                <a:solidFill>
-                  <a:schemeClr val="tx1"/>
-                </a:solidFill>
-                <a:effectLst/>
-                <a:latin typeface="+mn-lt"/>
-                <a:ea typeface="+mn-ea"/>
-                <a:cs typeface="+mn-cs"/>
-              </a:rPr>
-              <a:t> </a:t>
-            </a:r>
-            <a:r>
-              <a:rPr lang="en-US" sz="1200" b="1" i="0" kern="1200" dirty="0">
-                <a:solidFill>
-                  <a:schemeClr val="tx1"/>
-                </a:solidFill>
-                <a:effectLst/>
-                <a:latin typeface="+mn-lt"/>
-                <a:ea typeface="+mn-ea"/>
-                <a:cs typeface="+mn-cs"/>
-              </a:rPr>
-              <a:t>Arduino, ESP32, and Raspberry Pi</a:t>
-            </a:r>
-            <a:r>
-              <a:rPr lang="en-US" sz="1200" b="0" i="0" kern="1200" dirty="0">
-                <a:solidFill>
-                  <a:schemeClr val="tx1"/>
-                </a:solidFill>
-                <a:effectLst/>
-                <a:latin typeface="+mn-lt"/>
-                <a:ea typeface="+mn-ea"/>
-                <a:cs typeface="+mn-cs"/>
-              </a:rPr>
-              <a:t> can share the same backend—</a:t>
-            </a:r>
-            <a:r>
-              <a:rPr lang="en-US" sz="1200" b="1" i="0" kern="1200" dirty="0">
-                <a:solidFill>
-                  <a:schemeClr val="tx1"/>
-                </a:solidFill>
-                <a:effectLst/>
-                <a:latin typeface="+mn-lt"/>
-                <a:ea typeface="+mn-ea"/>
-                <a:cs typeface="+mn-cs"/>
-              </a:rPr>
-              <a:t>MQTT and JSON</a:t>
-            </a:r>
-            <a:r>
-              <a:rPr lang="en-US" sz="1200" b="0" i="0" kern="1200" dirty="0">
-                <a:solidFill>
-                  <a:schemeClr val="tx1"/>
-                </a:solidFill>
-                <a:effectLst/>
-                <a:latin typeface="+mn-lt"/>
-                <a:ea typeface="+mn-ea"/>
-                <a:cs typeface="+mn-cs"/>
-              </a:rPr>
-              <a:t> for devices, </a:t>
-            </a:r>
-            <a:r>
-              <a:rPr lang="en-US" sz="1200" b="1" i="0" kern="1200" dirty="0">
-                <a:solidFill>
-                  <a:schemeClr val="tx1"/>
-                </a:solidFill>
-                <a:effectLst/>
-                <a:latin typeface="+mn-lt"/>
-                <a:ea typeface="+mn-ea"/>
-                <a:cs typeface="+mn-cs"/>
-              </a:rPr>
-              <a:t>REST</a:t>
-            </a:r>
-            <a:r>
-              <a:rPr lang="en-US" sz="1200" b="0" i="0" kern="1200" dirty="0">
-                <a:solidFill>
-                  <a:schemeClr val="tx1"/>
-                </a:solidFill>
-                <a:effectLst/>
-                <a:latin typeface="+mn-lt"/>
-                <a:ea typeface="+mn-ea"/>
-                <a:cs typeface="+mn-cs"/>
-              </a:rPr>
-              <a:t> for tests and simulators, and a </a:t>
-            </a:r>
-            <a:r>
-              <a:rPr lang="en-US" sz="1200" b="1" i="0" kern="1200" dirty="0">
-                <a:solidFill>
-                  <a:schemeClr val="tx1"/>
-                </a:solidFill>
-                <a:effectLst/>
-                <a:latin typeface="+mn-lt"/>
-                <a:ea typeface="+mn-ea"/>
-                <a:cs typeface="+mn-cs"/>
-              </a:rPr>
-              <a:t>shared device, sensor, and actuator model</a:t>
-            </a:r>
-            <a:r>
-              <a:rPr lang="en-US" sz="1200" b="0" i="0" kern="1200" dirty="0">
-                <a:solidFill>
-                  <a:schemeClr val="tx1"/>
-                </a:solidFill>
-                <a:effectLst/>
-                <a:latin typeface="+mn-lt"/>
-                <a:ea typeface="+mn-ea"/>
-                <a:cs typeface="+mn-cs"/>
-              </a:rPr>
-              <a:t> in the database.</a:t>
-            </a:r>
-          </a:p>
-          <a:p>
-            <a:endParaRPr lang="en-US" dirty="0"/>
+              <a:rPr lang="en-US" dirty="0"/>
+              <a:t>, and frontend helps keep the architecture organized and maintainable.</a:t>
+            </a:r>
+          </a:p>
+          <a:p>
+            <a:r>
+              <a:rPr lang="en-US" dirty="0"/>
+              <a:t>Finally, the system needed to support different edge platforms, including Arduino, ESP32, and Raspberry Pi. This was achieved through a shared communication model using MQTT and JSON, allowing different devices to interact with the same backend services.</a:t>
+            </a:r>
+          </a:p>
+          <a:p>
+            <a:r>
+              <a:rPr lang="en-US" dirty="0"/>
+              <a:t>Together, these design decisions improved scalability, maintainability, and interoperability across the platform.</a:t>
+            </a:r>
           </a:p>
         </p:txBody>
       </p:sp>
@@ -2335,312 +1304,51 @@
           <a:lstStyle/>
           <a:p>
             <a:r>
-              <a:rPr lang="en-US" sz="1200" b="0" i="0" kern="1200" dirty="0">
-                <a:solidFill>
-                  <a:schemeClr val="tx1"/>
-                </a:solidFill>
-                <a:effectLst/>
-                <a:latin typeface="+mn-lt"/>
-                <a:ea typeface="+mn-ea"/>
-                <a:cs typeface="+mn-cs"/>
-              </a:rPr>
-              <a:t>We delivered an end-to-end system: </a:t>
-            </a:r>
-            <a:r>
-              <a:rPr lang="en-US" sz="1200" b="1" i="0" kern="1200" dirty="0">
-                <a:solidFill>
-                  <a:schemeClr val="tx1"/>
-                </a:solidFill>
-                <a:effectLst/>
-                <a:latin typeface="+mn-lt"/>
-                <a:ea typeface="+mn-ea"/>
-                <a:cs typeface="+mn-cs"/>
-              </a:rPr>
-              <a:t>MQTT, API, SQL Server, </a:t>
-            </a:r>
-            <a:r>
-              <a:rPr lang="en-US" sz="1200" b="1" i="0" kern="1200" dirty="0" err="1">
-                <a:solidFill>
-                  <a:schemeClr val="tx1"/>
-                </a:solidFill>
-                <a:effectLst/>
-                <a:latin typeface="+mn-lt"/>
-                <a:ea typeface="+mn-ea"/>
-                <a:cs typeface="+mn-cs"/>
-              </a:rPr>
+              <a:rPr lang="en-US" dirty="0"/>
+              <a:t>To conclude, this project successfully delivered a complete end-to-end IoT monitoring platform.</a:t>
+            </a:r>
+          </a:p>
+          <a:p>
+            <a:r>
+              <a:rPr lang="en-US" dirty="0"/>
+              <a:t>The solution supports the full data path from edge devices through MQTT, the backend API, SQL Server, </a:t>
+            </a:r>
+            <a:r>
+              <a:rPr lang="en-US" dirty="0" err="1"/>
               <a:t>SignalR</a:t>
             </a:r>
             <a:r>
-              <a:rPr lang="en-US" sz="1200" b="1" i="0" kern="1200" dirty="0">
-                <a:solidFill>
-                  <a:schemeClr val="tx1"/>
-                </a:solidFill>
-                <a:effectLst/>
-                <a:latin typeface="+mn-lt"/>
-                <a:ea typeface="+mn-ea"/>
-                <a:cs typeface="+mn-cs"/>
-              </a:rPr>
-              <a:t>, and React</a:t>
-            </a:r>
-            <a:r>
-              <a:rPr lang="en-US" sz="1200" b="0" i="0" kern="1200" dirty="0">
-                <a:solidFill>
-                  <a:schemeClr val="tx1"/>
-                </a:solidFill>
-                <a:effectLst/>
-                <a:latin typeface="+mn-lt"/>
-                <a:ea typeface="+mn-ea"/>
-                <a:cs typeface="+mn-cs"/>
-              </a:rPr>
-              <a:t>; an eleven-table schema; JWT roles; a full UI including actuators and command history; </a:t>
-            </a:r>
-            <a:r>
-              <a:rPr lang="en-US" sz="1200" b="1" i="0" kern="1200" dirty="0">
-                <a:solidFill>
-                  <a:schemeClr val="tx1"/>
-                </a:solidFill>
-                <a:effectLst/>
-                <a:latin typeface="+mn-lt"/>
-                <a:ea typeface="+mn-ea"/>
-                <a:cs typeface="+mn-cs"/>
-              </a:rPr>
-              <a:t>Arduino firmware</a:t>
-            </a:r>
-            <a:r>
-              <a:rPr lang="en-US" sz="1200" b="0" i="0" kern="1200" dirty="0">
-                <a:solidFill>
-                  <a:schemeClr val="tx1"/>
-                </a:solidFill>
-                <a:effectLst/>
-                <a:latin typeface="+mn-lt"/>
-                <a:ea typeface="+mn-ea"/>
-                <a:cs typeface="+mn-cs"/>
-              </a:rPr>
-              <a:t> with a live demo; and </a:t>
-            </a:r>
-            <a:r>
-              <a:rPr lang="en-US" sz="1200" b="1" i="0" kern="1200" dirty="0">
-                <a:solidFill>
-                  <a:schemeClr val="tx1"/>
-                </a:solidFill>
-                <a:effectLst/>
-                <a:latin typeface="+mn-lt"/>
-                <a:ea typeface="+mn-ea"/>
-                <a:cs typeface="+mn-cs"/>
-              </a:rPr>
-              <a:t>GitHub and Azure</a:t>
-            </a:r>
-            <a:r>
-              <a:rPr lang="en-US" sz="1200" b="0" i="0" kern="1200" dirty="0">
-                <a:solidFill>
-                  <a:schemeClr val="tx1"/>
-                </a:solidFill>
-                <a:effectLst/>
-                <a:latin typeface="+mn-lt"/>
-                <a:ea typeface="+mn-ea"/>
-                <a:cs typeface="+mn-cs"/>
-              </a:rPr>
-              <a:t> deployment.</a:t>
-            </a:r>
-          </a:p>
-          <a:p>
-            <a:r>
-              <a:rPr lang="en-US" sz="1200" b="0" i="0" kern="1200" dirty="0">
-                <a:solidFill>
-                  <a:schemeClr val="tx1"/>
-                </a:solidFill>
-                <a:effectLst/>
-                <a:latin typeface="+mn-lt"/>
-                <a:ea typeface="+mn-ea"/>
-                <a:cs typeface="+mn-cs"/>
-              </a:rPr>
-              <a:t>Future work includes </a:t>
-            </a:r>
-            <a:r>
-              <a:rPr lang="en-US" sz="1200" b="1" i="0" kern="1200" dirty="0">
-                <a:solidFill>
-                  <a:schemeClr val="tx1"/>
-                </a:solidFill>
-                <a:effectLst/>
-                <a:latin typeface="+mn-lt"/>
-                <a:ea typeface="+mn-ea"/>
-                <a:cs typeface="+mn-cs"/>
-              </a:rPr>
-              <a:t>data retention and archiving</a:t>
-            </a:r>
-            <a:r>
-              <a:rPr lang="en-US" sz="1200" b="0" i="0" kern="1200" dirty="0">
-                <a:solidFill>
-                  <a:schemeClr val="tx1"/>
-                </a:solidFill>
-                <a:effectLst/>
-                <a:latin typeface="+mn-lt"/>
-                <a:ea typeface="+mn-ea"/>
-                <a:cs typeface="+mn-cs"/>
-              </a:rPr>
-              <a:t>, </a:t>
-            </a:r>
-            <a:r>
-              <a:rPr lang="en-US" sz="1200" b="1" i="0" kern="1200" dirty="0">
-                <a:solidFill>
-                  <a:schemeClr val="tx1"/>
-                </a:solidFill>
-                <a:effectLst/>
-                <a:latin typeface="+mn-lt"/>
-                <a:ea typeface="+mn-ea"/>
-                <a:cs typeface="+mn-cs"/>
-              </a:rPr>
-              <a:t>multi-tenant</a:t>
-            </a:r>
-            <a:r>
-              <a:rPr lang="en-US" sz="1200" b="0" i="0" kern="1200" dirty="0">
-                <a:solidFill>
-                  <a:schemeClr val="tx1"/>
-                </a:solidFill>
-                <a:effectLst/>
-                <a:latin typeface="+mn-lt"/>
-                <a:ea typeface="+mn-ea"/>
-                <a:cs typeface="+mn-cs"/>
-              </a:rPr>
-              <a:t> support, a </a:t>
-            </a:r>
-            <a:r>
-              <a:rPr lang="en-US" sz="1200" b="1" i="0" kern="1200" dirty="0">
-                <a:solidFill>
-                  <a:schemeClr val="tx1"/>
-                </a:solidFill>
-                <a:effectLst/>
-                <a:latin typeface="+mn-lt"/>
-                <a:ea typeface="+mn-ea"/>
-                <a:cs typeface="+mn-cs"/>
-              </a:rPr>
-              <a:t>mobile app</a:t>
-            </a:r>
-            <a:r>
-              <a:rPr lang="en-US" sz="1200" b="0" i="0" kern="1200" dirty="0">
-                <a:solidFill>
-                  <a:schemeClr val="tx1"/>
-                </a:solidFill>
-                <a:effectLst/>
-                <a:latin typeface="+mn-lt"/>
-                <a:ea typeface="+mn-ea"/>
-                <a:cs typeface="+mn-cs"/>
-              </a:rPr>
-              <a:t>, </a:t>
-            </a:r>
-            <a:r>
-              <a:rPr lang="en-US" sz="1200" b="1" i="0" kern="1200" dirty="0">
-                <a:solidFill>
-                  <a:schemeClr val="tx1"/>
-                </a:solidFill>
-                <a:effectLst/>
-                <a:latin typeface="+mn-lt"/>
-                <a:ea typeface="+mn-ea"/>
-                <a:cs typeface="+mn-cs"/>
-              </a:rPr>
-              <a:t>machine learning</a:t>
-            </a:r>
-            <a:r>
-              <a:rPr lang="en-US" sz="1200" b="0" i="0" kern="1200" dirty="0">
-                <a:solidFill>
-                  <a:schemeClr val="tx1"/>
-                </a:solidFill>
-                <a:effectLst/>
-                <a:latin typeface="+mn-lt"/>
-                <a:ea typeface="+mn-ea"/>
-                <a:cs typeface="+mn-cs"/>
-              </a:rPr>
-              <a:t> for anomalies, broader </a:t>
-            </a:r>
-            <a:r>
-              <a:rPr lang="en-US" sz="1200" b="1" i="0" kern="1200" dirty="0">
-                <a:solidFill>
-                  <a:schemeClr val="tx1"/>
-                </a:solidFill>
-                <a:effectLst/>
-                <a:latin typeface="+mn-lt"/>
-                <a:ea typeface="+mn-ea"/>
-                <a:cs typeface="+mn-cs"/>
-              </a:rPr>
-              <a:t>edge integrations</a:t>
-            </a:r>
-            <a:r>
-              <a:rPr lang="en-US" sz="1200" b="0" i="0" kern="1200" dirty="0">
-                <a:solidFill>
-                  <a:schemeClr val="tx1"/>
-                </a:solidFill>
-                <a:effectLst/>
-                <a:latin typeface="+mn-lt"/>
-                <a:ea typeface="+mn-ea"/>
-                <a:cs typeface="+mn-cs"/>
-              </a:rPr>
-              <a:t>, and production </a:t>
-            </a:r>
-            <a:r>
-              <a:rPr lang="en-US" sz="1200" b="1" i="0" kern="1200" dirty="0">
-                <a:solidFill>
-                  <a:schemeClr val="tx1"/>
-                </a:solidFill>
-                <a:effectLst/>
-                <a:latin typeface="+mn-lt"/>
-                <a:ea typeface="+mn-ea"/>
-                <a:cs typeface="+mn-cs"/>
-              </a:rPr>
-              <a:t>hardening</a:t>
-            </a:r>
-            <a:r>
-              <a:rPr lang="en-US" sz="1200" b="0" i="0" kern="1200" dirty="0">
-                <a:solidFill>
-                  <a:schemeClr val="tx1"/>
-                </a:solidFill>
-                <a:effectLst/>
-                <a:latin typeface="+mn-lt"/>
-                <a:ea typeface="+mn-ea"/>
-                <a:cs typeface="+mn-cs"/>
-              </a:rPr>
-              <a:t>.</a:t>
-            </a:r>
-          </a:p>
-          <a:p>
-            <a:r>
-              <a:rPr lang="en-US" sz="1200" b="0" i="0" kern="1200" dirty="0">
-                <a:solidFill>
-                  <a:schemeClr val="tx1"/>
-                </a:solidFill>
-                <a:effectLst/>
-                <a:latin typeface="+mn-lt"/>
-                <a:ea typeface="+mn-ea"/>
-                <a:cs typeface="+mn-cs"/>
-              </a:rPr>
-              <a:t>This project demonstrates a </a:t>
-            </a:r>
-            <a:r>
-              <a:rPr lang="en-US" sz="1200" b="1" i="0" kern="1200" dirty="0">
-                <a:solidFill>
-                  <a:schemeClr val="tx1"/>
-                </a:solidFill>
-                <a:effectLst/>
-                <a:latin typeface="+mn-lt"/>
-                <a:ea typeface="+mn-ea"/>
-                <a:cs typeface="+mn-cs"/>
-              </a:rPr>
-              <a:t>full stack from physical sensor to cloud dashboard</a:t>
-            </a:r>
-            <a:r>
-              <a:rPr lang="en-US" sz="1200" b="0" i="0" kern="1200" dirty="0">
-                <a:solidFill>
-                  <a:schemeClr val="tx1"/>
-                </a:solidFill>
-                <a:effectLst/>
-                <a:latin typeface="+mn-lt"/>
-                <a:ea typeface="+mn-ea"/>
-                <a:cs typeface="+mn-cs"/>
-              </a:rPr>
-              <a:t> and applies the BAS Application Development program in a practical IoT solution.</a:t>
-            </a:r>
-          </a:p>
-          <a:p>
-            <a:endParaRPr lang="en-US" dirty="0"/>
+              <a:rPr lang="en-US" dirty="0"/>
+              <a:t>, and finally to a web-based dashboard. It provides real-time monitoring, alerting, historical data storage, and remote device control through a single application.</a:t>
+            </a:r>
+          </a:p>
+          <a:p>
+            <a:r>
+              <a:rPr lang="en-US" dirty="0"/>
+              <a:t>In addition to the software platform, the project includes device integration, role-based security, and cloud deployment using GitHub and Azure.</a:t>
+            </a:r>
+          </a:p>
+          <a:p>
+            <a:r>
+              <a:rPr lang="en-US" dirty="0"/>
+              <a:t>Looking ahead, future enhancements could include automated data retention and archiving, multi-tenant support, a mobile application for field operators, machine-learning-based anomaly detection, and broader device integration.</a:t>
+            </a:r>
+          </a:p>
+          <a:p>
+            <a:r>
+              <a:rPr lang="en-US" dirty="0"/>
+              <a:t>Overall, this project demonstrates a complete full-stack solution that connects physical sensors to a real-time web application and applies the BAS Application Development program in a practical industrial IoT context.</a:t>
+            </a:r>
+          </a:p>
+          <a:p>
+            <a:r>
+              <a:rPr lang="en-US" dirty="0"/>
+              <a:t>Thank you. </a:t>
+            </a:r>
+            <a:r>
+              <a:rPr lang="en-US"/>
+              <a:t>I am happy to take any questions.</a:t>
+            </a:r>
           </a:p>
         </p:txBody>
       </p:sp>
@@ -2953,294 +1661,52 @@
           <a:lstStyle/>
           <a:p>
             <a:r>
-              <a:rPr lang="en-US" sz="1200" b="0" i="0" kern="1200" dirty="0">
-                <a:solidFill>
-                  <a:schemeClr val="tx1"/>
-                </a:solidFill>
-                <a:effectLst/>
-                <a:latin typeface="+mn-lt"/>
-                <a:ea typeface="+mn-ea"/>
-                <a:cs typeface="+mn-cs"/>
-              </a:rPr>
-              <a:t>Here is how the presentation is organized.</a:t>
-            </a:r>
-          </a:p>
-          <a:p>
-            <a:r>
-              <a:rPr lang="en-US" sz="1200" b="0" i="0" kern="1200" dirty="0">
-                <a:solidFill>
-                  <a:schemeClr val="tx1"/>
-                </a:solidFill>
-                <a:effectLst/>
-                <a:latin typeface="+mn-lt"/>
-                <a:ea typeface="+mn-ea"/>
-                <a:cs typeface="+mn-cs"/>
-              </a:rPr>
-              <a:t>I will begin with the </a:t>
-            </a:r>
-            <a:r>
-              <a:rPr lang="en-US" sz="1200" b="1" i="0" kern="1200" dirty="0">
-                <a:solidFill>
-                  <a:schemeClr val="tx1"/>
-                </a:solidFill>
-                <a:effectLst/>
-                <a:latin typeface="+mn-lt"/>
-                <a:ea typeface="+mn-ea"/>
-                <a:cs typeface="+mn-cs"/>
-              </a:rPr>
-              <a:t>problem</a:t>
-            </a:r>
-            <a:r>
-              <a:rPr lang="en-US" sz="1200" b="0" i="0" kern="1200" dirty="0">
-                <a:solidFill>
-                  <a:schemeClr val="tx1"/>
-                </a:solidFill>
-                <a:effectLst/>
-                <a:latin typeface="+mn-lt"/>
-                <a:ea typeface="+mn-ea"/>
-                <a:cs typeface="+mn-cs"/>
-              </a:rPr>
-              <a:t> and </a:t>
-            </a:r>
-            <a:r>
-              <a:rPr lang="en-US" sz="1200" b="1" i="0" kern="1200" dirty="0">
-                <a:solidFill>
-                  <a:schemeClr val="tx1"/>
-                </a:solidFill>
-                <a:effectLst/>
-                <a:latin typeface="+mn-lt"/>
-                <a:ea typeface="+mn-ea"/>
-                <a:cs typeface="+mn-cs"/>
-              </a:rPr>
-              <a:t>project goals</a:t>
-            </a:r>
-            <a:r>
-              <a:rPr lang="en-US" sz="1200" b="0" i="0" kern="1200" dirty="0">
-                <a:solidFill>
-                  <a:schemeClr val="tx1"/>
-                </a:solidFill>
-                <a:effectLst/>
-                <a:latin typeface="+mn-lt"/>
-                <a:ea typeface="+mn-ea"/>
-                <a:cs typeface="+mn-cs"/>
-              </a:rPr>
-              <a:t>, then cover the </a:t>
-            </a:r>
-            <a:r>
-              <a:rPr lang="en-US" sz="1200" b="1" i="0" kern="1200" dirty="0">
-                <a:solidFill>
-                  <a:schemeClr val="tx1"/>
-                </a:solidFill>
-                <a:effectLst/>
-                <a:latin typeface="+mn-lt"/>
-                <a:ea typeface="+mn-ea"/>
-                <a:cs typeface="+mn-cs"/>
-              </a:rPr>
-              <a:t>technology stack</a:t>
-            </a:r>
-            <a:r>
-              <a:rPr lang="en-US" sz="1200" b="0" i="0" kern="1200" dirty="0">
-                <a:solidFill>
-                  <a:schemeClr val="tx1"/>
-                </a:solidFill>
-                <a:effectLst/>
-                <a:latin typeface="+mn-lt"/>
-                <a:ea typeface="+mn-ea"/>
-                <a:cs typeface="+mn-cs"/>
-              </a:rPr>
-              <a:t> and </a:t>
-            </a:r>
-            <a:r>
-              <a:rPr lang="en-US" sz="1200" b="1" i="0" kern="1200" dirty="0">
-                <a:solidFill>
-                  <a:schemeClr val="tx1"/>
-                </a:solidFill>
-                <a:effectLst/>
-                <a:latin typeface="+mn-lt"/>
-                <a:ea typeface="+mn-ea"/>
-                <a:cs typeface="+mn-cs"/>
-              </a:rPr>
-              <a:t>system architecture</a:t>
-            </a:r>
-            <a:r>
-              <a:rPr lang="en-US" sz="1200" b="0" i="0" kern="1200" dirty="0">
-                <a:solidFill>
-                  <a:schemeClr val="tx1"/>
-                </a:solidFill>
-                <a:effectLst/>
-                <a:latin typeface="+mn-lt"/>
-                <a:ea typeface="+mn-ea"/>
-                <a:cs typeface="+mn-cs"/>
-              </a:rPr>
-              <a:t>. From there we move into </a:t>
-            </a:r>
-            <a:r>
-              <a:rPr lang="en-US" sz="1200" b="1" i="0" kern="1200" dirty="0">
-                <a:solidFill>
-                  <a:schemeClr val="tx1"/>
-                </a:solidFill>
-                <a:effectLst/>
-                <a:latin typeface="+mn-lt"/>
-                <a:ea typeface="+mn-ea"/>
-                <a:cs typeface="+mn-cs"/>
-              </a:rPr>
-              <a:t>database design</a:t>
-            </a:r>
-            <a:r>
-              <a:rPr lang="en-US" sz="1200" b="0" i="0" kern="1200" dirty="0">
-                <a:solidFill>
-                  <a:schemeClr val="tx1"/>
-                </a:solidFill>
-                <a:effectLst/>
-                <a:latin typeface="+mn-lt"/>
-                <a:ea typeface="+mn-ea"/>
-                <a:cs typeface="+mn-cs"/>
-              </a:rPr>
-              <a:t>, the </a:t>
-            </a:r>
-            <a:r>
-              <a:rPr lang="en-US" sz="1200" b="1" i="0" kern="1200" dirty="0">
-                <a:solidFill>
-                  <a:schemeClr val="tx1"/>
-                </a:solidFill>
-                <a:effectLst/>
-                <a:latin typeface="+mn-lt"/>
-                <a:ea typeface="+mn-ea"/>
-                <a:cs typeface="+mn-cs"/>
-              </a:rPr>
-              <a:t>backend API</a:t>
-            </a:r>
-            <a:r>
-              <a:rPr lang="en-US" sz="1200" b="0" i="0" kern="1200" dirty="0">
-                <a:solidFill>
-                  <a:schemeClr val="tx1"/>
-                </a:solidFill>
-                <a:effectLst/>
-                <a:latin typeface="+mn-lt"/>
-                <a:ea typeface="+mn-ea"/>
-                <a:cs typeface="+mn-cs"/>
-              </a:rPr>
-              <a:t>, and </a:t>
-            </a:r>
-            <a:r>
-              <a:rPr lang="en-US" sz="1200" b="1" i="0" kern="1200" dirty="0">
-                <a:solidFill>
-                  <a:schemeClr val="tx1"/>
-                </a:solidFill>
-                <a:effectLst/>
-                <a:latin typeface="+mn-lt"/>
-                <a:ea typeface="+mn-ea"/>
-                <a:cs typeface="+mn-cs"/>
-              </a:rPr>
-              <a:t>frontend design</a:t>
-            </a:r>
-            <a:r>
-              <a:rPr lang="en-US" sz="1200" b="0" i="0" kern="1200" dirty="0">
-                <a:solidFill>
-                  <a:schemeClr val="tx1"/>
-                </a:solidFill>
-                <a:effectLst/>
-                <a:latin typeface="+mn-lt"/>
-                <a:ea typeface="+mn-ea"/>
-                <a:cs typeface="+mn-cs"/>
-              </a:rPr>
-              <a:t>. After that I will summarize </a:t>
-            </a:r>
-            <a:r>
-              <a:rPr lang="en-US" sz="1200" b="1" i="0" kern="1200" dirty="0">
-                <a:solidFill>
-                  <a:schemeClr val="tx1"/>
-                </a:solidFill>
-                <a:effectLst/>
-                <a:latin typeface="+mn-lt"/>
-                <a:ea typeface="+mn-ea"/>
-                <a:cs typeface="+mn-cs"/>
-              </a:rPr>
-              <a:t>key features</a:t>
-            </a:r>
-            <a:r>
-              <a:rPr lang="en-US" sz="1200" b="0" i="0" kern="1200" dirty="0">
-                <a:solidFill>
-                  <a:schemeClr val="tx1"/>
-                </a:solidFill>
-                <a:effectLst/>
-                <a:latin typeface="+mn-lt"/>
-                <a:ea typeface="+mn-ea"/>
-                <a:cs typeface="+mn-cs"/>
-              </a:rPr>
-              <a:t>, show a </a:t>
-            </a:r>
-            <a:r>
-              <a:rPr lang="en-US" sz="1200" b="1" i="0" kern="1200" dirty="0">
-                <a:solidFill>
-                  <a:schemeClr val="tx1"/>
-                </a:solidFill>
-                <a:effectLst/>
-                <a:latin typeface="+mn-lt"/>
-                <a:ea typeface="+mn-ea"/>
-                <a:cs typeface="+mn-cs"/>
-              </a:rPr>
-              <a:t>live demo</a:t>
-            </a:r>
-            <a:r>
-              <a:rPr lang="en-US" sz="1200" b="0" i="0" kern="1200" dirty="0">
-                <a:solidFill>
-                  <a:schemeClr val="tx1"/>
-                </a:solidFill>
-                <a:effectLst/>
-                <a:latin typeface="+mn-lt"/>
-                <a:ea typeface="+mn-ea"/>
-                <a:cs typeface="+mn-cs"/>
-              </a:rPr>
-              <a:t>, discuss </a:t>
-            </a:r>
-            <a:r>
-              <a:rPr lang="en-US" sz="1200" b="1" i="0" kern="1200" dirty="0">
-                <a:solidFill>
-                  <a:schemeClr val="tx1"/>
-                </a:solidFill>
-                <a:effectLst/>
-                <a:latin typeface="+mn-lt"/>
-                <a:ea typeface="+mn-ea"/>
-                <a:cs typeface="+mn-cs"/>
-              </a:rPr>
-              <a:t>challenges and solutions</a:t>
-            </a:r>
-            <a:r>
-              <a:rPr lang="en-US" sz="1200" b="0" i="0" kern="1200" dirty="0">
-                <a:solidFill>
-                  <a:schemeClr val="tx1"/>
-                </a:solidFill>
-                <a:effectLst/>
-                <a:latin typeface="+mn-lt"/>
-                <a:ea typeface="+mn-ea"/>
-                <a:cs typeface="+mn-cs"/>
-              </a:rPr>
-              <a:t>, and close with </a:t>
-            </a:r>
-            <a:r>
-              <a:rPr lang="en-US" sz="1200" b="1" i="0" kern="1200" dirty="0">
-                <a:solidFill>
-                  <a:schemeClr val="tx1"/>
-                </a:solidFill>
-                <a:effectLst/>
-                <a:latin typeface="+mn-lt"/>
-                <a:ea typeface="+mn-ea"/>
-                <a:cs typeface="+mn-cs"/>
-              </a:rPr>
-              <a:t>conclusion and future work</a:t>
-            </a:r>
-            <a:r>
-              <a:rPr lang="en-US" sz="1200" b="0" i="0" kern="1200" dirty="0">
-                <a:solidFill>
-                  <a:schemeClr val="tx1"/>
-                </a:solidFill>
-                <a:effectLst/>
-                <a:latin typeface="+mn-lt"/>
-                <a:ea typeface="+mn-ea"/>
-                <a:cs typeface="+mn-cs"/>
-              </a:rPr>
-              <a:t>.</a:t>
+              <a:rPr lang="en-US" dirty="0"/>
+              <a:t>Here is the roadmap for today’s presentation.</a:t>
+            </a:r>
+          </a:p>
+          <a:p>
+            <a:r>
+              <a:rPr lang="en-US" dirty="0"/>
+              <a:t>I will start with the problem statement, explaining why real-time IoT monitoring is important in industrial environments. Then, I will introduce the project goals and scope, including what the system is designed to achieve.</a:t>
+            </a:r>
+          </a:p>
+          <a:p>
+            <a:r>
+              <a:rPr lang="en-US" dirty="0"/>
+              <a:t>Next, I will cover the technology stack and system architecture, showing how data flows from the edge device through MQTT, the API, the database, </a:t>
+            </a:r>
+            <a:r>
+              <a:rPr lang="en-US" dirty="0" err="1"/>
+              <a:t>SignalR</a:t>
+            </a:r>
+            <a:r>
+              <a:rPr lang="en-US" dirty="0"/>
+              <a:t>, and finally to the React frontend.</a:t>
+            </a:r>
+          </a:p>
+          <a:p>
+            <a:r>
+              <a:rPr lang="en-US" dirty="0"/>
+              <a:t>After that, I will explain the database design, followed by an overview of the backend, API layer, and frontend design.</a:t>
+            </a:r>
+          </a:p>
+          <a:p>
+            <a:r>
+              <a:rPr lang="en-US" dirty="0"/>
+              <a:t>I will then highlight the key features and present a live demo, where you will see sensor data travel from the edge device to the dashboard in real time.</a:t>
+            </a:r>
+          </a:p>
+          <a:p>
+            <a:r>
+              <a:rPr lang="en-US" dirty="0"/>
+              <a:t>Finally, I will discuss the challenges we faced, the solutions we implemented, and conclude with future work.</a:t>
+            </a:r>
+          </a:p>
+          <a:p>
+            <a:r>
+              <a:rPr lang="en-US" dirty="0"/>
+              <a:t>Let’s begin with the problem statement.</a:t>
             </a:r>
           </a:p>
           <a:p>
@@ -3329,274 +1795,34 @@
           <a:lstStyle/>
           <a:p>
             <a:r>
-              <a:rPr lang="en-US" sz="1200" b="0" i="0" kern="1200" dirty="0">
-                <a:solidFill>
-                  <a:schemeClr val="tx1"/>
-                </a:solidFill>
-                <a:effectLst/>
-                <a:latin typeface="+mn-lt"/>
-                <a:ea typeface="+mn-ea"/>
-                <a:cs typeface="+mn-cs"/>
-              </a:rPr>
-              <a:t>Industrial and commercial facilities need </a:t>
-            </a:r>
-            <a:r>
-              <a:rPr lang="en-US" sz="1200" b="1" i="0" kern="1200" dirty="0">
-                <a:solidFill>
-                  <a:schemeClr val="tx1"/>
-                </a:solidFill>
-                <a:effectLst/>
-                <a:latin typeface="+mn-lt"/>
-                <a:ea typeface="+mn-ea"/>
-                <a:cs typeface="+mn-cs"/>
-              </a:rPr>
-              <a:t>continuous monitoring</a:t>
-            </a:r>
-            <a:r>
-              <a:rPr lang="en-US" sz="1200" b="0" i="0" kern="1200" dirty="0">
-                <a:solidFill>
-                  <a:schemeClr val="tx1"/>
-                </a:solidFill>
-                <a:effectLst/>
-                <a:latin typeface="+mn-lt"/>
-                <a:ea typeface="+mn-ea"/>
-                <a:cs typeface="+mn-cs"/>
-              </a:rPr>
-              <a:t> of equipment—temperature, pressure, level, speed, status, and faults—often across more than one location.</a:t>
-            </a:r>
-          </a:p>
-          <a:p>
-            <a:r>
-              <a:rPr lang="en-US" sz="1200" b="0" i="0" kern="1200" dirty="0">
-                <a:solidFill>
-                  <a:schemeClr val="tx1"/>
-                </a:solidFill>
-                <a:effectLst/>
-                <a:latin typeface="+mn-lt"/>
-                <a:ea typeface="+mn-ea"/>
-                <a:cs typeface="+mn-cs"/>
-              </a:rPr>
-              <a:t>Traditional systems solve that, but they are usually </a:t>
-            </a:r>
-            <a:r>
-              <a:rPr lang="en-US" sz="1200" b="1" i="0" kern="1200" dirty="0">
-                <a:solidFill>
-                  <a:schemeClr val="tx1"/>
-                </a:solidFill>
-                <a:effectLst/>
-                <a:latin typeface="+mn-lt"/>
-                <a:ea typeface="+mn-ea"/>
-                <a:cs typeface="+mn-cs"/>
-              </a:rPr>
-              <a:t>expensive</a:t>
-            </a:r>
-            <a:r>
-              <a:rPr lang="en-US" sz="1200" b="0" i="0" kern="1200" dirty="0">
-                <a:solidFill>
-                  <a:schemeClr val="tx1"/>
-                </a:solidFill>
-                <a:effectLst/>
-                <a:latin typeface="+mn-lt"/>
-                <a:ea typeface="+mn-ea"/>
-                <a:cs typeface="+mn-cs"/>
-              </a:rPr>
-              <a:t> and </a:t>
-            </a:r>
-            <a:r>
-              <a:rPr lang="en-US" sz="1200" b="1" i="0" kern="1200" dirty="0">
-                <a:solidFill>
-                  <a:schemeClr val="tx1"/>
-                </a:solidFill>
-                <a:effectLst/>
-                <a:latin typeface="+mn-lt"/>
-                <a:ea typeface="+mn-ea"/>
-                <a:cs typeface="+mn-cs"/>
-              </a:rPr>
-              <a:t>lock organizations into proprietary hardware and software</a:t>
-            </a:r>
-            <a:r>
-              <a:rPr lang="en-US" sz="1200" b="0" i="0" kern="1200" dirty="0">
-                <a:solidFill>
-                  <a:schemeClr val="tx1"/>
-                </a:solidFill>
-                <a:effectLst/>
-                <a:latin typeface="+mn-lt"/>
-                <a:ea typeface="+mn-ea"/>
-                <a:cs typeface="+mn-cs"/>
-              </a:rPr>
-              <a:t>.</a:t>
-            </a:r>
-          </a:p>
-          <a:p>
-            <a:r>
-              <a:rPr lang="en-US" sz="1200" b="0" i="0" kern="1200" dirty="0">
-                <a:solidFill>
-                  <a:schemeClr val="tx1"/>
-                </a:solidFill>
-                <a:effectLst/>
-                <a:latin typeface="+mn-lt"/>
-                <a:ea typeface="+mn-ea"/>
-                <a:cs typeface="+mn-cs"/>
-              </a:rPr>
-              <a:t>This approach is a </a:t>
-            </a:r>
-            <a:r>
-              <a:rPr lang="en-US" sz="1200" b="1" i="0" kern="1200" dirty="0">
-                <a:solidFill>
-                  <a:schemeClr val="tx1"/>
-                </a:solidFill>
-                <a:effectLst/>
-                <a:latin typeface="+mn-lt"/>
-                <a:ea typeface="+mn-ea"/>
-                <a:cs typeface="+mn-cs"/>
-              </a:rPr>
-              <a:t>web-based dashboard</a:t>
-            </a:r>
-            <a:r>
-              <a:rPr lang="en-US" sz="1200" b="0" i="0" kern="1200" dirty="0">
-                <a:solidFill>
-                  <a:schemeClr val="tx1"/>
-                </a:solidFill>
-                <a:effectLst/>
-                <a:latin typeface="+mn-lt"/>
-                <a:ea typeface="+mn-ea"/>
-                <a:cs typeface="+mn-cs"/>
-              </a:rPr>
-              <a:t> that runs in </a:t>
-            </a:r>
-            <a:r>
-              <a:rPr lang="en-US" sz="1200" b="1" i="0" kern="1200" dirty="0">
-                <a:solidFill>
-                  <a:schemeClr val="tx1"/>
-                </a:solidFill>
-                <a:effectLst/>
-                <a:latin typeface="+mn-lt"/>
-                <a:ea typeface="+mn-ea"/>
-                <a:cs typeface="+mn-cs"/>
-              </a:rPr>
-              <a:t>any browser</a:t>
-            </a:r>
-            <a:r>
-              <a:rPr lang="en-US" sz="1200" b="0" i="0" kern="1200" dirty="0">
-                <a:solidFill>
-                  <a:schemeClr val="tx1"/>
-                </a:solidFill>
-                <a:effectLst/>
-                <a:latin typeface="+mn-lt"/>
-                <a:ea typeface="+mn-ea"/>
-                <a:cs typeface="+mn-cs"/>
-              </a:rPr>
-              <a:t>, built with a standard stack—ASP.NET Core, React, SQL Server, MQTT, and </a:t>
-            </a:r>
-            <a:r>
-              <a:rPr lang="en-US" sz="1200" b="0" i="0" kern="1200" dirty="0" err="1">
-                <a:solidFill>
-                  <a:schemeClr val="tx1"/>
-                </a:solidFill>
-                <a:effectLst/>
-                <a:latin typeface="+mn-lt"/>
-                <a:ea typeface="+mn-ea"/>
-                <a:cs typeface="+mn-cs"/>
-              </a:rPr>
+              <a:rPr lang="en-US" dirty="0"/>
+              <a:t>Many facilities, including hotels, hospitals, farms, warehouses, and manufacturing plants, need to continuously monitor equipment and sensor data.</a:t>
+            </a:r>
+          </a:p>
+          <a:p>
+            <a:r>
+              <a:rPr lang="en-US" dirty="0"/>
+              <a:t>Traditional monitoring systems can be expensive and often lock organizations into proprietary hardware and software.</a:t>
+            </a:r>
+          </a:p>
+          <a:p>
+            <a:r>
+              <a:rPr lang="en-US" dirty="0"/>
+              <a:t>To address this, this project provides a web-based dashboard that runs in any browser and uses common IoT devices together with technologies such as ASP.NET Core, React, MQTT, </a:t>
+            </a:r>
+            <a:r>
+              <a:rPr lang="en-US" dirty="0" err="1"/>
               <a:t>SignalR</a:t>
             </a:r>
             <a:r>
-              <a:rPr lang="en-US" sz="1200" b="0" i="0" kern="1200" dirty="0">
-                <a:solidFill>
-                  <a:schemeClr val="tx1"/>
-                </a:solidFill>
-                <a:effectLst/>
-                <a:latin typeface="+mn-lt"/>
-                <a:ea typeface="+mn-ea"/>
-                <a:cs typeface="+mn-cs"/>
-              </a:rPr>
-              <a:t>—and common IoT hardware such as Arduino, ESP32, and Raspberry Pi.</a:t>
-            </a:r>
-          </a:p>
-          <a:p>
-            <a:r>
-              <a:rPr lang="en-US" sz="1200" b="0" i="0" kern="1200" dirty="0">
-                <a:solidFill>
-                  <a:schemeClr val="tx1"/>
-                </a:solidFill>
-                <a:effectLst/>
-                <a:latin typeface="+mn-lt"/>
-                <a:ea typeface="+mn-ea"/>
-                <a:cs typeface="+mn-cs"/>
-              </a:rPr>
-              <a:t>The result is </a:t>
-            </a:r>
-            <a:r>
-              <a:rPr lang="en-US" sz="1200" b="1" i="0" kern="1200" dirty="0">
-                <a:solidFill>
-                  <a:schemeClr val="tx1"/>
-                </a:solidFill>
-                <a:effectLst/>
-                <a:latin typeface="+mn-lt"/>
-                <a:ea typeface="+mn-ea"/>
-                <a:cs typeface="+mn-cs"/>
-              </a:rPr>
-              <a:t>real-time visibility</a:t>
-            </a:r>
-            <a:r>
-              <a:rPr lang="en-US" sz="1200" b="0" i="0" kern="1200" dirty="0">
-                <a:solidFill>
-                  <a:schemeClr val="tx1"/>
-                </a:solidFill>
-                <a:effectLst/>
-                <a:latin typeface="+mn-lt"/>
-                <a:ea typeface="+mn-ea"/>
-                <a:cs typeface="+mn-cs"/>
-              </a:rPr>
-              <a:t>, </a:t>
-            </a:r>
-            <a:r>
-              <a:rPr lang="en-US" sz="1200" b="1" i="0" kern="1200" dirty="0">
-                <a:solidFill>
-                  <a:schemeClr val="tx1"/>
-                </a:solidFill>
-                <a:effectLst/>
-                <a:latin typeface="+mn-lt"/>
-                <a:ea typeface="+mn-ea"/>
-                <a:cs typeface="+mn-cs"/>
-              </a:rPr>
-              <a:t>historical storage in SQL Server</a:t>
-            </a:r>
-            <a:r>
-              <a:rPr lang="en-US" sz="1200" b="0" i="0" kern="1200" dirty="0">
-                <a:solidFill>
-                  <a:schemeClr val="tx1"/>
-                </a:solidFill>
-                <a:effectLst/>
-                <a:latin typeface="+mn-lt"/>
-                <a:ea typeface="+mn-ea"/>
-                <a:cs typeface="+mn-cs"/>
-              </a:rPr>
-              <a:t>, and a </a:t>
-            </a:r>
-            <a:r>
-              <a:rPr lang="en-US" sz="1200" b="1" i="0" kern="1200" dirty="0">
-                <a:solidFill>
-                  <a:schemeClr val="tx1"/>
-                </a:solidFill>
-                <a:effectLst/>
-                <a:latin typeface="+mn-lt"/>
-                <a:ea typeface="+mn-ea"/>
-                <a:cs typeface="+mn-cs"/>
-              </a:rPr>
-              <a:t>practical, cost-effective</a:t>
-            </a:r>
-            <a:r>
-              <a:rPr lang="en-US" sz="1200" b="0" i="0" kern="1200" dirty="0">
-                <a:solidFill>
-                  <a:schemeClr val="tx1"/>
-                </a:solidFill>
-                <a:effectLst/>
-                <a:latin typeface="+mn-lt"/>
-                <a:ea typeface="+mn-ea"/>
-                <a:cs typeface="+mn-cs"/>
-              </a:rPr>
-              <a:t> alternative to full SCADA for capstone-scale deployment.</a:t>
+              <a:rPr lang="en-US" dirty="0"/>
+              <a:t>, and SQL Server.</a:t>
+            </a:r>
+          </a:p>
+          <a:p>
+            <a:r>
+              <a:rPr lang="en-US" dirty="0"/>
+              <a:t>The result is a practical and cost-effective solution for real-time monitoring and historical data storage.</a:t>
             </a:r>
           </a:p>
           <a:p>
@@ -3745,282 +1971,44 @@
           <a:lstStyle/>
           <a:p>
             <a:r>
-              <a:rPr lang="en-US" sz="1200" b="0" i="0" kern="1200" dirty="0">
-                <a:solidFill>
-                  <a:schemeClr val="tx1"/>
-                </a:solidFill>
-                <a:effectLst/>
-                <a:latin typeface="+mn-lt"/>
-                <a:ea typeface="+mn-ea"/>
-                <a:cs typeface="+mn-cs"/>
-              </a:rPr>
-              <a:t>These six capabilities define what the system does.</a:t>
-            </a:r>
-          </a:p>
-          <a:p>
-            <a:r>
-              <a:rPr lang="en-US" sz="1200" b="0" i="0" kern="1200" dirty="0">
-                <a:solidFill>
-                  <a:schemeClr val="tx1"/>
-                </a:solidFill>
-                <a:effectLst/>
-                <a:latin typeface="+mn-lt"/>
-                <a:ea typeface="+mn-ea"/>
-                <a:cs typeface="+mn-cs"/>
-              </a:rPr>
-              <a:t>First, </a:t>
-            </a:r>
-            <a:r>
-              <a:rPr lang="en-US" sz="1200" b="1" i="0" kern="1200" dirty="0">
-                <a:solidFill>
-                  <a:schemeClr val="tx1"/>
-                </a:solidFill>
-                <a:effectLst/>
-                <a:latin typeface="+mn-lt"/>
-                <a:ea typeface="+mn-ea"/>
-                <a:cs typeface="+mn-cs"/>
-              </a:rPr>
-              <a:t>device and sensor setup</a:t>
-            </a:r>
-            <a:r>
-              <a:rPr lang="en-US" sz="1200" b="0" i="0" kern="1200" dirty="0">
-                <a:solidFill>
-                  <a:schemeClr val="tx1"/>
-                </a:solidFill>
-                <a:effectLst/>
-                <a:latin typeface="+mn-lt"/>
-                <a:ea typeface="+mn-ea"/>
-                <a:cs typeface="+mn-cs"/>
-              </a:rPr>
-              <a:t>: register IoT devices and configure sensors and actuators in the application.</a:t>
-            </a:r>
-          </a:p>
-          <a:p>
-            <a:r>
-              <a:rPr lang="en-US" sz="1200" b="1" i="0" kern="1200" dirty="0">
-                <a:solidFill>
-                  <a:schemeClr val="tx1"/>
-                </a:solidFill>
-                <a:effectLst/>
-                <a:latin typeface="+mn-lt"/>
-                <a:ea typeface="+mn-ea"/>
-                <a:cs typeface="+mn-cs"/>
-              </a:rPr>
-              <a:t>Real-time monitoring</a:t>
-            </a:r>
-            <a:r>
-              <a:rPr lang="en-US" sz="1200" b="0" i="0" kern="1200" dirty="0">
-                <a:solidFill>
-                  <a:schemeClr val="tx1"/>
-                </a:solidFill>
-                <a:effectLst/>
-                <a:latin typeface="+mn-lt"/>
-                <a:ea typeface="+mn-ea"/>
-                <a:cs typeface="+mn-cs"/>
-              </a:rPr>
-              <a:t> delivers live readings and </a:t>
-            </a:r>
-            <a:r>
-              <a:rPr lang="en-US" sz="1200" b="1" i="0" kern="1200" dirty="0">
-                <a:solidFill>
-                  <a:schemeClr val="tx1"/>
-                </a:solidFill>
-                <a:effectLst/>
-                <a:latin typeface="+mn-lt"/>
-                <a:ea typeface="+mn-ea"/>
-                <a:cs typeface="+mn-cs"/>
-              </a:rPr>
-              <a:t>online/offline</a:t>
-            </a:r>
-            <a:r>
-              <a:rPr lang="en-US" sz="1200" b="0" i="0" kern="1200" dirty="0">
-                <a:solidFill>
-                  <a:schemeClr val="tx1"/>
-                </a:solidFill>
-                <a:effectLst/>
-                <a:latin typeface="+mn-lt"/>
-                <a:ea typeface="+mn-ea"/>
-                <a:cs typeface="+mn-cs"/>
-              </a:rPr>
-              <a:t> status based on device activity.</a:t>
-            </a:r>
-          </a:p>
-          <a:p>
-            <a:r>
-              <a:rPr lang="en-US" sz="1200" b="1" i="0" kern="1200" dirty="0">
-                <a:solidFill>
-                  <a:schemeClr val="tx1"/>
-                </a:solidFill>
-                <a:effectLst/>
-                <a:latin typeface="+mn-lt"/>
-                <a:ea typeface="+mn-ea"/>
-                <a:cs typeface="+mn-cs"/>
-              </a:rPr>
-              <a:t>Dashboards and charts</a:t>
-            </a:r>
-            <a:r>
-              <a:rPr lang="en-US" sz="1200" b="0" i="0" kern="1200" dirty="0">
-                <a:solidFill>
-                  <a:schemeClr val="tx1"/>
-                </a:solidFill>
-                <a:effectLst/>
-                <a:latin typeface="+mn-lt"/>
-                <a:ea typeface="+mn-ea"/>
-                <a:cs typeface="+mn-cs"/>
-              </a:rPr>
-              <a:t> show line trends, analog gauges, and discrete on/off indicators.</a:t>
-            </a:r>
-          </a:p>
-          <a:p>
-            <a:r>
-              <a:rPr lang="en-US" sz="1200" b="1" i="0" kern="1200" dirty="0">
-                <a:solidFill>
-                  <a:schemeClr val="tx1"/>
-                </a:solidFill>
-                <a:effectLst/>
-                <a:latin typeface="+mn-lt"/>
-                <a:ea typeface="+mn-ea"/>
-                <a:cs typeface="+mn-cs"/>
-              </a:rPr>
-              <a:t>Live and history windows</a:t>
-            </a:r>
-            <a:r>
-              <a:rPr lang="en-US" sz="1200" b="0" i="0" kern="1200" dirty="0">
-                <a:solidFill>
-                  <a:schemeClr val="tx1"/>
-                </a:solidFill>
-                <a:effectLst/>
-                <a:latin typeface="+mn-lt"/>
-                <a:ea typeface="+mn-ea"/>
-                <a:cs typeface="+mn-cs"/>
-              </a:rPr>
-              <a:t> support rolling live charts and history at ten minutes, one hour, twenty-four hours, or a custom range.</a:t>
-            </a:r>
-          </a:p>
-          <a:p>
-            <a:r>
-              <a:rPr lang="en-US" sz="1200" b="1" i="0" kern="1200" dirty="0">
-                <a:solidFill>
-                  <a:schemeClr val="tx1"/>
-                </a:solidFill>
-                <a:effectLst/>
-                <a:latin typeface="+mn-lt"/>
-                <a:ea typeface="+mn-ea"/>
-                <a:cs typeface="+mn-cs"/>
-              </a:rPr>
-              <a:t>Threshold alerting</a:t>
-            </a:r>
-            <a:r>
-              <a:rPr lang="en-US" sz="1200" b="0" i="0" kern="1200" dirty="0">
-                <a:solidFill>
-                  <a:schemeClr val="tx1"/>
-                </a:solidFill>
-                <a:effectLst/>
-                <a:latin typeface="+mn-lt"/>
-                <a:ea typeface="+mn-ea"/>
-                <a:cs typeface="+mn-cs"/>
-              </a:rPr>
-              <a:t> provides rule-based notifications when limits are exceeded.</a:t>
-            </a:r>
-          </a:p>
-          <a:p>
-            <a:r>
-              <a:rPr lang="en-US" sz="1200" b="0" i="0" kern="1200" dirty="0">
-                <a:solidFill>
-                  <a:schemeClr val="tx1"/>
-                </a:solidFill>
-                <a:effectLst/>
-                <a:latin typeface="+mn-lt"/>
-                <a:ea typeface="+mn-ea"/>
-                <a:cs typeface="+mn-cs"/>
-              </a:rPr>
-              <a:t>Finally, </a:t>
-            </a:r>
-            <a:r>
-              <a:rPr lang="en-US" sz="1200" b="1" i="0" kern="1200" dirty="0">
-                <a:solidFill>
-                  <a:schemeClr val="tx1"/>
-                </a:solidFill>
-                <a:effectLst/>
-                <a:latin typeface="+mn-lt"/>
-                <a:ea typeface="+mn-ea"/>
-                <a:cs typeface="+mn-cs"/>
-              </a:rPr>
-              <a:t>actuator commands</a:t>
-            </a:r>
-            <a:r>
-              <a:rPr lang="en-US" sz="1200" b="0" i="0" kern="1200" dirty="0">
-                <a:solidFill>
-                  <a:schemeClr val="tx1"/>
-                </a:solidFill>
-                <a:effectLst/>
-                <a:latin typeface="+mn-lt"/>
-                <a:ea typeface="+mn-ea"/>
-                <a:cs typeface="+mn-cs"/>
-              </a:rPr>
-              <a:t> allow remote control—for example an LED—with </a:t>
-            </a:r>
-            <a:r>
-              <a:rPr lang="en-US" sz="1200" b="1" i="0" kern="1200" dirty="0">
-                <a:solidFill>
-                  <a:schemeClr val="tx1"/>
-                </a:solidFill>
-                <a:effectLst/>
-                <a:latin typeface="+mn-lt"/>
-                <a:ea typeface="+mn-ea"/>
-                <a:cs typeface="+mn-cs"/>
-              </a:rPr>
-              <a:t>command history</a:t>
-            </a:r>
-            <a:r>
-              <a:rPr lang="en-US" sz="1200" b="0" i="0" kern="1200" dirty="0">
-                <a:solidFill>
-                  <a:schemeClr val="tx1"/>
-                </a:solidFill>
-                <a:effectLst/>
-                <a:latin typeface="+mn-lt"/>
-                <a:ea typeface="+mn-ea"/>
-                <a:cs typeface="+mn-cs"/>
-              </a:rPr>
-              <a:t> for traceability.</a:t>
-            </a:r>
-          </a:p>
-          <a:p>
-            <a:r>
-              <a:rPr lang="en-US" sz="1200" b="0" i="0" kern="1200" dirty="0">
-                <a:solidFill>
-                  <a:schemeClr val="tx1"/>
-                </a:solidFill>
-                <a:effectLst/>
-                <a:latin typeface="+mn-lt"/>
-                <a:ea typeface="+mn-ea"/>
-                <a:cs typeface="+mn-cs"/>
-              </a:rPr>
-              <a:t>Together, the system supports </a:t>
-            </a:r>
-            <a:r>
-              <a:rPr lang="en-US" sz="1200" b="1" i="0" kern="1200" dirty="0">
-                <a:solidFill>
-                  <a:schemeClr val="tx1"/>
-                </a:solidFill>
-                <a:effectLst/>
-                <a:latin typeface="+mn-lt"/>
-                <a:ea typeface="+mn-ea"/>
-                <a:cs typeface="+mn-cs"/>
-              </a:rPr>
-              <a:t>configure, observe, and respond</a:t>
-            </a:r>
-            <a:r>
-              <a:rPr lang="en-US" sz="1200" b="0" i="0" kern="1200" dirty="0">
-                <a:solidFill>
-                  <a:schemeClr val="tx1"/>
-                </a:solidFill>
-                <a:effectLst/>
-                <a:latin typeface="+mn-lt"/>
-                <a:ea typeface="+mn-ea"/>
-                <a:cs typeface="+mn-cs"/>
-              </a:rPr>
-              <a:t> from one web application.</a:t>
+              <a:rPr lang="en-US" dirty="0"/>
+              <a:t>These six capabilities define the scope of the system and support the complete monitoring workflow.</a:t>
+            </a:r>
+          </a:p>
+          <a:p>
+            <a:r>
+              <a:rPr lang="en-US" dirty="0"/>
+              <a:t>The process begins with device and sensor setup, where users register IoT devices and configure sensors and actuators within the application.</a:t>
+            </a:r>
+          </a:p>
+          <a:p>
+            <a:r>
+              <a:rPr lang="en-US" dirty="0"/>
+              <a:t>Once connected, the system provides real-time monitoring, displaying live sensor readings and device online or offline status.</a:t>
+            </a:r>
+          </a:p>
+          <a:p>
+            <a:r>
+              <a:rPr lang="en-US" dirty="0"/>
+              <a:t>The collected data is stored and presented through live and history views, as well as dashboards and charts that help users track trends and monitor system performance over time.</a:t>
+            </a:r>
+          </a:p>
+          <a:p>
+            <a:r>
+              <a:rPr lang="en-US" dirty="0"/>
+              <a:t>When sensor values exceed predefined limits, the threshold alerting feature generates real-time notifications.</a:t>
+            </a:r>
+          </a:p>
+          <a:p>
+            <a:r>
+              <a:rPr lang="en-US" dirty="0"/>
+              <a:t>Finally, actuator commands allow users to remotely control devices while maintaining a command history for traceability.</a:t>
+            </a:r>
+          </a:p>
+          <a:p>
+            <a:r>
+              <a:rPr lang="en-US" dirty="0"/>
+              <a:t>Together, these capabilities enable users to configure, monitor, and respond from a single web application.</a:t>
             </a:r>
           </a:p>
           <a:p>
@@ -4109,358 +2097,69 @@
           <a:lstStyle/>
           <a:p>
             <a:r>
-              <a:rPr lang="en-US" sz="1200" b="0" i="0" kern="1200" dirty="0">
-                <a:solidFill>
-                  <a:schemeClr val="tx1"/>
-                </a:solidFill>
-                <a:effectLst/>
-                <a:latin typeface="+mn-lt"/>
-                <a:ea typeface="+mn-ea"/>
-                <a:cs typeface="+mn-cs"/>
-              </a:rPr>
-              <a:t>This slide shows how those capabilities are built.</a:t>
-            </a:r>
-          </a:p>
-          <a:p>
-            <a:r>
-              <a:rPr lang="en-US" sz="1200" b="0" i="0" kern="1200" dirty="0">
-                <a:solidFill>
-                  <a:schemeClr val="tx1"/>
-                </a:solidFill>
-                <a:effectLst/>
-                <a:latin typeface="+mn-lt"/>
-                <a:ea typeface="+mn-ea"/>
-                <a:cs typeface="+mn-cs"/>
-              </a:rPr>
-              <a:t>Data flows from the </a:t>
-            </a:r>
-            <a:r>
-              <a:rPr lang="en-US" sz="1200" b="1" i="0" kern="1200" dirty="0">
-                <a:solidFill>
-                  <a:schemeClr val="tx1"/>
-                </a:solidFill>
-                <a:effectLst/>
-                <a:latin typeface="+mn-lt"/>
-                <a:ea typeface="+mn-ea"/>
-                <a:cs typeface="+mn-cs"/>
-              </a:rPr>
-              <a:t>device through MQTT to the API, into SQL Server, and to the React UI via </a:t>
-            </a:r>
-            <a:r>
-              <a:rPr lang="en-US" sz="1200" b="1" i="0" kern="1200" dirty="0" err="1">
-                <a:solidFill>
-                  <a:schemeClr val="tx1"/>
-                </a:solidFill>
-                <a:effectLst/>
-                <a:latin typeface="+mn-lt"/>
-                <a:ea typeface="+mn-ea"/>
-                <a:cs typeface="+mn-cs"/>
-              </a:rPr>
+              <a:rPr lang="en-US" dirty="0"/>
+              <a:t>This slide presents the main technologies used in the project.</a:t>
+            </a:r>
+          </a:p>
+          <a:p>
+            <a:r>
+              <a:rPr lang="en-US" dirty="0"/>
+              <a:t>The backend is built with ASP.NET Core, which provides REST APIs, MQTT data ingestion, and JWT-based authentication.</a:t>
+            </a:r>
+          </a:p>
+          <a:p>
+            <a:r>
+              <a:rPr lang="en-US" dirty="0"/>
+              <a:t>For device communication, the system uses MQTT with a </a:t>
+            </a:r>
+            <a:r>
+              <a:rPr lang="en-US" dirty="0" err="1"/>
+              <a:t>Mosquitto</a:t>
+            </a:r>
+            <a:r>
+              <a:rPr lang="en-US" dirty="0"/>
+              <a:t> broker. MQTT stands for Message Queuing Telemetry Transport, a lightweight messaging protocol commonly used in IoT systems. It enables devices and sensors to efficiently send data to the backend in real time.</a:t>
+            </a:r>
+          </a:p>
+          <a:p>
+            <a:r>
+              <a:rPr lang="en-US" dirty="0"/>
+              <a:t>Real-time updates are delivered through </a:t>
+            </a:r>
+            <a:r>
+              <a:rPr lang="en-US" dirty="0" err="1"/>
               <a:t>SignalR</a:t>
             </a:r>
             <a:r>
-              <a:rPr lang="en-US" sz="1200" b="0" i="0" kern="1200" dirty="0">
-                <a:solidFill>
-                  <a:schemeClr val="tx1"/>
-                </a:solidFill>
-                <a:effectLst/>
-                <a:latin typeface="+mn-lt"/>
-                <a:ea typeface="+mn-ea"/>
-                <a:cs typeface="+mn-cs"/>
-              </a:rPr>
-              <a:t>.</a:t>
-            </a:r>
-          </a:p>
-          <a:p>
-            <a:r>
-              <a:rPr lang="en-US" sz="1200" b="0" i="0" kern="1200" dirty="0">
-                <a:solidFill>
-                  <a:schemeClr val="tx1"/>
-                </a:solidFill>
-                <a:effectLst/>
-                <a:latin typeface="+mn-lt"/>
-                <a:ea typeface="+mn-ea"/>
-                <a:cs typeface="+mn-cs"/>
-              </a:rPr>
-              <a:t>The </a:t>
-            </a:r>
-            <a:r>
-              <a:rPr lang="en-US" sz="1200" b="1" i="0" kern="1200" dirty="0">
-                <a:solidFill>
-                  <a:schemeClr val="tx1"/>
-                </a:solidFill>
-                <a:effectLst/>
-                <a:latin typeface="+mn-lt"/>
-                <a:ea typeface="+mn-ea"/>
-                <a:cs typeface="+mn-cs"/>
-              </a:rPr>
-              <a:t>backend</a:t>
-            </a:r>
-            <a:r>
-              <a:rPr lang="en-US" sz="1200" b="0" i="0" kern="1200" dirty="0">
-                <a:solidFill>
-                  <a:schemeClr val="tx1"/>
-                </a:solidFill>
-                <a:effectLst/>
-                <a:latin typeface="+mn-lt"/>
-                <a:ea typeface="+mn-ea"/>
-                <a:cs typeface="+mn-cs"/>
-              </a:rPr>
-              <a:t> is </a:t>
-            </a:r>
-            <a:r>
-              <a:rPr lang="en-US" sz="1200" b="1" i="0" kern="1200" dirty="0">
-                <a:solidFill>
-                  <a:schemeClr val="tx1"/>
-                </a:solidFill>
-                <a:effectLst/>
-                <a:latin typeface="+mn-lt"/>
-                <a:ea typeface="+mn-ea"/>
-                <a:cs typeface="+mn-cs"/>
-              </a:rPr>
-              <a:t>C# and ASP.NET Core 8</a:t>
-            </a:r>
-            <a:r>
-              <a:rPr lang="en-US" sz="1200" b="0" i="0" kern="1200" dirty="0">
-                <a:solidFill>
-                  <a:schemeClr val="tx1"/>
-                </a:solidFill>
-                <a:effectLst/>
-                <a:latin typeface="+mn-lt"/>
-                <a:ea typeface="+mn-ea"/>
-                <a:cs typeface="+mn-cs"/>
-              </a:rPr>
-              <a:t>, providing REST APIs, MQTT ingest, and JWT authentication.</a:t>
-            </a:r>
-          </a:p>
-          <a:p>
-            <a:r>
-              <a:rPr lang="en-US" sz="1200" b="1" i="0" kern="1200" dirty="0">
-                <a:solidFill>
-                  <a:schemeClr val="tx1"/>
-                </a:solidFill>
-                <a:effectLst/>
-                <a:latin typeface="+mn-lt"/>
-                <a:ea typeface="+mn-ea"/>
-                <a:cs typeface="+mn-cs"/>
-              </a:rPr>
-              <a:t>IoT messaging</a:t>
-            </a:r>
-            <a:r>
-              <a:rPr lang="en-US" sz="1200" b="0" i="0" kern="1200" dirty="0">
-                <a:solidFill>
-                  <a:schemeClr val="tx1"/>
-                </a:solidFill>
-                <a:effectLst/>
-                <a:latin typeface="+mn-lt"/>
-                <a:ea typeface="+mn-ea"/>
-                <a:cs typeface="+mn-cs"/>
-              </a:rPr>
-              <a:t> uses </a:t>
-            </a:r>
-            <a:r>
-              <a:rPr lang="en-US" sz="1200" b="1" i="0" kern="1200" dirty="0">
-                <a:solidFill>
-                  <a:schemeClr val="tx1"/>
-                </a:solidFill>
-                <a:effectLst/>
-                <a:latin typeface="+mn-lt"/>
-                <a:ea typeface="+mn-ea"/>
-                <a:cs typeface="+mn-cs"/>
-              </a:rPr>
-              <a:t>MQTT</a:t>
-            </a:r>
-            <a:r>
-              <a:rPr lang="en-US" sz="1200" b="0" i="0" kern="1200" dirty="0">
-                <a:solidFill>
-                  <a:schemeClr val="tx1"/>
-                </a:solidFill>
-                <a:effectLst/>
-                <a:latin typeface="+mn-lt"/>
-                <a:ea typeface="+mn-ea"/>
-                <a:cs typeface="+mn-cs"/>
-              </a:rPr>
-              <a:t> with a </a:t>
-            </a:r>
-            <a:r>
-              <a:rPr lang="en-US" sz="1200" b="1" i="0" kern="1200" dirty="0" err="1">
-                <a:solidFill>
-                  <a:schemeClr val="tx1"/>
-                </a:solidFill>
-                <a:effectLst/>
-                <a:latin typeface="+mn-lt"/>
-                <a:ea typeface="+mn-ea"/>
-                <a:cs typeface="+mn-cs"/>
-              </a:rPr>
-              <a:t>Mosquitto</a:t>
-            </a:r>
-            <a:r>
-              <a:rPr lang="en-US" sz="1200" b="0" i="0" kern="1200" dirty="0">
-                <a:solidFill>
-                  <a:schemeClr val="tx1"/>
-                </a:solidFill>
-                <a:effectLst/>
-                <a:latin typeface="+mn-lt"/>
-                <a:ea typeface="+mn-ea"/>
-                <a:cs typeface="+mn-cs"/>
-              </a:rPr>
-              <a:t> broker; commands to actuators use the same path in reverse.</a:t>
-            </a:r>
-          </a:p>
-          <a:p>
-            <a:r>
-              <a:rPr lang="en-US" sz="1200" b="1" i="0" kern="1200" dirty="0" err="1">
-                <a:solidFill>
-                  <a:schemeClr val="tx1"/>
-                </a:solidFill>
-                <a:effectLst/>
-                <a:latin typeface="+mn-lt"/>
-                <a:ea typeface="+mn-ea"/>
-                <a:cs typeface="+mn-cs"/>
-              </a:rPr>
+              <a:rPr lang="en-US" dirty="0"/>
+              <a:t>. </a:t>
+            </a:r>
+            <a:r>
+              <a:rPr lang="en-US" dirty="0" err="1"/>
               <a:t>SignalR</a:t>
             </a:r>
             <a:r>
-              <a:rPr lang="en-US" sz="1200" b="0" i="0" kern="1200" dirty="0">
-                <a:solidFill>
-                  <a:schemeClr val="tx1"/>
-                </a:solidFill>
-                <a:effectLst/>
-                <a:latin typeface="+mn-lt"/>
-                <a:ea typeface="+mn-ea"/>
-                <a:cs typeface="+mn-cs"/>
-              </a:rPr>
-              <a:t> handles server-to-client live updates for readings and alerts.</a:t>
-            </a:r>
-          </a:p>
-          <a:p>
-            <a:r>
-              <a:rPr lang="en-US" sz="1200" b="0" i="0" kern="1200" dirty="0">
-                <a:solidFill>
-                  <a:schemeClr val="tx1"/>
-                </a:solidFill>
-                <a:effectLst/>
-                <a:latin typeface="+mn-lt"/>
-                <a:ea typeface="+mn-ea"/>
-                <a:cs typeface="+mn-cs"/>
-              </a:rPr>
-              <a:t>The </a:t>
-            </a:r>
-            <a:r>
-              <a:rPr lang="en-US" sz="1200" b="1" i="0" kern="1200" dirty="0">
-                <a:solidFill>
-                  <a:schemeClr val="tx1"/>
-                </a:solidFill>
-                <a:effectLst/>
-                <a:latin typeface="+mn-lt"/>
-                <a:ea typeface="+mn-ea"/>
-                <a:cs typeface="+mn-cs"/>
-              </a:rPr>
-              <a:t>frontend</a:t>
-            </a:r>
-            <a:r>
-              <a:rPr lang="en-US" sz="1200" b="0" i="0" kern="1200" dirty="0">
-                <a:solidFill>
-                  <a:schemeClr val="tx1"/>
-                </a:solidFill>
-                <a:effectLst/>
-                <a:latin typeface="+mn-lt"/>
-                <a:ea typeface="+mn-ea"/>
-                <a:cs typeface="+mn-cs"/>
-              </a:rPr>
-              <a:t> is </a:t>
-            </a:r>
-            <a:r>
-              <a:rPr lang="en-US" sz="1200" b="1" i="0" kern="1200" dirty="0">
-                <a:solidFill>
-                  <a:schemeClr val="tx1"/>
-                </a:solidFill>
-                <a:effectLst/>
-                <a:latin typeface="+mn-lt"/>
-                <a:ea typeface="+mn-ea"/>
-                <a:cs typeface="+mn-cs"/>
-              </a:rPr>
-              <a:t>React with TypeScript</a:t>
-            </a:r>
-            <a:r>
-              <a:rPr lang="en-US" sz="1200" b="0" i="0" kern="1200" dirty="0">
-                <a:solidFill>
-                  <a:schemeClr val="tx1"/>
-                </a:solidFill>
-                <a:effectLst/>
-                <a:latin typeface="+mn-lt"/>
-                <a:ea typeface="+mn-ea"/>
-                <a:cs typeface="+mn-cs"/>
-              </a:rPr>
-              <a:t> and Material-UI.</a:t>
-            </a:r>
-          </a:p>
-          <a:p>
-            <a:r>
-              <a:rPr lang="en-US" sz="1200" b="1" i="0" kern="1200" dirty="0">
-                <a:solidFill>
-                  <a:schemeClr val="tx1"/>
-                </a:solidFill>
-                <a:effectLst/>
-                <a:latin typeface="+mn-lt"/>
-                <a:ea typeface="+mn-ea"/>
-                <a:cs typeface="+mn-cs"/>
-              </a:rPr>
-              <a:t>SQL Server with Entity Framework Core</a:t>
-            </a:r>
-            <a:r>
-              <a:rPr lang="en-US" sz="1200" b="0" i="0" kern="1200" dirty="0">
-                <a:solidFill>
-                  <a:schemeClr val="tx1"/>
-                </a:solidFill>
-                <a:effectLst/>
-                <a:latin typeface="+mn-lt"/>
-                <a:ea typeface="+mn-ea"/>
-                <a:cs typeface="+mn-cs"/>
-              </a:rPr>
-              <a:t> stores configuration, readings, alerts, and commands.</a:t>
-            </a:r>
-          </a:p>
-          <a:p>
-            <a:r>
-              <a:rPr lang="en-US" sz="1200" b="0" i="0" kern="1200" dirty="0">
-                <a:solidFill>
-                  <a:schemeClr val="tx1"/>
-                </a:solidFill>
-                <a:effectLst/>
-                <a:latin typeface="+mn-lt"/>
-                <a:ea typeface="+mn-ea"/>
-                <a:cs typeface="+mn-cs"/>
-              </a:rPr>
-              <a:t>For delivery we use </a:t>
-            </a:r>
-            <a:r>
-              <a:rPr lang="en-US" sz="1200" b="1" i="0" kern="1200" dirty="0">
-                <a:solidFill>
-                  <a:schemeClr val="tx1"/>
-                </a:solidFill>
-                <a:effectLst/>
-                <a:latin typeface="+mn-lt"/>
-                <a:ea typeface="+mn-ea"/>
-                <a:cs typeface="+mn-cs"/>
-              </a:rPr>
-              <a:t>Git, GitHub, and Azure</a:t>
-            </a:r>
-            <a:r>
-              <a:rPr lang="en-US" sz="1200" b="0" i="0" kern="1200" dirty="0">
-                <a:solidFill>
-                  <a:schemeClr val="tx1"/>
-                </a:solidFill>
-                <a:effectLst/>
-                <a:latin typeface="+mn-lt"/>
-                <a:ea typeface="+mn-ea"/>
-                <a:cs typeface="+mn-cs"/>
-              </a:rPr>
-              <a:t>—the API on Azure Web App and the SPA on Static Web Apps.</a:t>
-            </a:r>
-          </a:p>
-          <a:p>
-            <a:endParaRPr lang="en-US" dirty="0"/>
+              <a:rPr lang="en-US" dirty="0"/>
+              <a:t> allows the server to instantly push sensor readings and alerts to connected users without requiring the browser to refresh the page.</a:t>
+            </a:r>
+          </a:p>
+          <a:p>
+            <a:r>
+              <a:rPr lang="en-US" dirty="0"/>
+              <a:t>The frontend is developed using React and TypeScript, providing dashboards, charts, and device management interfaces.</a:t>
+            </a:r>
+          </a:p>
+          <a:p>
+            <a:r>
+              <a:rPr lang="en-US" dirty="0"/>
+              <a:t>SQL Server is used for data storage, while GitHub and Azure support version control, CI/CD, and cloud deployment.</a:t>
+            </a:r>
+          </a:p>
+          <a:p>
+            <a:r>
+              <a:rPr lang="en-US" dirty="0"/>
+              <a:t>Together, these technologies form a complete stack for real-time IoT monitoring.</a:t>
+            </a:r>
           </a:p>
         </p:txBody>
       </p:sp>
@@ -4545,450 +2244,63 @@
           <a:lstStyle/>
           <a:p>
             <a:r>
-              <a:rPr lang="en-US" sz="1200" b="0" i="0" kern="1200" dirty="0">
-                <a:solidFill>
-                  <a:schemeClr val="tx1"/>
-                </a:solidFill>
-                <a:effectLst/>
-                <a:latin typeface="+mn-lt"/>
-                <a:ea typeface="+mn-ea"/>
-                <a:cs typeface="+mn-cs"/>
-              </a:rPr>
-              <a:t>The architecture separates concerns so each layer has a clear role.</a:t>
-            </a:r>
-          </a:p>
-          <a:p>
-            <a:r>
-              <a:rPr lang="en-US" sz="1200" b="1" i="0" kern="1200" dirty="0">
-                <a:solidFill>
-                  <a:schemeClr val="tx1"/>
-                </a:solidFill>
-                <a:effectLst/>
-                <a:latin typeface="+mn-lt"/>
-                <a:ea typeface="+mn-ea"/>
-                <a:cs typeface="+mn-cs"/>
-              </a:rPr>
-              <a:t>IoT devices</a:t>
-            </a:r>
-            <a:r>
-              <a:rPr lang="en-US" sz="1200" b="0" i="0" kern="1200" dirty="0">
-                <a:solidFill>
-                  <a:schemeClr val="tx1"/>
-                </a:solidFill>
-                <a:effectLst/>
-                <a:latin typeface="+mn-lt"/>
-                <a:ea typeface="+mn-ea"/>
-                <a:cs typeface="+mn-cs"/>
-              </a:rPr>
-              <a:t> publish to an </a:t>
-            </a:r>
-            <a:r>
-              <a:rPr lang="en-US" sz="1200" b="1" i="0" kern="1200" dirty="0">
-                <a:solidFill>
-                  <a:schemeClr val="tx1"/>
-                </a:solidFill>
-                <a:effectLst/>
-                <a:latin typeface="+mn-lt"/>
-                <a:ea typeface="+mn-ea"/>
-                <a:cs typeface="+mn-cs"/>
-              </a:rPr>
-              <a:t>MQTT broker</a:t>
-            </a:r>
-            <a:r>
-              <a:rPr lang="en-US" sz="1200" b="0" i="0" kern="1200" dirty="0">
-                <a:solidFill>
-                  <a:schemeClr val="tx1"/>
-                </a:solidFill>
-                <a:effectLst/>
-                <a:latin typeface="+mn-lt"/>
-                <a:ea typeface="+mn-ea"/>
-                <a:cs typeface="+mn-cs"/>
-              </a:rPr>
-              <a:t>. The backend </a:t>
-            </a:r>
-            <a:r>
-              <a:rPr lang="en-US" sz="1200" b="1" i="0" kern="1200" dirty="0" err="1">
-                <a:solidFill>
-                  <a:schemeClr val="tx1"/>
-                </a:solidFill>
-                <a:effectLst/>
-                <a:latin typeface="+mn-lt"/>
-                <a:ea typeface="+mn-ea"/>
-                <a:cs typeface="+mn-cs"/>
-              </a:rPr>
-              <a:t>MqttService</a:t>
-            </a:r>
-            <a:r>
-              <a:rPr lang="en-US" sz="1200" b="0" i="0" kern="1200" dirty="0">
-                <a:solidFill>
-                  <a:schemeClr val="tx1"/>
-                </a:solidFill>
-                <a:effectLst/>
-                <a:latin typeface="+mn-lt"/>
-                <a:ea typeface="+mn-ea"/>
-                <a:cs typeface="+mn-cs"/>
-              </a:rPr>
-              <a:t> subscribes, parses JSON, and passes data to application services.</a:t>
-            </a:r>
-          </a:p>
-          <a:p>
-            <a:r>
-              <a:rPr lang="en-US" sz="1200" b="0" i="0" kern="1200" dirty="0">
-                <a:solidFill>
-                  <a:schemeClr val="tx1"/>
-                </a:solidFill>
-                <a:effectLst/>
-                <a:latin typeface="+mn-lt"/>
-                <a:ea typeface="+mn-ea"/>
-                <a:cs typeface="+mn-cs"/>
-              </a:rPr>
-              <a:t>In the </a:t>
-            </a:r>
-            <a:r>
-              <a:rPr lang="en-US" sz="1200" b="1" i="0" kern="1200" dirty="0">
-                <a:solidFill>
-                  <a:schemeClr val="tx1"/>
-                </a:solidFill>
-                <a:effectLst/>
-                <a:latin typeface="+mn-lt"/>
-                <a:ea typeface="+mn-ea"/>
-                <a:cs typeface="+mn-cs"/>
-              </a:rPr>
-              <a:t>backend</a:t>
-            </a:r>
-            <a:r>
-              <a:rPr lang="en-US" sz="1200" b="0" i="0" kern="1200" dirty="0">
-                <a:solidFill>
-                  <a:schemeClr val="tx1"/>
-                </a:solidFill>
-                <a:effectLst/>
-                <a:latin typeface="+mn-lt"/>
-                <a:ea typeface="+mn-ea"/>
-                <a:cs typeface="+mn-cs"/>
-              </a:rPr>
-              <a:t>, REST </a:t>
-            </a:r>
-            <a:r>
-              <a:rPr lang="en-US" sz="1200" b="1" i="0" kern="1200" dirty="0">
-                <a:solidFill>
-                  <a:schemeClr val="tx1"/>
-                </a:solidFill>
-                <a:effectLst/>
-                <a:latin typeface="+mn-lt"/>
-                <a:ea typeface="+mn-ea"/>
-                <a:cs typeface="+mn-cs"/>
-              </a:rPr>
-              <a:t>controllers</a:t>
-            </a:r>
-            <a:r>
-              <a:rPr lang="en-US" sz="1200" b="0" i="0" kern="1200" dirty="0">
-                <a:solidFill>
-                  <a:schemeClr val="tx1"/>
-                </a:solidFill>
-                <a:effectLst/>
-                <a:latin typeface="+mn-lt"/>
-                <a:ea typeface="+mn-ea"/>
-                <a:cs typeface="+mn-cs"/>
-              </a:rPr>
-              <a:t> call </a:t>
-            </a:r>
-            <a:r>
-              <a:rPr lang="en-US" sz="1200" b="1" i="0" kern="1200" dirty="0">
-                <a:solidFill>
-                  <a:schemeClr val="tx1"/>
-                </a:solidFill>
-                <a:effectLst/>
-                <a:latin typeface="+mn-lt"/>
-                <a:ea typeface="+mn-ea"/>
-                <a:cs typeface="+mn-cs"/>
-              </a:rPr>
-              <a:t>services</a:t>
-            </a:r>
-            <a:r>
-              <a:rPr lang="en-US" sz="1200" b="0" i="0" kern="1200" dirty="0">
-                <a:solidFill>
-                  <a:schemeClr val="tx1"/>
-                </a:solidFill>
-                <a:effectLst/>
-                <a:latin typeface="+mn-lt"/>
-                <a:ea typeface="+mn-ea"/>
-                <a:cs typeface="+mn-cs"/>
-              </a:rPr>
-              <a:t> and </a:t>
-            </a:r>
-            <a:r>
-              <a:rPr lang="en-US" sz="1200" b="1" i="0" kern="1200" dirty="0">
-                <a:solidFill>
-                  <a:schemeClr val="tx1"/>
-                </a:solidFill>
-                <a:effectLst/>
-                <a:latin typeface="+mn-lt"/>
-                <a:ea typeface="+mn-ea"/>
-                <a:cs typeface="+mn-cs"/>
-              </a:rPr>
-              <a:t>repositories</a:t>
-            </a:r>
-            <a:r>
-              <a:rPr lang="en-US" sz="1200" b="0" i="0" kern="1200" dirty="0">
-                <a:solidFill>
-                  <a:schemeClr val="tx1"/>
-                </a:solidFill>
-                <a:effectLst/>
-                <a:latin typeface="+mn-lt"/>
-                <a:ea typeface="+mn-ea"/>
-                <a:cs typeface="+mn-cs"/>
-              </a:rPr>
-              <a:t>. The </a:t>
-            </a:r>
-            <a:r>
-              <a:rPr lang="en-US" sz="1200" b="1" i="0" kern="1200" dirty="0" err="1">
-                <a:solidFill>
-                  <a:schemeClr val="tx1"/>
-                </a:solidFill>
-                <a:effectLst/>
-                <a:latin typeface="+mn-lt"/>
-                <a:ea typeface="+mn-ea"/>
-                <a:cs typeface="+mn-cs"/>
-              </a:rPr>
-              <a:t>MonitoringHub</a:t>
-            </a:r>
-            <a:r>
-              <a:rPr lang="en-US" sz="1200" b="0" i="0" kern="1200" dirty="0">
-                <a:solidFill>
-                  <a:schemeClr val="tx1"/>
-                </a:solidFill>
-                <a:effectLst/>
-                <a:latin typeface="+mn-lt"/>
-                <a:ea typeface="+mn-ea"/>
-                <a:cs typeface="+mn-cs"/>
-              </a:rPr>
-              <a:t> and </a:t>
-            </a:r>
-            <a:r>
-              <a:rPr lang="en-US" sz="1200" b="1" i="0" kern="1200" dirty="0" err="1">
-                <a:solidFill>
-                  <a:schemeClr val="tx1"/>
-                </a:solidFill>
-                <a:effectLst/>
-                <a:latin typeface="+mn-lt"/>
-                <a:ea typeface="+mn-ea"/>
-                <a:cs typeface="+mn-cs"/>
-              </a:rPr>
+              <a:rPr lang="en-US" dirty="0"/>
+              <a:t>This diagram shows how the different components interact within the system.</a:t>
+            </a:r>
+          </a:p>
+          <a:p>
+            <a:r>
+              <a:rPr lang="en-US" dirty="0"/>
+              <a:t>IoT devices publish sensor readings to the MQTT broker. The MQTT service in the backend subscribes to these messages, processes the data, and forwards it to the application services.</a:t>
+            </a:r>
+          </a:p>
+          <a:p>
+            <a:r>
+              <a:rPr lang="en-US" dirty="0"/>
+              <a:t>The application services contain the core business logic and work with repositories to store and retrieve data from SQL Server through the </a:t>
+            </a:r>
+            <a:r>
+              <a:rPr lang="en-US" dirty="0" err="1"/>
+              <a:t>ApplicationDbContext</a:t>
+            </a:r>
+            <a:r>
+              <a:rPr lang="en-US" dirty="0"/>
+              <a:t>.</a:t>
+            </a:r>
+          </a:p>
+          <a:p>
+            <a:r>
+              <a:rPr lang="en-US" dirty="0"/>
+              <a:t>For client communication, REST controllers handle configuration, device management, and historical data requests, while </a:t>
+            </a:r>
+            <a:r>
+              <a:rPr lang="en-US" dirty="0" err="1"/>
               <a:t>SignalR</a:t>
             </a:r>
             <a:r>
-              <a:rPr lang="en-US" sz="1200" b="1" i="0" kern="1200" dirty="0">
-                <a:solidFill>
-                  <a:schemeClr val="tx1"/>
-                </a:solidFill>
-                <a:effectLst/>
-                <a:latin typeface="+mn-lt"/>
-                <a:ea typeface="+mn-ea"/>
-                <a:cs typeface="+mn-cs"/>
-              </a:rPr>
-              <a:t> notification service</a:t>
-            </a:r>
-            <a:r>
-              <a:rPr lang="en-US" sz="1200" b="0" i="0" kern="1200" dirty="0">
-                <a:solidFill>
-                  <a:schemeClr val="tx1"/>
-                </a:solidFill>
-                <a:effectLst/>
-                <a:latin typeface="+mn-lt"/>
-                <a:ea typeface="+mn-ea"/>
-                <a:cs typeface="+mn-cs"/>
-              </a:rPr>
-              <a:t> push events to clients </a:t>
-            </a:r>
-            <a:r>
-              <a:rPr lang="en-US" sz="1200" b="1" i="0" kern="1200" dirty="0">
-                <a:solidFill>
-                  <a:schemeClr val="tx1"/>
-                </a:solidFill>
-                <a:effectLst/>
-                <a:latin typeface="+mn-lt"/>
-                <a:ea typeface="+mn-ea"/>
-                <a:cs typeface="+mn-cs"/>
-              </a:rPr>
-              <a:t>after</a:t>
-            </a:r>
-            <a:r>
-              <a:rPr lang="en-US" sz="1200" b="0" i="0" kern="1200" dirty="0">
-                <a:solidFill>
-                  <a:schemeClr val="tx1"/>
-                </a:solidFill>
-                <a:effectLst/>
-                <a:latin typeface="+mn-lt"/>
-                <a:ea typeface="+mn-ea"/>
-                <a:cs typeface="+mn-cs"/>
-              </a:rPr>
-              <a:t> data is persisted.</a:t>
-            </a:r>
-          </a:p>
-          <a:p>
-            <a:r>
-              <a:rPr lang="en-US" sz="1200" b="0" i="0" kern="1200" dirty="0">
-                <a:solidFill>
-                  <a:schemeClr val="tx1"/>
-                </a:solidFill>
-                <a:effectLst/>
-                <a:latin typeface="+mn-lt"/>
-                <a:ea typeface="+mn-ea"/>
-                <a:cs typeface="+mn-cs"/>
-              </a:rPr>
-              <a:t>On the </a:t>
-            </a:r>
-            <a:r>
-              <a:rPr lang="en-US" sz="1200" b="1" i="0" kern="1200" dirty="0">
-                <a:solidFill>
-                  <a:schemeClr val="tx1"/>
-                </a:solidFill>
-                <a:effectLst/>
-                <a:latin typeface="+mn-lt"/>
-                <a:ea typeface="+mn-ea"/>
-                <a:cs typeface="+mn-cs"/>
-              </a:rPr>
-              <a:t>frontend</a:t>
-            </a:r>
-            <a:r>
-              <a:rPr lang="en-US" sz="1200" b="0" i="0" kern="1200" dirty="0">
-                <a:solidFill>
-                  <a:schemeClr val="tx1"/>
-                </a:solidFill>
-                <a:effectLst/>
-                <a:latin typeface="+mn-lt"/>
-                <a:ea typeface="+mn-ea"/>
-                <a:cs typeface="+mn-cs"/>
-              </a:rPr>
-              <a:t>, the React SPA uses a REST client for configuration and history, and a </a:t>
-            </a:r>
-            <a:r>
-              <a:rPr lang="en-US" sz="1200" b="0" i="0" kern="1200" dirty="0" err="1">
-                <a:solidFill>
-                  <a:schemeClr val="tx1"/>
-                </a:solidFill>
-                <a:effectLst/>
-                <a:latin typeface="+mn-lt"/>
-                <a:ea typeface="+mn-ea"/>
-                <a:cs typeface="+mn-cs"/>
-              </a:rPr>
+              <a:rPr lang="en-US" dirty="0"/>
+              <a:t> delivers real-time updates to connected users.</a:t>
+            </a:r>
+          </a:p>
+          <a:p>
+            <a:r>
+              <a:rPr lang="en-US" dirty="0"/>
+              <a:t>On the frontend, the React application uses REST APIs for configuration and historical data, and </a:t>
+            </a:r>
+            <a:r>
+              <a:rPr lang="en-US" dirty="0" err="1"/>
               <a:t>SignalR</a:t>
             </a:r>
             <a:r>
-              <a:rPr lang="en-US" sz="1200" b="0" i="0" kern="1200" dirty="0">
-                <a:solidFill>
-                  <a:schemeClr val="tx1"/>
-                </a:solidFill>
-                <a:effectLst/>
-                <a:latin typeface="+mn-lt"/>
-                <a:ea typeface="+mn-ea"/>
-                <a:cs typeface="+mn-cs"/>
-              </a:rPr>
-              <a:t> client for live updates.</a:t>
-            </a:r>
-          </a:p>
-          <a:p>
-            <a:r>
-              <a:rPr lang="en-US" sz="1200" b="0" i="0" kern="1200" dirty="0">
-                <a:solidFill>
-                  <a:schemeClr val="tx1"/>
-                </a:solidFill>
-                <a:effectLst/>
-                <a:latin typeface="+mn-lt"/>
-                <a:ea typeface="+mn-ea"/>
-                <a:cs typeface="+mn-cs"/>
-              </a:rPr>
-              <a:t>All durable data is stored in </a:t>
-            </a:r>
-            <a:r>
-              <a:rPr lang="en-US" sz="1200" b="1" i="0" kern="1200" dirty="0">
-                <a:solidFill>
-                  <a:schemeClr val="tx1"/>
-                </a:solidFill>
-                <a:effectLst/>
-                <a:latin typeface="+mn-lt"/>
-                <a:ea typeface="+mn-ea"/>
-                <a:cs typeface="+mn-cs"/>
-              </a:rPr>
-              <a:t>SQL Server</a:t>
-            </a:r>
-            <a:r>
-              <a:rPr lang="en-US" sz="1200" b="0" i="0" kern="1200" dirty="0">
-                <a:solidFill>
-                  <a:schemeClr val="tx1"/>
-                </a:solidFill>
-                <a:effectLst/>
-                <a:latin typeface="+mn-lt"/>
-                <a:ea typeface="+mn-ea"/>
-                <a:cs typeface="+mn-cs"/>
-              </a:rPr>
-              <a:t> through </a:t>
-            </a:r>
-            <a:r>
-              <a:rPr lang="en-US" sz="1200" b="1" i="0" kern="1200" dirty="0" err="1">
-                <a:solidFill>
-                  <a:schemeClr val="tx1"/>
-                </a:solidFill>
-                <a:effectLst/>
-                <a:latin typeface="+mn-lt"/>
-                <a:ea typeface="+mn-ea"/>
-                <a:cs typeface="+mn-cs"/>
-              </a:rPr>
-              <a:t>ApplicationDbContext</a:t>
-            </a:r>
-            <a:r>
-              <a:rPr lang="en-US" sz="1200" b="0" i="0" kern="1200" dirty="0">
-                <a:solidFill>
-                  <a:schemeClr val="tx1"/>
-                </a:solidFill>
-                <a:effectLst/>
-                <a:latin typeface="+mn-lt"/>
-                <a:ea typeface="+mn-ea"/>
-                <a:cs typeface="+mn-cs"/>
-              </a:rPr>
-              <a:t>.</a:t>
-            </a:r>
-          </a:p>
-          <a:p>
-            <a:r>
-              <a:rPr lang="en-US" sz="1200" b="0" i="0" kern="1200" dirty="0">
-                <a:solidFill>
-                  <a:schemeClr val="tx1"/>
-                </a:solidFill>
-                <a:effectLst/>
-                <a:latin typeface="+mn-lt"/>
-                <a:ea typeface="+mn-ea"/>
-                <a:cs typeface="+mn-cs"/>
-              </a:rPr>
-              <a:t>The operator only needs a </a:t>
-            </a:r>
-            <a:r>
-              <a:rPr lang="en-US" sz="1200" b="1" i="0" kern="1200" dirty="0">
-                <a:solidFill>
-                  <a:schemeClr val="tx1"/>
-                </a:solidFill>
-                <a:effectLst/>
-                <a:latin typeface="+mn-lt"/>
-                <a:ea typeface="+mn-ea"/>
-                <a:cs typeface="+mn-cs"/>
-              </a:rPr>
-              <a:t>web browser</a:t>
-            </a:r>
-            <a:r>
-              <a:rPr lang="en-US" sz="1200" b="0" i="0" kern="1200" dirty="0">
-                <a:solidFill>
-                  <a:schemeClr val="tx1"/>
-                </a:solidFill>
-                <a:effectLst/>
-                <a:latin typeface="+mn-lt"/>
-                <a:ea typeface="+mn-ea"/>
-                <a:cs typeface="+mn-cs"/>
-              </a:rPr>
-              <a:t>—no dedicated SCADA client.</a:t>
-            </a:r>
-          </a:p>
-          <a:p>
-            <a:endParaRPr lang="en-US" dirty="0"/>
+              <a:rPr lang="en-US" dirty="0"/>
+              <a:t> for live sensor readings and alerts.</a:t>
+            </a:r>
+          </a:p>
+          <a:p>
+            <a:r>
+              <a:rPr lang="en-US" dirty="0"/>
+              <a:t>As a result, operators only need a web browser to monitor devices, view historical trends, receive alerts, and interact with the system in real time.</a:t>
+            </a:r>
           </a:p>
         </p:txBody>
       </p:sp>
@@ -5073,312 +2385,79 @@
           <a:lstStyle/>
           <a:p>
             <a:r>
-              <a:rPr lang="en-US" sz="1200" b="0" i="0" kern="1200" dirty="0">
-                <a:solidFill>
-                  <a:schemeClr val="tx1"/>
-                </a:solidFill>
-                <a:effectLst/>
-                <a:latin typeface="+mn-lt"/>
-                <a:ea typeface="+mn-ea"/>
-                <a:cs typeface="+mn-cs"/>
-              </a:rPr>
-              <a:t>The database has </a:t>
-            </a:r>
-            <a:r>
-              <a:rPr lang="en-US" sz="1200" b="1" i="0" kern="1200" dirty="0">
-                <a:solidFill>
-                  <a:schemeClr val="tx1"/>
-                </a:solidFill>
-                <a:effectLst/>
-                <a:latin typeface="+mn-lt"/>
-                <a:ea typeface="+mn-ea"/>
-                <a:cs typeface="+mn-cs"/>
-              </a:rPr>
-              <a:t>eleven normalized tables</a:t>
-            </a:r>
-            <a:r>
-              <a:rPr lang="en-US" sz="1200" b="0" i="0" kern="1200" dirty="0">
-                <a:solidFill>
-                  <a:schemeClr val="tx1"/>
-                </a:solidFill>
-                <a:effectLst/>
-                <a:latin typeface="+mn-lt"/>
-                <a:ea typeface="+mn-ea"/>
-                <a:cs typeface="+mn-cs"/>
-              </a:rPr>
-              <a:t>. </a:t>
-            </a:r>
-            <a:r>
-              <a:rPr lang="en-US" sz="1200" b="1" i="0" kern="1200" dirty="0">
-                <a:solidFill>
-                  <a:schemeClr val="tx1"/>
-                </a:solidFill>
-                <a:effectLst/>
-                <a:latin typeface="+mn-lt"/>
-                <a:ea typeface="+mn-ea"/>
-                <a:cs typeface="+mn-cs"/>
-              </a:rPr>
-              <a:t>Devices</a:t>
-            </a:r>
-            <a:r>
-              <a:rPr lang="en-US" sz="1200" b="0" i="0" kern="1200" dirty="0">
-                <a:solidFill>
-                  <a:schemeClr val="tx1"/>
-                </a:solidFill>
-                <a:effectLst/>
-                <a:latin typeface="+mn-lt"/>
-                <a:ea typeface="+mn-ea"/>
-                <a:cs typeface="+mn-cs"/>
-              </a:rPr>
-              <a:t> is the central hub.</a:t>
-            </a:r>
-          </a:p>
-          <a:p>
-            <a:r>
-              <a:rPr lang="en-US" sz="1200" b="0" i="0" kern="1200" dirty="0">
-                <a:solidFill>
-                  <a:schemeClr val="tx1"/>
-                </a:solidFill>
-                <a:effectLst/>
-                <a:latin typeface="+mn-lt"/>
-                <a:ea typeface="+mn-ea"/>
-                <a:cs typeface="+mn-cs"/>
-              </a:rPr>
-              <a:t>Each device has </a:t>
-            </a:r>
-            <a:r>
-              <a:rPr lang="en-US" sz="1200" b="1" i="0" kern="1200" dirty="0">
-                <a:solidFill>
-                  <a:schemeClr val="tx1"/>
-                </a:solidFill>
-                <a:effectLst/>
-                <a:latin typeface="+mn-lt"/>
-                <a:ea typeface="+mn-ea"/>
-                <a:cs typeface="+mn-cs"/>
-              </a:rPr>
-              <a:t>sensors</a:t>
-            </a:r>
-            <a:r>
-              <a:rPr lang="en-US" sz="1200" b="0" i="0" kern="1200" dirty="0">
-                <a:solidFill>
-                  <a:schemeClr val="tx1"/>
-                </a:solidFill>
-                <a:effectLst/>
-                <a:latin typeface="+mn-lt"/>
-                <a:ea typeface="+mn-ea"/>
-                <a:cs typeface="+mn-cs"/>
-              </a:rPr>
-              <a:t> for inputs and </a:t>
-            </a:r>
-            <a:r>
-              <a:rPr lang="en-US" sz="1200" b="1" i="0" kern="1200" dirty="0">
-                <a:solidFill>
-                  <a:schemeClr val="tx1"/>
-                </a:solidFill>
-                <a:effectLst/>
-                <a:latin typeface="+mn-lt"/>
-                <a:ea typeface="+mn-ea"/>
-                <a:cs typeface="+mn-cs"/>
-              </a:rPr>
-              <a:t>actuators</a:t>
-            </a:r>
-            <a:r>
-              <a:rPr lang="en-US" sz="1200" b="0" i="0" kern="1200" dirty="0">
-                <a:solidFill>
-                  <a:schemeClr val="tx1"/>
-                </a:solidFill>
-                <a:effectLst/>
-                <a:latin typeface="+mn-lt"/>
-                <a:ea typeface="+mn-ea"/>
-                <a:cs typeface="+mn-cs"/>
-              </a:rPr>
-              <a:t> for outputs. </a:t>
-            </a:r>
-            <a:r>
-              <a:rPr lang="en-US" sz="1200" b="1" i="0" kern="1200" dirty="0" err="1">
-                <a:solidFill>
-                  <a:schemeClr val="tx1"/>
-                </a:solidFill>
-                <a:effectLst/>
-                <a:latin typeface="+mn-lt"/>
-                <a:ea typeface="+mn-ea"/>
-                <a:cs typeface="+mn-cs"/>
-              </a:rPr>
+              <a:rPr lang="en-US" dirty="0"/>
+              <a:t>This diagram shows the database schema used by the system.</a:t>
+            </a:r>
+          </a:p>
+          <a:p>
+            <a:r>
+              <a:rPr lang="en-US" dirty="0"/>
+              <a:t>The database consists of eleven normalized tables, with Devices serving as the central entity. Most other tables are connected to a device, allowing the system to manage multiple devices within a single platform.</a:t>
+            </a:r>
+          </a:p>
+          <a:p>
+            <a:r>
+              <a:rPr lang="en-US" dirty="0"/>
+              <a:t>Each device can have multiple sensors for data collection and multiple actuators for control actions. </a:t>
+            </a:r>
+            <a:r>
+              <a:rPr lang="en-US" dirty="0" err="1"/>
               <a:t>SensorReadings</a:t>
             </a:r>
             <a:r>
-              <a:rPr lang="en-US" sz="1200" b="0" i="0" kern="1200" dirty="0">
-                <a:solidFill>
-                  <a:schemeClr val="tx1"/>
-                </a:solidFill>
-                <a:effectLst/>
-                <a:latin typeface="+mn-lt"/>
-                <a:ea typeface="+mn-ea"/>
-                <a:cs typeface="+mn-cs"/>
-              </a:rPr>
-              <a:t> holds time-series data with a </a:t>
-            </a:r>
-            <a:r>
-              <a:rPr lang="en-US" sz="1200" b="1" i="0" kern="1200" dirty="0">
-                <a:solidFill>
-                  <a:schemeClr val="tx1"/>
-                </a:solidFill>
-                <a:effectLst/>
-                <a:latin typeface="+mn-lt"/>
-                <a:ea typeface="+mn-ea"/>
-                <a:cs typeface="+mn-cs"/>
-              </a:rPr>
-              <a:t>BIGINT</a:t>
-            </a:r>
-            <a:r>
-              <a:rPr lang="en-US" sz="1200" b="0" i="0" kern="1200" dirty="0">
-                <a:solidFill>
-                  <a:schemeClr val="tx1"/>
-                </a:solidFill>
-                <a:effectLst/>
-                <a:latin typeface="+mn-lt"/>
-                <a:ea typeface="+mn-ea"/>
-                <a:cs typeface="+mn-cs"/>
-              </a:rPr>
-              <a:t> primary key. </a:t>
-            </a:r>
-            <a:r>
-              <a:rPr lang="en-US" sz="1200" b="1" i="0" kern="1200" dirty="0" err="1">
-                <a:solidFill>
-                  <a:schemeClr val="tx1"/>
-                </a:solidFill>
-                <a:effectLst/>
-                <a:latin typeface="+mn-lt"/>
-                <a:ea typeface="+mn-ea"/>
-                <a:cs typeface="+mn-cs"/>
-              </a:rPr>
+              <a:rPr lang="en-US" dirty="0"/>
+              <a:t> stores time-series sensor data, while </a:t>
+            </a:r>
+            <a:r>
+              <a:rPr lang="en-US" dirty="0" err="1"/>
+              <a:t>DeviceStatusHistories</a:t>
+            </a:r>
+            <a:r>
+              <a:rPr lang="en-US" dirty="0"/>
+              <a:t> records device connectivity and status changes over time.</a:t>
+            </a:r>
+          </a:p>
+          <a:p>
+            <a:r>
+              <a:rPr lang="en-US" dirty="0"/>
+              <a:t>For monitoring and control, </a:t>
+            </a:r>
+            <a:r>
+              <a:rPr lang="en-US" dirty="0" err="1"/>
               <a:t>AlertRules</a:t>
             </a:r>
             <a:r>
-              <a:rPr lang="en-US" sz="1200" b="0" i="0" kern="1200" dirty="0">
-                <a:solidFill>
-                  <a:schemeClr val="tx1"/>
-                </a:solidFill>
-                <a:effectLst/>
-                <a:latin typeface="+mn-lt"/>
-                <a:ea typeface="+mn-ea"/>
-                <a:cs typeface="+mn-cs"/>
-              </a:rPr>
-              <a:t> and </a:t>
-            </a:r>
-            <a:r>
-              <a:rPr lang="en-US" sz="1200" b="1" i="0" kern="1200" dirty="0">
-                <a:solidFill>
-                  <a:schemeClr val="tx1"/>
-                </a:solidFill>
-                <a:effectLst/>
-                <a:latin typeface="+mn-lt"/>
-                <a:ea typeface="+mn-ea"/>
-                <a:cs typeface="+mn-cs"/>
-              </a:rPr>
-              <a:t>Alerts</a:t>
-            </a:r>
-            <a:r>
-              <a:rPr lang="en-US" sz="1200" b="0" i="0" kern="1200" dirty="0">
-                <a:solidFill>
-                  <a:schemeClr val="tx1"/>
-                </a:solidFill>
-                <a:effectLst/>
-                <a:latin typeface="+mn-lt"/>
-                <a:ea typeface="+mn-ea"/>
-                <a:cs typeface="+mn-cs"/>
-              </a:rPr>
-              <a:t> support alerting. </a:t>
-            </a:r>
-            <a:r>
-              <a:rPr lang="en-US" sz="1200" b="1" i="0" kern="1200" dirty="0" err="1">
-                <a:solidFill>
-                  <a:schemeClr val="tx1"/>
-                </a:solidFill>
-                <a:effectLst/>
-                <a:latin typeface="+mn-lt"/>
-                <a:ea typeface="+mn-ea"/>
-                <a:cs typeface="+mn-cs"/>
-              </a:rPr>
+              <a:rPr lang="en-US" dirty="0"/>
+              <a:t> define alert conditions, Alerts store alert events, and </a:t>
+            </a:r>
+            <a:r>
+              <a:rPr lang="en-US" dirty="0" err="1"/>
               <a:t>DeviceCommands</a:t>
             </a:r>
             <a:r>
-              <a:rPr lang="en-US" sz="1200" b="0" i="0" kern="1200" dirty="0">
-                <a:solidFill>
-                  <a:schemeClr val="tx1"/>
-                </a:solidFill>
-                <a:effectLst/>
-                <a:latin typeface="+mn-lt"/>
-                <a:ea typeface="+mn-ea"/>
-                <a:cs typeface="+mn-cs"/>
-              </a:rPr>
-              <a:t> records command history. </a:t>
-            </a:r>
-            <a:r>
-              <a:rPr lang="en-US" sz="1200" b="1" i="0" kern="1200" dirty="0">
-                <a:solidFill>
-                  <a:schemeClr val="tx1"/>
-                </a:solidFill>
-                <a:effectLst/>
-                <a:latin typeface="+mn-lt"/>
-                <a:ea typeface="+mn-ea"/>
-                <a:cs typeface="+mn-cs"/>
-              </a:rPr>
-              <a:t>Users</a:t>
-            </a:r>
-            <a:r>
-              <a:rPr lang="en-US" sz="1200" b="0" i="0" kern="1200" dirty="0">
-                <a:solidFill>
-                  <a:schemeClr val="tx1"/>
-                </a:solidFill>
-                <a:effectLst/>
-                <a:latin typeface="+mn-lt"/>
-                <a:ea typeface="+mn-ea"/>
-                <a:cs typeface="+mn-cs"/>
-              </a:rPr>
-              <a:t> supports JWT and role-based access.</a:t>
-            </a:r>
-          </a:p>
-          <a:p>
-            <a:r>
-              <a:rPr lang="en-US" sz="1200" b="0" i="0" kern="1200" dirty="0">
-                <a:solidFill>
-                  <a:schemeClr val="tx1"/>
-                </a:solidFill>
-                <a:effectLst/>
-                <a:latin typeface="+mn-lt"/>
-                <a:ea typeface="+mn-ea"/>
-                <a:cs typeface="+mn-cs"/>
-              </a:rPr>
-              <a:t>One schema supports </a:t>
-            </a:r>
-            <a:r>
-              <a:rPr lang="en-US" sz="1200" b="1" i="0" kern="1200" dirty="0">
-                <a:solidFill>
-                  <a:schemeClr val="tx1"/>
-                </a:solidFill>
-                <a:effectLst/>
-                <a:latin typeface="+mn-lt"/>
-                <a:ea typeface="+mn-ea"/>
-                <a:cs typeface="+mn-cs"/>
-              </a:rPr>
-              <a:t>monitoring, alerting, and control</a:t>
-            </a:r>
-            <a:r>
-              <a:rPr lang="en-US" sz="1200" b="0" i="0" kern="1200" dirty="0">
-                <a:solidFill>
-                  <a:schemeClr val="tx1"/>
-                </a:solidFill>
-                <a:effectLst/>
-                <a:latin typeface="+mn-lt"/>
-                <a:ea typeface="+mn-ea"/>
-                <a:cs typeface="+mn-cs"/>
-              </a:rPr>
-              <a:t> for multiple devices.</a:t>
-            </a:r>
-          </a:p>
-          <a:p>
-            <a:endParaRPr lang="en-US" dirty="0"/>
+              <a:rPr lang="en-US" dirty="0"/>
+              <a:t> maintain a history of commands sent to actuators.</a:t>
+            </a:r>
+          </a:p>
+          <a:p>
+            <a:r>
+              <a:rPr lang="en-US" dirty="0"/>
+              <a:t>Additional tables, such as </a:t>
+            </a:r>
+            <a:r>
+              <a:rPr lang="en-US" dirty="0" err="1"/>
+              <a:t>DeviceConfigurations</a:t>
+            </a:r>
+            <a:r>
+              <a:rPr lang="en-US" dirty="0"/>
+              <a:t> and Users, support system configuration, authentication, and access control.</a:t>
+            </a:r>
+          </a:p>
+          <a:p>
+            <a:r>
+              <a:rPr lang="en-US" dirty="0"/>
+              <a:t>Overall, the schema is designed to support monitoring, alerting, and device control while maintaining clear relationships and data integrity.</a:t>
+            </a:r>
           </a:p>
         </p:txBody>
       </p:sp>
@@ -5463,398 +2542,49 @@
           <a:lstStyle/>
           <a:p>
             <a:r>
-              <a:rPr lang="en-US" sz="1200" b="0" i="0" kern="1200" dirty="0">
-                <a:solidFill>
-                  <a:schemeClr val="tx1"/>
-                </a:solidFill>
-                <a:effectLst/>
-                <a:latin typeface="+mn-lt"/>
-                <a:ea typeface="+mn-ea"/>
-                <a:cs typeface="+mn-cs"/>
-              </a:rPr>
-              <a:t>The backend follows </a:t>
-            </a:r>
-            <a:r>
-              <a:rPr lang="en-US" sz="1200" b="1" i="0" kern="1200" dirty="0">
-                <a:solidFill>
-                  <a:schemeClr val="tx1"/>
-                </a:solidFill>
-                <a:effectLst/>
-                <a:latin typeface="+mn-lt"/>
-                <a:ea typeface="+mn-ea"/>
-                <a:cs typeface="+mn-cs"/>
-              </a:rPr>
-              <a:t>layered architecture</a:t>
-            </a:r>
-            <a:r>
-              <a:rPr lang="en-US" sz="1200" b="0" i="0" kern="1200" dirty="0">
-                <a:solidFill>
-                  <a:schemeClr val="tx1"/>
-                </a:solidFill>
-                <a:effectLst/>
-                <a:latin typeface="+mn-lt"/>
-                <a:ea typeface="+mn-ea"/>
-                <a:cs typeface="+mn-cs"/>
-              </a:rPr>
-              <a:t> under </a:t>
-            </a:r>
-            <a:r>
-              <a:rPr lang="en-US" sz="1200" b="1" i="0" kern="1200" dirty="0">
-                <a:solidFill>
-                  <a:schemeClr val="tx1"/>
-                </a:solidFill>
-                <a:effectLst/>
-                <a:latin typeface="+mn-lt"/>
-                <a:ea typeface="+mn-ea"/>
-                <a:cs typeface="+mn-cs"/>
-              </a:rPr>
-              <a:t>/</a:t>
-            </a:r>
-            <a:r>
-              <a:rPr lang="en-US" sz="1200" b="1" i="0" kern="1200" dirty="0" err="1">
-                <a:solidFill>
-                  <a:schemeClr val="tx1"/>
-                </a:solidFill>
-                <a:effectLst/>
-                <a:latin typeface="+mn-lt"/>
-                <a:ea typeface="+mn-ea"/>
-                <a:cs typeface="+mn-cs"/>
-              </a:rPr>
-              <a:t>api</a:t>
-            </a:r>
-            <a:r>
-              <a:rPr lang="en-US" sz="1200" b="1" i="0" kern="1200" dirty="0">
-                <a:solidFill>
-                  <a:schemeClr val="tx1"/>
-                </a:solidFill>
-                <a:effectLst/>
-                <a:latin typeface="+mn-lt"/>
-                <a:ea typeface="+mn-ea"/>
-                <a:cs typeface="+mn-cs"/>
-              </a:rPr>
-              <a:t>/v1</a:t>
-            </a:r>
-            <a:r>
-              <a:rPr lang="en-US" sz="1200" b="0" i="0" kern="1200" dirty="0">
-                <a:solidFill>
-                  <a:schemeClr val="tx1"/>
-                </a:solidFill>
-                <a:effectLst/>
-                <a:latin typeface="+mn-lt"/>
-                <a:ea typeface="+mn-ea"/>
-                <a:cs typeface="+mn-cs"/>
-              </a:rPr>
-              <a:t>.</a:t>
-            </a:r>
-          </a:p>
-          <a:p>
-            <a:r>
-              <a:rPr lang="en-US" sz="1200" b="0" i="0" kern="1200" dirty="0">
-                <a:solidFill>
-                  <a:schemeClr val="tx1"/>
-                </a:solidFill>
-                <a:effectLst/>
-                <a:latin typeface="+mn-lt"/>
-                <a:ea typeface="+mn-ea"/>
-                <a:cs typeface="+mn-cs"/>
-              </a:rPr>
-              <a:t>Three API groups matter most for the demo: </a:t>
-            </a:r>
-            <a:r>
-              <a:rPr lang="en-US" sz="1200" b="1" i="0" kern="1200" dirty="0">
-                <a:solidFill>
-                  <a:schemeClr val="tx1"/>
-                </a:solidFill>
-                <a:effectLst/>
-                <a:latin typeface="+mn-lt"/>
-                <a:ea typeface="+mn-ea"/>
-                <a:cs typeface="+mn-cs"/>
-              </a:rPr>
-              <a:t>sensor readings</a:t>
-            </a:r>
-            <a:r>
-              <a:rPr lang="en-US" sz="1200" b="0" i="0" kern="1200" dirty="0">
-                <a:solidFill>
-                  <a:schemeClr val="tx1"/>
-                </a:solidFill>
-                <a:effectLst/>
-                <a:latin typeface="+mn-lt"/>
-                <a:ea typeface="+mn-ea"/>
-                <a:cs typeface="+mn-cs"/>
-              </a:rPr>
-              <a:t> for ingest and historical queries; </a:t>
-            </a:r>
-            <a:r>
-              <a:rPr lang="en-US" sz="1200" b="1" i="0" kern="1200" dirty="0">
-                <a:solidFill>
-                  <a:schemeClr val="tx1"/>
-                </a:solidFill>
-                <a:effectLst/>
-                <a:latin typeface="+mn-lt"/>
-                <a:ea typeface="+mn-ea"/>
-                <a:cs typeface="+mn-cs"/>
-              </a:rPr>
-              <a:t>alerts and alert rules</a:t>
-            </a:r>
-            <a:r>
-              <a:rPr lang="en-US" sz="1200" b="0" i="0" kern="1200" dirty="0">
-                <a:solidFill>
-                  <a:schemeClr val="tx1"/>
-                </a:solidFill>
-                <a:effectLst/>
-                <a:latin typeface="+mn-lt"/>
-                <a:ea typeface="+mn-ea"/>
-                <a:cs typeface="+mn-cs"/>
-              </a:rPr>
-              <a:t> including acknowledge and resolve; and </a:t>
-            </a:r>
-            <a:r>
-              <a:rPr lang="en-US" sz="1200" b="1" i="0" kern="1200" dirty="0">
-                <a:solidFill>
-                  <a:schemeClr val="tx1"/>
-                </a:solidFill>
-                <a:effectLst/>
-                <a:latin typeface="+mn-lt"/>
-                <a:ea typeface="+mn-ea"/>
-                <a:cs typeface="+mn-cs"/>
-              </a:rPr>
-              <a:t>actuators and commands</a:t>
-            </a:r>
-            <a:r>
-              <a:rPr lang="en-US" sz="1200" b="0" i="0" kern="1200" dirty="0">
-                <a:solidFill>
-                  <a:schemeClr val="tx1"/>
-                </a:solidFill>
-                <a:effectLst/>
-                <a:latin typeface="+mn-lt"/>
-                <a:ea typeface="+mn-ea"/>
-                <a:cs typeface="+mn-cs"/>
-              </a:rPr>
-              <a:t> sent to the device over MQTT.</a:t>
-            </a:r>
-          </a:p>
-          <a:p>
-            <a:r>
-              <a:rPr lang="en-US" sz="1200" b="0" i="0" kern="1200" dirty="0">
-                <a:solidFill>
-                  <a:schemeClr val="tx1"/>
-                </a:solidFill>
-                <a:effectLst/>
-                <a:latin typeface="+mn-lt"/>
-                <a:ea typeface="+mn-ea"/>
-                <a:cs typeface="+mn-cs"/>
-              </a:rPr>
-              <a:t>Most endpoints require </a:t>
-            </a:r>
-            <a:r>
-              <a:rPr lang="en-US" sz="1200" b="1" i="0" kern="1200" dirty="0">
-                <a:solidFill>
-                  <a:schemeClr val="tx1"/>
-                </a:solidFill>
-                <a:effectLst/>
-                <a:latin typeface="+mn-lt"/>
-                <a:ea typeface="+mn-ea"/>
-                <a:cs typeface="+mn-cs"/>
-              </a:rPr>
-              <a:t>JWT</a:t>
-            </a:r>
-            <a:r>
-              <a:rPr lang="en-US" sz="1200" b="0" i="0" kern="1200" dirty="0">
-                <a:solidFill>
-                  <a:schemeClr val="tx1"/>
-                </a:solidFill>
-                <a:effectLst/>
-                <a:latin typeface="+mn-lt"/>
-                <a:ea typeface="+mn-ea"/>
-                <a:cs typeface="+mn-cs"/>
-              </a:rPr>
-              <a:t>. </a:t>
-            </a:r>
-            <a:r>
-              <a:rPr lang="en-US" sz="1200" b="1" i="0" kern="1200" dirty="0">
-                <a:solidFill>
-                  <a:schemeClr val="tx1"/>
-                </a:solidFill>
-                <a:effectLst/>
-                <a:latin typeface="+mn-lt"/>
-                <a:ea typeface="+mn-ea"/>
-                <a:cs typeface="+mn-cs"/>
-              </a:rPr>
-              <a:t>Admin</a:t>
-            </a:r>
-            <a:r>
-              <a:rPr lang="en-US" sz="1200" b="0" i="0" kern="1200" dirty="0">
-                <a:solidFill>
-                  <a:schemeClr val="tx1"/>
-                </a:solidFill>
-                <a:effectLst/>
-                <a:latin typeface="+mn-lt"/>
-                <a:ea typeface="+mn-ea"/>
-                <a:cs typeface="+mn-cs"/>
-              </a:rPr>
-              <a:t> and </a:t>
-            </a:r>
-            <a:r>
-              <a:rPr lang="en-US" sz="1200" b="1" i="0" kern="1200" dirty="0">
-                <a:solidFill>
-                  <a:schemeClr val="tx1"/>
-                </a:solidFill>
-                <a:effectLst/>
-                <a:latin typeface="+mn-lt"/>
-                <a:ea typeface="+mn-ea"/>
-                <a:cs typeface="+mn-cs"/>
-              </a:rPr>
-              <a:t>Operator</a:t>
-            </a:r>
-            <a:r>
-              <a:rPr lang="en-US" sz="1200" b="0" i="0" kern="1200" dirty="0">
-                <a:solidFill>
-                  <a:schemeClr val="tx1"/>
-                </a:solidFill>
-                <a:effectLst/>
-                <a:latin typeface="+mn-lt"/>
-                <a:ea typeface="+mn-ea"/>
-                <a:cs typeface="+mn-cs"/>
-              </a:rPr>
-              <a:t> can write; </a:t>
-            </a:r>
-            <a:r>
-              <a:rPr lang="en-US" sz="1200" b="1" i="0" kern="1200" dirty="0">
-                <a:solidFill>
-                  <a:schemeClr val="tx1"/>
-                </a:solidFill>
-                <a:effectLst/>
-                <a:latin typeface="+mn-lt"/>
-                <a:ea typeface="+mn-ea"/>
-                <a:cs typeface="+mn-cs"/>
-              </a:rPr>
-              <a:t>Viewer</a:t>
-            </a:r>
-            <a:r>
-              <a:rPr lang="en-US" sz="1200" b="0" i="0" kern="1200" dirty="0">
-                <a:solidFill>
-                  <a:schemeClr val="tx1"/>
-                </a:solidFill>
-                <a:effectLst/>
-                <a:latin typeface="+mn-lt"/>
-                <a:ea typeface="+mn-ea"/>
-                <a:cs typeface="+mn-cs"/>
-              </a:rPr>
-              <a:t> is read-only. </a:t>
-            </a:r>
-            <a:r>
-              <a:rPr lang="en-US" sz="1200" b="0" i="0" kern="1200" dirty="0" err="1">
-                <a:solidFill>
-                  <a:schemeClr val="tx1"/>
-                </a:solidFill>
-                <a:effectLst/>
-                <a:latin typeface="+mn-lt"/>
-                <a:ea typeface="+mn-ea"/>
-                <a:cs typeface="+mn-cs"/>
-              </a:rPr>
+              <a:rPr lang="en-US" dirty="0"/>
+              <a:t>This slide shows the backend architecture and the REST APIs exposed by the system.</a:t>
+            </a:r>
+          </a:p>
+          <a:p>
+            <a:r>
+              <a:rPr lang="en-US" dirty="0"/>
+              <a:t>The backend follows a layered architecture consisting of a presentation layer, service layer, data access layer, and database layer. This separation helps keep the application maintainable and scalable.</a:t>
+            </a:r>
+          </a:p>
+          <a:p>
+            <a:r>
+              <a:rPr lang="en-US" dirty="0"/>
+              <a:t>The APIs are organized into several functional groups. Device, Sensor, and Device Configuration APIs support system setup and management. Sensor Reading APIs handle data ingestion and historical queries. Alert Rule and Alert APIs manage alert configuration and alert processing. Actuator and Command APIs support remote device control and command tracking. Authentication and Health APIs provide security and system monitoring functions.</a:t>
+            </a:r>
+          </a:p>
+          <a:p>
+            <a:r>
+              <a:rPr lang="en-US" dirty="0"/>
+              <a:t>Most endpoints are protected using JWT authentication with role-based access control for Administrators, Operators, and Viewers. </a:t>
+            </a:r>
+            <a:r>
+              <a:rPr lang="en-US" dirty="0" err="1"/>
               <a:t>SignalR</a:t>
             </a:r>
             <a:r>
-              <a:rPr lang="en-US" sz="1200" b="0" i="0" kern="1200" dirty="0">
-                <a:solidFill>
-                  <a:schemeClr val="tx1"/>
-                </a:solidFill>
-                <a:effectLst/>
-                <a:latin typeface="+mn-lt"/>
-                <a:ea typeface="+mn-ea"/>
-                <a:cs typeface="+mn-cs"/>
-              </a:rPr>
-              <a:t> uses the same token.</a:t>
-            </a:r>
-          </a:p>
-          <a:p>
-            <a:r>
-              <a:rPr lang="en-US" sz="1200" b="0" i="0" kern="1200" dirty="0">
-                <a:solidFill>
-                  <a:schemeClr val="tx1"/>
-                </a:solidFill>
-                <a:effectLst/>
-                <a:latin typeface="+mn-lt"/>
-                <a:ea typeface="+mn-ea"/>
-                <a:cs typeface="+mn-cs"/>
-              </a:rPr>
-              <a:t>For live data, the path is </a:t>
-            </a:r>
-            <a:r>
-              <a:rPr lang="en-US" sz="1200" b="1" i="0" kern="1200" dirty="0">
-                <a:solidFill>
-                  <a:schemeClr val="tx1"/>
-                </a:solidFill>
-                <a:effectLst/>
-                <a:latin typeface="+mn-lt"/>
-                <a:ea typeface="+mn-ea"/>
-                <a:cs typeface="+mn-cs"/>
-              </a:rPr>
-              <a:t>MQTT through the broker to the API, then </a:t>
-            </a:r>
-            <a:r>
-              <a:rPr lang="en-US" sz="1200" b="1" i="0" kern="1200" dirty="0" err="1">
-                <a:solidFill>
-                  <a:schemeClr val="tx1"/>
-                </a:solidFill>
-                <a:effectLst/>
-                <a:latin typeface="+mn-lt"/>
-                <a:ea typeface="+mn-ea"/>
-                <a:cs typeface="+mn-cs"/>
-              </a:rPr>
+              <a:rPr lang="en-US" dirty="0"/>
+              <a:t> connections use the same authentication mechanism.</a:t>
+            </a:r>
+          </a:p>
+          <a:p>
+            <a:r>
+              <a:rPr lang="en-US" dirty="0"/>
+              <a:t>For real-time monitoring, sensor data travels from the device through MQTT and the broker to the API, where </a:t>
+            </a:r>
+            <a:r>
+              <a:rPr lang="en-US" dirty="0" err="1"/>
               <a:t>SignalR</a:t>
             </a:r>
             <a:r>
-              <a:rPr lang="en-US" sz="1200" b="1" i="0" kern="1200" dirty="0">
-                <a:solidFill>
-                  <a:schemeClr val="tx1"/>
-                </a:solidFill>
-                <a:effectLst/>
-                <a:latin typeface="+mn-lt"/>
-                <a:ea typeface="+mn-ea"/>
-                <a:cs typeface="+mn-cs"/>
-              </a:rPr>
-              <a:t> to the frontend</a:t>
-            </a:r>
-            <a:r>
-              <a:rPr lang="en-US" sz="1200" b="0" i="0" kern="1200" dirty="0">
-                <a:solidFill>
-                  <a:schemeClr val="tx1"/>
-                </a:solidFill>
-                <a:effectLst/>
-                <a:latin typeface="+mn-lt"/>
-                <a:ea typeface="+mn-ea"/>
-                <a:cs typeface="+mn-cs"/>
-              </a:rPr>
-              <a:t>, with updates typically within about </a:t>
-            </a:r>
-            <a:r>
-              <a:rPr lang="en-US" sz="1200" b="1" i="0" kern="1200" dirty="0">
-                <a:solidFill>
-                  <a:schemeClr val="tx1"/>
-                </a:solidFill>
-                <a:effectLst/>
-                <a:latin typeface="+mn-lt"/>
-                <a:ea typeface="+mn-ea"/>
-                <a:cs typeface="+mn-cs"/>
-              </a:rPr>
-              <a:t>one to two seconds</a:t>
-            </a:r>
-            <a:r>
-              <a:rPr lang="en-US" sz="1200" b="0" i="0" kern="1200" dirty="0">
-                <a:solidFill>
-                  <a:schemeClr val="tx1"/>
-                </a:solidFill>
-                <a:effectLst/>
-                <a:latin typeface="+mn-lt"/>
-                <a:ea typeface="+mn-ea"/>
-                <a:cs typeface="+mn-cs"/>
-              </a:rPr>
-              <a:t>.</a:t>
-            </a:r>
-          </a:p>
-          <a:p>
-            <a:endParaRPr lang="en-US" dirty="0"/>
+              <a:rPr lang="en-US" dirty="0"/>
+              <a:t> pushes updates to connected clients, typically within one to two seconds.</a:t>
+            </a:r>
           </a:p>
         </p:txBody>
       </p:sp>
@@ -5939,394 +2669,54 @@
           <a:lstStyle/>
           <a:p>
             <a:r>
-              <a:rPr lang="en-US" sz="1200" b="0" i="0" kern="1200" dirty="0">
-                <a:solidFill>
-                  <a:schemeClr val="tx1"/>
-                </a:solidFill>
-                <a:effectLst/>
-                <a:latin typeface="+mn-lt"/>
-                <a:ea typeface="+mn-ea"/>
-                <a:cs typeface="+mn-cs"/>
-              </a:rPr>
-              <a:t>The frontend is a </a:t>
-            </a:r>
-            <a:r>
-              <a:rPr lang="en-US" sz="1200" b="1" i="0" kern="1200" dirty="0">
-                <a:solidFill>
-                  <a:schemeClr val="tx1"/>
-                </a:solidFill>
-                <a:effectLst/>
-                <a:latin typeface="+mn-lt"/>
-                <a:ea typeface="+mn-ea"/>
-                <a:cs typeface="+mn-cs"/>
-              </a:rPr>
-              <a:t>React single-page application</a:t>
-            </a:r>
-            <a:r>
-              <a:rPr lang="en-US" sz="1200" b="0" i="0" kern="1200" dirty="0">
-                <a:solidFill>
-                  <a:schemeClr val="tx1"/>
-                </a:solidFill>
-                <a:effectLst/>
-                <a:latin typeface="+mn-lt"/>
-                <a:ea typeface="+mn-ea"/>
-                <a:cs typeface="+mn-cs"/>
-              </a:rPr>
-              <a:t> with protected routes after login.</a:t>
-            </a:r>
-          </a:p>
-          <a:p>
-            <a:r>
-              <a:rPr lang="en-US" sz="1200" b="0" i="0" kern="1200" dirty="0">
-                <a:solidFill>
-                  <a:schemeClr val="tx1"/>
-                </a:solidFill>
-                <a:effectLst/>
-                <a:latin typeface="+mn-lt"/>
-                <a:ea typeface="+mn-ea"/>
-                <a:cs typeface="+mn-cs"/>
-              </a:rPr>
-              <a:t>The </a:t>
-            </a:r>
-            <a:r>
-              <a:rPr lang="en-US" sz="1200" b="1" i="0" kern="1200" dirty="0">
-                <a:solidFill>
-                  <a:schemeClr val="tx1"/>
-                </a:solidFill>
-                <a:effectLst/>
-                <a:latin typeface="+mn-lt"/>
-                <a:ea typeface="+mn-ea"/>
-                <a:cs typeface="+mn-cs"/>
-              </a:rPr>
-              <a:t>dashboard</a:t>
-            </a:r>
-            <a:r>
-              <a:rPr lang="en-US" sz="1200" b="0" i="0" kern="1200" dirty="0">
-                <a:solidFill>
-                  <a:schemeClr val="tx1"/>
-                </a:solidFill>
-                <a:effectLst/>
-                <a:latin typeface="+mn-lt"/>
-                <a:ea typeface="+mn-ea"/>
-                <a:cs typeface="+mn-cs"/>
-              </a:rPr>
-              <a:t> gives an overview with live </a:t>
-            </a:r>
-            <a:r>
-              <a:rPr lang="en-US" sz="1200" b="0" i="0" kern="1200" dirty="0" err="1">
-                <a:solidFill>
-                  <a:schemeClr val="tx1"/>
-                </a:solidFill>
-                <a:effectLst/>
-                <a:latin typeface="+mn-lt"/>
-                <a:ea typeface="+mn-ea"/>
-                <a:cs typeface="+mn-cs"/>
-              </a:rPr>
+              <a:rPr lang="en-US" dirty="0"/>
+              <a:t>This slide shows how the frontend application is structured and how users navigate through the system.</a:t>
+            </a:r>
+          </a:p>
+          <a:p>
+            <a:r>
+              <a:rPr lang="en-US" dirty="0"/>
+              <a:t>The application is built as a React single-page application, meaning users can move between features without reloading the page.</a:t>
+            </a:r>
+          </a:p>
+          <a:p>
+            <a:r>
+              <a:rPr lang="en-US" dirty="0"/>
+              <a:t>After authentication, users access the system through </a:t>
+            </a:r>
+            <a:r>
+              <a:rPr lang="en-US" dirty="0" err="1"/>
+              <a:t>ProtectedRoute</a:t>
+            </a:r>
+            <a:r>
+              <a:rPr lang="en-US" dirty="0"/>
+              <a:t>, which validates the JWT token and enforces role-based access control. Administrative functions, such as user management, are only available to authorized users.</a:t>
+            </a:r>
+          </a:p>
+          <a:p>
+            <a:r>
+              <a:rPr lang="en-US" dirty="0"/>
+              <a:t>Once authenticated, users navigate through a shared navigation layout that provides access to the main system functions, including dashboards, device management, sensors, actuators, alerts, and command history.</a:t>
+            </a:r>
+          </a:p>
+          <a:p>
+            <a:r>
+              <a:rPr lang="en-US" dirty="0"/>
+              <a:t>The dashboard provides a real-time overview using </a:t>
+            </a:r>
+            <a:r>
+              <a:rPr lang="en-US" dirty="0" err="1"/>
               <a:t>SignalR</a:t>
             </a:r>
             <a:r>
-              <a:rPr lang="en-US" sz="1200" b="0" i="0" kern="1200" dirty="0">
-                <a:solidFill>
-                  <a:schemeClr val="tx1"/>
-                </a:solidFill>
-                <a:effectLst/>
-                <a:latin typeface="+mn-lt"/>
-                <a:ea typeface="+mn-ea"/>
-                <a:cs typeface="+mn-cs"/>
-              </a:rPr>
-              <a:t> updates. </a:t>
-            </a:r>
-            <a:r>
-              <a:rPr lang="en-US" sz="1200" b="1" i="0" kern="1200" dirty="0">
-                <a:solidFill>
-                  <a:schemeClr val="tx1"/>
-                </a:solidFill>
-                <a:effectLst/>
-                <a:latin typeface="+mn-lt"/>
-                <a:ea typeface="+mn-ea"/>
-                <a:cs typeface="+mn-cs"/>
-              </a:rPr>
-              <a:t>Devices</a:t>
-            </a:r>
-            <a:r>
-              <a:rPr lang="en-US" sz="1200" b="0" i="0" kern="1200" dirty="0">
-                <a:solidFill>
-                  <a:schemeClr val="tx1"/>
-                </a:solidFill>
-                <a:effectLst/>
-                <a:latin typeface="+mn-lt"/>
-                <a:ea typeface="+mn-ea"/>
-                <a:cs typeface="+mn-cs"/>
-              </a:rPr>
-              <a:t> and </a:t>
-            </a:r>
-            <a:r>
-              <a:rPr lang="en-US" sz="1200" b="1" i="0" kern="1200" dirty="0">
-                <a:solidFill>
-                  <a:schemeClr val="tx1"/>
-                </a:solidFill>
-                <a:effectLst/>
-                <a:latin typeface="+mn-lt"/>
-                <a:ea typeface="+mn-ea"/>
-                <a:cs typeface="+mn-cs"/>
-              </a:rPr>
-              <a:t>device detail</a:t>
-            </a:r>
-            <a:r>
-              <a:rPr lang="en-US" sz="1200" b="0" i="0" kern="1200" dirty="0">
-                <a:solidFill>
-                  <a:schemeClr val="tx1"/>
-                </a:solidFill>
-                <a:effectLst/>
-                <a:latin typeface="+mn-lt"/>
-                <a:ea typeface="+mn-ea"/>
-                <a:cs typeface="+mn-cs"/>
-              </a:rPr>
-              <a:t> support charts and commands. </a:t>
-            </a:r>
-            <a:r>
-              <a:rPr lang="en-US" sz="1200" b="1" i="0" kern="1200" dirty="0">
-                <a:solidFill>
-                  <a:schemeClr val="tx1"/>
-                </a:solidFill>
-                <a:effectLst/>
-                <a:latin typeface="+mn-lt"/>
-                <a:ea typeface="+mn-ea"/>
-                <a:cs typeface="+mn-cs"/>
-              </a:rPr>
-              <a:t>Sensors</a:t>
-            </a:r>
-            <a:r>
-              <a:rPr lang="en-US" sz="1200" b="0" i="0" kern="1200" dirty="0">
-                <a:solidFill>
-                  <a:schemeClr val="tx1"/>
-                </a:solidFill>
-                <a:effectLst/>
-                <a:latin typeface="+mn-lt"/>
-                <a:ea typeface="+mn-ea"/>
-                <a:cs typeface="+mn-cs"/>
-              </a:rPr>
-              <a:t> and </a:t>
-            </a:r>
-            <a:r>
-              <a:rPr lang="en-US" sz="1200" b="1" i="0" kern="1200" dirty="0">
-                <a:solidFill>
-                  <a:schemeClr val="tx1"/>
-                </a:solidFill>
-                <a:effectLst/>
-                <a:latin typeface="+mn-lt"/>
-                <a:ea typeface="+mn-ea"/>
-                <a:cs typeface="+mn-cs"/>
-              </a:rPr>
-              <a:t>actuators</a:t>
-            </a:r>
-            <a:r>
-              <a:rPr lang="en-US" sz="1200" b="0" i="0" kern="1200" dirty="0">
-                <a:solidFill>
-                  <a:schemeClr val="tx1"/>
-                </a:solidFill>
-                <a:effectLst/>
-                <a:latin typeface="+mn-lt"/>
-                <a:ea typeface="+mn-ea"/>
-                <a:cs typeface="+mn-cs"/>
-              </a:rPr>
-              <a:t> manage inputs and outputs. </a:t>
-            </a:r>
-            <a:r>
-              <a:rPr lang="en-US" sz="1200" b="1" i="0" kern="1200" dirty="0">
-                <a:solidFill>
-                  <a:schemeClr val="tx1"/>
-                </a:solidFill>
-                <a:effectLst/>
-                <a:latin typeface="+mn-lt"/>
-                <a:ea typeface="+mn-ea"/>
-                <a:cs typeface="+mn-cs"/>
-              </a:rPr>
-              <a:t>Alert rules</a:t>
-            </a:r>
-            <a:r>
-              <a:rPr lang="en-US" sz="1200" b="0" i="0" kern="1200" dirty="0">
-                <a:solidFill>
-                  <a:schemeClr val="tx1"/>
-                </a:solidFill>
-                <a:effectLst/>
-                <a:latin typeface="+mn-lt"/>
-                <a:ea typeface="+mn-ea"/>
-                <a:cs typeface="+mn-cs"/>
-              </a:rPr>
-              <a:t> and </a:t>
-            </a:r>
-            <a:r>
-              <a:rPr lang="en-US" sz="1200" b="1" i="0" kern="1200" dirty="0">
-                <a:solidFill>
-                  <a:schemeClr val="tx1"/>
-                </a:solidFill>
-                <a:effectLst/>
-                <a:latin typeface="+mn-lt"/>
-                <a:ea typeface="+mn-ea"/>
-                <a:cs typeface="+mn-cs"/>
-              </a:rPr>
-              <a:t>alerts</a:t>
-            </a:r>
-            <a:r>
-              <a:rPr lang="en-US" sz="1200" b="0" i="0" kern="1200" dirty="0">
-                <a:solidFill>
-                  <a:schemeClr val="tx1"/>
-                </a:solidFill>
-                <a:effectLst/>
-                <a:latin typeface="+mn-lt"/>
-                <a:ea typeface="+mn-ea"/>
-                <a:cs typeface="+mn-cs"/>
-              </a:rPr>
-              <a:t> handle configuration and response. </a:t>
-            </a:r>
-            <a:r>
-              <a:rPr lang="en-US" sz="1200" b="1" i="0" kern="1200" dirty="0">
-                <a:solidFill>
-                  <a:schemeClr val="tx1"/>
-                </a:solidFill>
-                <a:effectLst/>
-                <a:latin typeface="+mn-lt"/>
-                <a:ea typeface="+mn-ea"/>
-                <a:cs typeface="+mn-cs"/>
-              </a:rPr>
-              <a:t>Command history</a:t>
-            </a:r>
-            <a:r>
-              <a:rPr lang="en-US" sz="1200" b="0" i="0" kern="1200" dirty="0">
-                <a:solidFill>
-                  <a:schemeClr val="tx1"/>
-                </a:solidFill>
-                <a:effectLst/>
-                <a:latin typeface="+mn-lt"/>
-                <a:ea typeface="+mn-ea"/>
-                <a:cs typeface="+mn-cs"/>
-              </a:rPr>
-              <a:t> shows status from </a:t>
-            </a:r>
-            <a:r>
-              <a:rPr lang="en-US" sz="1200" b="1" i="0" kern="1200" dirty="0">
-                <a:solidFill>
-                  <a:schemeClr val="tx1"/>
-                </a:solidFill>
-                <a:effectLst/>
-                <a:latin typeface="+mn-lt"/>
-                <a:ea typeface="+mn-ea"/>
-                <a:cs typeface="+mn-cs"/>
-              </a:rPr>
-              <a:t>Pending through Sent to </a:t>
-            </a:r>
-            <a:r>
-              <a:rPr lang="en-US" sz="1200" b="1" i="0" kern="1200" dirty="0" err="1">
-                <a:solidFill>
-                  <a:schemeClr val="tx1"/>
-                </a:solidFill>
-                <a:effectLst/>
-                <a:latin typeface="+mn-lt"/>
-                <a:ea typeface="+mn-ea"/>
-                <a:cs typeface="+mn-cs"/>
-              </a:rPr>
-              <a:t>Acked</a:t>
-            </a:r>
-            <a:r>
-              <a:rPr lang="en-US" sz="1200" b="0" i="0" kern="1200" dirty="0">
-                <a:solidFill>
-                  <a:schemeClr val="tx1"/>
-                </a:solidFill>
-                <a:effectLst/>
-                <a:latin typeface="+mn-lt"/>
-                <a:ea typeface="+mn-ea"/>
-                <a:cs typeface="+mn-cs"/>
-              </a:rPr>
-              <a:t>. </a:t>
-            </a:r>
-            <a:r>
-              <a:rPr lang="en-US" sz="1200" b="1" i="0" kern="1200" dirty="0">
-                <a:solidFill>
-                  <a:schemeClr val="tx1"/>
-                </a:solidFill>
-                <a:effectLst/>
-                <a:latin typeface="+mn-lt"/>
-                <a:ea typeface="+mn-ea"/>
-                <a:cs typeface="+mn-cs"/>
-              </a:rPr>
-              <a:t>Users</a:t>
-            </a:r>
-            <a:r>
-              <a:rPr lang="en-US" sz="1200" b="0" i="0" kern="1200" dirty="0">
-                <a:solidFill>
-                  <a:schemeClr val="tx1"/>
-                </a:solidFill>
-                <a:effectLst/>
-                <a:latin typeface="+mn-lt"/>
-                <a:ea typeface="+mn-ea"/>
-                <a:cs typeface="+mn-cs"/>
-              </a:rPr>
-              <a:t> is restricted to administrators.</a:t>
-            </a:r>
-          </a:p>
-          <a:p>
-            <a:r>
-              <a:rPr lang="en-US" sz="1200" b="1" i="0" kern="1200" dirty="0" err="1">
-                <a:solidFill>
-                  <a:schemeClr val="tx1"/>
-                </a:solidFill>
-                <a:effectLst/>
-                <a:latin typeface="+mn-lt"/>
-                <a:ea typeface="+mn-ea"/>
-                <a:cs typeface="+mn-cs"/>
-              </a:rPr>
-              <a:t>ProtectedRoute</a:t>
-            </a:r>
-            <a:r>
-              <a:rPr lang="en-US" sz="1200" b="0" i="0" kern="1200" dirty="0">
-                <a:solidFill>
-                  <a:schemeClr val="tx1"/>
-                </a:solidFill>
-                <a:effectLst/>
-                <a:latin typeface="+mn-lt"/>
-                <a:ea typeface="+mn-ea"/>
-                <a:cs typeface="+mn-cs"/>
-              </a:rPr>
-              <a:t> enforces authentication, and role checks gate admin functions.</a:t>
-            </a:r>
-          </a:p>
-          <a:p>
-            <a:r>
-              <a:rPr lang="en-US" sz="1200" b="0" i="0" kern="1200" dirty="0">
-                <a:solidFill>
-                  <a:schemeClr val="tx1"/>
-                </a:solidFill>
-                <a:effectLst/>
-                <a:latin typeface="+mn-lt"/>
-                <a:ea typeface="+mn-ea"/>
-                <a:cs typeface="+mn-cs"/>
-              </a:rPr>
-              <a:t>The UI keeps </a:t>
-            </a:r>
-            <a:r>
-              <a:rPr lang="en-US" sz="1200" b="1" i="0" kern="1200" dirty="0">
-                <a:solidFill>
-                  <a:schemeClr val="tx1"/>
-                </a:solidFill>
-                <a:effectLst/>
-                <a:latin typeface="+mn-lt"/>
-                <a:ea typeface="+mn-ea"/>
-                <a:cs typeface="+mn-cs"/>
-              </a:rPr>
-              <a:t>monitoring, configuration, and control</a:t>
-            </a:r>
-            <a:r>
-              <a:rPr lang="en-US" sz="1200" b="0" i="0" kern="1200" dirty="0">
-                <a:solidFill>
-                  <a:schemeClr val="tx1"/>
-                </a:solidFill>
-                <a:effectLst/>
-                <a:latin typeface="+mn-lt"/>
-                <a:ea typeface="+mn-ea"/>
-                <a:cs typeface="+mn-cs"/>
-              </a:rPr>
-              <a:t> in one consistent experience.</a:t>
+              <a:rPr lang="en-US" dirty="0"/>
+              <a:t> updates, while the other pages support monitoring, configuration, alert management, and device control.</a:t>
+            </a:r>
+          </a:p>
+          <a:p>
+            <a:r>
+              <a:rPr lang="en-US" dirty="0"/>
+              <a:t>Overall, the frontend delivers a consistent and secure user experience for monitoring and managing IoT devices from a single web application.</a:t>
             </a:r>
           </a:p>
           <a:p>
@@ -6609,7 +2999,7 @@
           <a:p>
             <a:fld id="{5BCAD085-E8A6-8845-BD4E-CB4CCA059FC4}" type="datetimeFigureOut">
               <a:rPr lang="en-US" smtClean="0"/>
-              <a:t>5/23/2026</a:t>
+              <a:t>6/10/2026</a:t>
             </a:fld>
             <a:endParaRPr lang="en-US"/>
           </a:p>
@@ -6777,7 +3167,7 @@
           <a:p>
             <a:fld id="{5BCAD085-E8A6-8845-BD4E-CB4CCA059FC4}" type="datetimeFigureOut">
               <a:rPr lang="en-US" smtClean="0"/>
-              <a:t>5/23/2026</a:t>
+              <a:t>6/10/2026</a:t>
             </a:fld>
             <a:endParaRPr lang="en-US"/>
           </a:p>
@@ -6955,7 +3345,7 @@
           <a:p>
             <a:fld id="{5BCAD085-E8A6-8845-BD4E-CB4CCA059FC4}" type="datetimeFigureOut">
               <a:rPr lang="en-US" smtClean="0"/>
-              <a:t>5/23/2026</a:t>
+              <a:t>6/10/2026</a:t>
             </a:fld>
             <a:endParaRPr lang="en-US"/>
           </a:p>
@@ -7195,7 +3585,7 @@
           <a:p>
             <a:fld id="{5BCAD085-E8A6-8845-BD4E-CB4CCA059FC4}" type="datetimeFigureOut">
               <a:rPr lang="en-US" smtClean="0"/>
-              <a:t>5/23/2026</a:t>
+              <a:t>6/10/2026</a:t>
             </a:fld>
             <a:endParaRPr lang="en-US"/>
           </a:p>
@@ -7363,7 +3753,7 @@
           <a:p>
             <a:fld id="{5BCAD085-E8A6-8845-BD4E-CB4CCA059FC4}" type="datetimeFigureOut">
               <a:rPr lang="en-US" smtClean="0"/>
-              <a:t>5/23/2026</a:t>
+              <a:t>6/10/2026</a:t>
             </a:fld>
             <a:endParaRPr lang="en-US"/>
           </a:p>
@@ -7608,7 +3998,7 @@
           <a:p>
             <a:fld id="{5BCAD085-E8A6-8845-BD4E-CB4CCA059FC4}" type="datetimeFigureOut">
               <a:rPr lang="en-US" smtClean="0"/>
-              <a:t>5/23/2026</a:t>
+              <a:t>6/10/2026</a:t>
             </a:fld>
             <a:endParaRPr lang="en-US"/>
           </a:p>
@@ -7893,7 +4283,7 @@
           <a:p>
             <a:fld id="{5BCAD085-E8A6-8845-BD4E-CB4CCA059FC4}" type="datetimeFigureOut">
               <a:rPr lang="en-US" smtClean="0"/>
-              <a:t>5/23/2026</a:t>
+              <a:t>6/10/2026</a:t>
             </a:fld>
             <a:endParaRPr lang="en-US"/>
           </a:p>
@@ -8312,7 +4702,7 @@
           <a:p>
             <a:fld id="{5BCAD085-E8A6-8845-BD4E-CB4CCA059FC4}" type="datetimeFigureOut">
               <a:rPr lang="en-US" smtClean="0"/>
-              <a:t>5/23/2026</a:t>
+              <a:t>6/10/2026</a:t>
             </a:fld>
             <a:endParaRPr lang="en-US"/>
           </a:p>
@@ -8429,7 +4819,7 @@
           <a:p>
             <a:fld id="{5BCAD085-E8A6-8845-BD4E-CB4CCA059FC4}" type="datetimeFigureOut">
               <a:rPr lang="en-US" smtClean="0"/>
-              <a:t>5/23/2026</a:t>
+              <a:t>6/10/2026</a:t>
             </a:fld>
             <a:endParaRPr lang="en-US"/>
           </a:p>
@@ -8524,7 +4914,7 @@
           <a:p>
             <a:fld id="{5BCAD085-E8A6-8845-BD4E-CB4CCA059FC4}" type="datetimeFigureOut">
               <a:rPr lang="en-US" smtClean="0"/>
-              <a:t>5/23/2026</a:t>
+              <a:t>6/10/2026</a:t>
             </a:fld>
             <a:endParaRPr lang="en-US"/>
           </a:p>
@@ -8799,7 +5189,7 @@
           <a:p>
             <a:fld id="{5BCAD085-E8A6-8845-BD4E-CB4CCA059FC4}" type="datetimeFigureOut">
               <a:rPr lang="en-US" smtClean="0"/>
-              <a:t>5/23/2026</a:t>
+              <a:t>6/10/2026</a:t>
             </a:fld>
             <a:endParaRPr lang="en-US"/>
           </a:p>
@@ -8967,7 +5357,7 @@
           <a:p>
             <a:fld id="{5BCAD085-E8A6-8845-BD4E-CB4CCA059FC4}" type="datetimeFigureOut">
               <a:rPr lang="en-US" smtClean="0"/>
-              <a:t>5/23/2026</a:t>
+              <a:t>6/10/2026</a:t>
             </a:fld>
             <a:endParaRPr lang="en-US"/>
           </a:p>
@@ -9219,7 +5609,7 @@
           <a:p>
             <a:fld id="{5BCAD085-E8A6-8845-BD4E-CB4CCA059FC4}" type="datetimeFigureOut">
               <a:rPr lang="en-US" smtClean="0"/>
-              <a:t>5/23/2026</a:t>
+              <a:t>6/10/2026</a:t>
             </a:fld>
             <a:endParaRPr lang="en-US"/>
           </a:p>
@@ -9387,7 +5777,7 @@
           <a:p>
             <a:fld id="{5BCAD085-E8A6-8845-BD4E-CB4CCA059FC4}" type="datetimeFigureOut">
               <a:rPr lang="en-US" smtClean="0"/>
-              <a:t>5/23/2026</a:t>
+              <a:t>6/10/2026</a:t>
             </a:fld>
             <a:endParaRPr lang="en-US"/>
           </a:p>
@@ -9565,7 +5955,7 @@
           <a:p>
             <a:fld id="{5BCAD085-E8A6-8845-BD4E-CB4CCA059FC4}" type="datetimeFigureOut">
               <a:rPr lang="en-US" smtClean="0"/>
-              <a:t>5/23/2026</a:t>
+              <a:t>6/10/2026</a:t>
             </a:fld>
             <a:endParaRPr lang="en-US"/>
           </a:p>
@@ -9840,7 +6230,7 @@
           <a:p>
             <a:fld id="{5BCAD085-E8A6-8845-BD4E-CB4CCA059FC4}" type="datetimeFigureOut">
               <a:rPr lang="en-US" smtClean="0"/>
-              <a:t>5/23/2026</a:t>
+              <a:t>6/10/2026</a:t>
             </a:fld>
             <a:endParaRPr lang="en-US"/>
           </a:p>
@@ -10008,7 +6398,7 @@
           <a:p>
             <a:fld id="{5BCAD085-E8A6-8845-BD4E-CB4CCA059FC4}" type="datetimeFigureOut">
               <a:rPr lang="en-US" smtClean="0"/>
-              <a:t>5/23/2026</a:t>
+              <a:t>6/10/2026</a:t>
             </a:fld>
             <a:endParaRPr lang="en-US"/>
           </a:p>
@@ -10253,7 +6643,7 @@
           <a:p>
             <a:fld id="{5BCAD085-E8A6-8845-BD4E-CB4CCA059FC4}" type="datetimeFigureOut">
               <a:rPr lang="en-US" smtClean="0"/>
-              <a:t>5/23/2026</a:t>
+              <a:t>6/10/2026</a:t>
             </a:fld>
             <a:endParaRPr lang="en-US"/>
           </a:p>
@@ -10538,7 +6928,7 @@
           <a:p>
             <a:fld id="{5BCAD085-E8A6-8845-BD4E-CB4CCA059FC4}" type="datetimeFigureOut">
               <a:rPr lang="en-US" smtClean="0"/>
-              <a:t>5/23/2026</a:t>
+              <a:t>6/10/2026</a:t>
             </a:fld>
             <a:endParaRPr lang="en-US"/>
           </a:p>
@@ -10957,7 +7347,7 @@
           <a:p>
             <a:fld id="{5BCAD085-E8A6-8845-BD4E-CB4CCA059FC4}" type="datetimeFigureOut">
               <a:rPr lang="en-US" smtClean="0"/>
-              <a:t>5/23/2026</a:t>
+              <a:t>6/10/2026</a:t>
             </a:fld>
             <a:endParaRPr lang="en-US"/>
           </a:p>
@@ -11074,7 +7464,7 @@
           <a:p>
             <a:fld id="{5BCAD085-E8A6-8845-BD4E-CB4CCA059FC4}" type="datetimeFigureOut">
               <a:rPr lang="en-US" smtClean="0"/>
-              <a:t>5/23/2026</a:t>
+              <a:t>6/10/2026</a:t>
             </a:fld>
             <a:endParaRPr lang="en-US"/>
           </a:p>
@@ -11319,7 +7709,7 @@
           <a:p>
             <a:fld id="{5BCAD085-E8A6-8845-BD4E-CB4CCA059FC4}" type="datetimeFigureOut">
               <a:rPr lang="en-US" smtClean="0"/>
-              <a:t>5/23/2026</a:t>
+              <a:t>6/10/2026</a:t>
             </a:fld>
             <a:endParaRPr lang="en-US"/>
           </a:p>
@@ -11414,7 +7804,7 @@
           <a:p>
             <a:fld id="{5BCAD085-E8A6-8845-BD4E-CB4CCA059FC4}" type="datetimeFigureOut">
               <a:rPr lang="en-US" smtClean="0"/>
-              <a:t>5/23/2026</a:t>
+              <a:t>6/10/2026</a:t>
             </a:fld>
             <a:endParaRPr lang="en-US"/>
           </a:p>
@@ -11689,7 +8079,7 @@
           <a:p>
             <a:fld id="{5BCAD085-E8A6-8845-BD4E-CB4CCA059FC4}" type="datetimeFigureOut">
               <a:rPr lang="en-US" smtClean="0"/>
-              <a:t>5/23/2026</a:t>
+              <a:t>6/10/2026</a:t>
             </a:fld>
             <a:endParaRPr lang="en-US"/>
           </a:p>
@@ -11941,7 +8331,7 @@
           <a:p>
             <a:fld id="{5BCAD085-E8A6-8845-BD4E-CB4CCA059FC4}" type="datetimeFigureOut">
               <a:rPr lang="en-US" smtClean="0"/>
-              <a:t>5/23/2026</a:t>
+              <a:t>6/10/2026</a:t>
             </a:fld>
             <a:endParaRPr lang="en-US"/>
           </a:p>
@@ -12109,7 +8499,7 @@
           <a:p>
             <a:fld id="{5BCAD085-E8A6-8845-BD4E-CB4CCA059FC4}" type="datetimeFigureOut">
               <a:rPr lang="en-US" smtClean="0"/>
-              <a:t>5/23/2026</a:t>
+              <a:t>6/10/2026</a:t>
             </a:fld>
             <a:endParaRPr lang="en-US"/>
           </a:p>
@@ -12287,7 +8677,7 @@
           <a:p>
             <a:fld id="{5BCAD085-E8A6-8845-BD4E-CB4CCA059FC4}" type="datetimeFigureOut">
               <a:rPr lang="en-US" smtClean="0"/>
-              <a:t>5/23/2026</a:t>
+              <a:t>6/10/2026</a:t>
             </a:fld>
             <a:endParaRPr lang="en-US"/>
           </a:p>
@@ -12642,7 +9032,7 @@
           <a:p>
             <a:fld id="{5BCAD085-E8A6-8845-BD4E-CB4CCA059FC4}" type="datetimeFigureOut">
               <a:rPr lang="en-US" smtClean="0"/>
-              <a:t>5/23/2026</a:t>
+              <a:t>6/10/2026</a:t>
             </a:fld>
             <a:endParaRPr lang="en-US"/>
           </a:p>
@@ -13061,7 +9451,7 @@
           <a:p>
             <a:fld id="{5BCAD085-E8A6-8845-BD4E-CB4CCA059FC4}" type="datetimeFigureOut">
               <a:rPr lang="en-US" smtClean="0"/>
-              <a:t>5/23/2026</a:t>
+              <a:t>6/10/2026</a:t>
             </a:fld>
             <a:endParaRPr lang="en-US"/>
           </a:p>
@@ -13178,7 +9568,7 @@
           <a:p>
             <a:fld id="{5BCAD085-E8A6-8845-BD4E-CB4CCA059FC4}" type="datetimeFigureOut">
               <a:rPr lang="en-US" smtClean="0"/>
-              <a:t>5/23/2026</a:t>
+              <a:t>6/10/2026</a:t>
             </a:fld>
             <a:endParaRPr lang="en-US"/>
           </a:p>
@@ -13273,7 +9663,7 @@
           <a:p>
             <a:fld id="{5BCAD085-E8A6-8845-BD4E-CB4CCA059FC4}" type="datetimeFigureOut">
               <a:rPr lang="en-US" smtClean="0"/>
-              <a:t>5/23/2026</a:t>
+              <a:t>6/10/2026</a:t>
             </a:fld>
             <a:endParaRPr lang="en-US"/>
           </a:p>
@@ -13548,7 +9938,7 @@
           <a:p>
             <a:fld id="{5BCAD085-E8A6-8845-BD4E-CB4CCA059FC4}" type="datetimeFigureOut">
               <a:rPr lang="en-US" smtClean="0"/>
-              <a:t>5/23/2026</a:t>
+              <a:t>6/10/2026</a:t>
             </a:fld>
             <a:endParaRPr lang="en-US"/>
           </a:p>
@@ -13800,7 +10190,7 @@
           <a:p>
             <a:fld id="{5BCAD085-E8A6-8845-BD4E-CB4CCA059FC4}" type="datetimeFigureOut">
               <a:rPr lang="en-US" smtClean="0"/>
-              <a:t>5/23/2026</a:t>
+              <a:t>6/10/2026</a:t>
             </a:fld>
             <a:endParaRPr lang="en-US"/>
           </a:p>
@@ -14011,7 +10401,7 @@
           <a:p>
             <a:fld id="{5BCAD085-E8A6-8845-BD4E-CB4CCA059FC4}" type="datetimeFigureOut">
               <a:rPr lang="en-US" smtClean="0"/>
-              <a:t>5/23/2026</a:t>
+              <a:t>6/10/2026</a:t>
             </a:fld>
             <a:endParaRPr lang="en-US"/>
           </a:p>
@@ -14519,7 +10909,7 @@
           <a:p>
             <a:fld id="{5BCAD085-E8A6-8845-BD4E-CB4CCA059FC4}" type="datetimeFigureOut">
               <a:rPr lang="en-US" smtClean="0"/>
-              <a:t>5/23/2026</a:t>
+              <a:t>6/10/2026</a:t>
             </a:fld>
             <a:endParaRPr lang="en-US"/>
           </a:p>
@@ -15028,7 +11418,7 @@
           <a:p>
             <a:fld id="{5BCAD085-E8A6-8845-BD4E-CB4CCA059FC4}" type="datetimeFigureOut">
               <a:rPr lang="en-US" smtClean="0"/>
-              <a:t>5/23/2026</a:t>
+              <a:t>6/10/2026</a:t>
             </a:fld>
             <a:endParaRPr lang="en-US"/>
           </a:p>
@@ -16451,205 +12841,19 @@
           </a:p>
         </p:txBody>
       </p:sp>
-      <p:pic>
-        <p:nvPicPr>
-          <p:cNvPr id="13" name="Video 12">
-            <a:hlinkClick r:id="" action="ppaction://media"/>
-            <a:extLst>
-              <a:ext uri="{FF2B5EF4-FFF2-40B4-BE49-F238E27FC236}">
-                <a16:creationId xmlns:a16="http://schemas.microsoft.com/office/drawing/2014/main" id="{5D28CF58-B785-A60E-A2A3-031E49122832}"/>
-              </a:ext>
-            </a:extLst>
-          </p:cNvPr>
-          <p:cNvPicPr>
-            <a:picLocks noChangeAspect="1"/>
-          </p:cNvPicPr>
-          <p:nvPr>
-            <a:videoFile r:link="rId2"/>
-            <p:extLst>
-              <p:ext uri="{DAA4B4D4-6D71-4841-9C94-3DE7FCFB9230}">
-                <p14:media xmlns:p14="http://schemas.microsoft.com/office/powerpoint/2010/main" r:embed="rId1"/>
-              </p:ext>
-              <p:ext uri="{42D2F446-02D8-4167-A562-619A0277C38B}">
-                <p15:isNarration xmlns:p15="http://schemas.microsoft.com/office/powerpoint/2012/main" val="1"/>
-              </p:ext>
-            </p:extLst>
-          </p:nvPr>
-        </p:nvPicPr>
-        <p:blipFill>
-          <a:blip r:embed="rId5"/>
-          <a:srcRect l="21875" r="21875"/>
-          <a:stretch>
-            <a:fillRect/>
-          </a:stretch>
-        </p:blipFill>
-        <p:spPr>
-          <a:xfrm>
-            <a:off x="10049129" y="4718304"/>
-            <a:ext cx="2057400" cy="2057400"/>
-          </a:xfrm>
-          <a:prstGeom prst="ellipse">
-            <a:avLst/>
-          </a:prstGeom>
-          <a:ln>
-            <a:noFill/>
-          </a:ln>
-          <a:effectLst>
-            <a:softEdge rad="127000"/>
-          </a:effectLst>
-        </p:spPr>
-      </p:pic>
     </p:spTree>
   </p:cSld>
   <p:clrMapOvr>
     <a:masterClrMapping/>
   </p:clrMapOvr>
-  <mc:AlternateContent xmlns:mc="http://schemas.openxmlformats.org/markup-compatibility/2006">
-    <mc:Choice xmlns:p14="http://schemas.microsoft.com/office/powerpoint/2010/main" Requires="p14">
+  <mc:AlternateContent xmlns:mc="http://schemas.openxmlformats.org/markup-compatibility/2006" xmlns:p14="http://schemas.microsoft.com/office/powerpoint/2010/main">
+    <mc:Choice Requires="p14">
       <p:transition spd="slow" p14:dur="2000" advTm="23957"/>
     </mc:Choice>
-    <mc:Fallback>
+    <mc:Fallback xmlns="">
       <p:transition spd="slow" advTm="23957"/>
     </mc:Fallback>
   </mc:AlternateContent>
-  <p:timing>
-    <p:tnLst>
-      <p:par>
-        <p:cTn id="1" dur="indefinite" restart="never" nodeType="tmRoot">
-          <p:childTnLst>
-            <p:seq concurrent="1" nextAc="seek">
-              <p:cTn id="2" dur="indefinite" nodeType="mainSeq">
-                <p:childTnLst>
-                  <p:par>
-                    <p:cTn id="3" fill="hold">
-                      <p:stCondLst>
-                        <p:cond delay="indefinite"/>
-                        <p:cond evt="onBegin" delay="0">
-                          <p:tn val="2"/>
-                        </p:cond>
-                      </p:stCondLst>
-                      <p:childTnLst>
-                        <p:par>
-                          <p:cTn id="4" fill="hold">
-                            <p:stCondLst>
-                              <p:cond delay="0"/>
-                            </p:stCondLst>
-                            <p:childTnLst>
-                              <p:par>
-                                <p:cTn id="5" presetID="1" presetClass="mediacall" presetSubtype="0" fill="hold" nodeType="afterEffect">
-                                  <p:stCondLst>
-                                    <p:cond delay="0"/>
-                                  </p:stCondLst>
-                                  <p:childTnLst>
-                                    <p:cmd type="call" cmd="playFrom(0.0)">
-                                      <p:cBhvr>
-                                        <p:cTn id="6" dur="1" fill="hold"/>
-                                        <p:tgtEl>
-                                          <p:spTgt spid="13"/>
-                                        </p:tgtEl>
-                                      </p:cBhvr>
-                                    </p:cmd>
-                                  </p:childTnLst>
-                                </p:cTn>
-                              </p:par>
-                            </p:childTnLst>
-                          </p:cTn>
-                        </p:par>
-                      </p:childTnLst>
-                    </p:cTn>
-                  </p:par>
-                </p:childTnLst>
-              </p:cTn>
-              <p:prevCondLst>
-                <p:cond evt="onPrev" delay="0">
-                  <p:tgtEl>
-                    <p:sldTgt/>
-                  </p:tgtEl>
-                </p:cond>
-              </p:prevCondLst>
-              <p:nextCondLst>
-                <p:cond evt="onNext" delay="0">
-                  <p:tgtEl>
-                    <p:sldTgt/>
-                  </p:tgtEl>
-                </p:cond>
-              </p:nextCondLst>
-            </p:seq>
-            <p:video>
-              <p:cMediaNode vol="80000">
-                <p:cTn id="7" fill="hold" display="0">
-                  <p:stCondLst>
-                    <p:cond delay="indefinite"/>
-                  </p:stCondLst>
-                </p:cTn>
-                <p:tgtEl>
-                  <p:spTgt spid="13"/>
-                </p:tgtEl>
-              </p:cMediaNode>
-            </p:video>
-            <p:seq concurrent="1" nextAc="seek">
-              <p:cTn id="8" restart="whenNotActive" fill="hold" evtFilter="cancelBubble" nodeType="interactiveSeq">
-                <p:stCondLst>
-                  <p:cond evt="onClick" delay="0">
-                    <p:tgtEl>
-                      <p:spTgt spid="13"/>
-                    </p:tgtEl>
-                  </p:cond>
-                </p:stCondLst>
-                <p:endSync evt="end" delay="0">
-                  <p:rtn val="all"/>
-                </p:endSync>
-                <p:childTnLst>
-                  <p:par>
-                    <p:cTn id="9" fill="hold">
-                      <p:stCondLst>
-                        <p:cond delay="0"/>
-                      </p:stCondLst>
-                      <p:childTnLst>
-                        <p:par>
-                          <p:cTn id="10" fill="hold">
-                            <p:stCondLst>
-                              <p:cond delay="0"/>
-                            </p:stCondLst>
-                            <p:childTnLst>
-                              <p:par>
-                                <p:cTn id="11" presetID="2" presetClass="mediacall" presetSubtype="0" fill="hold" nodeType="clickEffect">
-                                  <p:stCondLst>
-                                    <p:cond delay="0"/>
-                                  </p:stCondLst>
-                                  <p:childTnLst>
-                                    <p:cmd type="call" cmd="togglePause">
-                                      <p:cBhvr>
-                                        <p:cTn id="12" dur="1" fill="hold"/>
-                                        <p:tgtEl>
-                                          <p:spTgt spid="13"/>
-                                        </p:tgtEl>
-                                      </p:cBhvr>
-                                    </p:cmd>
-                                  </p:childTnLst>
-                                </p:cTn>
-                              </p:par>
-                            </p:childTnLst>
-                          </p:cTn>
-                        </p:par>
-                      </p:childTnLst>
-                    </p:cTn>
-                  </p:par>
-                </p:childTnLst>
-              </p:cTn>
-              <p:nextCondLst>
-                <p:cond evt="onClick" delay="0">
-                  <p:tgtEl>
-                    <p:spTgt spid="13"/>
-                  </p:tgtEl>
-                </p:cond>
-              </p:nextCondLst>
-            </p:seq>
-          </p:childTnLst>
-        </p:cTn>
-      </p:par>
-    </p:tnLst>
-  </p:timing>
 </p:sld>
 </file>
 
@@ -27815,7 +24019,7 @@
         </p:blipFill>
         <p:spPr>
           <a:xfrm>
-            <a:off x="1271016" y="3942079"/>
+            <a:off x="6501383" y="2520484"/>
             <a:ext cx="420624" cy="420624"/>
           </a:xfrm>
           <a:prstGeom prst="rect">
@@ -27831,7 +24035,7 @@
         </p:nvSpPr>
         <p:spPr>
           <a:xfrm>
-            <a:off x="1856232" y="3942079"/>
+            <a:off x="7086599" y="2520484"/>
             <a:ext cx="4572000" cy="369332"/>
           </a:xfrm>
           <a:prstGeom prst="rect">
@@ -27921,7 +24125,7 @@
         </p:nvSpPr>
         <p:spPr>
           <a:xfrm>
-            <a:off x="1856232" y="4198112"/>
+            <a:off x="7086599" y="2776517"/>
             <a:ext cx="4572000" cy="307777"/>
           </a:xfrm>
           <a:prstGeom prst="rect">
@@ -27986,7 +24190,7 @@
         </p:nvSpPr>
         <p:spPr>
           <a:xfrm>
-            <a:off x="1197864" y="3942079"/>
+            <a:off x="6428231" y="2520484"/>
             <a:ext cx="36576" cy="420624"/>
           </a:xfrm>
           <a:prstGeom prst="rect">
@@ -28067,7 +24271,7 @@
         </p:blipFill>
         <p:spPr>
           <a:xfrm>
-            <a:off x="1271016" y="5359400"/>
+            <a:off x="6501383" y="3915707"/>
             <a:ext cx="420624" cy="420624"/>
           </a:xfrm>
           <a:prstGeom prst="rect">
@@ -28083,7 +24287,7 @@
         </p:nvSpPr>
         <p:spPr>
           <a:xfrm>
-            <a:off x="1856232" y="5359400"/>
+            <a:off x="7086599" y="3915707"/>
             <a:ext cx="4572000" cy="923330"/>
           </a:xfrm>
           <a:prstGeom prst="rect">
@@ -28200,7 +24404,7 @@
         </p:nvSpPr>
         <p:spPr>
           <a:xfrm>
-            <a:off x="1856232" y="5615432"/>
+            <a:off x="7086599" y="4171739"/>
             <a:ext cx="3745992" cy="307777"/>
           </a:xfrm>
           <a:prstGeom prst="rect">
@@ -28243,7 +24447,7 @@
         </p:nvSpPr>
         <p:spPr>
           <a:xfrm>
-            <a:off x="1197864" y="5359400"/>
+            <a:off x="6428231" y="3915707"/>
             <a:ext cx="36576" cy="420624"/>
           </a:xfrm>
           <a:prstGeom prst="rect">
@@ -28324,7 +24528,7 @@
         </p:blipFill>
         <p:spPr>
           <a:xfrm>
-            <a:off x="6793992" y="2524759"/>
+            <a:off x="1271016" y="3948460"/>
             <a:ext cx="420624" cy="420624"/>
           </a:xfrm>
           <a:prstGeom prst="rect">
@@ -28340,7 +24544,7 @@
         </p:nvSpPr>
         <p:spPr>
           <a:xfrm>
-            <a:off x="7379207" y="2524759"/>
+            <a:off x="1856231" y="3948460"/>
             <a:ext cx="4572000" cy="369332"/>
           </a:xfrm>
           <a:prstGeom prst="rect">
@@ -28405,7 +24609,7 @@
         </p:nvSpPr>
         <p:spPr>
           <a:xfrm>
-            <a:off x="7379207" y="2780792"/>
+            <a:off x="1856231" y="4204493"/>
             <a:ext cx="4572000" cy="307777"/>
           </a:xfrm>
           <a:prstGeom prst="rect">
@@ -28470,7 +24674,7 @@
         </p:nvSpPr>
         <p:spPr>
           <a:xfrm>
-            <a:off x="6720840" y="2524759"/>
+            <a:off x="1197864" y="3948460"/>
             <a:ext cx="36576" cy="420624"/>
           </a:xfrm>
           <a:prstGeom prst="rect">
@@ -28551,7 +24755,7 @@
         </p:blipFill>
         <p:spPr>
           <a:xfrm>
-            <a:off x="6793992" y="3942079"/>
+            <a:off x="1289306" y="5357718"/>
             <a:ext cx="420624" cy="420624"/>
           </a:xfrm>
           <a:prstGeom prst="rect">
@@ -28567,7 +24771,7 @@
         </p:nvSpPr>
         <p:spPr>
           <a:xfrm>
-            <a:off x="7379207" y="3942079"/>
+            <a:off x="1874521" y="5357718"/>
             <a:ext cx="4572000" cy="369332"/>
           </a:xfrm>
           <a:prstGeom prst="rect">
@@ -28632,7 +24836,7 @@
         </p:nvSpPr>
         <p:spPr>
           <a:xfrm>
-            <a:off x="7379207" y="4198112"/>
+            <a:off x="1874521" y="5613751"/>
             <a:ext cx="4572000" cy="307777"/>
           </a:xfrm>
           <a:prstGeom prst="rect">
@@ -28697,7 +24901,7 @@
         </p:nvSpPr>
         <p:spPr>
           <a:xfrm>
-            <a:off x="6720840" y="3942079"/>
+            <a:off x="1216154" y="5357718"/>
             <a:ext cx="36576" cy="420624"/>
           </a:xfrm>
           <a:prstGeom prst="rect">
@@ -28778,7 +24982,7 @@
         </p:blipFill>
         <p:spPr>
           <a:xfrm>
-            <a:off x="6793992" y="5359400"/>
+            <a:off x="6556249" y="5359400"/>
             <a:ext cx="420624" cy="420624"/>
           </a:xfrm>
           <a:prstGeom prst="rect">
@@ -28794,7 +24998,7 @@
         </p:nvSpPr>
         <p:spPr>
           <a:xfrm>
-            <a:off x="7379207" y="5359400"/>
+            <a:off x="7141464" y="5359400"/>
             <a:ext cx="4572000" cy="369332"/>
           </a:xfrm>
           <a:prstGeom prst="rect">
@@ -28859,8 +25063,8 @@
         </p:nvSpPr>
         <p:spPr>
           <a:xfrm>
-            <a:off x="7379207" y="5615432"/>
-            <a:ext cx="4572000" cy="307777"/>
+            <a:off x="7141464" y="5615432"/>
+            <a:ext cx="4242817" cy="307777"/>
           </a:xfrm>
           <a:prstGeom prst="rect">
             <a:avLst/>
@@ -28924,7 +25128,7 @@
         </p:nvSpPr>
         <p:spPr>
           <a:xfrm>
-            <a:off x="6720840" y="5359400"/>
+            <a:off x="6483097" y="5359400"/>
             <a:ext cx="36576" cy="420624"/>
           </a:xfrm>
           <a:prstGeom prst="rect">

--- a/Documents/Presentation/Capstone Project Presentation.pptx
+++ b/Documents/Presentation/Capstone Project Presentation.pptx
@@ -600,31 +600,7 @@
                 <a:ea typeface="+mn-ea"/>
                 <a:cs typeface="+mn-cs"/>
               </a:rPr>
-              <a:t> program, under instructor </a:t>
-            </a:r>
-            <a:r>
-              <a:rPr lang="en-US" sz="1200" b="1" i="0" kern="1200" dirty="0">
-                <a:solidFill>
-                  <a:schemeClr val="tx1"/>
-                </a:solidFill>
-                <a:effectLst/>
-                <a:latin typeface="+mn-lt"/>
-                <a:ea typeface="+mn-ea"/>
-                <a:cs typeface="+mn-cs"/>
-              </a:rPr>
-              <a:t>Naser Chowdhury</a:t>
-            </a:r>
-            <a:r>
-              <a:rPr lang="en-US" sz="1200" b="0" i="0" kern="1200" dirty="0">
-                <a:solidFill>
-                  <a:schemeClr val="tx1"/>
-                </a:solidFill>
-                <a:effectLst/>
-                <a:latin typeface="+mn-lt"/>
-                <a:ea typeface="+mn-ea"/>
-                <a:cs typeface="+mn-cs"/>
-              </a:rPr>
-              <a:t>.</a:t>
+              <a:t> program</a:t>
             </a:r>
           </a:p>
           <a:p>
@@ -1305,27 +1281,13 @@
           <a:p>
             <a:r>
               <a:rPr lang="en-US" dirty="0"/>
-              <a:t>To conclude, this project successfully delivered a complete end-to-end IoT monitoring platform.</a:t>
+              <a:t>This project successfully delivered a complete end-to-end IoT monitoring platform.</a:t>
             </a:r>
           </a:p>
           <a:p>
             <a:r>
               <a:rPr lang="en-US" dirty="0"/>
-              <a:t>The solution supports the full data path from edge devices through MQTT, the backend API, SQL Server, </a:t>
-            </a:r>
-            <a:r>
-              <a:rPr lang="en-US" dirty="0" err="1"/>
-              <a:t>SignalR</a:t>
-            </a:r>
-            <a:r>
-              <a:rPr lang="en-US" dirty="0"/>
-              <a:t>, and finally to a web-based dashboard. It provides real-time monitoring, alerting, historical data storage, and remote device control through a single application.</a:t>
-            </a:r>
-          </a:p>
-          <a:p>
-            <a:r>
-              <a:rPr lang="en-US" dirty="0"/>
-              <a:t>In addition to the software platform, the project includes device integration, role-based security, and cloud deployment using GitHub and Azure.</a:t>
+              <a:t>The system provides real-time monitoring, alerting, historical data storage, and remote device control through a single web application. It also includes device integration, role-based security, and cloud deployment using GitHub and Azure.</a:t>
             </a:r>
           </a:p>
           <a:p>
@@ -1337,17 +1299,7 @@
           <a:p>
             <a:r>
               <a:rPr lang="en-US" dirty="0"/>
-              <a:t>Overall, this project demonstrates a complete full-stack solution that connects physical sensors to a real-time web application and applies the BAS Application Development program in a practical industrial IoT context.</a:t>
-            </a:r>
-          </a:p>
-          <a:p>
-            <a:r>
-              <a:rPr lang="en-US" dirty="0"/>
-              <a:t>Thank you. </a:t>
-            </a:r>
-            <a:r>
-              <a:rPr lang="en-US"/>
-              <a:t>I am happy to take any questions.</a:t>
+              <a:t>Overall, this project demonstrates a practical full-stack IoT solution that connects physical devices to a real-time web dashboard and applies the knowledge gained throughout the BAS Application Development program.</a:t>
             </a:r>
           </a:p>
         </p:txBody>
@@ -13826,7 +13778,7 @@
           <p:nvPr>
             <p:extLst>
               <p:ext uri="{D42A27DB-BD31-4B8C-83A1-F6EECF244321}">
-                <p14:modId xmlns:p14="http://schemas.microsoft.com/office/powerpoint/2010/main" val="1975096064"/>
+                <p14:modId xmlns:p14="http://schemas.microsoft.com/office/powerpoint/2010/main" val="88501286"/>
               </p:ext>
             </p:extLst>
           </p:nvPr>
@@ -16200,7 +16152,7 @@
         </p:nvSpPr>
         <p:spPr>
           <a:xfrm>
-            <a:off x="548497" y="1439417"/>
+            <a:off x="625404" y="1439417"/>
             <a:ext cx="5484971" cy="4936474"/>
           </a:xfrm>
           <a:prstGeom prst="roundRect">
@@ -16225,8 +16177,11 @@
             <a:pPr defTabSz="1218895"/>
             <a:endParaRPr lang="en-US" sz="1866">
               <a:solidFill>
-                <a:prstClr val="black"/>
+                <a:srgbClr val="00B050"/>
               </a:solidFill>
+              <a:highlight>
+                <a:srgbClr val="FFFF00"/>
+              </a:highlight>
               <a:latin typeface="Candara" panose="020E0502030303020204" pitchFamily="34" charset="0"/>
             </a:endParaRPr>
           </a:p>
@@ -16240,7 +16195,7 @@
         </p:nvSpPr>
         <p:spPr>
           <a:xfrm>
-            <a:off x="6204112" y="1439174"/>
+            <a:off x="6204112" y="1390419"/>
             <a:ext cx="5484971" cy="4936474"/>
           </a:xfrm>
           <a:prstGeom prst="roundRect">
@@ -16262,11 +16217,18 @@
           <a:bodyPr/>
           <a:lstStyle/>
           <a:p>
-            <a:pPr defTabSz="1218895"/>
-            <a:endParaRPr lang="en-US" sz="1866">
+            <a:pPr defTabSz="1218895">
+              <a:lnSpc>
+                <a:spcPct val="150000"/>
+              </a:lnSpc>
+            </a:pPr>
+            <a:endParaRPr lang="en-US" sz="1866" dirty="0">
               <a:solidFill>
-                <a:prstClr val="black"/>
+                <a:srgbClr val="00B050"/>
               </a:solidFill>
+              <a:highlight>
+                <a:srgbClr val="FFFF00"/>
+              </a:highlight>
               <a:latin typeface="Candara" panose="020E0502030303020204" pitchFamily="34" charset="0"/>
             </a:endParaRPr>
           </a:p>
@@ -16346,8 +16308,8 @@
         </p:nvSpPr>
         <p:spPr>
           <a:xfrm>
-            <a:off x="1060427" y="2300619"/>
-            <a:ext cx="4875530" cy="3778536"/>
+            <a:off x="1687284" y="2217241"/>
+            <a:ext cx="4329355" cy="3778536"/>
           </a:xfrm>
           <a:prstGeom prst="rect">
             <a:avLst/>
@@ -16359,355 +16321,183 @@
           <a:bodyPr wrap="square" lIns="0" tIns="0" rIns="0" bIns="0" rtlCol="0" anchor="t"/>
           <a:lstStyle/>
           <a:p>
-            <a:pPr marL="457086" indent="-457086" defTabSz="1218895">
+            <a:pPr defTabSz="1218895">
               <a:spcAft>
                 <a:spcPts val="667"/>
               </a:spcAft>
               <a:buSzPct val="100000"/>
-              <a:buFontTx/>
-              <a:buChar char="●"/>
             </a:pPr>
             <a:r>
-              <a:rPr lang="en-US" sz="1866" b="1" dirty="0">
-                <a:solidFill>
-                  <a:srgbClr val="4ADE80"/>
-                </a:solidFill>
-                <a:latin typeface="Candara" panose="020E0502030303020204" pitchFamily="34" charset="0"/>
-                <a:ea typeface="Calibri" pitchFamily="34" charset="-122"/>
-                <a:cs typeface="Calibri" pitchFamily="34" charset="-120"/>
-              </a:rPr>
-              <a:t>MQTT → API → SQL Server → SignalR → React</a:t>
-            </a:r>
-            <a:r>
-              <a:rPr lang="en-US" sz="1866" dirty="0">
-                <a:solidFill>
-                  <a:srgbClr val="86C29A"/>
-                </a:solidFill>
-                <a:latin typeface="Candara" panose="020E0502030303020204" pitchFamily="34" charset="0"/>
-                <a:ea typeface="Calibri" pitchFamily="34" charset="-122"/>
-                <a:cs typeface="Calibri" pitchFamily="34" charset="-120"/>
-              </a:rPr>
-              <a:t> </a:t>
-            </a:r>
-            <a:r>
-              <a:rPr lang="en-US" sz="1866" dirty="0">
-                <a:solidFill>
-                  <a:prstClr val="white"/>
-                </a:solidFill>
-                <a:latin typeface="Candara" panose="020E0502030303020204" pitchFamily="34" charset="0"/>
-                <a:ea typeface="Calibri" pitchFamily="34" charset="-122"/>
-                <a:cs typeface="Calibri" pitchFamily="34" charset="-120"/>
-              </a:rPr>
-              <a:t>end to end pipeline</a:t>
+              <a:rPr lang="en-US" sz="2000" dirty="0">
+                <a:solidFill>
+                  <a:schemeClr val="bg2"/>
+                </a:solidFill>
+                <a:latin typeface="Candara" panose="020E0502030303020204" pitchFamily="34" charset="0"/>
+              </a:rPr>
+              <a:t>✓ End-to-end IoT platform</a:t>
+            </a:r>
+            <a:br>
+              <a:rPr lang="en-US" sz="2000" dirty="0">
+                <a:solidFill>
+                  <a:schemeClr val="bg2"/>
+                </a:solidFill>
+                <a:latin typeface="Candara" panose="020E0502030303020204" pitchFamily="34" charset="0"/>
+              </a:rPr>
+            </a:br>
+            <a:br>
+              <a:rPr lang="en-US" sz="2000" dirty="0">
+                <a:solidFill>
+                  <a:schemeClr val="bg2"/>
+                </a:solidFill>
+                <a:latin typeface="Candara" panose="020E0502030303020204" pitchFamily="34" charset="0"/>
+              </a:rPr>
+            </a:br>
+            <a:r>
+              <a:rPr lang="en-US" sz="2000" dirty="0">
+                <a:solidFill>
+                  <a:schemeClr val="bg2"/>
+                </a:solidFill>
+                <a:latin typeface="Candara" panose="020E0502030303020204" pitchFamily="34" charset="0"/>
+              </a:rPr>
+              <a:t>✓ 11-table database schema</a:t>
+            </a:r>
+            <a:br>
+              <a:rPr lang="en-US" sz="2000" dirty="0">
+                <a:solidFill>
+                  <a:schemeClr val="bg2"/>
+                </a:solidFill>
+                <a:latin typeface="Candara" panose="020E0502030303020204" pitchFamily="34" charset="0"/>
+              </a:rPr>
+            </a:br>
+            <a:br>
+              <a:rPr lang="en-US" sz="2000" dirty="0">
+                <a:solidFill>
+                  <a:schemeClr val="bg2"/>
+                </a:solidFill>
+                <a:latin typeface="Candara" panose="020E0502030303020204" pitchFamily="34" charset="0"/>
+              </a:rPr>
+            </a:br>
+            <a:r>
+              <a:rPr lang="en-US" sz="2000" dirty="0">
+                <a:solidFill>
+                  <a:schemeClr val="bg2"/>
+                </a:solidFill>
+                <a:latin typeface="Candara" panose="020E0502030303020204" pitchFamily="34" charset="0"/>
+              </a:rPr>
+              <a:t>✓ ASP.NET Core API &amp; JWT security</a:t>
+            </a:r>
+            <a:br>
+              <a:rPr lang="en-US" sz="2000" dirty="0">
+                <a:solidFill>
+                  <a:schemeClr val="bg2"/>
+                </a:solidFill>
+                <a:latin typeface="Candara" panose="020E0502030303020204" pitchFamily="34" charset="0"/>
+              </a:rPr>
+            </a:br>
+            <a:br>
+              <a:rPr lang="en-US" sz="2000" dirty="0">
+                <a:solidFill>
+                  <a:schemeClr val="bg2"/>
+                </a:solidFill>
+                <a:latin typeface="Candara" panose="020E0502030303020204" pitchFamily="34" charset="0"/>
+              </a:rPr>
+            </a:br>
+            <a:r>
+              <a:rPr lang="en-US" sz="2000" dirty="0">
+                <a:solidFill>
+                  <a:schemeClr val="bg2"/>
+                </a:solidFill>
+                <a:latin typeface="Candara" panose="020E0502030303020204" pitchFamily="34" charset="0"/>
+              </a:rPr>
+              <a:t>✓ Real-time monitoring with </a:t>
+            </a:r>
+            <a:r>
+              <a:rPr lang="en-US" sz="2000" dirty="0" err="1">
+                <a:solidFill>
+                  <a:schemeClr val="bg2"/>
+                </a:solidFill>
+                <a:latin typeface="Candara" panose="020E0502030303020204" pitchFamily="34" charset="0"/>
+              </a:rPr>
+              <a:t>SignalR</a:t>
+            </a:r>
+            <a:br>
+              <a:rPr lang="en-US" sz="2000" dirty="0">
+                <a:solidFill>
+                  <a:schemeClr val="bg2"/>
+                </a:solidFill>
+                <a:latin typeface="Candara" panose="020E0502030303020204" pitchFamily="34" charset="0"/>
+              </a:rPr>
+            </a:br>
+            <a:br>
+              <a:rPr lang="en-US" sz="2000" dirty="0">
+                <a:solidFill>
+                  <a:schemeClr val="bg2"/>
+                </a:solidFill>
+                <a:latin typeface="Candara" panose="020E0502030303020204" pitchFamily="34" charset="0"/>
+              </a:rPr>
+            </a:br>
+            <a:r>
+              <a:rPr lang="en-US" sz="2000" dirty="0">
+                <a:solidFill>
+                  <a:schemeClr val="bg2"/>
+                </a:solidFill>
+                <a:latin typeface="Candara" panose="020E0502030303020204" pitchFamily="34" charset="0"/>
+              </a:rPr>
+              <a:t>✓ React dashboard &amp; device control</a:t>
+            </a:r>
+            <a:br>
+              <a:rPr lang="en-US" sz="2000" dirty="0">
+                <a:solidFill>
+                  <a:schemeClr val="bg2"/>
+                </a:solidFill>
+                <a:latin typeface="Candara" panose="020E0502030303020204" pitchFamily="34" charset="0"/>
+              </a:rPr>
+            </a:br>
+            <a:br>
+              <a:rPr lang="en-US" sz="2000" dirty="0">
+                <a:solidFill>
+                  <a:schemeClr val="bg2"/>
+                </a:solidFill>
+                <a:latin typeface="Candara" panose="020E0502030303020204" pitchFamily="34" charset="0"/>
+              </a:rPr>
+            </a:br>
+            <a:r>
+              <a:rPr lang="en-US" sz="2000" dirty="0">
+                <a:solidFill>
+                  <a:schemeClr val="bg2"/>
+                </a:solidFill>
+                <a:latin typeface="Candara" panose="020E0502030303020204" pitchFamily="34" charset="0"/>
+              </a:rPr>
+              <a:t>✓ Edge device integration (Arduino)</a:t>
+            </a:r>
+            <a:br>
+              <a:rPr lang="en-US" sz="2000" dirty="0">
+                <a:solidFill>
+                  <a:schemeClr val="bg2"/>
+                </a:solidFill>
+                <a:latin typeface="Candara" panose="020E0502030303020204" pitchFamily="34" charset="0"/>
+              </a:rPr>
+            </a:br>
+            <a:br>
+              <a:rPr lang="en-US" sz="2000" dirty="0">
+                <a:solidFill>
+                  <a:schemeClr val="bg2"/>
+                </a:solidFill>
+                <a:latin typeface="Candara" panose="020E0502030303020204" pitchFamily="34" charset="0"/>
+              </a:rPr>
+            </a:br>
+            <a:r>
+              <a:rPr lang="en-US" sz="2000" dirty="0">
+                <a:solidFill>
+                  <a:schemeClr val="bg2"/>
+                </a:solidFill>
+                <a:latin typeface="Candara" panose="020E0502030303020204" pitchFamily="34" charset="0"/>
+              </a:rPr>
+              <a:t>✓ Azure cloud deployment</a:t>
             </a:r>
             <a:endParaRPr lang="en-US" sz="1866" dirty="0">
               <a:solidFill>
-                <a:prstClr val="white"/>
-              </a:solidFill>
-              <a:latin typeface="Candara" panose="020E0502030303020204" pitchFamily="34" charset="0"/>
-            </a:endParaRPr>
-          </a:p>
-          <a:p>
-            <a:pPr marL="457086" indent="-457086" defTabSz="1218895">
-              <a:spcAft>
-                <a:spcPts val="667"/>
-              </a:spcAft>
-              <a:buSzPct val="100000"/>
-              <a:buFontTx/>
-              <a:buChar char="●"/>
-            </a:pPr>
-            <a:r>
-              <a:rPr lang="en-US" sz="1866" b="1" dirty="0">
-                <a:solidFill>
-                  <a:srgbClr val="4ADE80"/>
-                </a:solidFill>
-                <a:latin typeface="Candara" panose="020E0502030303020204" pitchFamily="34" charset="0"/>
-                <a:ea typeface="Calibri" pitchFamily="34" charset="-122"/>
-                <a:cs typeface="Calibri" pitchFamily="34" charset="-120"/>
-              </a:rPr>
-              <a:t>11-table</a:t>
-            </a:r>
-            <a:r>
-              <a:rPr lang="en-US" sz="1866" dirty="0">
-                <a:solidFill>
-                  <a:srgbClr val="86C29A"/>
-                </a:solidFill>
-                <a:latin typeface="Candara" panose="020E0502030303020204" pitchFamily="34" charset="0"/>
-                <a:ea typeface="Calibri" pitchFamily="34" charset="-122"/>
-                <a:cs typeface="Calibri" pitchFamily="34" charset="-120"/>
-              </a:rPr>
-              <a:t> </a:t>
-            </a:r>
-            <a:r>
-              <a:rPr lang="en-US" sz="1866" dirty="0">
-                <a:solidFill>
-                  <a:prstClr val="white"/>
-                </a:solidFill>
-                <a:latin typeface="Candara" panose="020E0502030303020204" pitchFamily="34" charset="0"/>
-                <a:ea typeface="Calibri" pitchFamily="34" charset="-122"/>
-                <a:cs typeface="Calibri" pitchFamily="34" charset="-120"/>
-              </a:rPr>
-              <a:t>SQL Server schema with EF </a:t>
-            </a:r>
-            <a:endParaRPr lang="en-US" sz="1866" dirty="0">
-              <a:solidFill>
-                <a:prstClr val="white"/>
-              </a:solidFill>
-              <a:latin typeface="Candara" panose="020E0502030303020204" pitchFamily="34" charset="0"/>
-            </a:endParaRPr>
-          </a:p>
-          <a:p>
-            <a:pPr marL="457086" indent="-457086" defTabSz="1218895">
-              <a:spcAft>
-                <a:spcPts val="667"/>
-              </a:spcAft>
-              <a:buSzPct val="100000"/>
-              <a:buFontTx/>
-              <a:buChar char="●"/>
-            </a:pPr>
-            <a:r>
-              <a:rPr lang="en-US" sz="1866" b="1" dirty="0">
-                <a:solidFill>
-                  <a:srgbClr val="4ADE80"/>
-                </a:solidFill>
-                <a:latin typeface="Candara" panose="020E0502030303020204" pitchFamily="34" charset="0"/>
-                <a:ea typeface="Calibri" pitchFamily="34" charset="-122"/>
-                <a:cs typeface="Calibri" pitchFamily="34" charset="-120"/>
-              </a:rPr>
-              <a:t>ASP.NET Core 8</a:t>
-            </a:r>
-            <a:r>
-              <a:rPr lang="en-US" sz="1866" dirty="0">
-                <a:solidFill>
-                  <a:srgbClr val="86C29A"/>
-                </a:solidFill>
-                <a:latin typeface="Candara" panose="020E0502030303020204" pitchFamily="34" charset="0"/>
-                <a:ea typeface="Calibri" pitchFamily="34" charset="-122"/>
-                <a:cs typeface="Calibri" pitchFamily="34" charset="-120"/>
-              </a:rPr>
-              <a:t> </a:t>
-            </a:r>
-            <a:r>
-              <a:rPr lang="en-US" sz="1866" dirty="0">
-                <a:solidFill>
-                  <a:schemeClr val="bg1"/>
-                </a:solidFill>
-                <a:latin typeface="Candara" panose="020E0502030303020204" pitchFamily="34" charset="0"/>
-                <a:ea typeface="Calibri" pitchFamily="34" charset="-122"/>
-                <a:cs typeface="Calibri" pitchFamily="34" charset="-120"/>
-              </a:rPr>
-              <a:t>API: REST, JWT roles</a:t>
-            </a:r>
-            <a:endParaRPr lang="en-US" sz="1866" dirty="0">
-              <a:solidFill>
-                <a:schemeClr val="bg1"/>
-              </a:solidFill>
-              <a:latin typeface="Candara" panose="020E0502030303020204" pitchFamily="34" charset="0"/>
-            </a:endParaRPr>
-          </a:p>
-          <a:p>
-            <a:pPr marL="457086" indent="-457086" defTabSz="1218895">
-              <a:spcAft>
-                <a:spcPts val="667"/>
-              </a:spcAft>
-              <a:buSzPct val="100000"/>
-              <a:buFontTx/>
-              <a:buChar char="●"/>
-            </a:pPr>
-            <a:r>
-              <a:rPr lang="en-US" sz="1866" b="1" dirty="0">
-                <a:solidFill>
-                  <a:srgbClr val="4ADE80"/>
-                </a:solidFill>
-                <a:latin typeface="Candara" panose="020E0502030303020204" pitchFamily="34" charset="0"/>
-                <a:ea typeface="Calibri" pitchFamily="34" charset="-122"/>
-                <a:cs typeface="Calibri" pitchFamily="34" charset="-120"/>
-              </a:rPr>
-              <a:t>SignalR</a:t>
-            </a:r>
-            <a:r>
-              <a:rPr lang="en-US" sz="1866" dirty="0">
-                <a:solidFill>
-                  <a:srgbClr val="86C29A"/>
-                </a:solidFill>
-                <a:latin typeface="Candara" panose="020E0502030303020204" pitchFamily="34" charset="0"/>
-                <a:ea typeface="Calibri" pitchFamily="34" charset="-122"/>
-                <a:cs typeface="Calibri" pitchFamily="34" charset="-120"/>
-              </a:rPr>
-              <a:t> </a:t>
-            </a:r>
-            <a:r>
-              <a:rPr lang="en-US" sz="1866" dirty="0">
-                <a:solidFill>
-                  <a:schemeClr val="bg1"/>
-                </a:solidFill>
-                <a:latin typeface="Candara" panose="020E0502030303020204" pitchFamily="34" charset="0"/>
-                <a:ea typeface="Calibri" pitchFamily="34" charset="-122"/>
-                <a:cs typeface="Calibri" pitchFamily="34" charset="-120"/>
-              </a:rPr>
-              <a:t>live readings, alerts, device status</a:t>
-            </a:r>
-            <a:endParaRPr lang="en-US" sz="1866" dirty="0">
-              <a:solidFill>
-                <a:schemeClr val="bg1"/>
-              </a:solidFill>
-              <a:latin typeface="Candara" panose="020E0502030303020204" pitchFamily="34" charset="0"/>
-            </a:endParaRPr>
-          </a:p>
-          <a:p>
-            <a:pPr marL="457086" indent="-457086" defTabSz="1218895">
-              <a:spcAft>
-                <a:spcPts val="667"/>
-              </a:spcAft>
-              <a:buSzPct val="100000"/>
-              <a:buFontTx/>
-              <a:buChar char="●"/>
-            </a:pPr>
-            <a:r>
-              <a:rPr lang="en-US" sz="1866" b="1" dirty="0">
-                <a:solidFill>
-                  <a:srgbClr val="4ADE80"/>
-                </a:solidFill>
-                <a:latin typeface="Candara" panose="020E0502030303020204" pitchFamily="34" charset="0"/>
-                <a:ea typeface="Calibri" pitchFamily="34" charset="-122"/>
-                <a:cs typeface="Calibri" pitchFamily="34" charset="-120"/>
-              </a:rPr>
-              <a:t>React UI</a:t>
-            </a:r>
-            <a:r>
-              <a:rPr lang="en-US" sz="1866" dirty="0">
-                <a:solidFill>
-                  <a:schemeClr val="bg1"/>
-                </a:solidFill>
-                <a:latin typeface="Candara" panose="020E0502030303020204" pitchFamily="34" charset="0"/>
-                <a:ea typeface="Calibri" pitchFamily="34" charset="-122"/>
-                <a:cs typeface="Calibri" pitchFamily="34" charset="-120"/>
-              </a:rPr>
-              <a:t>: dashboards, charts, gauges, actuators, command history</a:t>
-            </a:r>
-            <a:endParaRPr lang="en-US" sz="1866" dirty="0">
-              <a:solidFill>
-                <a:schemeClr val="bg1"/>
-              </a:solidFill>
-              <a:latin typeface="Candara" panose="020E0502030303020204" pitchFamily="34" charset="0"/>
-            </a:endParaRPr>
-          </a:p>
-          <a:p>
-            <a:pPr marL="457086" indent="-457086" defTabSz="1218895">
-              <a:spcAft>
-                <a:spcPts val="667"/>
-              </a:spcAft>
-              <a:buSzPct val="100000"/>
-              <a:buFontTx/>
-              <a:buChar char="●"/>
-            </a:pPr>
-            <a:r>
-              <a:rPr lang="en-US" sz="1866" b="1" dirty="0">
-                <a:solidFill>
-                  <a:srgbClr val="4ADE80"/>
-                </a:solidFill>
-                <a:latin typeface="Candara" panose="020E0502030303020204" pitchFamily="34" charset="0"/>
-                <a:ea typeface="Calibri" pitchFamily="34" charset="-122"/>
-                <a:cs typeface="Calibri" pitchFamily="34" charset="-120"/>
-              </a:rPr>
-              <a:t>Arduino</a:t>
-            </a:r>
-            <a:r>
-              <a:rPr lang="en-US" sz="1866" dirty="0">
-                <a:solidFill>
-                  <a:srgbClr val="86C29A"/>
-                </a:solidFill>
-                <a:latin typeface="Candara" panose="020E0502030303020204" pitchFamily="34" charset="0"/>
-                <a:ea typeface="Calibri" pitchFamily="34" charset="-122"/>
-                <a:cs typeface="Calibri" pitchFamily="34" charset="-120"/>
-              </a:rPr>
-              <a:t> </a:t>
-            </a:r>
-            <a:r>
-              <a:rPr lang="en-US" sz="1866" dirty="0">
-                <a:solidFill>
-                  <a:schemeClr val="bg1"/>
-                </a:solidFill>
-                <a:latin typeface="Candara" panose="020E0502030303020204" pitchFamily="34" charset="0"/>
-                <a:ea typeface="Calibri" pitchFamily="34" charset="-122"/>
-                <a:cs typeface="Calibri" pitchFamily="34" charset="-120"/>
-              </a:rPr>
-              <a:t>firmware (local/cloud MQTT) with live demo</a:t>
-            </a:r>
-            <a:endParaRPr lang="en-US" sz="1866" dirty="0">
-              <a:solidFill>
-                <a:schemeClr val="bg1"/>
-              </a:solidFill>
-              <a:latin typeface="Candara" panose="020E0502030303020204" pitchFamily="34" charset="0"/>
-            </a:endParaRPr>
-          </a:p>
-          <a:p>
-            <a:pPr marL="457086" indent="-457086" defTabSz="1218895">
-              <a:spcAft>
-                <a:spcPts val="667"/>
-              </a:spcAft>
-              <a:buSzPct val="100000"/>
-              <a:buFontTx/>
-              <a:buChar char="●"/>
-            </a:pPr>
-            <a:r>
-              <a:rPr lang="en-US" sz="1866" b="1" dirty="0">
-                <a:solidFill>
-                  <a:srgbClr val="4ADE80"/>
-                </a:solidFill>
-                <a:latin typeface="Candara" panose="020E0502030303020204" pitchFamily="34" charset="0"/>
-                <a:ea typeface="Calibri" pitchFamily="34" charset="-122"/>
-                <a:cs typeface="Calibri" pitchFamily="34" charset="-120"/>
-              </a:rPr>
-              <a:t>Git/GitHub</a:t>
-            </a:r>
-            <a:r>
-              <a:rPr lang="en-US" sz="1866" dirty="0">
-                <a:solidFill>
-                  <a:srgbClr val="86C29A"/>
-                </a:solidFill>
-                <a:latin typeface="Candara" panose="020E0502030303020204" pitchFamily="34" charset="0"/>
-                <a:ea typeface="Calibri" pitchFamily="34" charset="-122"/>
-                <a:cs typeface="Calibri" pitchFamily="34" charset="-120"/>
-              </a:rPr>
-              <a:t> and </a:t>
-            </a:r>
-            <a:r>
-              <a:rPr lang="en-US" sz="1866" b="1" dirty="0">
-                <a:solidFill>
-                  <a:srgbClr val="4ADE80"/>
-                </a:solidFill>
-                <a:latin typeface="Candara" panose="020E0502030303020204" pitchFamily="34" charset="0"/>
-                <a:ea typeface="Calibri" pitchFamily="34" charset="-122"/>
-                <a:cs typeface="Calibri" pitchFamily="34" charset="-120"/>
-              </a:rPr>
-              <a:t>Azure</a:t>
-            </a:r>
-            <a:r>
-              <a:rPr lang="en-US" sz="1866" dirty="0">
-                <a:solidFill>
-                  <a:srgbClr val="86C29A"/>
-                </a:solidFill>
-                <a:latin typeface="Candara" panose="020E0502030303020204" pitchFamily="34" charset="0"/>
-                <a:ea typeface="Calibri" pitchFamily="34" charset="-122"/>
-                <a:cs typeface="Calibri" pitchFamily="34" charset="-120"/>
-              </a:rPr>
-              <a:t> </a:t>
-            </a:r>
-            <a:r>
-              <a:rPr lang="en-US" sz="1866" dirty="0">
-                <a:solidFill>
-                  <a:schemeClr val="bg1"/>
-                </a:solidFill>
-                <a:latin typeface="Candara" panose="020E0502030303020204" pitchFamily="34" charset="0"/>
-                <a:ea typeface="Calibri" pitchFamily="34" charset="-122"/>
-                <a:cs typeface="Calibri" pitchFamily="34" charset="-120"/>
-              </a:rPr>
-              <a:t>deployment workflows</a:t>
-            </a:r>
-            <a:endParaRPr lang="en-US" sz="1866" dirty="0">
-              <a:solidFill>
-                <a:schemeClr val="bg1"/>
+                <a:schemeClr val="bg2"/>
               </a:solidFill>
               <a:latin typeface="Candara" panose="020E0502030303020204" pitchFamily="34" charset="0"/>
             </a:endParaRPr>
@@ -16788,8 +16578,8 @@
         </p:nvSpPr>
         <p:spPr>
           <a:xfrm>
-            <a:off x="6813553" y="2285288"/>
-            <a:ext cx="4400166" cy="3778536"/>
+            <a:off x="7649120" y="2716472"/>
+            <a:ext cx="4039963" cy="3778536"/>
           </a:xfrm>
           <a:prstGeom prst="rect">
             <a:avLst/>
@@ -16801,254 +16591,136 @@
           <a:bodyPr wrap="square" lIns="0" tIns="0" rIns="0" bIns="0" rtlCol="0" anchor="t"/>
           <a:lstStyle/>
           <a:p>
-            <a:pPr marL="457086" indent="-457086" defTabSz="1218895">
+            <a:pPr marL="342900" indent="-342900" defTabSz="1218895">
+              <a:lnSpc>
+                <a:spcPct val="150000"/>
+              </a:lnSpc>
               <a:spcAft>
                 <a:spcPts val="1066"/>
               </a:spcAft>
               <a:buSzPct val="100000"/>
-              <a:buFontTx/>
-              <a:buChar char="●"/>
+              <a:buFont typeface="Wingdings" panose="05000000000000000000" pitchFamily="2" charset="2"/>
+              <a:buChar char="§"/>
             </a:pPr>
             <a:r>
-              <a:rPr lang="en-US" sz="1866" dirty="0">
-                <a:solidFill>
-                  <a:srgbClr val="86C29A"/>
-                </a:solidFill>
-                <a:latin typeface="Candara" panose="020E0502030303020204" pitchFamily="34" charset="0"/>
-                <a:ea typeface="Calibri" pitchFamily="34" charset="-122"/>
-                <a:cs typeface="Calibri" pitchFamily="34" charset="-120"/>
-              </a:rPr>
-              <a:t>Automated </a:t>
-            </a:r>
-            <a:r>
-              <a:rPr lang="en-US" sz="1866" b="1" dirty="0">
-                <a:solidFill>
-                  <a:srgbClr val="4ADE80"/>
-                </a:solidFill>
-                <a:latin typeface="Candara" panose="020E0502030303020204" pitchFamily="34" charset="0"/>
-                <a:ea typeface="Calibri" pitchFamily="34" charset="-122"/>
-                <a:cs typeface="Calibri" pitchFamily="34" charset="-120"/>
-              </a:rPr>
-              <a:t>data retention / archiving</a:t>
-            </a:r>
-            <a:r>
-              <a:rPr lang="en-US" sz="1866" dirty="0">
-                <a:solidFill>
-                  <a:srgbClr val="86C29A"/>
-                </a:solidFill>
-                <a:latin typeface="Candara" panose="020E0502030303020204" pitchFamily="34" charset="0"/>
-                <a:ea typeface="Calibri" pitchFamily="34" charset="-122"/>
-                <a:cs typeface="Calibri" pitchFamily="34" charset="-120"/>
-              </a:rPr>
-              <a:t> for growing time-series data</a:t>
-            </a:r>
-            <a:endParaRPr lang="en-US" sz="1866" dirty="0">
-              <a:solidFill>
-                <a:prstClr val="black"/>
-              </a:solidFill>
-              <a:latin typeface="Candara" panose="020E0502030303020204" pitchFamily="34" charset="0"/>
-            </a:endParaRPr>
-          </a:p>
-          <a:p>
-            <a:pPr marL="457086" indent="-457086" defTabSz="1218895">
+              <a:rPr lang="en-US" sz="2000" dirty="0">
+                <a:solidFill>
+                  <a:schemeClr val="bg2"/>
+                </a:solidFill>
+                <a:latin typeface="Candara" panose="020E0502030303020204" pitchFamily="34" charset="0"/>
+              </a:rPr>
+              <a:t>Data retention &amp; archiving</a:t>
+            </a:r>
+          </a:p>
+          <a:p>
+            <a:pPr marL="342900" indent="-342900" defTabSz="1218895">
+              <a:lnSpc>
+                <a:spcPct val="150000"/>
+              </a:lnSpc>
               <a:spcAft>
                 <a:spcPts val="1066"/>
               </a:spcAft>
               <a:buSzPct val="100000"/>
-              <a:buFontTx/>
-              <a:buChar char="●"/>
+              <a:buFont typeface="Wingdings" panose="05000000000000000000" pitchFamily="2" charset="2"/>
+              <a:buChar char="§"/>
             </a:pPr>
             <a:r>
-              <a:rPr lang="en-US" sz="1866" b="1" dirty="0">
-                <a:solidFill>
-                  <a:srgbClr val="4ADE80"/>
-                </a:solidFill>
-                <a:latin typeface="Candara" panose="020E0502030303020204" pitchFamily="34" charset="0"/>
-                <a:ea typeface="Calibri" pitchFamily="34" charset="-122"/>
-                <a:cs typeface="Calibri" pitchFamily="34" charset="-120"/>
-              </a:rPr>
-              <a:t>Multi-tenant</a:t>
-            </a:r>
-            <a:r>
-              <a:rPr lang="en-US" sz="1866" dirty="0">
-                <a:solidFill>
-                  <a:srgbClr val="86C29A"/>
-                </a:solidFill>
-                <a:latin typeface="Candara" panose="020E0502030303020204" pitchFamily="34" charset="0"/>
-                <a:ea typeface="Calibri" pitchFamily="34" charset="-122"/>
-                <a:cs typeface="Calibri" pitchFamily="34" charset="-120"/>
-              </a:rPr>
-              <a:t> or multi-site support</a:t>
-            </a:r>
-            <a:endParaRPr lang="en-US" sz="1866" dirty="0">
-              <a:solidFill>
-                <a:prstClr val="black"/>
-              </a:solidFill>
-              <a:latin typeface="Candara" panose="020E0502030303020204" pitchFamily="34" charset="0"/>
-            </a:endParaRPr>
-          </a:p>
-          <a:p>
-            <a:pPr marL="457086" indent="-457086" defTabSz="1218895">
+              <a:rPr lang="en-US" sz="2000" dirty="0">
+                <a:solidFill>
+                  <a:schemeClr val="bg2"/>
+                </a:solidFill>
+                <a:latin typeface="Candara" panose="020E0502030303020204" pitchFamily="34" charset="0"/>
+              </a:rPr>
+              <a:t>Multi-tenant support</a:t>
+            </a:r>
+          </a:p>
+          <a:p>
+            <a:pPr marL="342900" indent="-342900" defTabSz="1218895">
+              <a:lnSpc>
+                <a:spcPct val="150000"/>
+              </a:lnSpc>
               <a:spcAft>
                 <a:spcPts val="1066"/>
               </a:spcAft>
               <a:buSzPct val="100000"/>
-              <a:buFontTx/>
-              <a:buChar char="●"/>
+              <a:buFont typeface="Wingdings" panose="05000000000000000000" pitchFamily="2" charset="2"/>
+              <a:buChar char="§"/>
             </a:pPr>
             <a:r>
-              <a:rPr lang="en-US" sz="1866" b="1" dirty="0">
-                <a:solidFill>
-                  <a:srgbClr val="4ADE80"/>
-                </a:solidFill>
-                <a:latin typeface="Candara" panose="020E0502030303020204" pitchFamily="34" charset="0"/>
-                <a:ea typeface="Calibri" pitchFamily="34" charset="-122"/>
-                <a:cs typeface="Calibri" pitchFamily="34" charset="-120"/>
-              </a:rPr>
-              <a:t>Mobile</a:t>
-            </a:r>
-            <a:r>
-              <a:rPr lang="en-US" sz="1866" dirty="0">
-                <a:solidFill>
-                  <a:srgbClr val="86C29A"/>
-                </a:solidFill>
-                <a:latin typeface="Candara" panose="020E0502030303020204" pitchFamily="34" charset="0"/>
-                <a:ea typeface="Calibri" pitchFamily="34" charset="-122"/>
-                <a:cs typeface="Calibri" pitchFamily="34" charset="-120"/>
-              </a:rPr>
-              <a:t> app for field operators</a:t>
-            </a:r>
-            <a:endParaRPr lang="en-US" sz="1866" dirty="0">
-              <a:solidFill>
-                <a:prstClr val="black"/>
-              </a:solidFill>
-              <a:latin typeface="Candara" panose="020E0502030303020204" pitchFamily="34" charset="0"/>
-            </a:endParaRPr>
-          </a:p>
-          <a:p>
-            <a:pPr marL="457086" indent="-457086" defTabSz="1218895">
+              <a:rPr lang="en-US" sz="2000" dirty="0">
+                <a:solidFill>
+                  <a:schemeClr val="bg2"/>
+                </a:solidFill>
+                <a:latin typeface="Candara" panose="020E0502030303020204" pitchFamily="34" charset="0"/>
+              </a:rPr>
+              <a:t>Mobile application</a:t>
+            </a:r>
+          </a:p>
+          <a:p>
+            <a:pPr marL="342900" indent="-342900" defTabSz="1218895">
+              <a:lnSpc>
+                <a:spcPct val="150000"/>
+              </a:lnSpc>
               <a:spcAft>
                 <a:spcPts val="1066"/>
               </a:spcAft>
               <a:buSzPct val="100000"/>
-              <a:buFontTx/>
-              <a:buChar char="●"/>
+              <a:buFont typeface="Wingdings" panose="05000000000000000000" pitchFamily="2" charset="2"/>
+              <a:buChar char="§"/>
             </a:pPr>
             <a:r>
-              <a:rPr lang="en-US" sz="1866" b="1" dirty="0">
-                <a:solidFill>
-                  <a:srgbClr val="4ADE80"/>
-                </a:solidFill>
-                <a:latin typeface="Candara" panose="020E0502030303020204" pitchFamily="34" charset="0"/>
-                <a:ea typeface="Calibri" pitchFamily="34" charset="-122"/>
-                <a:cs typeface="Calibri" pitchFamily="34" charset="-120"/>
-              </a:rPr>
-              <a:t>ML</a:t>
-            </a:r>
-            <a:r>
-              <a:rPr lang="en-US" sz="1866" dirty="0">
-                <a:solidFill>
-                  <a:srgbClr val="86C29A"/>
-                </a:solidFill>
-                <a:latin typeface="Candara" panose="020E0502030303020204" pitchFamily="34" charset="0"/>
-                <a:ea typeface="Calibri" pitchFamily="34" charset="-122"/>
-                <a:cs typeface="Calibri" pitchFamily="34" charset="-120"/>
-              </a:rPr>
-              <a:t> anomaly detection and predictive maintenance</a:t>
-            </a:r>
-            <a:endParaRPr lang="en-US" sz="1866" dirty="0">
-              <a:solidFill>
-                <a:prstClr val="black"/>
-              </a:solidFill>
-              <a:latin typeface="Candara" panose="020E0502030303020204" pitchFamily="34" charset="0"/>
-            </a:endParaRPr>
-          </a:p>
-          <a:p>
-            <a:pPr marL="457086" indent="-457086" defTabSz="1218895">
+              <a:rPr lang="en-US" sz="2000" dirty="0">
+                <a:solidFill>
+                  <a:schemeClr val="bg2"/>
+                </a:solidFill>
+                <a:latin typeface="Candara" panose="020E0502030303020204" pitchFamily="34" charset="0"/>
+              </a:rPr>
+              <a:t>AI anomaly detection</a:t>
+            </a:r>
+          </a:p>
+          <a:p>
+            <a:pPr marL="342900" indent="-342900" defTabSz="1218895">
+              <a:lnSpc>
+                <a:spcPct val="150000"/>
+              </a:lnSpc>
               <a:spcAft>
                 <a:spcPts val="1066"/>
               </a:spcAft>
               <a:buSzPct val="100000"/>
-              <a:buFontTx/>
-              <a:buChar char="●"/>
+              <a:buFont typeface="Wingdings" panose="05000000000000000000" pitchFamily="2" charset="2"/>
+              <a:buChar char="§"/>
             </a:pPr>
             <a:r>
-              <a:rPr lang="en-US" sz="1866" dirty="0">
-                <a:solidFill>
-                  <a:srgbClr val="86C29A"/>
-                </a:solidFill>
-                <a:latin typeface="Candara" panose="020E0502030303020204" pitchFamily="34" charset="0"/>
-                <a:ea typeface="Calibri" pitchFamily="34" charset="-122"/>
-                <a:cs typeface="Calibri" pitchFamily="34" charset="-120"/>
-              </a:rPr>
-              <a:t>Broader </a:t>
-            </a:r>
-            <a:r>
-              <a:rPr lang="en-US" sz="1866" b="1" dirty="0">
-                <a:solidFill>
-                  <a:srgbClr val="4ADE80"/>
-                </a:solidFill>
-                <a:latin typeface="Candara" panose="020E0502030303020204" pitchFamily="34" charset="0"/>
-                <a:ea typeface="Calibri" pitchFamily="34" charset="-122"/>
-                <a:cs typeface="Calibri" pitchFamily="34" charset="-120"/>
-              </a:rPr>
-              <a:t>edge integrations</a:t>
-            </a:r>
-            <a:r>
-              <a:rPr lang="en-US" sz="1866" dirty="0">
-                <a:solidFill>
-                  <a:srgbClr val="86C29A"/>
-                </a:solidFill>
-                <a:latin typeface="Candara" panose="020E0502030303020204" pitchFamily="34" charset="0"/>
-                <a:ea typeface="Calibri" pitchFamily="34" charset="-122"/>
-                <a:cs typeface="Calibri" pitchFamily="34" charset="-120"/>
-              </a:rPr>
-              <a:t> (ESP32, Raspberry Pi)</a:t>
-            </a:r>
-            <a:endParaRPr lang="en-US" sz="1866" dirty="0">
-              <a:solidFill>
-                <a:prstClr val="black"/>
-              </a:solidFill>
-              <a:latin typeface="Candara" panose="020E0502030303020204" pitchFamily="34" charset="0"/>
-            </a:endParaRPr>
-          </a:p>
-          <a:p>
-            <a:pPr marL="457086" indent="-457086" defTabSz="1218895">
+              <a:rPr lang="en-US" sz="2000" dirty="0">
+                <a:solidFill>
+                  <a:schemeClr val="bg2"/>
+                </a:solidFill>
+                <a:latin typeface="Candara" panose="020E0502030303020204" pitchFamily="34" charset="0"/>
+              </a:rPr>
+              <a:t>More edge device integrations</a:t>
+            </a:r>
+          </a:p>
+          <a:p>
+            <a:pPr marL="342900" indent="-342900" defTabSz="1218895">
+              <a:lnSpc>
+                <a:spcPct val="150000"/>
+              </a:lnSpc>
               <a:spcAft>
                 <a:spcPts val="1066"/>
               </a:spcAft>
               <a:buSzPct val="100000"/>
-              <a:buFontTx/>
-              <a:buChar char="●"/>
+              <a:buFont typeface="Wingdings" panose="05000000000000000000" pitchFamily="2" charset="2"/>
+              <a:buChar char="§"/>
             </a:pPr>
             <a:r>
-              <a:rPr lang="en-US" sz="1866" b="1" dirty="0">
-                <a:solidFill>
-                  <a:srgbClr val="4ADE80"/>
-                </a:solidFill>
-                <a:latin typeface="Candara" panose="020E0502030303020204" pitchFamily="34" charset="0"/>
-                <a:ea typeface="Calibri" pitchFamily="34" charset="-122"/>
-                <a:cs typeface="Calibri" pitchFamily="34" charset="-120"/>
-              </a:rPr>
-              <a:t>Production hardening</a:t>
-            </a:r>
-            <a:r>
-              <a:rPr lang="en-US" sz="1866" dirty="0">
-                <a:solidFill>
-                  <a:srgbClr val="86C29A"/>
-                </a:solidFill>
-                <a:latin typeface="Candara" panose="020E0502030303020204" pitchFamily="34" charset="0"/>
-                <a:ea typeface="Calibri" pitchFamily="34" charset="-122"/>
-                <a:cs typeface="Calibri" pitchFamily="34" charset="-120"/>
-              </a:rPr>
-              <a:t>: monitoring, scaling, and operations</a:t>
-            </a:r>
-            <a:endParaRPr lang="en-US" sz="1866" dirty="0">
-              <a:solidFill>
-                <a:prstClr val="black"/>
-              </a:solidFill>
-              <a:latin typeface="Candara" panose="020E0502030303020204" pitchFamily="34" charset="0"/>
-            </a:endParaRPr>
+              <a:rPr lang="en-US" sz="2000" dirty="0">
+                <a:solidFill>
+                  <a:schemeClr val="bg2"/>
+                </a:solidFill>
+                <a:latin typeface="Candara" panose="020E0502030303020204" pitchFamily="34" charset="0"/>
+              </a:rPr>
+              <a:t>Production scalability</a:t>
+            </a:r>
           </a:p>
         </p:txBody>
       </p:sp>
@@ -17105,7 +16777,7 @@
         </p:nvSpPr>
         <p:spPr>
           <a:xfrm>
-            <a:off x="2875634" y="4858141"/>
+            <a:off x="1727200" y="4705741"/>
             <a:ext cx="4556117" cy="670385"/>
           </a:xfrm>
           <a:prstGeom prst="rect">
@@ -17369,8 +17041,8 @@
         </p:nvSpPr>
         <p:spPr>
           <a:xfrm>
-            <a:off x="2875634" y="2147498"/>
-            <a:ext cx="6702550" cy="1631780"/>
+            <a:off x="1727200" y="2098163"/>
+            <a:ext cx="9225279" cy="1528957"/>
           </a:xfrm>
           <a:prstGeom prst="rect">
             <a:avLst/>
@@ -17394,7 +17066,7 @@
             </a:pPr>
             <a:endParaRPr lang="en-US" sz="1600" dirty="0">
               <a:solidFill>
-                <a:schemeClr val="bg1"/>
+                <a:schemeClr val="bg2"/>
               </a:solidFill>
               <a:latin typeface="Candara" panose="020E0502030303020204" pitchFamily="34" charset="0"/>
             </a:endParaRPr>
@@ -17409,18 +17081,18 @@
             <a:r>
               <a:rPr lang="en-US" sz="1600" dirty="0">
                 <a:solidFill>
-                  <a:schemeClr val="bg1"/>
-                </a:solidFill>
-                <a:latin typeface="Candara" panose="020E0502030303020204" pitchFamily="34" charset="0"/>
-              </a:rPr>
-              <a:t>I would like to take this opportunity to express my sincere gratitude to the instructors especially Naser Chowdhury who guided and supported us throughout the program over the past two years, to RTC School for giving me the opportunity to achieve my first educational milestone in the United States, and to my colleagues who worked hard to balance work and study at the same time so that we could achieve this goal together.</a:t>
+                  <a:schemeClr val="bg2"/>
+                </a:solidFill>
+                <a:latin typeface="Candara" panose="020E0502030303020204" pitchFamily="34" charset="0"/>
+              </a:rPr>
+              <a:t>I would like to express my sincere gratitude to the instructors, especially Naser Chowdhury, for their guidance and support throughout the past two years. I would also like to thank RTC School for giving me the opportunity to achieve my first educational milestone in the United States, and my classmates and colleagues for their hard work, dedication, and support as we balanced work and study together to reach this achievement.</a:t>
             </a:r>
             <a:endParaRPr kumimoji="0" lang="en-US" sz="1600" b="0" u="none" strike="noStrike" kern="1200" cap="none" spc="0" normalizeH="0" baseline="0" noProof="0" dirty="0">
               <a:ln>
                 <a:noFill/>
               </a:ln>
               <a:solidFill>
-                <a:schemeClr val="bg1"/>
+                <a:schemeClr val="bg2"/>
               </a:solidFill>
               <a:effectLst/>
               <a:uLnTx/>

--- a/Documents/Presentation/Capstone Project Presentation.pptx
+++ b/Documents/Presentation/Capstone Project Presentation.pptx
@@ -138,6 +138,9 @@
         </p15:guide>
       </p15:sldGuideLst>
     </p:ext>
+    <p:ext uri="{2D200454-40CA-4A62-9FC3-DE9A4176ACB9}">
+      <p15:notesGuideLst xmlns:p15="http://schemas.microsoft.com/office/powerpoint/2012/main"/>
+    </p:ext>
   </p:extLst>
 </p:presentation>
 </file>
@@ -224,7 +227,7 @@
           <a:p>
             <a:fld id="{01EDE3E3-4DC4-4033-AB14-8C688262196C}" type="datetimeFigureOut">
               <a:rPr lang="en-US" smtClean="0"/>
-              <a:t>6/10/2026</a:t>
+              <a:t>6/16/2026</a:t>
             </a:fld>
             <a:endParaRPr lang="en-US"/>
           </a:p>
@@ -2344,7 +2347,7 @@
           <a:p>
             <a:r>
               <a:rPr lang="en-US" dirty="0"/>
-              <a:t>The database consists of eleven normalized tables, with Devices serving as the central entity. Most other tables are connected to a device, allowing the system to manage multiple devices within a single platform.</a:t>
+              <a:t>The database consists of 8 normalized tables, with Devices serving as the central entity. Most other tables are connected to a device, allowing the system to manage multiple devices within a single platform.</a:t>
             </a:r>
           </a:p>
           <a:p>
@@ -2358,15 +2361,7 @@
             </a:r>
             <a:r>
               <a:rPr lang="en-US" dirty="0"/>
-              <a:t> stores time-series sensor data, while </a:t>
-            </a:r>
-            <a:r>
-              <a:rPr lang="en-US" dirty="0" err="1"/>
-              <a:t>DeviceStatusHistories</a:t>
-            </a:r>
-            <a:r>
-              <a:rPr lang="en-US" dirty="0"/>
-              <a:t> records device connectivity and status changes over time.</a:t>
+              <a:t> stores time-series sensor data.</a:t>
             </a:r>
           </a:p>
           <a:p>
@@ -2394,15 +2389,7 @@
           <a:p>
             <a:r>
               <a:rPr lang="en-US" dirty="0"/>
-              <a:t>Additional tables, such as </a:t>
-            </a:r>
-            <a:r>
-              <a:rPr lang="en-US" dirty="0" err="1"/>
-              <a:t>DeviceConfigurations</a:t>
-            </a:r>
-            <a:r>
-              <a:rPr lang="en-US" dirty="0"/>
-              <a:t> and Users, support system configuration, authentication, and access control.</a:t>
+              <a:t>Additional tables Users, support authentication, and access control.</a:t>
             </a:r>
           </a:p>
           <a:p>
@@ -2951,7 +2938,7 @@
           <a:p>
             <a:fld id="{5BCAD085-E8A6-8845-BD4E-CB4CCA059FC4}" type="datetimeFigureOut">
               <a:rPr lang="en-US" smtClean="0"/>
-              <a:t>6/10/2026</a:t>
+              <a:t>6/16/2026</a:t>
             </a:fld>
             <a:endParaRPr lang="en-US"/>
           </a:p>
@@ -3119,7 +3106,7 @@
           <a:p>
             <a:fld id="{5BCAD085-E8A6-8845-BD4E-CB4CCA059FC4}" type="datetimeFigureOut">
               <a:rPr lang="en-US" smtClean="0"/>
-              <a:t>6/10/2026</a:t>
+              <a:t>6/16/2026</a:t>
             </a:fld>
             <a:endParaRPr lang="en-US"/>
           </a:p>
@@ -3297,7 +3284,7 @@
           <a:p>
             <a:fld id="{5BCAD085-E8A6-8845-BD4E-CB4CCA059FC4}" type="datetimeFigureOut">
               <a:rPr lang="en-US" smtClean="0"/>
-              <a:t>6/10/2026</a:t>
+              <a:t>6/16/2026</a:t>
             </a:fld>
             <a:endParaRPr lang="en-US"/>
           </a:p>
@@ -3537,7 +3524,7 @@
           <a:p>
             <a:fld id="{5BCAD085-E8A6-8845-BD4E-CB4CCA059FC4}" type="datetimeFigureOut">
               <a:rPr lang="en-US" smtClean="0"/>
-              <a:t>6/10/2026</a:t>
+              <a:t>6/16/2026</a:t>
             </a:fld>
             <a:endParaRPr lang="en-US"/>
           </a:p>
@@ -3705,7 +3692,7 @@
           <a:p>
             <a:fld id="{5BCAD085-E8A6-8845-BD4E-CB4CCA059FC4}" type="datetimeFigureOut">
               <a:rPr lang="en-US" smtClean="0"/>
-              <a:t>6/10/2026</a:t>
+              <a:t>6/16/2026</a:t>
             </a:fld>
             <a:endParaRPr lang="en-US"/>
           </a:p>
@@ -3950,7 +3937,7 @@
           <a:p>
             <a:fld id="{5BCAD085-E8A6-8845-BD4E-CB4CCA059FC4}" type="datetimeFigureOut">
               <a:rPr lang="en-US" smtClean="0"/>
-              <a:t>6/10/2026</a:t>
+              <a:t>6/16/2026</a:t>
             </a:fld>
             <a:endParaRPr lang="en-US"/>
           </a:p>
@@ -4235,7 +4222,7 @@
           <a:p>
             <a:fld id="{5BCAD085-E8A6-8845-BD4E-CB4CCA059FC4}" type="datetimeFigureOut">
               <a:rPr lang="en-US" smtClean="0"/>
-              <a:t>6/10/2026</a:t>
+              <a:t>6/16/2026</a:t>
             </a:fld>
             <a:endParaRPr lang="en-US"/>
           </a:p>
@@ -4654,7 +4641,7 @@
           <a:p>
             <a:fld id="{5BCAD085-E8A6-8845-BD4E-CB4CCA059FC4}" type="datetimeFigureOut">
               <a:rPr lang="en-US" smtClean="0"/>
-              <a:t>6/10/2026</a:t>
+              <a:t>6/16/2026</a:t>
             </a:fld>
             <a:endParaRPr lang="en-US"/>
           </a:p>
@@ -4771,7 +4758,7 @@
           <a:p>
             <a:fld id="{5BCAD085-E8A6-8845-BD4E-CB4CCA059FC4}" type="datetimeFigureOut">
               <a:rPr lang="en-US" smtClean="0"/>
-              <a:t>6/10/2026</a:t>
+              <a:t>6/16/2026</a:t>
             </a:fld>
             <a:endParaRPr lang="en-US"/>
           </a:p>
@@ -4866,7 +4853,7 @@
           <a:p>
             <a:fld id="{5BCAD085-E8A6-8845-BD4E-CB4CCA059FC4}" type="datetimeFigureOut">
               <a:rPr lang="en-US" smtClean="0"/>
-              <a:t>6/10/2026</a:t>
+              <a:t>6/16/2026</a:t>
             </a:fld>
             <a:endParaRPr lang="en-US"/>
           </a:p>
@@ -5141,7 +5128,7 @@
           <a:p>
             <a:fld id="{5BCAD085-E8A6-8845-BD4E-CB4CCA059FC4}" type="datetimeFigureOut">
               <a:rPr lang="en-US" smtClean="0"/>
-              <a:t>6/10/2026</a:t>
+              <a:t>6/16/2026</a:t>
             </a:fld>
             <a:endParaRPr lang="en-US"/>
           </a:p>
@@ -5309,7 +5296,7 @@
           <a:p>
             <a:fld id="{5BCAD085-E8A6-8845-BD4E-CB4CCA059FC4}" type="datetimeFigureOut">
               <a:rPr lang="en-US" smtClean="0"/>
-              <a:t>6/10/2026</a:t>
+              <a:t>6/16/2026</a:t>
             </a:fld>
             <a:endParaRPr lang="en-US"/>
           </a:p>
@@ -5561,7 +5548,7 @@
           <a:p>
             <a:fld id="{5BCAD085-E8A6-8845-BD4E-CB4CCA059FC4}" type="datetimeFigureOut">
               <a:rPr lang="en-US" smtClean="0"/>
-              <a:t>6/10/2026</a:t>
+              <a:t>6/16/2026</a:t>
             </a:fld>
             <a:endParaRPr lang="en-US"/>
           </a:p>
@@ -5729,7 +5716,7 @@
           <a:p>
             <a:fld id="{5BCAD085-E8A6-8845-BD4E-CB4CCA059FC4}" type="datetimeFigureOut">
               <a:rPr lang="en-US" smtClean="0"/>
-              <a:t>6/10/2026</a:t>
+              <a:t>6/16/2026</a:t>
             </a:fld>
             <a:endParaRPr lang="en-US"/>
           </a:p>
@@ -5907,7 +5894,7 @@
           <a:p>
             <a:fld id="{5BCAD085-E8A6-8845-BD4E-CB4CCA059FC4}" type="datetimeFigureOut">
               <a:rPr lang="en-US" smtClean="0"/>
-              <a:t>6/10/2026</a:t>
+              <a:t>6/16/2026</a:t>
             </a:fld>
             <a:endParaRPr lang="en-US"/>
           </a:p>
@@ -6182,7 +6169,7 @@
           <a:p>
             <a:fld id="{5BCAD085-E8A6-8845-BD4E-CB4CCA059FC4}" type="datetimeFigureOut">
               <a:rPr lang="en-US" smtClean="0"/>
-              <a:t>6/10/2026</a:t>
+              <a:t>6/16/2026</a:t>
             </a:fld>
             <a:endParaRPr lang="en-US"/>
           </a:p>
@@ -6350,7 +6337,7 @@
           <a:p>
             <a:fld id="{5BCAD085-E8A6-8845-BD4E-CB4CCA059FC4}" type="datetimeFigureOut">
               <a:rPr lang="en-US" smtClean="0"/>
-              <a:t>6/10/2026</a:t>
+              <a:t>6/16/2026</a:t>
             </a:fld>
             <a:endParaRPr lang="en-US"/>
           </a:p>
@@ -6595,7 +6582,7 @@
           <a:p>
             <a:fld id="{5BCAD085-E8A6-8845-BD4E-CB4CCA059FC4}" type="datetimeFigureOut">
               <a:rPr lang="en-US" smtClean="0"/>
-              <a:t>6/10/2026</a:t>
+              <a:t>6/16/2026</a:t>
             </a:fld>
             <a:endParaRPr lang="en-US"/>
           </a:p>
@@ -6880,7 +6867,7 @@
           <a:p>
             <a:fld id="{5BCAD085-E8A6-8845-BD4E-CB4CCA059FC4}" type="datetimeFigureOut">
               <a:rPr lang="en-US" smtClean="0"/>
-              <a:t>6/10/2026</a:t>
+              <a:t>6/16/2026</a:t>
             </a:fld>
             <a:endParaRPr lang="en-US"/>
           </a:p>
@@ -7299,7 +7286,7 @@
           <a:p>
             <a:fld id="{5BCAD085-E8A6-8845-BD4E-CB4CCA059FC4}" type="datetimeFigureOut">
               <a:rPr lang="en-US" smtClean="0"/>
-              <a:t>6/10/2026</a:t>
+              <a:t>6/16/2026</a:t>
             </a:fld>
             <a:endParaRPr lang="en-US"/>
           </a:p>
@@ -7416,7 +7403,7 @@
           <a:p>
             <a:fld id="{5BCAD085-E8A6-8845-BD4E-CB4CCA059FC4}" type="datetimeFigureOut">
               <a:rPr lang="en-US" smtClean="0"/>
-              <a:t>6/10/2026</a:t>
+              <a:t>6/16/2026</a:t>
             </a:fld>
             <a:endParaRPr lang="en-US"/>
           </a:p>
@@ -7661,7 +7648,7 @@
           <a:p>
             <a:fld id="{5BCAD085-E8A6-8845-BD4E-CB4CCA059FC4}" type="datetimeFigureOut">
               <a:rPr lang="en-US" smtClean="0"/>
-              <a:t>6/10/2026</a:t>
+              <a:t>6/16/2026</a:t>
             </a:fld>
             <a:endParaRPr lang="en-US"/>
           </a:p>
@@ -7756,7 +7743,7 @@
           <a:p>
             <a:fld id="{5BCAD085-E8A6-8845-BD4E-CB4CCA059FC4}" type="datetimeFigureOut">
               <a:rPr lang="en-US" smtClean="0"/>
-              <a:t>6/10/2026</a:t>
+              <a:t>6/16/2026</a:t>
             </a:fld>
             <a:endParaRPr lang="en-US"/>
           </a:p>
@@ -8031,7 +8018,7 @@
           <a:p>
             <a:fld id="{5BCAD085-E8A6-8845-BD4E-CB4CCA059FC4}" type="datetimeFigureOut">
               <a:rPr lang="en-US" smtClean="0"/>
-              <a:t>6/10/2026</a:t>
+              <a:t>6/16/2026</a:t>
             </a:fld>
             <a:endParaRPr lang="en-US"/>
           </a:p>
@@ -8283,7 +8270,7 @@
           <a:p>
             <a:fld id="{5BCAD085-E8A6-8845-BD4E-CB4CCA059FC4}" type="datetimeFigureOut">
               <a:rPr lang="en-US" smtClean="0"/>
-              <a:t>6/10/2026</a:t>
+              <a:t>6/16/2026</a:t>
             </a:fld>
             <a:endParaRPr lang="en-US"/>
           </a:p>
@@ -8451,7 +8438,7 @@
           <a:p>
             <a:fld id="{5BCAD085-E8A6-8845-BD4E-CB4CCA059FC4}" type="datetimeFigureOut">
               <a:rPr lang="en-US" smtClean="0"/>
-              <a:t>6/10/2026</a:t>
+              <a:t>6/16/2026</a:t>
             </a:fld>
             <a:endParaRPr lang="en-US"/>
           </a:p>
@@ -8629,7 +8616,7 @@
           <a:p>
             <a:fld id="{5BCAD085-E8A6-8845-BD4E-CB4CCA059FC4}" type="datetimeFigureOut">
               <a:rPr lang="en-US" smtClean="0"/>
-              <a:t>6/10/2026</a:t>
+              <a:t>6/16/2026</a:t>
             </a:fld>
             <a:endParaRPr lang="en-US"/>
           </a:p>
@@ -8984,7 +8971,7 @@
           <a:p>
             <a:fld id="{5BCAD085-E8A6-8845-BD4E-CB4CCA059FC4}" type="datetimeFigureOut">
               <a:rPr lang="en-US" smtClean="0"/>
-              <a:t>6/10/2026</a:t>
+              <a:t>6/16/2026</a:t>
             </a:fld>
             <a:endParaRPr lang="en-US"/>
           </a:p>
@@ -9403,7 +9390,7 @@
           <a:p>
             <a:fld id="{5BCAD085-E8A6-8845-BD4E-CB4CCA059FC4}" type="datetimeFigureOut">
               <a:rPr lang="en-US" smtClean="0"/>
-              <a:t>6/10/2026</a:t>
+              <a:t>6/16/2026</a:t>
             </a:fld>
             <a:endParaRPr lang="en-US"/>
           </a:p>
@@ -9520,7 +9507,7 @@
           <a:p>
             <a:fld id="{5BCAD085-E8A6-8845-BD4E-CB4CCA059FC4}" type="datetimeFigureOut">
               <a:rPr lang="en-US" smtClean="0"/>
-              <a:t>6/10/2026</a:t>
+              <a:t>6/16/2026</a:t>
             </a:fld>
             <a:endParaRPr lang="en-US"/>
           </a:p>
@@ -9615,7 +9602,7 @@
           <a:p>
             <a:fld id="{5BCAD085-E8A6-8845-BD4E-CB4CCA059FC4}" type="datetimeFigureOut">
               <a:rPr lang="en-US" smtClean="0"/>
-              <a:t>6/10/2026</a:t>
+              <a:t>6/16/2026</a:t>
             </a:fld>
             <a:endParaRPr lang="en-US"/>
           </a:p>
@@ -9890,7 +9877,7 @@
           <a:p>
             <a:fld id="{5BCAD085-E8A6-8845-BD4E-CB4CCA059FC4}" type="datetimeFigureOut">
               <a:rPr lang="en-US" smtClean="0"/>
-              <a:t>6/10/2026</a:t>
+              <a:t>6/16/2026</a:t>
             </a:fld>
             <a:endParaRPr lang="en-US"/>
           </a:p>
@@ -10142,7 +10129,7 @@
           <a:p>
             <a:fld id="{5BCAD085-E8A6-8845-BD4E-CB4CCA059FC4}" type="datetimeFigureOut">
               <a:rPr lang="en-US" smtClean="0"/>
-              <a:t>6/10/2026</a:t>
+              <a:t>6/16/2026</a:t>
             </a:fld>
             <a:endParaRPr lang="en-US"/>
           </a:p>
@@ -10353,7 +10340,7 @@
           <a:p>
             <a:fld id="{5BCAD085-E8A6-8845-BD4E-CB4CCA059FC4}" type="datetimeFigureOut">
               <a:rPr lang="en-US" smtClean="0"/>
-              <a:t>6/10/2026</a:t>
+              <a:t>6/16/2026</a:t>
             </a:fld>
             <a:endParaRPr lang="en-US"/>
           </a:p>
@@ -10861,7 +10848,7 @@
           <a:p>
             <a:fld id="{5BCAD085-E8A6-8845-BD4E-CB4CCA059FC4}" type="datetimeFigureOut">
               <a:rPr lang="en-US" smtClean="0"/>
-              <a:t>6/10/2026</a:t>
+              <a:t>6/16/2026</a:t>
             </a:fld>
             <a:endParaRPr lang="en-US"/>
           </a:p>
@@ -11370,7 +11357,7 @@
           <a:p>
             <a:fld id="{5BCAD085-E8A6-8845-BD4E-CB4CCA059FC4}" type="datetimeFigureOut">
               <a:rPr lang="en-US" smtClean="0"/>
-              <a:t>6/10/2026</a:t>
+              <a:t>6/16/2026</a:t>
             </a:fld>
             <a:endParaRPr lang="en-US"/>
           </a:p>
@@ -12197,17 +12184,7 @@
                 <a:latin typeface="Candara" panose="020E0502030303020204" pitchFamily="34" charset="0"/>
                 <a:ea typeface="Cambria Math" panose="02040503050406030204" pitchFamily="18" charset="0"/>
               </a:rPr>
-              <a:t> </a:t>
-            </a:r>
-            <a:r>
-              <a:rPr lang="en-US" sz="1400" dirty="0">
-                <a:solidFill>
-                  <a:srgbClr val="9EC4AE"/>
-                </a:solidFill>
-                <a:latin typeface="Candara" panose="020E0502030303020204" pitchFamily="34" charset="0"/>
-                <a:ea typeface="Cambria Math" panose="02040503050406030204" pitchFamily="18" charset="0"/>
-              </a:rPr>
-              <a:t>SPA</a:t>
+              <a:t> SPA</a:t>
             </a:r>
             <a:endParaRPr sz="1400" b="1" i="0" dirty="0">
               <a:solidFill>
@@ -12263,7 +12240,7 @@
         <p:spPr>
           <a:xfrm>
             <a:off x="2685119" y="4313770"/>
-            <a:ext cx="1943028" cy="523220"/>
+            <a:ext cx="1943028" cy="307777"/>
           </a:xfrm>
           <a:prstGeom prst="rect">
             <a:avLst/>
@@ -12287,34 +12264,14 @@
               <a:t>SignalR</a:t>
             </a:r>
             <a:r>
-              <a:rPr lang="en-US" sz="1400" b="1" dirty="0">
+              <a:rPr lang="en-US" sz="1400" b="1" i="0" dirty="0">
                 <a:solidFill>
                   <a:srgbClr val="00B8D4"/>
                 </a:solidFill>
                 <a:latin typeface="Candara" panose="020E0502030303020204" pitchFamily="34" charset="0"/>
                 <a:ea typeface="Cambria Math" panose="02040503050406030204" pitchFamily="18" charset="0"/>
               </a:rPr>
-              <a:t> | Web Service</a:t>
-            </a:r>
-            <a:r>
-              <a:rPr lang="en-US" sz="1400" b="1" i="0" dirty="0">
-                <a:solidFill>
-                  <a:srgbClr val="00B8D4"/>
-                </a:solidFill>
-                <a:latin typeface="Candara" panose="020E0502030303020204" pitchFamily="34" charset="0"/>
-                <a:ea typeface="Cambria Math" panose="02040503050406030204" pitchFamily="18" charset="0"/>
-              </a:rPr>
               <a:t> </a:t>
-            </a:r>
-            <a:r>
-              <a:rPr lang="en-US" sz="1400" dirty="0">
-                <a:solidFill>
-                  <a:srgbClr val="9EC4AE"/>
-                </a:solidFill>
-                <a:latin typeface="Candara" panose="020E0502030303020204" pitchFamily="34" charset="0"/>
-                <a:ea typeface="Cambria Math" panose="02040503050406030204" pitchFamily="18" charset="0"/>
-              </a:rPr>
-              <a:t>Hub</a:t>
             </a:r>
             <a:endParaRPr sz="1400" b="1" i="0" dirty="0">
               <a:solidFill>
@@ -12669,8 +12626,8 @@
         </p:nvSpPr>
         <p:spPr>
           <a:xfrm>
-            <a:off x="2685119" y="2415632"/>
-            <a:ext cx="1524342" cy="523220"/>
+            <a:off x="2685118" y="2415632"/>
+            <a:ext cx="1589701" cy="523220"/>
           </a:xfrm>
           <a:prstGeom prst="rect">
             <a:avLst/>
@@ -12691,27 +12648,7 @@
                 <a:latin typeface="Candara" panose="020E0502030303020204" pitchFamily="34" charset="0"/>
                 <a:ea typeface="Cambria Math" panose="02040503050406030204" pitchFamily="18" charset="0"/>
               </a:rPr>
-              <a:t>C#, ASP.NET Core, </a:t>
-            </a:r>
-            <a:r>
-              <a:rPr lang="en-US" sz="1400" b="1" dirty="0" err="1">
-                <a:solidFill>
-                  <a:srgbClr val="009A72"/>
-                </a:solidFill>
-                <a:latin typeface="Candara" panose="020E0502030303020204" pitchFamily="34" charset="0"/>
-                <a:ea typeface="Cambria Math" panose="02040503050406030204" pitchFamily="18" charset="0"/>
-              </a:rPr>
-              <a:t>RESt</a:t>
-            </a:r>
-            <a:r>
-              <a:rPr lang="en-US" sz="1400" b="1" dirty="0">
-                <a:solidFill>
-                  <a:srgbClr val="009A72"/>
-                </a:solidFill>
-                <a:latin typeface="Candara" panose="020E0502030303020204" pitchFamily="34" charset="0"/>
-                <a:ea typeface="Cambria Math" panose="02040503050406030204" pitchFamily="18" charset="0"/>
-              </a:rPr>
-              <a:t> </a:t>
+              <a:t>C#, ASP.NET Core, REST </a:t>
             </a:r>
             <a:r>
               <a:rPr lang="en-US" sz="1400" dirty="0">
@@ -12781,7 +12718,7 @@
                 <a:latin typeface="Candara" panose="020E0502030303020204" pitchFamily="34" charset="0"/>
                 <a:ea typeface="Cambria Math" panose="02040503050406030204" pitchFamily="18" charset="0"/>
               </a:rPr>
-              <a:t>MQTT Broker</a:t>
+              <a:t>MQTT </a:t>
             </a:r>
             <a:endParaRPr sz="1400" b="1" i="0" dirty="0">
               <a:solidFill>
@@ -12798,14 +12735,6 @@
   <p:clrMapOvr>
     <a:masterClrMapping/>
   </p:clrMapOvr>
-  <mc:AlternateContent xmlns:mc="http://schemas.openxmlformats.org/markup-compatibility/2006" xmlns:p14="http://schemas.microsoft.com/office/powerpoint/2010/main">
-    <mc:Choice Requires="p14">
-      <p:transition spd="slow" p14:dur="2000" advTm="23957"/>
-    </mc:Choice>
-    <mc:Fallback xmlns="">
-      <p:transition spd="slow" advTm="23957"/>
-    </mc:Fallback>
-  </mc:AlternateContent>
 </p:sld>
 </file>
 
@@ -13778,7 +13707,7 @@
           <p:nvPr>
             <p:extLst>
               <p:ext uri="{D42A27DB-BD31-4B8C-83A1-F6EECF244321}">
-                <p14:modId xmlns:p14="http://schemas.microsoft.com/office/powerpoint/2010/main" val="88501286"/>
+                <p14:modId xmlns:p14="http://schemas.microsoft.com/office/powerpoint/2010/main" val="63962351"/>
               </p:ext>
             </p:extLst>
           </p:nvPr>
@@ -14141,14 +14070,14 @@
                         <a:buNone/>
                       </a:pPr>
                       <a:r>
-                        <a:rPr lang="en-US" sz="1800">
+                        <a:rPr lang="en-US" sz="1800" dirty="0">
                           <a:solidFill>
                             <a:schemeClr val="bg1"/>
                           </a:solidFill>
                           <a:effectLst/>
                           <a:latin typeface="Candara" panose="020E0502030303020204" pitchFamily="34" charset="0"/>
                         </a:rPr>
-                        <a:t>Connect Arduino; run firmware (local MQTT)</a:t>
+                        <a:t>Connect Arduino; run firmware</a:t>
                       </a:r>
                     </a:p>
                   </a:txBody>
@@ -14599,27 +14528,7 @@
                           <a:effectLst/>
                           <a:latin typeface="Candara" panose="020E0502030303020204" pitchFamily="34" charset="0"/>
                         </a:rPr>
-                        <a:t>Alert appears (</a:t>
-                      </a:r>
-                      <a:r>
-                        <a:rPr lang="en-US" sz="1800" dirty="0" err="1">
-                          <a:solidFill>
-                            <a:schemeClr val="bg1"/>
-                          </a:solidFill>
-                          <a:effectLst/>
-                          <a:latin typeface="Candara" panose="020E0502030303020204" pitchFamily="34" charset="0"/>
-                        </a:rPr>
-                        <a:t>SignalR</a:t>
-                      </a:r>
-                      <a:r>
-                        <a:rPr lang="en-US" sz="1800" dirty="0">
-                          <a:solidFill>
-                            <a:schemeClr val="bg1"/>
-                          </a:solidFill>
-                          <a:effectLst/>
-                          <a:latin typeface="Candara" panose="020E0502030303020204" pitchFamily="34" charset="0"/>
-                        </a:rPr>
-                        <a:t>)</a:t>
+                        <a:t>Alert appears</a:t>
                       </a:r>
                     </a:p>
                   </a:txBody>
@@ -16777,7 +16686,7 @@
         </p:nvSpPr>
         <p:spPr>
           <a:xfrm>
-            <a:off x="1727200" y="4705741"/>
+            <a:off x="1727200" y="969904"/>
             <a:ext cx="4556117" cy="670385"/>
           </a:xfrm>
           <a:prstGeom prst="rect">
@@ -17085,7 +16994,7 @@
                 </a:solidFill>
                 <a:latin typeface="Candara" panose="020E0502030303020204" pitchFamily="34" charset="0"/>
               </a:rPr>
-              <a:t>I would like to express my sincere gratitude to the instructors, especially Naser Chowdhury, for their guidance and support throughout the past two years. I would also like to thank RTC School for giving me the opportunity to achieve my first educational milestone in the United States, and my classmates and colleagues for their hard work, dedication, and support as we balanced work and study together to reach this achievement.</a:t>
+              <a:t>I would like to express my sincere gratitude to the instructors, especially Naser Chowdhury, for the guidance and support throughout the past two years. I would also like to thank RTC School for giving me the opportunity to achieve my first educational milestone in the United States, and my classmates and colleagues for their hard work, dedication, and support as we balanced work and study together to reach this achievement.</a:t>
             </a:r>
             <a:endParaRPr kumimoji="0" lang="en-US" sz="1600" b="0" u="none" strike="noStrike" kern="1200" cap="none" spc="0" normalizeH="0" baseline="0" noProof="0" dirty="0">
               <a:ln>
@@ -17104,10 +17013,10 @@
       </p:sp>
       <p:sp>
         <p:nvSpPr>
-          <p:cNvPr id="3" name="TextBox 2">
+          <p:cNvPr id="5" name="TextBox 4">
             <a:extLst>
               <a:ext uri="{FF2B5EF4-FFF2-40B4-BE49-F238E27FC236}">
-                <a16:creationId xmlns:a16="http://schemas.microsoft.com/office/drawing/2014/main" id="{8A007543-48F6-8493-80CF-D65E66082C51}"/>
+                <a16:creationId xmlns:a16="http://schemas.microsoft.com/office/drawing/2014/main" id="{FA09E5FA-DB4E-A610-E8C1-21624C372F45}"/>
               </a:ext>
             </a:extLst>
           </p:cNvPr>
@@ -17116,7 +17025,7 @@
         </p:nvSpPr>
         <p:spPr>
           <a:xfrm>
-            <a:off x="1530220" y="860041"/>
+            <a:off x="4864262" y="4703483"/>
             <a:ext cx="5822302" cy="830997"/>
           </a:xfrm>
           <a:prstGeom prst="rect">
@@ -30194,7 +30103,7 @@
                 <a:ea typeface="Calibri" pitchFamily="34" charset="-122"/>
                 <a:cs typeface="Calibri" pitchFamily="34" charset="-120"/>
               </a:rPr>
-              <a:t>11 tables  •  Devices = central hub  •  Key fields and relationships shown</a:t>
+              <a:t>8 tables  •  Devices = central hub  •  Key fields and relationships shown</a:t>
             </a:r>
             <a:endParaRPr lang="en-US" sz="1200" dirty="0">
               <a:latin typeface="Candara" panose="020E0502030303020204" pitchFamily="34" charset="0"/>
@@ -30300,70 +30209,6 @@
       </p:sp>
       <p:sp>
         <p:nvSpPr>
-          <p:cNvPr id="7" name="Shape 5"/>
-          <p:cNvSpPr/>
-          <p:nvPr/>
-        </p:nvSpPr>
-        <p:spPr>
-          <a:xfrm flipV="1">
-            <a:off x="7084754" y="3100816"/>
-            <a:ext cx="2559653" cy="281562"/>
-          </a:xfrm>
-          <a:prstGeom prst="line">
-            <a:avLst/>
-          </a:prstGeom>
-          <a:noFill/>
-          <a:ln w="19050">
-            <a:solidFill>
-              <a:srgbClr val="3ECF80"/>
-            </a:solidFill>
-            <a:prstDash val="solid"/>
-          </a:ln>
-        </p:spPr>
-        <p:txBody>
-          <a:bodyPr/>
-          <a:lstStyle/>
-          <a:p>
-            <a:endParaRPr lang="en-US" sz="1799">
-              <a:latin typeface="Candara" panose="020E0502030303020204" pitchFamily="34" charset="0"/>
-            </a:endParaRPr>
-          </a:p>
-        </p:txBody>
-      </p:sp>
-      <p:sp>
-        <p:nvSpPr>
-          <p:cNvPr id="8" name="Shape 6"/>
-          <p:cNvSpPr/>
-          <p:nvPr/>
-        </p:nvSpPr>
-        <p:spPr>
-          <a:xfrm>
-            <a:off x="7084754" y="3704163"/>
-            <a:ext cx="2559653" cy="537527"/>
-          </a:xfrm>
-          <a:prstGeom prst="line">
-            <a:avLst/>
-          </a:prstGeom>
-          <a:noFill/>
-          <a:ln w="19050">
-            <a:solidFill>
-              <a:srgbClr val="3ECF80"/>
-            </a:solidFill>
-            <a:prstDash val="solid"/>
-          </a:ln>
-        </p:spPr>
-        <p:txBody>
-          <a:bodyPr/>
-          <a:lstStyle/>
-          <a:p>
-            <a:endParaRPr lang="en-US" sz="1799">
-              <a:latin typeface="Candara" panose="020E0502030303020204" pitchFamily="34" charset="0"/>
-            </a:endParaRPr>
-          </a:p>
-        </p:txBody>
-      </p:sp>
-      <p:sp>
-        <p:nvSpPr>
           <p:cNvPr id="9" name="Shape 7"/>
           <p:cNvSpPr/>
           <p:nvPr/>
@@ -30372,38 +30217,6 @@
           <a:xfrm>
             <a:off x="7084754" y="4025947"/>
             <a:ext cx="2559653" cy="1356617"/>
-          </a:xfrm>
-          <a:prstGeom prst="line">
-            <a:avLst/>
-          </a:prstGeom>
-          <a:noFill/>
-          <a:ln w="19050">
-            <a:solidFill>
-              <a:srgbClr val="3ECF80"/>
-            </a:solidFill>
-            <a:prstDash val="solid"/>
-          </a:ln>
-        </p:spPr>
-        <p:txBody>
-          <a:bodyPr/>
-          <a:lstStyle/>
-          <a:p>
-            <a:endParaRPr lang="en-US" sz="1799">
-              <a:latin typeface="Candara" panose="020E0502030303020204" pitchFamily="34" charset="0"/>
-            </a:endParaRPr>
-          </a:p>
-        </p:txBody>
-      </p:sp>
-      <p:sp>
-        <p:nvSpPr>
-          <p:cNvPr id="10" name="Shape 8"/>
-          <p:cNvSpPr/>
-          <p:nvPr/>
-        </p:nvSpPr>
-        <p:spPr>
-          <a:xfrm flipV="1">
-            <a:off x="4316367" y="4059772"/>
-            <a:ext cx="1148797" cy="1060428"/>
           </a:xfrm>
           <a:prstGeom prst="line">
             <a:avLst/>
@@ -33977,13 +33790,13 @@
       </p:sp>
       <p:sp>
         <p:nvSpPr>
-          <p:cNvPr id="107" name="Shape 105"/>
-          <p:cNvSpPr/>
-          <p:nvPr/>
-        </p:nvSpPr>
-        <p:spPr>
-          <a:xfrm>
-            <a:off x="9671832" y="2450847"/>
+          <p:cNvPr id="124" name="Shape 122"/>
+          <p:cNvSpPr/>
+          <p:nvPr/>
+        </p:nvSpPr>
+        <p:spPr>
+          <a:xfrm>
+            <a:off x="9671832" y="3913506"/>
             <a:ext cx="2011156" cy="1133561"/>
           </a:xfrm>
           <a:prstGeom prst="roundRect">
@@ -34015,611 +33828,13 @@
       </p:sp>
       <p:sp>
         <p:nvSpPr>
-          <p:cNvPr id="108" name="Shape 106"/>
-          <p:cNvSpPr/>
-          <p:nvPr/>
-        </p:nvSpPr>
-        <p:spPr>
-          <a:xfrm>
-            <a:off x="9644407" y="2423422"/>
-            <a:ext cx="2011156" cy="1133561"/>
-          </a:xfrm>
-          <a:prstGeom prst="roundRect">
-            <a:avLst>
-              <a:gd name="adj" fmla="val 6452"/>
-            </a:avLst>
-          </a:prstGeom>
-          <a:solidFill>
-            <a:srgbClr val="112B1D"/>
-          </a:solidFill>
-          <a:ln w="9525">
-            <a:solidFill>
-              <a:srgbClr val="1E3D2A"/>
-            </a:solidFill>
-            <a:prstDash val="solid"/>
-          </a:ln>
-        </p:spPr>
-        <p:txBody>
-          <a:bodyPr/>
-          <a:lstStyle/>
-          <a:p>
-            <a:endParaRPr lang="en-US" sz="1799">
-              <a:latin typeface="Candara" panose="020E0502030303020204" pitchFamily="34" charset="0"/>
-            </a:endParaRPr>
-          </a:p>
-        </p:txBody>
-      </p:sp>
-      <p:sp>
-        <p:nvSpPr>
-          <p:cNvPr id="109" name="Shape 107"/>
-          <p:cNvSpPr/>
-          <p:nvPr/>
-        </p:nvSpPr>
-        <p:spPr>
-          <a:xfrm>
-            <a:off x="9644407" y="2496555"/>
-            <a:ext cx="50279" cy="987295"/>
-          </a:xfrm>
-          <a:prstGeom prst="rect">
-            <a:avLst/>
-          </a:prstGeom>
-          <a:solidFill>
-            <a:srgbClr val="1B5C3A"/>
-          </a:solidFill>
-          <a:ln w="12700">
-            <a:solidFill>
-              <a:srgbClr val="1B5C3A"/>
-            </a:solidFill>
-            <a:prstDash val="solid"/>
-          </a:ln>
-        </p:spPr>
-        <p:txBody>
-          <a:bodyPr/>
-          <a:lstStyle/>
-          <a:p>
-            <a:endParaRPr lang="en-US" sz="1799">
-              <a:latin typeface="Candara" panose="020E0502030303020204" pitchFamily="34" charset="0"/>
-            </a:endParaRPr>
-          </a:p>
-        </p:txBody>
-      </p:sp>
-      <p:sp>
-        <p:nvSpPr>
-          <p:cNvPr id="110" name="Shape 108"/>
-          <p:cNvSpPr/>
-          <p:nvPr/>
-        </p:nvSpPr>
-        <p:spPr>
-          <a:xfrm>
-            <a:off x="9644407" y="2423422"/>
-            <a:ext cx="50279" cy="164549"/>
-          </a:xfrm>
-          <a:prstGeom prst="roundRect">
-            <a:avLst>
-              <a:gd name="adj" fmla="val 72727"/>
-            </a:avLst>
-          </a:prstGeom>
-          <a:solidFill>
-            <a:srgbClr val="1B5C3A"/>
-          </a:solidFill>
-          <a:ln w="12700">
-            <a:solidFill>
-              <a:srgbClr val="1B5C3A"/>
-            </a:solidFill>
-            <a:prstDash val="solid"/>
-          </a:ln>
-        </p:spPr>
-        <p:txBody>
-          <a:bodyPr/>
-          <a:lstStyle/>
-          <a:p>
-            <a:endParaRPr lang="en-US" sz="1799">
-              <a:latin typeface="Candara" panose="020E0502030303020204" pitchFamily="34" charset="0"/>
-            </a:endParaRPr>
-          </a:p>
-        </p:txBody>
-      </p:sp>
-      <p:sp>
-        <p:nvSpPr>
-          <p:cNvPr id="111" name="Text 109"/>
-          <p:cNvSpPr/>
-          <p:nvPr/>
-        </p:nvSpPr>
-        <p:spPr>
-          <a:xfrm>
-            <a:off x="9790673" y="2441705"/>
-            <a:ext cx="1810041" cy="237682"/>
-          </a:xfrm>
-          <a:prstGeom prst="rect">
-            <a:avLst/>
-          </a:prstGeom>
-          <a:noFill/>
-          <a:ln/>
-        </p:spPr>
-        <p:txBody>
-          <a:bodyPr wrap="square" lIns="0" tIns="0" rIns="0" bIns="0" rtlCol="0" anchor="ctr"/>
-          <a:lstStyle/>
-          <a:p>
-            <a:r>
-              <a:rPr lang="en-US" sz="1100" b="1" dirty="0">
-                <a:solidFill>
-                  <a:srgbClr val="3ECF80"/>
-                </a:solidFill>
-                <a:latin typeface="Candara" panose="020E0502030303020204" pitchFamily="34" charset="0"/>
-                <a:ea typeface="Calibri" pitchFamily="34" charset="-122"/>
-                <a:cs typeface="Calibri" pitchFamily="34" charset="-120"/>
-              </a:rPr>
-              <a:t>DeviceStatusHistories</a:t>
-            </a:r>
-            <a:endParaRPr lang="en-US" sz="1100" dirty="0">
-              <a:latin typeface="Candara" panose="020E0502030303020204" pitchFamily="34" charset="0"/>
-            </a:endParaRPr>
-          </a:p>
-        </p:txBody>
-      </p:sp>
-      <p:sp>
-        <p:nvSpPr>
-          <p:cNvPr id="112" name="Text 110"/>
-          <p:cNvSpPr/>
-          <p:nvPr/>
-        </p:nvSpPr>
-        <p:spPr>
-          <a:xfrm>
-            <a:off x="9790673" y="2715954"/>
-            <a:ext cx="1810041" cy="164549"/>
-          </a:xfrm>
-          <a:prstGeom prst="rect">
-            <a:avLst/>
-          </a:prstGeom>
-          <a:noFill/>
-          <a:ln/>
-        </p:spPr>
-        <p:txBody>
-          <a:bodyPr wrap="square" lIns="0" tIns="0" rIns="0" bIns="0" rtlCol="0" anchor="t"/>
-          <a:lstStyle/>
-          <a:p>
-            <a:r>
-              <a:rPr lang="en-US" sz="850" i="1" dirty="0">
-                <a:solidFill>
-                  <a:srgbClr val="7AB896"/>
-                </a:solidFill>
-                <a:latin typeface="Candara" panose="020E0502030303020204" pitchFamily="34" charset="0"/>
-                <a:ea typeface="Calibri" pitchFamily="34" charset="-122"/>
-                <a:cs typeface="Calibri" pitchFamily="34" charset="-120"/>
-              </a:rPr>
-              <a:t>Device status change log</a:t>
-            </a:r>
-            <a:endParaRPr lang="en-US" sz="850" dirty="0">
-              <a:latin typeface="Candara" panose="020E0502030303020204" pitchFamily="34" charset="0"/>
-            </a:endParaRPr>
-          </a:p>
-        </p:txBody>
-      </p:sp>
-      <p:sp>
-        <p:nvSpPr>
-          <p:cNvPr id="113" name="Shape 111"/>
-          <p:cNvSpPr/>
-          <p:nvPr/>
-        </p:nvSpPr>
-        <p:spPr>
-          <a:xfrm>
-            <a:off x="9772390" y="2898786"/>
-            <a:ext cx="1828324" cy="0"/>
-          </a:xfrm>
-          <a:prstGeom prst="line">
-            <a:avLst/>
-          </a:prstGeom>
-          <a:noFill/>
-          <a:ln w="9525">
-            <a:solidFill>
-              <a:srgbClr val="1E3D2A"/>
-            </a:solidFill>
-            <a:prstDash val="solid"/>
-          </a:ln>
-        </p:spPr>
-        <p:txBody>
-          <a:bodyPr/>
-          <a:lstStyle/>
-          <a:p>
-            <a:endParaRPr lang="en-US" sz="1799">
-              <a:latin typeface="Candara" panose="020E0502030303020204" pitchFamily="34" charset="0"/>
-            </a:endParaRPr>
-          </a:p>
-        </p:txBody>
-      </p:sp>
-      <p:sp>
-        <p:nvSpPr>
-          <p:cNvPr id="114" name="Text 112"/>
-          <p:cNvSpPr/>
-          <p:nvPr/>
-        </p:nvSpPr>
-        <p:spPr>
-          <a:xfrm>
-            <a:off x="9790673" y="2935353"/>
-            <a:ext cx="274249" cy="141695"/>
-          </a:xfrm>
-          <a:prstGeom prst="rect">
-            <a:avLst/>
-          </a:prstGeom>
-          <a:noFill/>
-          <a:ln/>
-        </p:spPr>
-        <p:txBody>
-          <a:bodyPr wrap="square" lIns="0" tIns="0" rIns="0" bIns="0" rtlCol="0" anchor="ctr"/>
-          <a:lstStyle/>
-          <a:p>
-            <a:r>
-              <a:rPr lang="en-US" sz="700" b="1" dirty="0">
-                <a:solidFill>
-                  <a:srgbClr val="F6C90E"/>
-                </a:solidFill>
-                <a:latin typeface="Candara" panose="020E0502030303020204" pitchFamily="34" charset="0"/>
-                <a:ea typeface="Calibri" pitchFamily="34" charset="-122"/>
-                <a:cs typeface="Calibri" pitchFamily="34" charset="-120"/>
-              </a:rPr>
-              <a:t>PK</a:t>
-            </a:r>
-            <a:endParaRPr lang="en-US" sz="700" dirty="0">
-              <a:latin typeface="Candara" panose="020E0502030303020204" pitchFamily="34" charset="0"/>
-            </a:endParaRPr>
-          </a:p>
-        </p:txBody>
-      </p:sp>
-      <p:sp>
-        <p:nvSpPr>
-          <p:cNvPr id="115" name="Text 113"/>
-          <p:cNvSpPr/>
-          <p:nvPr/>
-        </p:nvSpPr>
-        <p:spPr>
-          <a:xfrm>
-            <a:off x="10083205" y="2935353"/>
-            <a:ext cx="1005578" cy="141695"/>
-          </a:xfrm>
-          <a:prstGeom prst="rect">
-            <a:avLst/>
-          </a:prstGeom>
-          <a:noFill/>
-          <a:ln/>
-        </p:spPr>
-        <p:txBody>
-          <a:bodyPr wrap="square" lIns="0" tIns="0" rIns="0" bIns="0" rtlCol="0" anchor="ctr"/>
-          <a:lstStyle/>
-          <a:p>
-            <a:r>
-              <a:rPr lang="en-US" sz="850" b="1" dirty="0">
-                <a:solidFill>
-                  <a:srgbClr val="FFFFFF"/>
-                </a:solidFill>
-                <a:latin typeface="Candara" panose="020E0502030303020204" pitchFamily="34" charset="0"/>
-                <a:ea typeface="Calibri" pitchFamily="34" charset="-122"/>
-                <a:cs typeface="Calibri" pitchFamily="34" charset="-120"/>
-              </a:rPr>
-              <a:t>StatusHistoryId</a:t>
-            </a:r>
-            <a:endParaRPr lang="en-US" sz="850" dirty="0">
-              <a:latin typeface="Candara" panose="020E0502030303020204" pitchFamily="34" charset="0"/>
-            </a:endParaRPr>
-          </a:p>
-        </p:txBody>
-      </p:sp>
-      <p:sp>
-        <p:nvSpPr>
-          <p:cNvPr id="116" name="Text 114"/>
-          <p:cNvSpPr/>
-          <p:nvPr/>
-        </p:nvSpPr>
-        <p:spPr>
-          <a:xfrm>
-            <a:off x="11088783" y="2935353"/>
-            <a:ext cx="475364" cy="141695"/>
-          </a:xfrm>
-          <a:prstGeom prst="rect">
-            <a:avLst/>
-          </a:prstGeom>
-          <a:noFill/>
-          <a:ln/>
-        </p:spPr>
-        <p:txBody>
-          <a:bodyPr wrap="square" lIns="0" tIns="0" rIns="0" bIns="0" rtlCol="0" anchor="ctr"/>
-          <a:lstStyle/>
-          <a:p>
-            <a:pPr algn="r"/>
-            <a:r>
-              <a:rPr lang="en-US" sz="750" dirty="0">
-                <a:solidFill>
-                  <a:srgbClr val="4D8C6A"/>
-                </a:solidFill>
-                <a:latin typeface="Candara" panose="020E0502030303020204" pitchFamily="34" charset="0"/>
-                <a:ea typeface="Calibri" pitchFamily="34" charset="-122"/>
-                <a:cs typeface="Calibri" pitchFamily="34" charset="-120"/>
-              </a:rPr>
-              <a:t>long</a:t>
-            </a:r>
-            <a:endParaRPr lang="en-US" sz="750" dirty="0">
-              <a:latin typeface="Candara" panose="020E0502030303020204" pitchFamily="34" charset="0"/>
-            </a:endParaRPr>
-          </a:p>
-        </p:txBody>
-      </p:sp>
-      <p:sp>
-        <p:nvSpPr>
-          <p:cNvPr id="117" name="Text 115"/>
-          <p:cNvSpPr/>
-          <p:nvPr/>
-        </p:nvSpPr>
-        <p:spPr>
-          <a:xfrm>
-            <a:off x="9790673" y="3077048"/>
-            <a:ext cx="274249" cy="141695"/>
-          </a:xfrm>
-          <a:prstGeom prst="rect">
-            <a:avLst/>
-          </a:prstGeom>
-          <a:noFill/>
-          <a:ln/>
-        </p:spPr>
-        <p:txBody>
-          <a:bodyPr wrap="square" lIns="0" tIns="0" rIns="0" bIns="0" rtlCol="0" anchor="ctr"/>
-          <a:lstStyle/>
-          <a:p>
-            <a:r>
-              <a:rPr lang="en-US" sz="700" b="1" dirty="0">
-                <a:solidFill>
-                  <a:srgbClr val="60B8FF"/>
-                </a:solidFill>
-                <a:latin typeface="Candara" panose="020E0502030303020204" pitchFamily="34" charset="0"/>
-                <a:ea typeface="Calibri" pitchFamily="34" charset="-122"/>
-                <a:cs typeface="Calibri" pitchFamily="34" charset="-120"/>
-              </a:rPr>
-              <a:t>FK</a:t>
-            </a:r>
-            <a:endParaRPr lang="en-US" sz="700" dirty="0">
-              <a:latin typeface="Candara" panose="020E0502030303020204" pitchFamily="34" charset="0"/>
-            </a:endParaRPr>
-          </a:p>
-        </p:txBody>
-      </p:sp>
-      <p:sp>
-        <p:nvSpPr>
-          <p:cNvPr id="118" name="Text 116"/>
-          <p:cNvSpPr/>
-          <p:nvPr/>
-        </p:nvSpPr>
-        <p:spPr>
-          <a:xfrm>
-            <a:off x="10083205" y="3077048"/>
-            <a:ext cx="1005578" cy="141695"/>
-          </a:xfrm>
-          <a:prstGeom prst="rect">
-            <a:avLst/>
-          </a:prstGeom>
-          <a:noFill/>
-          <a:ln/>
-        </p:spPr>
-        <p:txBody>
-          <a:bodyPr wrap="square" lIns="0" tIns="0" rIns="0" bIns="0" rtlCol="0" anchor="ctr"/>
-          <a:lstStyle/>
-          <a:p>
-            <a:r>
-              <a:rPr lang="en-US" sz="850" i="1" dirty="0">
-                <a:solidFill>
-                  <a:srgbClr val="7AB896"/>
-                </a:solidFill>
-                <a:latin typeface="Candara" panose="020E0502030303020204" pitchFamily="34" charset="0"/>
-                <a:ea typeface="Calibri" pitchFamily="34" charset="-122"/>
-                <a:cs typeface="Calibri" pitchFamily="34" charset="-120"/>
-              </a:rPr>
-              <a:t>DeviceId</a:t>
-            </a:r>
-            <a:endParaRPr lang="en-US" sz="850" dirty="0">
-              <a:latin typeface="Candara" panose="020E0502030303020204" pitchFamily="34" charset="0"/>
-            </a:endParaRPr>
-          </a:p>
-        </p:txBody>
-      </p:sp>
-      <p:sp>
-        <p:nvSpPr>
-          <p:cNvPr id="119" name="Text 117"/>
-          <p:cNvSpPr/>
-          <p:nvPr/>
-        </p:nvSpPr>
-        <p:spPr>
-          <a:xfrm>
-            <a:off x="11088783" y="3077048"/>
-            <a:ext cx="475364" cy="141695"/>
-          </a:xfrm>
-          <a:prstGeom prst="rect">
-            <a:avLst/>
-          </a:prstGeom>
-          <a:noFill/>
-          <a:ln/>
-        </p:spPr>
-        <p:txBody>
-          <a:bodyPr wrap="square" lIns="0" tIns="0" rIns="0" bIns="0" rtlCol="0" anchor="ctr"/>
-          <a:lstStyle/>
-          <a:p>
-            <a:pPr algn="r"/>
-            <a:r>
-              <a:rPr lang="en-US" sz="750" dirty="0">
-                <a:solidFill>
-                  <a:srgbClr val="4D8C6A"/>
-                </a:solidFill>
-                <a:latin typeface="Candara" panose="020E0502030303020204" pitchFamily="34" charset="0"/>
-                <a:ea typeface="Calibri" pitchFamily="34" charset="-122"/>
-                <a:cs typeface="Calibri" pitchFamily="34" charset="-120"/>
-              </a:rPr>
-              <a:t>int</a:t>
-            </a:r>
-            <a:endParaRPr lang="en-US" sz="750" dirty="0">
-              <a:latin typeface="Candara" panose="020E0502030303020204" pitchFamily="34" charset="0"/>
-            </a:endParaRPr>
-          </a:p>
-        </p:txBody>
-      </p:sp>
-      <p:sp>
-        <p:nvSpPr>
-          <p:cNvPr id="120" name="Text 118"/>
-          <p:cNvSpPr/>
-          <p:nvPr/>
-        </p:nvSpPr>
-        <p:spPr>
-          <a:xfrm>
-            <a:off x="10083205" y="3218743"/>
-            <a:ext cx="1005578" cy="141695"/>
-          </a:xfrm>
-          <a:prstGeom prst="rect">
-            <a:avLst/>
-          </a:prstGeom>
-          <a:noFill/>
-          <a:ln/>
-        </p:spPr>
-        <p:txBody>
-          <a:bodyPr wrap="square" lIns="0" tIns="0" rIns="0" bIns="0" rtlCol="0" anchor="ctr"/>
-          <a:lstStyle/>
-          <a:p>
-            <a:r>
-              <a:rPr lang="en-US" sz="850" dirty="0">
-                <a:solidFill>
-                  <a:srgbClr val="FFFFFF"/>
-                </a:solidFill>
-                <a:latin typeface="Candara" panose="020E0502030303020204" pitchFamily="34" charset="0"/>
-                <a:ea typeface="Calibri" pitchFamily="34" charset="-122"/>
-                <a:cs typeface="Calibri" pitchFamily="34" charset="-120"/>
-              </a:rPr>
-              <a:t>Status</a:t>
-            </a:r>
-            <a:endParaRPr lang="en-US" sz="850" dirty="0">
-              <a:latin typeface="Candara" panose="020E0502030303020204" pitchFamily="34" charset="0"/>
-            </a:endParaRPr>
-          </a:p>
-        </p:txBody>
-      </p:sp>
-      <p:sp>
-        <p:nvSpPr>
-          <p:cNvPr id="121" name="Text 119"/>
-          <p:cNvSpPr/>
-          <p:nvPr/>
-        </p:nvSpPr>
-        <p:spPr>
-          <a:xfrm>
-            <a:off x="11088783" y="3218743"/>
-            <a:ext cx="475364" cy="141695"/>
-          </a:xfrm>
-          <a:prstGeom prst="rect">
-            <a:avLst/>
-          </a:prstGeom>
-          <a:noFill/>
-          <a:ln/>
-        </p:spPr>
-        <p:txBody>
-          <a:bodyPr wrap="square" lIns="0" tIns="0" rIns="0" bIns="0" rtlCol="0" anchor="ctr"/>
-          <a:lstStyle/>
-          <a:p>
-            <a:pPr algn="r"/>
-            <a:r>
-              <a:rPr lang="en-US" sz="750" dirty="0">
-                <a:solidFill>
-                  <a:srgbClr val="4D8C6A"/>
-                </a:solidFill>
-                <a:latin typeface="Candara" panose="020E0502030303020204" pitchFamily="34" charset="0"/>
-                <a:ea typeface="Calibri" pitchFamily="34" charset="-122"/>
-                <a:cs typeface="Calibri" pitchFamily="34" charset="-120"/>
-              </a:rPr>
-              <a:t>string(50)</a:t>
-            </a:r>
-            <a:endParaRPr lang="en-US" sz="750" dirty="0">
-              <a:latin typeface="Candara" panose="020E0502030303020204" pitchFamily="34" charset="0"/>
-            </a:endParaRPr>
-          </a:p>
-        </p:txBody>
-      </p:sp>
-      <p:sp>
-        <p:nvSpPr>
-          <p:cNvPr id="122" name="Text 120"/>
-          <p:cNvSpPr/>
-          <p:nvPr/>
-        </p:nvSpPr>
-        <p:spPr>
-          <a:xfrm>
-            <a:off x="10083205" y="3360438"/>
-            <a:ext cx="1005578" cy="141695"/>
-          </a:xfrm>
-          <a:prstGeom prst="rect">
-            <a:avLst/>
-          </a:prstGeom>
-          <a:noFill/>
-          <a:ln/>
-        </p:spPr>
-        <p:txBody>
-          <a:bodyPr wrap="square" lIns="0" tIns="0" rIns="0" bIns="0" rtlCol="0" anchor="ctr"/>
-          <a:lstStyle/>
-          <a:p>
-            <a:r>
-              <a:rPr lang="en-US" sz="850" dirty="0">
-                <a:solidFill>
-                  <a:srgbClr val="FFFFFF"/>
-                </a:solidFill>
-                <a:latin typeface="Candara" panose="020E0502030303020204" pitchFamily="34" charset="0"/>
-                <a:ea typeface="Calibri" pitchFamily="34" charset="-122"/>
-                <a:cs typeface="Calibri" pitchFamily="34" charset="-120"/>
-              </a:rPr>
-              <a:t>Timestamp</a:t>
-            </a:r>
-            <a:endParaRPr lang="en-US" sz="850" dirty="0">
-              <a:latin typeface="Candara" panose="020E0502030303020204" pitchFamily="34" charset="0"/>
-            </a:endParaRPr>
-          </a:p>
-        </p:txBody>
-      </p:sp>
-      <p:sp>
-        <p:nvSpPr>
-          <p:cNvPr id="123" name="Text 121"/>
-          <p:cNvSpPr/>
-          <p:nvPr/>
-        </p:nvSpPr>
-        <p:spPr>
-          <a:xfrm>
-            <a:off x="11088783" y="3360438"/>
-            <a:ext cx="475364" cy="141695"/>
-          </a:xfrm>
-          <a:prstGeom prst="rect">
-            <a:avLst/>
-          </a:prstGeom>
-          <a:noFill/>
-          <a:ln/>
-        </p:spPr>
-        <p:txBody>
-          <a:bodyPr wrap="square" lIns="0" tIns="0" rIns="0" bIns="0" rtlCol="0" anchor="ctr"/>
-          <a:lstStyle/>
-          <a:p>
-            <a:pPr algn="r"/>
-            <a:r>
-              <a:rPr lang="en-US" sz="750" dirty="0">
-                <a:solidFill>
-                  <a:srgbClr val="4D8C6A"/>
-                </a:solidFill>
-                <a:latin typeface="Candara" panose="020E0502030303020204" pitchFamily="34" charset="0"/>
-                <a:ea typeface="Calibri" pitchFamily="34" charset="-122"/>
-                <a:cs typeface="Calibri" pitchFamily="34" charset="-120"/>
-              </a:rPr>
-              <a:t>DateTime</a:t>
-            </a:r>
-            <a:endParaRPr lang="en-US" sz="750" dirty="0">
-              <a:latin typeface="Candara" panose="020E0502030303020204" pitchFamily="34" charset="0"/>
-            </a:endParaRPr>
-          </a:p>
-        </p:txBody>
-      </p:sp>
-      <p:sp>
-        <p:nvSpPr>
-          <p:cNvPr id="124" name="Shape 122"/>
-          <p:cNvSpPr/>
-          <p:nvPr/>
-        </p:nvSpPr>
-        <p:spPr>
-          <a:xfrm>
-            <a:off x="9671832" y="3913506"/>
+          <p:cNvPr id="141" name="Shape 139"/>
+          <p:cNvSpPr/>
+          <p:nvPr/>
+        </p:nvSpPr>
+        <p:spPr>
+          <a:xfrm>
+            <a:off x="9671832" y="5376165"/>
             <a:ext cx="2011156" cy="1133561"/>
           </a:xfrm>
           <a:prstGeom prst="roundRect">
@@ -34651,13 +33866,13 @@
       </p:sp>
       <p:sp>
         <p:nvSpPr>
-          <p:cNvPr id="125" name="Shape 123"/>
-          <p:cNvSpPr/>
-          <p:nvPr/>
-        </p:nvSpPr>
-        <p:spPr>
-          <a:xfrm>
-            <a:off x="9644407" y="3886081"/>
+          <p:cNvPr id="142" name="Shape 140"/>
+          <p:cNvSpPr/>
+          <p:nvPr/>
+        </p:nvSpPr>
+        <p:spPr>
+          <a:xfrm>
+            <a:off x="9644407" y="5348740"/>
             <a:ext cx="2011156" cy="1133561"/>
           </a:xfrm>
           <a:prstGeom prst="roundRect">
@@ -34687,13 +33902,13 @@
       </p:sp>
       <p:sp>
         <p:nvSpPr>
-          <p:cNvPr id="126" name="Shape 124"/>
-          <p:cNvSpPr/>
-          <p:nvPr/>
-        </p:nvSpPr>
-        <p:spPr>
-          <a:xfrm>
-            <a:off x="9644407" y="3959214"/>
+          <p:cNvPr id="143" name="Shape 141"/>
+          <p:cNvSpPr/>
+          <p:nvPr/>
+        </p:nvSpPr>
+        <p:spPr>
+          <a:xfrm>
+            <a:off x="9644407" y="5421873"/>
             <a:ext cx="50279" cy="987295"/>
           </a:xfrm>
           <a:prstGeom prst="rect">
@@ -34721,13 +33936,13 @@
       </p:sp>
       <p:sp>
         <p:nvSpPr>
-          <p:cNvPr id="127" name="Shape 125"/>
-          <p:cNvSpPr/>
-          <p:nvPr/>
-        </p:nvSpPr>
-        <p:spPr>
-          <a:xfrm>
-            <a:off x="9644407" y="3886081"/>
+          <p:cNvPr id="144" name="Shape 142"/>
+          <p:cNvSpPr/>
+          <p:nvPr/>
+        </p:nvSpPr>
+        <p:spPr>
+          <a:xfrm>
+            <a:off x="9644407" y="5348740"/>
             <a:ext cx="50279" cy="164549"/>
           </a:xfrm>
           <a:prstGeom prst="roundRect">
@@ -34757,13 +33972,13 @@
       </p:sp>
       <p:sp>
         <p:nvSpPr>
-          <p:cNvPr id="128" name="Text 126"/>
-          <p:cNvSpPr/>
-          <p:nvPr/>
-        </p:nvSpPr>
-        <p:spPr>
-          <a:xfrm>
-            <a:off x="9790673" y="3904364"/>
+          <p:cNvPr id="145" name="Text 143"/>
+          <p:cNvSpPr/>
+          <p:nvPr/>
+        </p:nvSpPr>
+        <p:spPr>
+          <a:xfrm>
+            <a:off x="9790673" y="5367023"/>
             <a:ext cx="1810041" cy="237682"/>
           </a:xfrm>
           <a:prstGeom prst="rect">
@@ -34785,7 +34000,7 @@
                 <a:ea typeface="Calibri" pitchFamily="34" charset="-122"/>
                 <a:cs typeface="Calibri" pitchFamily="34" charset="-120"/>
               </a:rPr>
-              <a:t>OperationalMetrics</a:t>
+              <a:t>Alerts</a:t>
             </a:r>
             <a:endParaRPr lang="en-US" sz="1100" dirty="0">
               <a:latin typeface="Candara" panose="020E0502030303020204" pitchFamily="34" charset="0"/>
@@ -34795,13 +34010,13 @@
       </p:sp>
       <p:sp>
         <p:nvSpPr>
-          <p:cNvPr id="129" name="Text 127"/>
-          <p:cNvSpPr/>
-          <p:nvPr/>
-        </p:nvSpPr>
-        <p:spPr>
-          <a:xfrm>
-            <a:off x="9790673" y="4178613"/>
+          <p:cNvPr id="146" name="Text 144"/>
+          <p:cNvSpPr/>
+          <p:nvPr/>
+        </p:nvSpPr>
+        <p:spPr>
+          <a:xfrm>
+            <a:off x="9790673" y="5641272"/>
             <a:ext cx="1810041" cy="164549"/>
           </a:xfrm>
           <a:prstGeom prst="rect">
@@ -34823,7 +34038,7 @@
                 <a:ea typeface="Calibri" pitchFamily="34" charset="-122"/>
                 <a:cs typeface="Calibri" pitchFamily="34" charset="-120"/>
               </a:rPr>
-              <a:t>Calculated KPIs per device</a:t>
+              <a:t>Fired alert records</a:t>
             </a:r>
             <a:endParaRPr lang="en-US" sz="850" dirty="0">
               <a:latin typeface="Candara" panose="020E0502030303020204" pitchFamily="34" charset="0"/>
@@ -34833,13 +34048,13 @@
       </p:sp>
       <p:sp>
         <p:nvSpPr>
-          <p:cNvPr id="130" name="Shape 128"/>
-          <p:cNvSpPr/>
-          <p:nvPr/>
-        </p:nvSpPr>
-        <p:spPr>
-          <a:xfrm>
-            <a:off x="9772390" y="4361445"/>
+          <p:cNvPr id="147" name="Shape 145"/>
+          <p:cNvSpPr/>
+          <p:nvPr/>
+        </p:nvSpPr>
+        <p:spPr>
+          <a:xfrm>
+            <a:off x="9772390" y="5824104"/>
             <a:ext cx="1828324" cy="0"/>
           </a:xfrm>
           <a:prstGeom prst="line">
@@ -34865,13 +34080,13 @@
       </p:sp>
       <p:sp>
         <p:nvSpPr>
-          <p:cNvPr id="131" name="Text 129"/>
-          <p:cNvSpPr/>
-          <p:nvPr/>
-        </p:nvSpPr>
-        <p:spPr>
-          <a:xfrm>
-            <a:off x="9790673" y="4398012"/>
+          <p:cNvPr id="148" name="Text 146"/>
+          <p:cNvSpPr/>
+          <p:nvPr/>
+        </p:nvSpPr>
+        <p:spPr>
+          <a:xfrm>
+            <a:off x="9790673" y="5860671"/>
             <a:ext cx="274249" cy="141695"/>
           </a:xfrm>
           <a:prstGeom prst="rect">
@@ -34903,13 +34118,13 @@
       </p:sp>
       <p:sp>
         <p:nvSpPr>
-          <p:cNvPr id="132" name="Text 130"/>
-          <p:cNvSpPr/>
-          <p:nvPr/>
-        </p:nvSpPr>
-        <p:spPr>
-          <a:xfrm>
-            <a:off x="10083205" y="4398012"/>
+          <p:cNvPr id="149" name="Text 147"/>
+          <p:cNvSpPr/>
+          <p:nvPr/>
+        </p:nvSpPr>
+        <p:spPr>
+          <a:xfrm>
+            <a:off x="10083205" y="5860671"/>
             <a:ext cx="1005578" cy="141695"/>
           </a:xfrm>
           <a:prstGeom prst="rect">
@@ -34931,7 +34146,7 @@
                 <a:ea typeface="Calibri" pitchFamily="34" charset="-122"/>
                 <a:cs typeface="Calibri" pitchFamily="34" charset="-120"/>
               </a:rPr>
-              <a:t>MetricId</a:t>
+              <a:t>AlertId</a:t>
             </a:r>
             <a:endParaRPr lang="en-US" sz="850" dirty="0">
               <a:latin typeface="Candara" panose="020E0502030303020204" pitchFamily="34" charset="0"/>
@@ -34941,13 +34156,13 @@
       </p:sp>
       <p:sp>
         <p:nvSpPr>
-          <p:cNvPr id="133" name="Text 131"/>
-          <p:cNvSpPr/>
-          <p:nvPr/>
-        </p:nvSpPr>
-        <p:spPr>
-          <a:xfrm>
-            <a:off x="11088783" y="4398012"/>
+          <p:cNvPr id="150" name="Text 148"/>
+          <p:cNvSpPr/>
+          <p:nvPr/>
+        </p:nvSpPr>
+        <p:spPr>
+          <a:xfrm>
+            <a:off x="11088783" y="5860671"/>
             <a:ext cx="475364" cy="141695"/>
           </a:xfrm>
           <a:prstGeom prst="rect">
@@ -34980,13 +34195,13 @@
       </p:sp>
       <p:sp>
         <p:nvSpPr>
-          <p:cNvPr id="134" name="Text 132"/>
-          <p:cNvSpPr/>
-          <p:nvPr/>
-        </p:nvSpPr>
-        <p:spPr>
-          <a:xfrm>
-            <a:off x="9790673" y="4539707"/>
+          <p:cNvPr id="151" name="Text 149"/>
+          <p:cNvSpPr/>
+          <p:nvPr/>
+        </p:nvSpPr>
+        <p:spPr>
+          <a:xfrm>
+            <a:off x="9790673" y="6002366"/>
             <a:ext cx="274249" cy="141695"/>
           </a:xfrm>
           <a:prstGeom prst="rect">
@@ -35018,13 +34233,13 @@
       </p:sp>
       <p:sp>
         <p:nvSpPr>
-          <p:cNvPr id="135" name="Text 133"/>
-          <p:cNvSpPr/>
-          <p:nvPr/>
-        </p:nvSpPr>
-        <p:spPr>
-          <a:xfrm>
-            <a:off x="10083205" y="4539707"/>
+          <p:cNvPr id="152" name="Text 150"/>
+          <p:cNvSpPr/>
+          <p:nvPr/>
+        </p:nvSpPr>
+        <p:spPr>
+          <a:xfrm>
+            <a:off x="10083205" y="6002366"/>
             <a:ext cx="1005578" cy="141695"/>
           </a:xfrm>
           <a:prstGeom prst="rect">
@@ -35046,7 +34261,7 @@
                 <a:ea typeface="Calibri" pitchFamily="34" charset="-122"/>
                 <a:cs typeface="Calibri" pitchFamily="34" charset="-120"/>
               </a:rPr>
-              <a:t>DeviceId</a:t>
+              <a:t>AlertRuleId</a:t>
             </a:r>
             <a:endParaRPr lang="en-US" sz="850" dirty="0">
               <a:latin typeface="Candara" panose="020E0502030303020204" pitchFamily="34" charset="0"/>
@@ -35056,13 +34271,13 @@
       </p:sp>
       <p:sp>
         <p:nvSpPr>
-          <p:cNvPr id="136" name="Text 134"/>
-          <p:cNvSpPr/>
-          <p:nvPr/>
-        </p:nvSpPr>
-        <p:spPr>
-          <a:xfrm>
-            <a:off x="11088783" y="4539707"/>
+          <p:cNvPr id="153" name="Text 151"/>
+          <p:cNvSpPr/>
+          <p:nvPr/>
+        </p:nvSpPr>
+        <p:spPr>
+          <a:xfrm>
+            <a:off x="11088783" y="6002366"/>
             <a:ext cx="475364" cy="141695"/>
           </a:xfrm>
           <a:prstGeom prst="rect">
@@ -35095,14 +34310,14 @@
       </p:sp>
       <p:sp>
         <p:nvSpPr>
-          <p:cNvPr id="137" name="Text 135"/>
-          <p:cNvSpPr/>
-          <p:nvPr/>
-        </p:nvSpPr>
-        <p:spPr>
-          <a:xfrm>
-            <a:off x="10083205" y="4681402"/>
-            <a:ext cx="1005578" cy="141695"/>
+          <p:cNvPr id="154" name="Text 152"/>
+          <p:cNvSpPr/>
+          <p:nvPr/>
+        </p:nvSpPr>
+        <p:spPr>
+          <a:xfrm>
+            <a:off x="9790673" y="6144061"/>
+            <a:ext cx="274249" cy="141695"/>
           </a:xfrm>
           <a:prstGeom prst="rect">
             <a:avLst/>
@@ -35115,32 +34330,32 @@
           <a:lstStyle/>
           <a:p>
             <a:r>
-              <a:rPr lang="en-US" sz="850" dirty="0">
-                <a:solidFill>
-                  <a:srgbClr val="FFFFFF"/>
+              <a:rPr lang="en-US" sz="700" b="1" dirty="0">
+                <a:solidFill>
+                  <a:srgbClr val="60B8FF"/>
                 </a:solidFill>
                 <a:latin typeface="Candara" panose="020E0502030303020204" pitchFamily="34" charset="0"/>
                 <a:ea typeface="Calibri" pitchFamily="34" charset="-122"/>
                 <a:cs typeface="Calibri" pitchFamily="34" charset="-120"/>
               </a:rPr>
-              <a:t>MetricType</a:t>
-            </a:r>
-            <a:endParaRPr lang="en-US" sz="850" dirty="0">
-              <a:latin typeface="Candara" panose="020E0502030303020204" pitchFamily="34" charset="0"/>
-            </a:endParaRPr>
-          </a:p>
-        </p:txBody>
-      </p:sp>
-      <p:sp>
-        <p:nvSpPr>
-          <p:cNvPr id="138" name="Text 136"/>
-          <p:cNvSpPr/>
-          <p:nvPr/>
-        </p:nvSpPr>
-        <p:spPr>
-          <a:xfrm>
-            <a:off x="11088783" y="4681402"/>
-            <a:ext cx="475364" cy="141695"/>
+              <a:t>FK</a:t>
+            </a:r>
+            <a:endParaRPr lang="en-US" sz="700" dirty="0">
+              <a:latin typeface="Candara" panose="020E0502030303020204" pitchFamily="34" charset="0"/>
+            </a:endParaRPr>
+          </a:p>
+        </p:txBody>
+      </p:sp>
+      <p:sp>
+        <p:nvSpPr>
+          <p:cNvPr id="155" name="Text 153"/>
+          <p:cNvSpPr/>
+          <p:nvPr/>
+        </p:nvSpPr>
+        <p:spPr>
+          <a:xfrm>
+            <a:off x="10083205" y="6144061"/>
+            <a:ext cx="1005578" cy="141695"/>
           </a:xfrm>
           <a:prstGeom prst="rect">
             <a:avLst/>
@@ -35152,34 +34367,33 @@
           <a:bodyPr wrap="square" lIns="0" tIns="0" rIns="0" bIns="0" rtlCol="0" anchor="ctr"/>
           <a:lstStyle/>
           <a:p>
-            <a:pPr algn="r"/>
-            <a:r>
-              <a:rPr lang="en-US" sz="750" dirty="0">
-                <a:solidFill>
-                  <a:srgbClr val="4D8C6A"/>
+            <a:r>
+              <a:rPr lang="en-US" sz="850" i="1" dirty="0">
+                <a:solidFill>
+                  <a:srgbClr val="7AB896"/>
                 </a:solidFill>
                 <a:latin typeface="Candara" panose="020E0502030303020204" pitchFamily="34" charset="0"/>
                 <a:ea typeface="Calibri" pitchFamily="34" charset="-122"/>
                 <a:cs typeface="Calibri" pitchFamily="34" charset="-120"/>
               </a:rPr>
-              <a:t>string(50)</a:t>
-            </a:r>
-            <a:endParaRPr lang="en-US" sz="750" dirty="0">
-              <a:latin typeface="Candara" panose="020E0502030303020204" pitchFamily="34" charset="0"/>
-            </a:endParaRPr>
-          </a:p>
-        </p:txBody>
-      </p:sp>
-      <p:sp>
-        <p:nvSpPr>
-          <p:cNvPr id="139" name="Text 137"/>
-          <p:cNvSpPr/>
-          <p:nvPr/>
-        </p:nvSpPr>
-        <p:spPr>
-          <a:xfrm>
-            <a:off x="10083205" y="4823097"/>
-            <a:ext cx="1005578" cy="141695"/>
+              <a:t>DeviceId</a:t>
+            </a:r>
+            <a:endParaRPr lang="en-US" sz="850" dirty="0">
+              <a:latin typeface="Candara" panose="020E0502030303020204" pitchFamily="34" charset="0"/>
+            </a:endParaRPr>
+          </a:p>
+        </p:txBody>
+      </p:sp>
+      <p:sp>
+        <p:nvSpPr>
+          <p:cNvPr id="156" name="Text 154"/>
+          <p:cNvSpPr/>
+          <p:nvPr/>
+        </p:nvSpPr>
+        <p:spPr>
+          <a:xfrm>
+            <a:off x="11088783" y="6144061"/>
+            <a:ext cx="475364" cy="141695"/>
           </a:xfrm>
           <a:prstGeom prst="rect">
             <a:avLst/>
@@ -35191,33 +34405,34 @@
           <a:bodyPr wrap="square" lIns="0" tIns="0" rIns="0" bIns="0" rtlCol="0" anchor="ctr"/>
           <a:lstStyle/>
           <a:p>
-            <a:r>
-              <a:rPr lang="en-US" sz="850" dirty="0">
-                <a:solidFill>
-                  <a:srgbClr val="FFFFFF"/>
+            <a:pPr algn="r"/>
+            <a:r>
+              <a:rPr lang="en-US" sz="750" dirty="0">
+                <a:solidFill>
+                  <a:srgbClr val="4D8C6A"/>
                 </a:solidFill>
                 <a:latin typeface="Candara" panose="020E0502030303020204" pitchFamily="34" charset="0"/>
                 <a:ea typeface="Calibri" pitchFamily="34" charset="-122"/>
                 <a:cs typeface="Calibri" pitchFamily="34" charset="-120"/>
               </a:rPr>
-              <a:t>MetricValue</a:t>
-            </a:r>
-            <a:endParaRPr lang="en-US" sz="850" dirty="0">
-              <a:latin typeface="Candara" panose="020E0502030303020204" pitchFamily="34" charset="0"/>
-            </a:endParaRPr>
-          </a:p>
-        </p:txBody>
-      </p:sp>
-      <p:sp>
-        <p:nvSpPr>
-          <p:cNvPr id="140" name="Text 138"/>
-          <p:cNvSpPr/>
-          <p:nvPr/>
-        </p:nvSpPr>
-        <p:spPr>
-          <a:xfrm>
-            <a:off x="11088783" y="4823097"/>
-            <a:ext cx="475364" cy="141695"/>
+              <a:t>int</a:t>
+            </a:r>
+            <a:endParaRPr lang="en-US" sz="750" dirty="0">
+              <a:latin typeface="Candara" panose="020E0502030303020204" pitchFamily="34" charset="0"/>
+            </a:endParaRPr>
+          </a:p>
+        </p:txBody>
+      </p:sp>
+      <p:sp>
+        <p:nvSpPr>
+          <p:cNvPr id="157" name="Text 155"/>
+          <p:cNvSpPr/>
+          <p:nvPr/>
+        </p:nvSpPr>
+        <p:spPr>
+          <a:xfrm>
+            <a:off x="9790673" y="6285756"/>
+            <a:ext cx="274249" cy="141695"/>
           </a:xfrm>
           <a:prstGeom prst="rect">
             <a:avLst/>
@@ -35229,17 +34444,93 @@
           <a:bodyPr wrap="square" lIns="0" tIns="0" rIns="0" bIns="0" rtlCol="0" anchor="ctr"/>
           <a:lstStyle/>
           <a:p>
-            <a:pPr algn="r"/>
-            <a:r>
-              <a:rPr lang="en-US" sz="750" dirty="0">
-                <a:solidFill>
-                  <a:srgbClr val="4D8C6A"/>
+            <a:r>
+              <a:rPr lang="en-US" sz="700" b="1" dirty="0">
+                <a:solidFill>
+                  <a:srgbClr val="60B8FF"/>
                 </a:solidFill>
                 <a:latin typeface="Candara" panose="020E0502030303020204" pitchFamily="34" charset="0"/>
                 <a:ea typeface="Calibri" pitchFamily="34" charset="-122"/>
                 <a:cs typeface="Calibri" pitchFamily="34" charset="-120"/>
               </a:rPr>
-              <a:t>dec(18,4)</a:t>
+              <a:t>FK?</a:t>
+            </a:r>
+            <a:endParaRPr lang="en-US" sz="700" dirty="0">
+              <a:latin typeface="Candara" panose="020E0502030303020204" pitchFamily="34" charset="0"/>
+            </a:endParaRPr>
+          </a:p>
+        </p:txBody>
+      </p:sp>
+      <p:sp>
+        <p:nvSpPr>
+          <p:cNvPr id="158" name="Text 156"/>
+          <p:cNvSpPr/>
+          <p:nvPr/>
+        </p:nvSpPr>
+        <p:spPr>
+          <a:xfrm>
+            <a:off x="10083205" y="6285756"/>
+            <a:ext cx="1005578" cy="141695"/>
+          </a:xfrm>
+          <a:prstGeom prst="rect">
+            <a:avLst/>
+          </a:prstGeom>
+          <a:noFill/>
+          <a:ln/>
+        </p:spPr>
+        <p:txBody>
+          <a:bodyPr wrap="square" lIns="0" tIns="0" rIns="0" bIns="0" rtlCol="0" anchor="ctr"/>
+          <a:lstStyle/>
+          <a:p>
+            <a:r>
+              <a:rPr lang="en-US" sz="850" i="1" dirty="0">
+                <a:solidFill>
+                  <a:srgbClr val="7AB896"/>
+                </a:solidFill>
+                <a:latin typeface="Candara" panose="020E0502030303020204" pitchFamily="34" charset="0"/>
+                <a:ea typeface="Calibri" pitchFamily="34" charset="-122"/>
+                <a:cs typeface="Calibri" pitchFamily="34" charset="-120"/>
+              </a:rPr>
+              <a:t>SensorId</a:t>
+            </a:r>
+            <a:endParaRPr lang="en-US" sz="850" dirty="0">
+              <a:latin typeface="Candara" panose="020E0502030303020204" pitchFamily="34" charset="0"/>
+            </a:endParaRPr>
+          </a:p>
+        </p:txBody>
+      </p:sp>
+      <p:sp>
+        <p:nvSpPr>
+          <p:cNvPr id="159" name="Text 157"/>
+          <p:cNvSpPr/>
+          <p:nvPr/>
+        </p:nvSpPr>
+        <p:spPr>
+          <a:xfrm>
+            <a:off x="11088783" y="6285756"/>
+            <a:ext cx="475364" cy="141695"/>
+          </a:xfrm>
+          <a:prstGeom prst="rect">
+            <a:avLst/>
+          </a:prstGeom>
+          <a:noFill/>
+          <a:ln/>
+        </p:spPr>
+        <p:txBody>
+          <a:bodyPr wrap="square" lIns="0" tIns="0" rIns="0" bIns="0" rtlCol="0" anchor="ctr"/>
+          <a:lstStyle/>
+          <a:p>
+            <a:pPr algn="r"/>
+            <a:r>
+              <a:rPr lang="en-US" sz="750" dirty="0">
+                <a:solidFill>
+                  <a:srgbClr val="4D8C6A"/>
+                </a:solidFill>
+                <a:latin typeface="Candara" panose="020E0502030303020204" pitchFamily="34" charset="0"/>
+                <a:ea typeface="Calibri" pitchFamily="34" charset="-122"/>
+                <a:cs typeface="Calibri" pitchFamily="34" charset="-120"/>
+              </a:rPr>
+              <a:t>int?</a:t>
             </a:r>
             <a:endParaRPr lang="en-US" sz="750" dirty="0">
               <a:latin typeface="Candara" panose="020E0502030303020204" pitchFamily="34" charset="0"/>
@@ -35249,13 +34540,13 @@
       </p:sp>
       <p:sp>
         <p:nvSpPr>
-          <p:cNvPr id="141" name="Shape 139"/>
-          <p:cNvSpPr/>
-          <p:nvPr/>
-        </p:nvSpPr>
-        <p:spPr>
-          <a:xfrm>
-            <a:off x="9671832" y="5376165"/>
+          <p:cNvPr id="177" name="Shape 175"/>
+          <p:cNvSpPr/>
+          <p:nvPr/>
+        </p:nvSpPr>
+        <p:spPr>
+          <a:xfrm>
+            <a:off x="4963899" y="5147624"/>
             <a:ext cx="2011156" cy="1133561"/>
           </a:xfrm>
           <a:prstGeom prst="roundRect">
@@ -35287,13 +34578,13 @@
       </p:sp>
       <p:sp>
         <p:nvSpPr>
-          <p:cNvPr id="142" name="Shape 140"/>
-          <p:cNvSpPr/>
-          <p:nvPr/>
-        </p:nvSpPr>
-        <p:spPr>
-          <a:xfrm>
-            <a:off x="9644407" y="5348740"/>
+          <p:cNvPr id="178" name="Shape 176"/>
+          <p:cNvSpPr/>
+          <p:nvPr/>
+        </p:nvSpPr>
+        <p:spPr>
+          <a:xfrm>
+            <a:off x="4936474" y="5120199"/>
             <a:ext cx="2011156" cy="1133561"/>
           </a:xfrm>
           <a:prstGeom prst="roundRect">
@@ -35323,83 +34614,13 @@
       </p:sp>
       <p:sp>
         <p:nvSpPr>
-          <p:cNvPr id="143" name="Shape 141"/>
-          <p:cNvSpPr/>
-          <p:nvPr/>
-        </p:nvSpPr>
-        <p:spPr>
-          <a:xfrm>
-            <a:off x="9644407" y="5421873"/>
-            <a:ext cx="50279" cy="987295"/>
-          </a:xfrm>
-          <a:prstGeom prst="rect">
-            <a:avLst/>
-          </a:prstGeom>
-          <a:solidFill>
-            <a:srgbClr val="1B5C3A"/>
-          </a:solidFill>
-          <a:ln w="12700">
-            <a:solidFill>
-              <a:srgbClr val="1B5C3A"/>
-            </a:solidFill>
-            <a:prstDash val="solid"/>
-          </a:ln>
-        </p:spPr>
-        <p:txBody>
-          <a:bodyPr/>
-          <a:lstStyle/>
-          <a:p>
-            <a:endParaRPr lang="en-US" sz="1799">
-              <a:latin typeface="Candara" panose="020E0502030303020204" pitchFamily="34" charset="0"/>
-            </a:endParaRPr>
-          </a:p>
-        </p:txBody>
-      </p:sp>
-      <p:sp>
-        <p:nvSpPr>
-          <p:cNvPr id="144" name="Shape 142"/>
-          <p:cNvSpPr/>
-          <p:nvPr/>
-        </p:nvSpPr>
-        <p:spPr>
-          <a:xfrm>
-            <a:off x="9644407" y="5348740"/>
-            <a:ext cx="50279" cy="164549"/>
-          </a:xfrm>
-          <a:prstGeom prst="roundRect">
-            <a:avLst>
-              <a:gd name="adj" fmla="val 72727"/>
-            </a:avLst>
-          </a:prstGeom>
-          <a:solidFill>
-            <a:srgbClr val="1B5C3A"/>
-          </a:solidFill>
-          <a:ln w="12700">
-            <a:solidFill>
-              <a:srgbClr val="1B5C3A"/>
-            </a:solidFill>
-            <a:prstDash val="solid"/>
-          </a:ln>
-        </p:spPr>
-        <p:txBody>
-          <a:bodyPr/>
-          <a:lstStyle/>
-          <a:p>
-            <a:endParaRPr lang="en-US" sz="1799">
-              <a:latin typeface="Candara" panose="020E0502030303020204" pitchFamily="34" charset="0"/>
-            </a:endParaRPr>
-          </a:p>
-        </p:txBody>
-      </p:sp>
-      <p:sp>
-        <p:nvSpPr>
-          <p:cNvPr id="145" name="Text 143"/>
-          <p:cNvSpPr/>
-          <p:nvPr/>
-        </p:nvSpPr>
-        <p:spPr>
-          <a:xfrm>
-            <a:off x="9790673" y="5367023"/>
+          <p:cNvPr id="181" name="Text 179"/>
+          <p:cNvSpPr/>
+          <p:nvPr/>
+        </p:nvSpPr>
+        <p:spPr>
+          <a:xfrm>
+            <a:off x="5082739" y="5138483"/>
             <a:ext cx="1810041" cy="237682"/>
           </a:xfrm>
           <a:prstGeom prst="rect">
@@ -35421,7 +34642,7 @@
                 <a:ea typeface="Calibri" pitchFamily="34" charset="-122"/>
                 <a:cs typeface="Calibri" pitchFamily="34" charset="-120"/>
               </a:rPr>
-              <a:t>Alerts</a:t>
+              <a:t>DeviceCommands</a:t>
             </a:r>
             <a:endParaRPr lang="en-US" sz="1100" dirty="0">
               <a:latin typeface="Candara" panose="020E0502030303020204" pitchFamily="34" charset="0"/>
@@ -35431,13 +34652,13 @@
       </p:sp>
       <p:sp>
         <p:nvSpPr>
-          <p:cNvPr id="146" name="Text 144"/>
-          <p:cNvSpPr/>
-          <p:nvPr/>
-        </p:nvSpPr>
-        <p:spPr>
-          <a:xfrm>
-            <a:off x="9790673" y="5641272"/>
+          <p:cNvPr id="182" name="Text 180"/>
+          <p:cNvSpPr/>
+          <p:nvPr/>
+        </p:nvSpPr>
+        <p:spPr>
+          <a:xfrm>
+            <a:off x="5082739" y="5412731"/>
             <a:ext cx="1810041" cy="164549"/>
           </a:xfrm>
           <a:prstGeom prst="rect">
@@ -35459,7 +34680,7 @@
                 <a:ea typeface="Calibri" pitchFamily="34" charset="-122"/>
                 <a:cs typeface="Calibri" pitchFamily="34" charset="-120"/>
               </a:rPr>
-              <a:t>Fired alert records</a:t>
+              <a:t>Commands sent to device / actuator</a:t>
             </a:r>
             <a:endParaRPr lang="en-US" sz="850" dirty="0">
               <a:latin typeface="Candara" panose="020E0502030303020204" pitchFamily="34" charset="0"/>
@@ -35469,13 +34690,13 @@
       </p:sp>
       <p:sp>
         <p:nvSpPr>
-          <p:cNvPr id="147" name="Shape 145"/>
-          <p:cNvSpPr/>
-          <p:nvPr/>
-        </p:nvSpPr>
-        <p:spPr>
-          <a:xfrm>
-            <a:off x="9772390" y="5824104"/>
+          <p:cNvPr id="183" name="Shape 181"/>
+          <p:cNvSpPr/>
+          <p:nvPr/>
+        </p:nvSpPr>
+        <p:spPr>
+          <a:xfrm>
+            <a:off x="5064456" y="5595564"/>
             <a:ext cx="1828324" cy="0"/>
           </a:xfrm>
           <a:prstGeom prst="line">
@@ -35501,13 +34722,13 @@
       </p:sp>
       <p:sp>
         <p:nvSpPr>
-          <p:cNvPr id="148" name="Text 146"/>
-          <p:cNvSpPr/>
-          <p:nvPr/>
-        </p:nvSpPr>
-        <p:spPr>
-          <a:xfrm>
-            <a:off x="9790673" y="5860671"/>
+          <p:cNvPr id="184" name="Text 182"/>
+          <p:cNvSpPr/>
+          <p:nvPr/>
+        </p:nvSpPr>
+        <p:spPr>
+          <a:xfrm>
+            <a:off x="5082739" y="5632130"/>
             <a:ext cx="274249" cy="141695"/>
           </a:xfrm>
           <a:prstGeom prst="rect">
@@ -35539,13 +34760,13 @@
       </p:sp>
       <p:sp>
         <p:nvSpPr>
-          <p:cNvPr id="149" name="Text 147"/>
-          <p:cNvSpPr/>
-          <p:nvPr/>
-        </p:nvSpPr>
-        <p:spPr>
-          <a:xfrm>
-            <a:off x="10083205" y="5860671"/>
+          <p:cNvPr id="185" name="Text 183"/>
+          <p:cNvSpPr/>
+          <p:nvPr/>
+        </p:nvSpPr>
+        <p:spPr>
+          <a:xfrm>
+            <a:off x="5375271" y="5632130"/>
             <a:ext cx="1005578" cy="141695"/>
           </a:xfrm>
           <a:prstGeom prst="rect">
@@ -35567,7 +34788,7 @@
                 <a:ea typeface="Calibri" pitchFamily="34" charset="-122"/>
                 <a:cs typeface="Calibri" pitchFamily="34" charset="-120"/>
               </a:rPr>
-              <a:t>AlertId</a:t>
+              <a:t>CommandId</a:t>
             </a:r>
             <a:endParaRPr lang="en-US" sz="850" dirty="0">
               <a:latin typeface="Candara" panose="020E0502030303020204" pitchFamily="34" charset="0"/>
@@ -35577,13 +34798,13 @@
       </p:sp>
       <p:sp>
         <p:nvSpPr>
-          <p:cNvPr id="150" name="Text 148"/>
-          <p:cNvSpPr/>
-          <p:nvPr/>
-        </p:nvSpPr>
-        <p:spPr>
-          <a:xfrm>
-            <a:off x="11088783" y="5860671"/>
+          <p:cNvPr id="186" name="Text 184"/>
+          <p:cNvSpPr/>
+          <p:nvPr/>
+        </p:nvSpPr>
+        <p:spPr>
+          <a:xfrm>
+            <a:off x="6380849" y="5632130"/>
             <a:ext cx="475364" cy="141695"/>
           </a:xfrm>
           <a:prstGeom prst="rect">
@@ -35616,13 +34837,13 @@
       </p:sp>
       <p:sp>
         <p:nvSpPr>
-          <p:cNvPr id="151" name="Text 149"/>
-          <p:cNvSpPr/>
-          <p:nvPr/>
-        </p:nvSpPr>
-        <p:spPr>
-          <a:xfrm>
-            <a:off x="9790673" y="6002366"/>
+          <p:cNvPr id="187" name="Text 185"/>
+          <p:cNvSpPr/>
+          <p:nvPr/>
+        </p:nvSpPr>
+        <p:spPr>
+          <a:xfrm>
+            <a:off x="5082739" y="5773825"/>
             <a:ext cx="274249" cy="141695"/>
           </a:xfrm>
           <a:prstGeom prst="rect">
@@ -35654,13 +34875,13 @@
       </p:sp>
       <p:sp>
         <p:nvSpPr>
-          <p:cNvPr id="152" name="Text 150"/>
-          <p:cNvSpPr/>
-          <p:nvPr/>
-        </p:nvSpPr>
-        <p:spPr>
-          <a:xfrm>
-            <a:off x="10083205" y="6002366"/>
+          <p:cNvPr id="188" name="Text 186"/>
+          <p:cNvSpPr/>
+          <p:nvPr/>
+        </p:nvSpPr>
+        <p:spPr>
+          <a:xfrm>
+            <a:off x="5375271" y="5773825"/>
             <a:ext cx="1005578" cy="141695"/>
           </a:xfrm>
           <a:prstGeom prst="rect">
@@ -35682,7 +34903,7 @@
                 <a:ea typeface="Calibri" pitchFamily="34" charset="-122"/>
                 <a:cs typeface="Calibri" pitchFamily="34" charset="-120"/>
               </a:rPr>
-              <a:t>AlertRuleId</a:t>
+              <a:t>DeviceId</a:t>
             </a:r>
             <a:endParaRPr lang="en-US" sz="850" dirty="0">
               <a:latin typeface="Candara" panose="020E0502030303020204" pitchFamily="34" charset="0"/>
@@ -35692,13 +34913,13 @@
       </p:sp>
       <p:sp>
         <p:nvSpPr>
-          <p:cNvPr id="153" name="Text 151"/>
-          <p:cNvSpPr/>
-          <p:nvPr/>
-        </p:nvSpPr>
-        <p:spPr>
-          <a:xfrm>
-            <a:off x="11088783" y="6002366"/>
+          <p:cNvPr id="189" name="Text 187"/>
+          <p:cNvSpPr/>
+          <p:nvPr/>
+        </p:nvSpPr>
+        <p:spPr>
+          <a:xfrm>
+            <a:off x="6380849" y="5773825"/>
             <a:ext cx="475364" cy="141695"/>
           </a:xfrm>
           <a:prstGeom prst="rect">
@@ -35731,13 +34952,13 @@
       </p:sp>
       <p:sp>
         <p:nvSpPr>
-          <p:cNvPr id="154" name="Text 152"/>
-          <p:cNvSpPr/>
-          <p:nvPr/>
-        </p:nvSpPr>
-        <p:spPr>
-          <a:xfrm>
-            <a:off x="9790673" y="6144061"/>
+          <p:cNvPr id="190" name="Text 188"/>
+          <p:cNvSpPr/>
+          <p:nvPr/>
+        </p:nvSpPr>
+        <p:spPr>
+          <a:xfrm>
+            <a:off x="5082739" y="5915520"/>
             <a:ext cx="274249" cy="141695"/>
           </a:xfrm>
           <a:prstGeom prst="rect">
@@ -35759,7 +34980,7 @@
                 <a:ea typeface="Calibri" pitchFamily="34" charset="-122"/>
                 <a:cs typeface="Calibri" pitchFamily="34" charset="-120"/>
               </a:rPr>
-              <a:t>FK</a:t>
+              <a:t>FK?</a:t>
             </a:r>
             <a:endParaRPr lang="en-US" sz="700" dirty="0">
               <a:latin typeface="Candara" panose="020E0502030303020204" pitchFamily="34" charset="0"/>
@@ -35769,13 +34990,13 @@
       </p:sp>
       <p:sp>
         <p:nvSpPr>
-          <p:cNvPr id="155" name="Text 153"/>
-          <p:cNvSpPr/>
-          <p:nvPr/>
-        </p:nvSpPr>
-        <p:spPr>
-          <a:xfrm>
-            <a:off x="10083205" y="6144061"/>
+          <p:cNvPr id="191" name="Text 189"/>
+          <p:cNvSpPr/>
+          <p:nvPr/>
+        </p:nvSpPr>
+        <p:spPr>
+          <a:xfrm>
+            <a:off x="5375271" y="5915520"/>
             <a:ext cx="1005578" cy="141695"/>
           </a:xfrm>
           <a:prstGeom prst="rect">
@@ -35797,7 +35018,7 @@
                 <a:ea typeface="Calibri" pitchFamily="34" charset="-122"/>
                 <a:cs typeface="Calibri" pitchFamily="34" charset="-120"/>
               </a:rPr>
-              <a:t>DeviceId</a:t>
+              <a:t>ActuatorId</a:t>
             </a:r>
             <a:endParaRPr lang="en-US" sz="850" dirty="0">
               <a:latin typeface="Candara" panose="020E0502030303020204" pitchFamily="34" charset="0"/>
@@ -35807,13 +35028,13 @@
       </p:sp>
       <p:sp>
         <p:nvSpPr>
-          <p:cNvPr id="156" name="Text 154"/>
-          <p:cNvSpPr/>
-          <p:nvPr/>
-        </p:nvSpPr>
-        <p:spPr>
-          <a:xfrm>
-            <a:off x="11088783" y="6144061"/>
+          <p:cNvPr id="192" name="Text 190"/>
+          <p:cNvSpPr/>
+          <p:nvPr/>
+        </p:nvSpPr>
+        <p:spPr>
+          <a:xfrm>
+            <a:off x="6380849" y="5915520"/>
             <a:ext cx="475364" cy="141695"/>
           </a:xfrm>
           <a:prstGeom prst="rect">
@@ -35836,7 +35057,7 @@
                 <a:ea typeface="Calibri" pitchFamily="34" charset="-122"/>
                 <a:cs typeface="Calibri" pitchFamily="34" charset="-120"/>
               </a:rPr>
-              <a:t>int</a:t>
+              <a:t>int?</a:t>
             </a:r>
             <a:endParaRPr lang="en-US" sz="750" dirty="0">
               <a:latin typeface="Candara" panose="020E0502030303020204" pitchFamily="34" charset="0"/>
@@ -35846,14 +35067,14 @@
       </p:sp>
       <p:sp>
         <p:nvSpPr>
-          <p:cNvPr id="157" name="Text 155"/>
-          <p:cNvSpPr/>
-          <p:nvPr/>
-        </p:nvSpPr>
-        <p:spPr>
-          <a:xfrm>
-            <a:off x="9790673" y="6285756"/>
-            <a:ext cx="274249" cy="141695"/>
+          <p:cNvPr id="193" name="Text 191"/>
+          <p:cNvSpPr/>
+          <p:nvPr/>
+        </p:nvSpPr>
+        <p:spPr>
+          <a:xfrm>
+            <a:off x="5375271" y="6057215"/>
+            <a:ext cx="1005578" cy="141695"/>
           </a:xfrm>
           <a:prstGeom prst="rect">
             <a:avLst/>
@@ -35866,32 +35087,32 @@
           <a:lstStyle/>
           <a:p>
             <a:r>
-              <a:rPr lang="en-US" sz="700" b="1" dirty="0">
-                <a:solidFill>
-                  <a:srgbClr val="60B8FF"/>
+              <a:rPr lang="en-US" sz="850" dirty="0">
+                <a:solidFill>
+                  <a:srgbClr val="FFFFFF"/>
                 </a:solidFill>
                 <a:latin typeface="Candara" panose="020E0502030303020204" pitchFamily="34" charset="0"/>
                 <a:ea typeface="Calibri" pitchFamily="34" charset="-122"/>
                 <a:cs typeface="Calibri" pitchFamily="34" charset="-120"/>
               </a:rPr>
-              <a:t>FK?</a:t>
-            </a:r>
-            <a:endParaRPr lang="en-US" sz="700" dirty="0">
-              <a:latin typeface="Candara" panose="020E0502030303020204" pitchFamily="34" charset="0"/>
-            </a:endParaRPr>
-          </a:p>
-        </p:txBody>
-      </p:sp>
-      <p:sp>
-        <p:nvSpPr>
-          <p:cNvPr id="158" name="Text 156"/>
-          <p:cNvSpPr/>
-          <p:nvPr/>
-        </p:nvSpPr>
-        <p:spPr>
-          <a:xfrm>
-            <a:off x="10083205" y="6285756"/>
-            <a:ext cx="1005578" cy="141695"/>
+              <a:t>CommandType</a:t>
+            </a:r>
+            <a:endParaRPr lang="en-US" sz="850" dirty="0">
+              <a:latin typeface="Candara" panose="020E0502030303020204" pitchFamily="34" charset="0"/>
+            </a:endParaRPr>
+          </a:p>
+        </p:txBody>
+      </p:sp>
+      <p:sp>
+        <p:nvSpPr>
+          <p:cNvPr id="194" name="Text 192"/>
+          <p:cNvSpPr/>
+          <p:nvPr/>
+        </p:nvSpPr>
+        <p:spPr>
+          <a:xfrm>
+            <a:off x="6380849" y="6057215"/>
+            <a:ext cx="475364" cy="141695"/>
           </a:xfrm>
           <a:prstGeom prst="rect">
             <a:avLst/>
@@ -35903,55 +35124,17 @@
           <a:bodyPr wrap="square" lIns="0" tIns="0" rIns="0" bIns="0" rtlCol="0" anchor="ctr"/>
           <a:lstStyle/>
           <a:p>
-            <a:r>
-              <a:rPr lang="en-US" sz="850" i="1" dirty="0">
-                <a:solidFill>
-                  <a:srgbClr val="7AB896"/>
+            <a:pPr algn="r"/>
+            <a:r>
+              <a:rPr lang="en-US" sz="750" dirty="0">
+                <a:solidFill>
+                  <a:srgbClr val="4D8C6A"/>
                 </a:solidFill>
                 <a:latin typeface="Candara" panose="020E0502030303020204" pitchFamily="34" charset="0"/>
                 <a:ea typeface="Calibri" pitchFamily="34" charset="-122"/>
                 <a:cs typeface="Calibri" pitchFamily="34" charset="-120"/>
               </a:rPr>
-              <a:t>SensorId</a:t>
-            </a:r>
-            <a:endParaRPr lang="en-US" sz="850" dirty="0">
-              <a:latin typeface="Candara" panose="020E0502030303020204" pitchFamily="34" charset="0"/>
-            </a:endParaRPr>
-          </a:p>
-        </p:txBody>
-      </p:sp>
-      <p:sp>
-        <p:nvSpPr>
-          <p:cNvPr id="159" name="Text 157"/>
-          <p:cNvSpPr/>
-          <p:nvPr/>
-        </p:nvSpPr>
-        <p:spPr>
-          <a:xfrm>
-            <a:off x="11088783" y="6285756"/>
-            <a:ext cx="475364" cy="141695"/>
-          </a:xfrm>
-          <a:prstGeom prst="rect">
-            <a:avLst/>
-          </a:prstGeom>
-          <a:noFill/>
-          <a:ln/>
-        </p:spPr>
-        <p:txBody>
-          <a:bodyPr wrap="square" lIns="0" tIns="0" rIns="0" bIns="0" rtlCol="0" anchor="ctr"/>
-          <a:lstStyle/>
-          <a:p>
-            <a:pPr algn="r"/>
-            <a:r>
-              <a:rPr lang="en-US" sz="750" dirty="0">
-                <a:solidFill>
-                  <a:srgbClr val="4D8C6A"/>
-                </a:solidFill>
-                <a:latin typeface="Candara" panose="020E0502030303020204" pitchFamily="34" charset="0"/>
-                <a:ea typeface="Calibri" pitchFamily="34" charset="-122"/>
-                <a:cs typeface="Calibri" pitchFamily="34" charset="-120"/>
-              </a:rPr>
-              <a:t>int?</a:t>
+              <a:t>string(50)</a:t>
             </a:r>
             <a:endParaRPr lang="en-US" sz="750" dirty="0">
               <a:latin typeface="Candara" panose="020E0502030303020204" pitchFamily="34" charset="0"/>
@@ -35961,13 +35144,13 @@
       </p:sp>
       <p:sp>
         <p:nvSpPr>
-          <p:cNvPr id="160" name="Shape 158"/>
-          <p:cNvSpPr/>
-          <p:nvPr/>
-        </p:nvSpPr>
-        <p:spPr>
-          <a:xfrm>
-            <a:off x="2724202" y="5147624"/>
+          <p:cNvPr id="195" name="Shape 193"/>
+          <p:cNvSpPr/>
+          <p:nvPr/>
+        </p:nvSpPr>
+        <p:spPr>
+          <a:xfrm>
+            <a:off x="7157887" y="5147624"/>
             <a:ext cx="2011156" cy="1133561"/>
           </a:xfrm>
           <a:prstGeom prst="roundRect">
@@ -35999,13 +35182,13 @@
       </p:sp>
       <p:sp>
         <p:nvSpPr>
-          <p:cNvPr id="161" name="Shape 159"/>
-          <p:cNvSpPr/>
-          <p:nvPr/>
-        </p:nvSpPr>
-        <p:spPr>
-          <a:xfrm>
-            <a:off x="2696777" y="5120199"/>
+          <p:cNvPr id="196" name="Shape 194"/>
+          <p:cNvSpPr/>
+          <p:nvPr/>
+        </p:nvSpPr>
+        <p:spPr>
+          <a:xfrm>
+            <a:off x="7130462" y="5120199"/>
             <a:ext cx="2011156" cy="1133561"/>
           </a:xfrm>
           <a:prstGeom prst="roundRect">
@@ -36035,13 +35218,13 @@
       </p:sp>
       <p:sp>
         <p:nvSpPr>
-          <p:cNvPr id="162" name="Shape 160"/>
-          <p:cNvSpPr/>
-          <p:nvPr/>
-        </p:nvSpPr>
-        <p:spPr>
-          <a:xfrm>
-            <a:off x="2696777" y="5193332"/>
+          <p:cNvPr id="197" name="Shape 195"/>
+          <p:cNvSpPr/>
+          <p:nvPr/>
+        </p:nvSpPr>
+        <p:spPr>
+          <a:xfrm>
+            <a:off x="7130462" y="5193332"/>
             <a:ext cx="50279" cy="987295"/>
           </a:xfrm>
           <a:prstGeom prst="rect">
@@ -36069,13 +35252,13 @@
       </p:sp>
       <p:sp>
         <p:nvSpPr>
-          <p:cNvPr id="163" name="Shape 161"/>
-          <p:cNvSpPr/>
-          <p:nvPr/>
-        </p:nvSpPr>
-        <p:spPr>
-          <a:xfrm>
-            <a:off x="2696777" y="5120200"/>
+          <p:cNvPr id="198" name="Shape 196"/>
+          <p:cNvSpPr/>
+          <p:nvPr/>
+        </p:nvSpPr>
+        <p:spPr>
+          <a:xfrm>
+            <a:off x="7130462" y="5120200"/>
             <a:ext cx="50279" cy="164549"/>
           </a:xfrm>
           <a:prstGeom prst="roundRect">
@@ -36105,1316 +35288,6 @@
       </p:sp>
       <p:sp>
         <p:nvSpPr>
-          <p:cNvPr id="164" name="Text 162"/>
-          <p:cNvSpPr/>
-          <p:nvPr/>
-        </p:nvSpPr>
-        <p:spPr>
-          <a:xfrm>
-            <a:off x="2843043" y="5138483"/>
-            <a:ext cx="1810041" cy="237682"/>
-          </a:xfrm>
-          <a:prstGeom prst="rect">
-            <a:avLst/>
-          </a:prstGeom>
-          <a:noFill/>
-          <a:ln/>
-        </p:spPr>
-        <p:txBody>
-          <a:bodyPr wrap="square" lIns="0" tIns="0" rIns="0" bIns="0" rtlCol="0" anchor="ctr"/>
-          <a:lstStyle/>
-          <a:p>
-            <a:r>
-              <a:rPr lang="en-US" sz="1100" b="1" dirty="0">
-                <a:solidFill>
-                  <a:srgbClr val="3ECF80"/>
-                </a:solidFill>
-                <a:latin typeface="Candara" panose="020E0502030303020204" pitchFamily="34" charset="0"/>
-                <a:ea typeface="Calibri" pitchFamily="34" charset="-122"/>
-                <a:cs typeface="Calibri" pitchFamily="34" charset="-120"/>
-              </a:rPr>
-              <a:t>DeviceConfigurations</a:t>
-            </a:r>
-            <a:endParaRPr lang="en-US" sz="1100" dirty="0">
-              <a:latin typeface="Candara" panose="020E0502030303020204" pitchFamily="34" charset="0"/>
-            </a:endParaRPr>
-          </a:p>
-        </p:txBody>
-      </p:sp>
-      <p:sp>
-        <p:nvSpPr>
-          <p:cNvPr id="165" name="Text 163"/>
-          <p:cNvSpPr/>
-          <p:nvPr/>
-        </p:nvSpPr>
-        <p:spPr>
-          <a:xfrm>
-            <a:off x="2843043" y="5412731"/>
-            <a:ext cx="1810041" cy="164549"/>
-          </a:xfrm>
-          <a:prstGeom prst="rect">
-            <a:avLst/>
-          </a:prstGeom>
-          <a:noFill/>
-          <a:ln/>
-        </p:spPr>
-        <p:txBody>
-          <a:bodyPr wrap="square" lIns="0" tIns="0" rIns="0" bIns="0" rtlCol="0" anchor="t"/>
-          <a:lstStyle/>
-          <a:p>
-            <a:r>
-              <a:rPr lang="en-US" sz="850" i="1" dirty="0">
-                <a:solidFill>
-                  <a:srgbClr val="7AB896"/>
-                </a:solidFill>
-                <a:latin typeface="Candara" panose="020E0502030303020204" pitchFamily="34" charset="0"/>
-                <a:ea typeface="Calibri" pitchFamily="34" charset="-122"/>
-                <a:cs typeface="Calibri" pitchFamily="34" charset="-120"/>
-              </a:rPr>
-              <a:t>Per-device settings</a:t>
-            </a:r>
-            <a:endParaRPr lang="en-US" sz="850" dirty="0">
-              <a:latin typeface="Candara" panose="020E0502030303020204" pitchFamily="34" charset="0"/>
-            </a:endParaRPr>
-          </a:p>
-        </p:txBody>
-      </p:sp>
-      <p:sp>
-        <p:nvSpPr>
-          <p:cNvPr id="166" name="Shape 164"/>
-          <p:cNvSpPr/>
-          <p:nvPr/>
-        </p:nvSpPr>
-        <p:spPr>
-          <a:xfrm>
-            <a:off x="2824760" y="5595564"/>
-            <a:ext cx="1828324" cy="0"/>
-          </a:xfrm>
-          <a:prstGeom prst="line">
-            <a:avLst/>
-          </a:prstGeom>
-          <a:noFill/>
-          <a:ln w="9525">
-            <a:solidFill>
-              <a:srgbClr val="1E3D2A"/>
-            </a:solidFill>
-            <a:prstDash val="solid"/>
-          </a:ln>
-        </p:spPr>
-        <p:txBody>
-          <a:bodyPr/>
-          <a:lstStyle/>
-          <a:p>
-            <a:endParaRPr lang="en-US" sz="1799">
-              <a:latin typeface="Candara" panose="020E0502030303020204" pitchFamily="34" charset="0"/>
-            </a:endParaRPr>
-          </a:p>
-        </p:txBody>
-      </p:sp>
-      <p:sp>
-        <p:nvSpPr>
-          <p:cNvPr id="167" name="Text 165"/>
-          <p:cNvSpPr/>
-          <p:nvPr/>
-        </p:nvSpPr>
-        <p:spPr>
-          <a:xfrm>
-            <a:off x="2843043" y="5632130"/>
-            <a:ext cx="274249" cy="141695"/>
-          </a:xfrm>
-          <a:prstGeom prst="rect">
-            <a:avLst/>
-          </a:prstGeom>
-          <a:noFill/>
-          <a:ln/>
-        </p:spPr>
-        <p:txBody>
-          <a:bodyPr wrap="square" lIns="0" tIns="0" rIns="0" bIns="0" rtlCol="0" anchor="ctr"/>
-          <a:lstStyle/>
-          <a:p>
-            <a:r>
-              <a:rPr lang="en-US" sz="700" b="1" dirty="0">
-                <a:solidFill>
-                  <a:srgbClr val="F6C90E"/>
-                </a:solidFill>
-                <a:latin typeface="Candara" panose="020E0502030303020204" pitchFamily="34" charset="0"/>
-                <a:ea typeface="Calibri" pitchFamily="34" charset="-122"/>
-                <a:cs typeface="Calibri" pitchFamily="34" charset="-120"/>
-              </a:rPr>
-              <a:t>PK</a:t>
-            </a:r>
-            <a:endParaRPr lang="en-US" sz="700" dirty="0">
-              <a:latin typeface="Candara" panose="020E0502030303020204" pitchFamily="34" charset="0"/>
-            </a:endParaRPr>
-          </a:p>
-        </p:txBody>
-      </p:sp>
-      <p:sp>
-        <p:nvSpPr>
-          <p:cNvPr id="168" name="Text 166"/>
-          <p:cNvSpPr/>
-          <p:nvPr/>
-        </p:nvSpPr>
-        <p:spPr>
-          <a:xfrm>
-            <a:off x="3135575" y="5632130"/>
-            <a:ext cx="1005578" cy="141695"/>
-          </a:xfrm>
-          <a:prstGeom prst="rect">
-            <a:avLst/>
-          </a:prstGeom>
-          <a:noFill/>
-          <a:ln/>
-        </p:spPr>
-        <p:txBody>
-          <a:bodyPr wrap="square" lIns="0" tIns="0" rIns="0" bIns="0" rtlCol="0" anchor="ctr"/>
-          <a:lstStyle/>
-          <a:p>
-            <a:r>
-              <a:rPr lang="en-US" sz="850" b="1" dirty="0">
-                <a:solidFill>
-                  <a:srgbClr val="FFFFFF"/>
-                </a:solidFill>
-                <a:latin typeface="Candara" panose="020E0502030303020204" pitchFamily="34" charset="0"/>
-                <a:ea typeface="Calibri" pitchFamily="34" charset="-122"/>
-                <a:cs typeface="Calibri" pitchFamily="34" charset="-120"/>
-              </a:rPr>
-              <a:t>ConfigurationId</a:t>
-            </a:r>
-            <a:endParaRPr lang="en-US" sz="850" dirty="0">
-              <a:latin typeface="Candara" panose="020E0502030303020204" pitchFamily="34" charset="0"/>
-            </a:endParaRPr>
-          </a:p>
-        </p:txBody>
-      </p:sp>
-      <p:sp>
-        <p:nvSpPr>
-          <p:cNvPr id="169" name="Text 167"/>
-          <p:cNvSpPr/>
-          <p:nvPr/>
-        </p:nvSpPr>
-        <p:spPr>
-          <a:xfrm>
-            <a:off x="4141153" y="5632130"/>
-            <a:ext cx="475364" cy="141695"/>
-          </a:xfrm>
-          <a:prstGeom prst="rect">
-            <a:avLst/>
-          </a:prstGeom>
-          <a:noFill/>
-          <a:ln/>
-        </p:spPr>
-        <p:txBody>
-          <a:bodyPr wrap="square" lIns="0" tIns="0" rIns="0" bIns="0" rtlCol="0" anchor="ctr"/>
-          <a:lstStyle/>
-          <a:p>
-            <a:pPr algn="r"/>
-            <a:r>
-              <a:rPr lang="en-US" sz="750" dirty="0">
-                <a:solidFill>
-                  <a:srgbClr val="4D8C6A"/>
-                </a:solidFill>
-                <a:latin typeface="Candara" panose="020E0502030303020204" pitchFamily="34" charset="0"/>
-                <a:ea typeface="Calibri" pitchFamily="34" charset="-122"/>
-                <a:cs typeface="Calibri" pitchFamily="34" charset="-120"/>
-              </a:rPr>
-              <a:t>int</a:t>
-            </a:r>
-            <a:endParaRPr lang="en-US" sz="750" dirty="0">
-              <a:latin typeface="Candara" panose="020E0502030303020204" pitchFamily="34" charset="0"/>
-            </a:endParaRPr>
-          </a:p>
-        </p:txBody>
-      </p:sp>
-      <p:sp>
-        <p:nvSpPr>
-          <p:cNvPr id="170" name="Text 168"/>
-          <p:cNvSpPr/>
-          <p:nvPr/>
-        </p:nvSpPr>
-        <p:spPr>
-          <a:xfrm>
-            <a:off x="2843043" y="5773825"/>
-            <a:ext cx="274249" cy="141695"/>
-          </a:xfrm>
-          <a:prstGeom prst="rect">
-            <a:avLst/>
-          </a:prstGeom>
-          <a:noFill/>
-          <a:ln/>
-        </p:spPr>
-        <p:txBody>
-          <a:bodyPr wrap="square" lIns="0" tIns="0" rIns="0" bIns="0" rtlCol="0" anchor="ctr"/>
-          <a:lstStyle/>
-          <a:p>
-            <a:r>
-              <a:rPr lang="en-US" sz="700" b="1" dirty="0">
-                <a:solidFill>
-                  <a:srgbClr val="60B8FF"/>
-                </a:solidFill>
-                <a:latin typeface="Candara" panose="020E0502030303020204" pitchFamily="34" charset="0"/>
-                <a:ea typeface="Calibri" pitchFamily="34" charset="-122"/>
-                <a:cs typeface="Calibri" pitchFamily="34" charset="-120"/>
-              </a:rPr>
-              <a:t>FK</a:t>
-            </a:r>
-            <a:endParaRPr lang="en-US" sz="700" dirty="0">
-              <a:latin typeface="Candara" panose="020E0502030303020204" pitchFamily="34" charset="0"/>
-            </a:endParaRPr>
-          </a:p>
-        </p:txBody>
-      </p:sp>
-      <p:sp>
-        <p:nvSpPr>
-          <p:cNvPr id="171" name="Text 169"/>
-          <p:cNvSpPr/>
-          <p:nvPr/>
-        </p:nvSpPr>
-        <p:spPr>
-          <a:xfrm>
-            <a:off x="3135575" y="5773825"/>
-            <a:ext cx="1005578" cy="141695"/>
-          </a:xfrm>
-          <a:prstGeom prst="rect">
-            <a:avLst/>
-          </a:prstGeom>
-          <a:noFill/>
-          <a:ln/>
-        </p:spPr>
-        <p:txBody>
-          <a:bodyPr wrap="square" lIns="0" tIns="0" rIns="0" bIns="0" rtlCol="0" anchor="ctr"/>
-          <a:lstStyle/>
-          <a:p>
-            <a:r>
-              <a:rPr lang="en-US" sz="850" i="1" dirty="0">
-                <a:solidFill>
-                  <a:srgbClr val="7AB896"/>
-                </a:solidFill>
-                <a:latin typeface="Candara" panose="020E0502030303020204" pitchFamily="34" charset="0"/>
-                <a:ea typeface="Calibri" pitchFamily="34" charset="-122"/>
-                <a:cs typeface="Calibri" pitchFamily="34" charset="-120"/>
-              </a:rPr>
-              <a:t>DeviceId</a:t>
-            </a:r>
-            <a:endParaRPr lang="en-US" sz="850" dirty="0">
-              <a:latin typeface="Candara" panose="020E0502030303020204" pitchFamily="34" charset="0"/>
-            </a:endParaRPr>
-          </a:p>
-        </p:txBody>
-      </p:sp>
-      <p:sp>
-        <p:nvSpPr>
-          <p:cNvPr id="172" name="Text 170"/>
-          <p:cNvSpPr/>
-          <p:nvPr/>
-        </p:nvSpPr>
-        <p:spPr>
-          <a:xfrm>
-            <a:off x="4141153" y="5773825"/>
-            <a:ext cx="475364" cy="141695"/>
-          </a:xfrm>
-          <a:prstGeom prst="rect">
-            <a:avLst/>
-          </a:prstGeom>
-          <a:noFill/>
-          <a:ln/>
-        </p:spPr>
-        <p:txBody>
-          <a:bodyPr wrap="square" lIns="0" tIns="0" rIns="0" bIns="0" rtlCol="0" anchor="ctr"/>
-          <a:lstStyle/>
-          <a:p>
-            <a:pPr algn="r"/>
-            <a:r>
-              <a:rPr lang="en-US" sz="750" dirty="0">
-                <a:solidFill>
-                  <a:srgbClr val="4D8C6A"/>
-                </a:solidFill>
-                <a:latin typeface="Candara" panose="020E0502030303020204" pitchFamily="34" charset="0"/>
-                <a:ea typeface="Calibri" pitchFamily="34" charset="-122"/>
-                <a:cs typeface="Calibri" pitchFamily="34" charset="-120"/>
-              </a:rPr>
-              <a:t>int</a:t>
-            </a:r>
-            <a:endParaRPr lang="en-US" sz="750" dirty="0">
-              <a:latin typeface="Candara" panose="020E0502030303020204" pitchFamily="34" charset="0"/>
-            </a:endParaRPr>
-          </a:p>
-        </p:txBody>
-      </p:sp>
-      <p:sp>
-        <p:nvSpPr>
-          <p:cNvPr id="173" name="Text 171"/>
-          <p:cNvSpPr/>
-          <p:nvPr/>
-        </p:nvSpPr>
-        <p:spPr>
-          <a:xfrm>
-            <a:off x="3135575" y="5915520"/>
-            <a:ext cx="1005578" cy="141695"/>
-          </a:xfrm>
-          <a:prstGeom prst="rect">
-            <a:avLst/>
-          </a:prstGeom>
-          <a:noFill/>
-          <a:ln/>
-        </p:spPr>
-        <p:txBody>
-          <a:bodyPr wrap="square" lIns="0" tIns="0" rIns="0" bIns="0" rtlCol="0" anchor="ctr"/>
-          <a:lstStyle/>
-          <a:p>
-            <a:r>
-              <a:rPr lang="en-US" sz="850" dirty="0">
-                <a:solidFill>
-                  <a:srgbClr val="FFFFFF"/>
-                </a:solidFill>
-                <a:latin typeface="Candara" panose="020E0502030303020204" pitchFamily="34" charset="0"/>
-                <a:ea typeface="Calibri" pitchFamily="34" charset="-122"/>
-                <a:cs typeface="Calibri" pitchFamily="34" charset="-120"/>
-              </a:rPr>
-              <a:t>ConfigurationKey</a:t>
-            </a:r>
-            <a:endParaRPr lang="en-US" sz="850" dirty="0">
-              <a:latin typeface="Candara" panose="020E0502030303020204" pitchFamily="34" charset="0"/>
-            </a:endParaRPr>
-          </a:p>
-        </p:txBody>
-      </p:sp>
-      <p:sp>
-        <p:nvSpPr>
-          <p:cNvPr id="174" name="Text 172"/>
-          <p:cNvSpPr/>
-          <p:nvPr/>
-        </p:nvSpPr>
-        <p:spPr>
-          <a:xfrm>
-            <a:off x="4141153" y="5915520"/>
-            <a:ext cx="475364" cy="141695"/>
-          </a:xfrm>
-          <a:prstGeom prst="rect">
-            <a:avLst/>
-          </a:prstGeom>
-          <a:noFill/>
-          <a:ln/>
-        </p:spPr>
-        <p:txBody>
-          <a:bodyPr wrap="square" lIns="0" tIns="0" rIns="0" bIns="0" rtlCol="0" anchor="ctr"/>
-          <a:lstStyle/>
-          <a:p>
-            <a:pPr algn="r"/>
-            <a:r>
-              <a:rPr lang="en-US" sz="750" dirty="0">
-                <a:solidFill>
-                  <a:srgbClr val="4D8C6A"/>
-                </a:solidFill>
-                <a:latin typeface="Candara" panose="020E0502030303020204" pitchFamily="34" charset="0"/>
-                <a:ea typeface="Calibri" pitchFamily="34" charset="-122"/>
-                <a:cs typeface="Calibri" pitchFamily="34" charset="-120"/>
-              </a:rPr>
-              <a:t>string(100)</a:t>
-            </a:r>
-            <a:endParaRPr lang="en-US" sz="750" dirty="0">
-              <a:latin typeface="Candara" panose="020E0502030303020204" pitchFamily="34" charset="0"/>
-            </a:endParaRPr>
-          </a:p>
-        </p:txBody>
-      </p:sp>
-      <p:sp>
-        <p:nvSpPr>
-          <p:cNvPr id="175" name="Text 173"/>
-          <p:cNvSpPr/>
-          <p:nvPr/>
-        </p:nvSpPr>
-        <p:spPr>
-          <a:xfrm>
-            <a:off x="3135575" y="6057215"/>
-            <a:ext cx="1005578" cy="141695"/>
-          </a:xfrm>
-          <a:prstGeom prst="rect">
-            <a:avLst/>
-          </a:prstGeom>
-          <a:noFill/>
-          <a:ln/>
-        </p:spPr>
-        <p:txBody>
-          <a:bodyPr wrap="square" lIns="0" tIns="0" rIns="0" bIns="0" rtlCol="0" anchor="ctr"/>
-          <a:lstStyle/>
-          <a:p>
-            <a:r>
-              <a:rPr lang="en-US" sz="850" dirty="0">
-                <a:solidFill>
-                  <a:srgbClr val="FFFFFF"/>
-                </a:solidFill>
-                <a:latin typeface="Candara" panose="020E0502030303020204" pitchFamily="34" charset="0"/>
-                <a:ea typeface="Calibri" pitchFamily="34" charset="-122"/>
-                <a:cs typeface="Calibri" pitchFamily="34" charset="-120"/>
-              </a:rPr>
-              <a:t>ConfigurationValue</a:t>
-            </a:r>
-            <a:endParaRPr lang="en-US" sz="850" dirty="0">
-              <a:latin typeface="Candara" panose="020E0502030303020204" pitchFamily="34" charset="0"/>
-            </a:endParaRPr>
-          </a:p>
-        </p:txBody>
-      </p:sp>
-      <p:sp>
-        <p:nvSpPr>
-          <p:cNvPr id="176" name="Text 174"/>
-          <p:cNvSpPr/>
-          <p:nvPr/>
-        </p:nvSpPr>
-        <p:spPr>
-          <a:xfrm>
-            <a:off x="4141153" y="6057215"/>
-            <a:ext cx="475364" cy="141695"/>
-          </a:xfrm>
-          <a:prstGeom prst="rect">
-            <a:avLst/>
-          </a:prstGeom>
-          <a:noFill/>
-          <a:ln/>
-        </p:spPr>
-        <p:txBody>
-          <a:bodyPr wrap="square" lIns="0" tIns="0" rIns="0" bIns="0" rtlCol="0" anchor="ctr"/>
-          <a:lstStyle/>
-          <a:p>
-            <a:pPr algn="r"/>
-            <a:r>
-              <a:rPr lang="en-US" sz="750" dirty="0">
-                <a:solidFill>
-                  <a:srgbClr val="4D8C6A"/>
-                </a:solidFill>
-                <a:latin typeface="Candara" panose="020E0502030303020204" pitchFamily="34" charset="0"/>
-                <a:ea typeface="Calibri" pitchFamily="34" charset="-122"/>
-                <a:cs typeface="Calibri" pitchFamily="34" charset="-120"/>
-              </a:rPr>
-              <a:t>string(500)</a:t>
-            </a:r>
-            <a:endParaRPr lang="en-US" sz="750" dirty="0">
-              <a:latin typeface="Candara" panose="020E0502030303020204" pitchFamily="34" charset="0"/>
-            </a:endParaRPr>
-          </a:p>
-        </p:txBody>
-      </p:sp>
-      <p:sp>
-        <p:nvSpPr>
-          <p:cNvPr id="177" name="Shape 175"/>
-          <p:cNvSpPr/>
-          <p:nvPr/>
-        </p:nvSpPr>
-        <p:spPr>
-          <a:xfrm>
-            <a:off x="4963899" y="5147624"/>
-            <a:ext cx="2011156" cy="1133561"/>
-          </a:xfrm>
-          <a:prstGeom prst="roundRect">
-            <a:avLst>
-              <a:gd name="adj" fmla="val 6452"/>
-            </a:avLst>
-          </a:prstGeom>
-          <a:solidFill>
-            <a:srgbClr val="000000">
-              <a:alpha val="20000"/>
-            </a:srgbClr>
-          </a:solidFill>
-          <a:ln w="12700">
-            <a:solidFill>
-              <a:srgbClr val="000000"/>
-            </a:solidFill>
-            <a:prstDash val="solid"/>
-          </a:ln>
-        </p:spPr>
-        <p:txBody>
-          <a:bodyPr/>
-          <a:lstStyle/>
-          <a:p>
-            <a:endParaRPr lang="en-US" sz="1799">
-              <a:latin typeface="Candara" panose="020E0502030303020204" pitchFamily="34" charset="0"/>
-            </a:endParaRPr>
-          </a:p>
-        </p:txBody>
-      </p:sp>
-      <p:sp>
-        <p:nvSpPr>
-          <p:cNvPr id="178" name="Shape 176"/>
-          <p:cNvSpPr/>
-          <p:nvPr/>
-        </p:nvSpPr>
-        <p:spPr>
-          <a:xfrm>
-            <a:off x="4936474" y="5120199"/>
-            <a:ext cx="2011156" cy="1133561"/>
-          </a:xfrm>
-          <a:prstGeom prst="roundRect">
-            <a:avLst>
-              <a:gd name="adj" fmla="val 6452"/>
-            </a:avLst>
-          </a:prstGeom>
-          <a:solidFill>
-            <a:srgbClr val="112B1D"/>
-          </a:solidFill>
-          <a:ln w="9525">
-            <a:solidFill>
-              <a:srgbClr val="1E3D2A"/>
-            </a:solidFill>
-            <a:prstDash val="solid"/>
-          </a:ln>
-        </p:spPr>
-        <p:txBody>
-          <a:bodyPr/>
-          <a:lstStyle/>
-          <a:p>
-            <a:endParaRPr lang="en-US" sz="1799">
-              <a:latin typeface="Candara" panose="020E0502030303020204" pitchFamily="34" charset="0"/>
-            </a:endParaRPr>
-          </a:p>
-        </p:txBody>
-      </p:sp>
-      <p:sp>
-        <p:nvSpPr>
-          <p:cNvPr id="179" name="Shape 177"/>
-          <p:cNvSpPr/>
-          <p:nvPr/>
-        </p:nvSpPr>
-        <p:spPr>
-          <a:xfrm>
-            <a:off x="4936474" y="5193332"/>
-            <a:ext cx="50279" cy="987295"/>
-          </a:xfrm>
-          <a:prstGeom prst="rect">
-            <a:avLst/>
-          </a:prstGeom>
-          <a:solidFill>
-            <a:srgbClr val="1B5C3A"/>
-          </a:solidFill>
-          <a:ln w="12700">
-            <a:solidFill>
-              <a:srgbClr val="1B5C3A"/>
-            </a:solidFill>
-            <a:prstDash val="solid"/>
-          </a:ln>
-        </p:spPr>
-        <p:txBody>
-          <a:bodyPr/>
-          <a:lstStyle/>
-          <a:p>
-            <a:endParaRPr lang="en-US" sz="1799">
-              <a:latin typeface="Candara" panose="020E0502030303020204" pitchFamily="34" charset="0"/>
-            </a:endParaRPr>
-          </a:p>
-        </p:txBody>
-      </p:sp>
-      <p:sp>
-        <p:nvSpPr>
-          <p:cNvPr id="180" name="Shape 178"/>
-          <p:cNvSpPr/>
-          <p:nvPr/>
-        </p:nvSpPr>
-        <p:spPr>
-          <a:xfrm>
-            <a:off x="4936474" y="5120200"/>
-            <a:ext cx="50279" cy="164549"/>
-          </a:xfrm>
-          <a:prstGeom prst="roundRect">
-            <a:avLst>
-              <a:gd name="adj" fmla="val 72727"/>
-            </a:avLst>
-          </a:prstGeom>
-          <a:solidFill>
-            <a:srgbClr val="1B5C3A"/>
-          </a:solidFill>
-          <a:ln w="12700">
-            <a:solidFill>
-              <a:srgbClr val="1B5C3A"/>
-            </a:solidFill>
-            <a:prstDash val="solid"/>
-          </a:ln>
-        </p:spPr>
-        <p:txBody>
-          <a:bodyPr/>
-          <a:lstStyle/>
-          <a:p>
-            <a:endParaRPr lang="en-US" sz="1799">
-              <a:latin typeface="Candara" panose="020E0502030303020204" pitchFamily="34" charset="0"/>
-            </a:endParaRPr>
-          </a:p>
-        </p:txBody>
-      </p:sp>
-      <p:sp>
-        <p:nvSpPr>
-          <p:cNvPr id="181" name="Text 179"/>
-          <p:cNvSpPr/>
-          <p:nvPr/>
-        </p:nvSpPr>
-        <p:spPr>
-          <a:xfrm>
-            <a:off x="5082739" y="5138483"/>
-            <a:ext cx="1810041" cy="237682"/>
-          </a:xfrm>
-          <a:prstGeom prst="rect">
-            <a:avLst/>
-          </a:prstGeom>
-          <a:noFill/>
-          <a:ln/>
-        </p:spPr>
-        <p:txBody>
-          <a:bodyPr wrap="square" lIns="0" tIns="0" rIns="0" bIns="0" rtlCol="0" anchor="ctr"/>
-          <a:lstStyle/>
-          <a:p>
-            <a:r>
-              <a:rPr lang="en-US" sz="1100" b="1" dirty="0">
-                <a:solidFill>
-                  <a:srgbClr val="3ECF80"/>
-                </a:solidFill>
-                <a:latin typeface="Candara" panose="020E0502030303020204" pitchFamily="34" charset="0"/>
-                <a:ea typeface="Calibri" pitchFamily="34" charset="-122"/>
-                <a:cs typeface="Calibri" pitchFamily="34" charset="-120"/>
-              </a:rPr>
-              <a:t>DeviceCommands</a:t>
-            </a:r>
-            <a:endParaRPr lang="en-US" sz="1100" dirty="0">
-              <a:latin typeface="Candara" panose="020E0502030303020204" pitchFamily="34" charset="0"/>
-            </a:endParaRPr>
-          </a:p>
-        </p:txBody>
-      </p:sp>
-      <p:sp>
-        <p:nvSpPr>
-          <p:cNvPr id="182" name="Text 180"/>
-          <p:cNvSpPr/>
-          <p:nvPr/>
-        </p:nvSpPr>
-        <p:spPr>
-          <a:xfrm>
-            <a:off x="5082739" y="5412731"/>
-            <a:ext cx="1810041" cy="164549"/>
-          </a:xfrm>
-          <a:prstGeom prst="rect">
-            <a:avLst/>
-          </a:prstGeom>
-          <a:noFill/>
-          <a:ln/>
-        </p:spPr>
-        <p:txBody>
-          <a:bodyPr wrap="square" lIns="0" tIns="0" rIns="0" bIns="0" rtlCol="0" anchor="t"/>
-          <a:lstStyle/>
-          <a:p>
-            <a:r>
-              <a:rPr lang="en-US" sz="850" i="1" dirty="0">
-                <a:solidFill>
-                  <a:srgbClr val="7AB896"/>
-                </a:solidFill>
-                <a:latin typeface="Candara" panose="020E0502030303020204" pitchFamily="34" charset="0"/>
-                <a:ea typeface="Calibri" pitchFamily="34" charset="-122"/>
-                <a:cs typeface="Calibri" pitchFamily="34" charset="-120"/>
-              </a:rPr>
-              <a:t>Commands sent to device / actuator</a:t>
-            </a:r>
-            <a:endParaRPr lang="en-US" sz="850" dirty="0">
-              <a:latin typeface="Candara" panose="020E0502030303020204" pitchFamily="34" charset="0"/>
-            </a:endParaRPr>
-          </a:p>
-        </p:txBody>
-      </p:sp>
-      <p:sp>
-        <p:nvSpPr>
-          <p:cNvPr id="183" name="Shape 181"/>
-          <p:cNvSpPr/>
-          <p:nvPr/>
-        </p:nvSpPr>
-        <p:spPr>
-          <a:xfrm>
-            <a:off x="5064456" y="5595564"/>
-            <a:ext cx="1828324" cy="0"/>
-          </a:xfrm>
-          <a:prstGeom prst="line">
-            <a:avLst/>
-          </a:prstGeom>
-          <a:noFill/>
-          <a:ln w="9525">
-            <a:solidFill>
-              <a:srgbClr val="1E3D2A"/>
-            </a:solidFill>
-            <a:prstDash val="solid"/>
-          </a:ln>
-        </p:spPr>
-        <p:txBody>
-          <a:bodyPr/>
-          <a:lstStyle/>
-          <a:p>
-            <a:endParaRPr lang="en-US" sz="1799">
-              <a:latin typeface="Candara" panose="020E0502030303020204" pitchFamily="34" charset="0"/>
-            </a:endParaRPr>
-          </a:p>
-        </p:txBody>
-      </p:sp>
-      <p:sp>
-        <p:nvSpPr>
-          <p:cNvPr id="184" name="Text 182"/>
-          <p:cNvSpPr/>
-          <p:nvPr/>
-        </p:nvSpPr>
-        <p:spPr>
-          <a:xfrm>
-            <a:off x="5082739" y="5632130"/>
-            <a:ext cx="274249" cy="141695"/>
-          </a:xfrm>
-          <a:prstGeom prst="rect">
-            <a:avLst/>
-          </a:prstGeom>
-          <a:noFill/>
-          <a:ln/>
-        </p:spPr>
-        <p:txBody>
-          <a:bodyPr wrap="square" lIns="0" tIns="0" rIns="0" bIns="0" rtlCol="0" anchor="ctr"/>
-          <a:lstStyle/>
-          <a:p>
-            <a:r>
-              <a:rPr lang="en-US" sz="700" b="1" dirty="0">
-                <a:solidFill>
-                  <a:srgbClr val="F6C90E"/>
-                </a:solidFill>
-                <a:latin typeface="Candara" panose="020E0502030303020204" pitchFamily="34" charset="0"/>
-                <a:ea typeface="Calibri" pitchFamily="34" charset="-122"/>
-                <a:cs typeface="Calibri" pitchFamily="34" charset="-120"/>
-              </a:rPr>
-              <a:t>PK</a:t>
-            </a:r>
-            <a:endParaRPr lang="en-US" sz="700" dirty="0">
-              <a:latin typeface="Candara" panose="020E0502030303020204" pitchFamily="34" charset="0"/>
-            </a:endParaRPr>
-          </a:p>
-        </p:txBody>
-      </p:sp>
-      <p:sp>
-        <p:nvSpPr>
-          <p:cNvPr id="185" name="Text 183"/>
-          <p:cNvSpPr/>
-          <p:nvPr/>
-        </p:nvSpPr>
-        <p:spPr>
-          <a:xfrm>
-            <a:off x="5375271" y="5632130"/>
-            <a:ext cx="1005578" cy="141695"/>
-          </a:xfrm>
-          <a:prstGeom prst="rect">
-            <a:avLst/>
-          </a:prstGeom>
-          <a:noFill/>
-          <a:ln/>
-        </p:spPr>
-        <p:txBody>
-          <a:bodyPr wrap="square" lIns="0" tIns="0" rIns="0" bIns="0" rtlCol="0" anchor="ctr"/>
-          <a:lstStyle/>
-          <a:p>
-            <a:r>
-              <a:rPr lang="en-US" sz="850" b="1" dirty="0">
-                <a:solidFill>
-                  <a:srgbClr val="FFFFFF"/>
-                </a:solidFill>
-                <a:latin typeface="Candara" panose="020E0502030303020204" pitchFamily="34" charset="0"/>
-                <a:ea typeface="Calibri" pitchFamily="34" charset="-122"/>
-                <a:cs typeface="Calibri" pitchFamily="34" charset="-120"/>
-              </a:rPr>
-              <a:t>CommandId</a:t>
-            </a:r>
-            <a:endParaRPr lang="en-US" sz="850" dirty="0">
-              <a:latin typeface="Candara" panose="020E0502030303020204" pitchFamily="34" charset="0"/>
-            </a:endParaRPr>
-          </a:p>
-        </p:txBody>
-      </p:sp>
-      <p:sp>
-        <p:nvSpPr>
-          <p:cNvPr id="186" name="Text 184"/>
-          <p:cNvSpPr/>
-          <p:nvPr/>
-        </p:nvSpPr>
-        <p:spPr>
-          <a:xfrm>
-            <a:off x="6380849" y="5632130"/>
-            <a:ext cx="475364" cy="141695"/>
-          </a:xfrm>
-          <a:prstGeom prst="rect">
-            <a:avLst/>
-          </a:prstGeom>
-          <a:noFill/>
-          <a:ln/>
-        </p:spPr>
-        <p:txBody>
-          <a:bodyPr wrap="square" lIns="0" tIns="0" rIns="0" bIns="0" rtlCol="0" anchor="ctr"/>
-          <a:lstStyle/>
-          <a:p>
-            <a:pPr algn="r"/>
-            <a:r>
-              <a:rPr lang="en-US" sz="750" dirty="0">
-                <a:solidFill>
-                  <a:srgbClr val="4D8C6A"/>
-                </a:solidFill>
-                <a:latin typeface="Candara" panose="020E0502030303020204" pitchFamily="34" charset="0"/>
-                <a:ea typeface="Calibri" pitchFamily="34" charset="-122"/>
-                <a:cs typeface="Calibri" pitchFamily="34" charset="-120"/>
-              </a:rPr>
-              <a:t>long</a:t>
-            </a:r>
-            <a:endParaRPr lang="en-US" sz="750" dirty="0">
-              <a:latin typeface="Candara" panose="020E0502030303020204" pitchFamily="34" charset="0"/>
-            </a:endParaRPr>
-          </a:p>
-        </p:txBody>
-      </p:sp>
-      <p:sp>
-        <p:nvSpPr>
-          <p:cNvPr id="187" name="Text 185"/>
-          <p:cNvSpPr/>
-          <p:nvPr/>
-        </p:nvSpPr>
-        <p:spPr>
-          <a:xfrm>
-            <a:off x="5082739" y="5773825"/>
-            <a:ext cx="274249" cy="141695"/>
-          </a:xfrm>
-          <a:prstGeom prst="rect">
-            <a:avLst/>
-          </a:prstGeom>
-          <a:noFill/>
-          <a:ln/>
-        </p:spPr>
-        <p:txBody>
-          <a:bodyPr wrap="square" lIns="0" tIns="0" rIns="0" bIns="0" rtlCol="0" anchor="ctr"/>
-          <a:lstStyle/>
-          <a:p>
-            <a:r>
-              <a:rPr lang="en-US" sz="700" b="1" dirty="0">
-                <a:solidFill>
-                  <a:srgbClr val="60B8FF"/>
-                </a:solidFill>
-                <a:latin typeface="Candara" panose="020E0502030303020204" pitchFamily="34" charset="0"/>
-                <a:ea typeface="Calibri" pitchFamily="34" charset="-122"/>
-                <a:cs typeface="Calibri" pitchFamily="34" charset="-120"/>
-              </a:rPr>
-              <a:t>FK</a:t>
-            </a:r>
-            <a:endParaRPr lang="en-US" sz="700" dirty="0">
-              <a:latin typeface="Candara" panose="020E0502030303020204" pitchFamily="34" charset="0"/>
-            </a:endParaRPr>
-          </a:p>
-        </p:txBody>
-      </p:sp>
-      <p:sp>
-        <p:nvSpPr>
-          <p:cNvPr id="188" name="Text 186"/>
-          <p:cNvSpPr/>
-          <p:nvPr/>
-        </p:nvSpPr>
-        <p:spPr>
-          <a:xfrm>
-            <a:off x="5375271" y="5773825"/>
-            <a:ext cx="1005578" cy="141695"/>
-          </a:xfrm>
-          <a:prstGeom prst="rect">
-            <a:avLst/>
-          </a:prstGeom>
-          <a:noFill/>
-          <a:ln/>
-        </p:spPr>
-        <p:txBody>
-          <a:bodyPr wrap="square" lIns="0" tIns="0" rIns="0" bIns="0" rtlCol="0" anchor="ctr"/>
-          <a:lstStyle/>
-          <a:p>
-            <a:r>
-              <a:rPr lang="en-US" sz="850" i="1" dirty="0">
-                <a:solidFill>
-                  <a:srgbClr val="7AB896"/>
-                </a:solidFill>
-                <a:latin typeface="Candara" panose="020E0502030303020204" pitchFamily="34" charset="0"/>
-                <a:ea typeface="Calibri" pitchFamily="34" charset="-122"/>
-                <a:cs typeface="Calibri" pitchFamily="34" charset="-120"/>
-              </a:rPr>
-              <a:t>DeviceId</a:t>
-            </a:r>
-            <a:endParaRPr lang="en-US" sz="850" dirty="0">
-              <a:latin typeface="Candara" panose="020E0502030303020204" pitchFamily="34" charset="0"/>
-            </a:endParaRPr>
-          </a:p>
-        </p:txBody>
-      </p:sp>
-      <p:sp>
-        <p:nvSpPr>
-          <p:cNvPr id="189" name="Text 187"/>
-          <p:cNvSpPr/>
-          <p:nvPr/>
-        </p:nvSpPr>
-        <p:spPr>
-          <a:xfrm>
-            <a:off x="6380849" y="5773825"/>
-            <a:ext cx="475364" cy="141695"/>
-          </a:xfrm>
-          <a:prstGeom prst="rect">
-            <a:avLst/>
-          </a:prstGeom>
-          <a:noFill/>
-          <a:ln/>
-        </p:spPr>
-        <p:txBody>
-          <a:bodyPr wrap="square" lIns="0" tIns="0" rIns="0" bIns="0" rtlCol="0" anchor="ctr"/>
-          <a:lstStyle/>
-          <a:p>
-            <a:pPr algn="r"/>
-            <a:r>
-              <a:rPr lang="en-US" sz="750" dirty="0">
-                <a:solidFill>
-                  <a:srgbClr val="4D8C6A"/>
-                </a:solidFill>
-                <a:latin typeface="Candara" panose="020E0502030303020204" pitchFamily="34" charset="0"/>
-                <a:ea typeface="Calibri" pitchFamily="34" charset="-122"/>
-                <a:cs typeface="Calibri" pitchFamily="34" charset="-120"/>
-              </a:rPr>
-              <a:t>int</a:t>
-            </a:r>
-            <a:endParaRPr lang="en-US" sz="750" dirty="0">
-              <a:latin typeface="Candara" panose="020E0502030303020204" pitchFamily="34" charset="0"/>
-            </a:endParaRPr>
-          </a:p>
-        </p:txBody>
-      </p:sp>
-      <p:sp>
-        <p:nvSpPr>
-          <p:cNvPr id="190" name="Text 188"/>
-          <p:cNvSpPr/>
-          <p:nvPr/>
-        </p:nvSpPr>
-        <p:spPr>
-          <a:xfrm>
-            <a:off x="5082739" y="5915520"/>
-            <a:ext cx="274249" cy="141695"/>
-          </a:xfrm>
-          <a:prstGeom prst="rect">
-            <a:avLst/>
-          </a:prstGeom>
-          <a:noFill/>
-          <a:ln/>
-        </p:spPr>
-        <p:txBody>
-          <a:bodyPr wrap="square" lIns="0" tIns="0" rIns="0" bIns="0" rtlCol="0" anchor="ctr"/>
-          <a:lstStyle/>
-          <a:p>
-            <a:r>
-              <a:rPr lang="en-US" sz="700" b="1" dirty="0">
-                <a:solidFill>
-                  <a:srgbClr val="60B8FF"/>
-                </a:solidFill>
-                <a:latin typeface="Candara" panose="020E0502030303020204" pitchFamily="34" charset="0"/>
-                <a:ea typeface="Calibri" pitchFamily="34" charset="-122"/>
-                <a:cs typeface="Calibri" pitchFamily="34" charset="-120"/>
-              </a:rPr>
-              <a:t>FK?</a:t>
-            </a:r>
-            <a:endParaRPr lang="en-US" sz="700" dirty="0">
-              <a:latin typeface="Candara" panose="020E0502030303020204" pitchFamily="34" charset="0"/>
-            </a:endParaRPr>
-          </a:p>
-        </p:txBody>
-      </p:sp>
-      <p:sp>
-        <p:nvSpPr>
-          <p:cNvPr id="191" name="Text 189"/>
-          <p:cNvSpPr/>
-          <p:nvPr/>
-        </p:nvSpPr>
-        <p:spPr>
-          <a:xfrm>
-            <a:off x="5375271" y="5915520"/>
-            <a:ext cx="1005578" cy="141695"/>
-          </a:xfrm>
-          <a:prstGeom prst="rect">
-            <a:avLst/>
-          </a:prstGeom>
-          <a:noFill/>
-          <a:ln/>
-        </p:spPr>
-        <p:txBody>
-          <a:bodyPr wrap="square" lIns="0" tIns="0" rIns="0" bIns="0" rtlCol="0" anchor="ctr"/>
-          <a:lstStyle/>
-          <a:p>
-            <a:r>
-              <a:rPr lang="en-US" sz="850" i="1" dirty="0">
-                <a:solidFill>
-                  <a:srgbClr val="7AB896"/>
-                </a:solidFill>
-                <a:latin typeface="Candara" panose="020E0502030303020204" pitchFamily="34" charset="0"/>
-                <a:ea typeface="Calibri" pitchFamily="34" charset="-122"/>
-                <a:cs typeface="Calibri" pitchFamily="34" charset="-120"/>
-              </a:rPr>
-              <a:t>ActuatorId</a:t>
-            </a:r>
-            <a:endParaRPr lang="en-US" sz="850" dirty="0">
-              <a:latin typeface="Candara" panose="020E0502030303020204" pitchFamily="34" charset="0"/>
-            </a:endParaRPr>
-          </a:p>
-        </p:txBody>
-      </p:sp>
-      <p:sp>
-        <p:nvSpPr>
-          <p:cNvPr id="192" name="Text 190"/>
-          <p:cNvSpPr/>
-          <p:nvPr/>
-        </p:nvSpPr>
-        <p:spPr>
-          <a:xfrm>
-            <a:off x="6380849" y="5915520"/>
-            <a:ext cx="475364" cy="141695"/>
-          </a:xfrm>
-          <a:prstGeom prst="rect">
-            <a:avLst/>
-          </a:prstGeom>
-          <a:noFill/>
-          <a:ln/>
-        </p:spPr>
-        <p:txBody>
-          <a:bodyPr wrap="square" lIns="0" tIns="0" rIns="0" bIns="0" rtlCol="0" anchor="ctr"/>
-          <a:lstStyle/>
-          <a:p>
-            <a:pPr algn="r"/>
-            <a:r>
-              <a:rPr lang="en-US" sz="750" dirty="0">
-                <a:solidFill>
-                  <a:srgbClr val="4D8C6A"/>
-                </a:solidFill>
-                <a:latin typeface="Candara" panose="020E0502030303020204" pitchFamily="34" charset="0"/>
-                <a:ea typeface="Calibri" pitchFamily="34" charset="-122"/>
-                <a:cs typeface="Calibri" pitchFamily="34" charset="-120"/>
-              </a:rPr>
-              <a:t>int?</a:t>
-            </a:r>
-            <a:endParaRPr lang="en-US" sz="750" dirty="0">
-              <a:latin typeface="Candara" panose="020E0502030303020204" pitchFamily="34" charset="0"/>
-            </a:endParaRPr>
-          </a:p>
-        </p:txBody>
-      </p:sp>
-      <p:sp>
-        <p:nvSpPr>
-          <p:cNvPr id="193" name="Text 191"/>
-          <p:cNvSpPr/>
-          <p:nvPr/>
-        </p:nvSpPr>
-        <p:spPr>
-          <a:xfrm>
-            <a:off x="5375271" y="6057215"/>
-            <a:ext cx="1005578" cy="141695"/>
-          </a:xfrm>
-          <a:prstGeom prst="rect">
-            <a:avLst/>
-          </a:prstGeom>
-          <a:noFill/>
-          <a:ln/>
-        </p:spPr>
-        <p:txBody>
-          <a:bodyPr wrap="square" lIns="0" tIns="0" rIns="0" bIns="0" rtlCol="0" anchor="ctr"/>
-          <a:lstStyle/>
-          <a:p>
-            <a:r>
-              <a:rPr lang="en-US" sz="850" dirty="0">
-                <a:solidFill>
-                  <a:srgbClr val="FFFFFF"/>
-                </a:solidFill>
-                <a:latin typeface="Candara" panose="020E0502030303020204" pitchFamily="34" charset="0"/>
-                <a:ea typeface="Calibri" pitchFamily="34" charset="-122"/>
-                <a:cs typeface="Calibri" pitchFamily="34" charset="-120"/>
-              </a:rPr>
-              <a:t>CommandType</a:t>
-            </a:r>
-            <a:endParaRPr lang="en-US" sz="850" dirty="0">
-              <a:latin typeface="Candara" panose="020E0502030303020204" pitchFamily="34" charset="0"/>
-            </a:endParaRPr>
-          </a:p>
-        </p:txBody>
-      </p:sp>
-      <p:sp>
-        <p:nvSpPr>
-          <p:cNvPr id="194" name="Text 192"/>
-          <p:cNvSpPr/>
-          <p:nvPr/>
-        </p:nvSpPr>
-        <p:spPr>
-          <a:xfrm>
-            <a:off x="6380849" y="6057215"/>
-            <a:ext cx="475364" cy="141695"/>
-          </a:xfrm>
-          <a:prstGeom prst="rect">
-            <a:avLst/>
-          </a:prstGeom>
-          <a:noFill/>
-          <a:ln/>
-        </p:spPr>
-        <p:txBody>
-          <a:bodyPr wrap="square" lIns="0" tIns="0" rIns="0" bIns="0" rtlCol="0" anchor="ctr"/>
-          <a:lstStyle/>
-          <a:p>
-            <a:pPr algn="r"/>
-            <a:r>
-              <a:rPr lang="en-US" sz="750" dirty="0">
-                <a:solidFill>
-                  <a:srgbClr val="4D8C6A"/>
-                </a:solidFill>
-                <a:latin typeface="Candara" panose="020E0502030303020204" pitchFamily="34" charset="0"/>
-                <a:ea typeface="Calibri" pitchFamily="34" charset="-122"/>
-                <a:cs typeface="Calibri" pitchFamily="34" charset="-120"/>
-              </a:rPr>
-              <a:t>string(50)</a:t>
-            </a:r>
-            <a:endParaRPr lang="en-US" sz="750" dirty="0">
-              <a:latin typeface="Candara" panose="020E0502030303020204" pitchFamily="34" charset="0"/>
-            </a:endParaRPr>
-          </a:p>
-        </p:txBody>
-      </p:sp>
-      <p:sp>
-        <p:nvSpPr>
-          <p:cNvPr id="195" name="Shape 193"/>
-          <p:cNvSpPr/>
-          <p:nvPr/>
-        </p:nvSpPr>
-        <p:spPr>
-          <a:xfrm>
-            <a:off x="7157887" y="5147624"/>
-            <a:ext cx="2011156" cy="1133561"/>
-          </a:xfrm>
-          <a:prstGeom prst="roundRect">
-            <a:avLst>
-              <a:gd name="adj" fmla="val 6452"/>
-            </a:avLst>
-          </a:prstGeom>
-          <a:solidFill>
-            <a:srgbClr val="000000">
-              <a:alpha val="20000"/>
-            </a:srgbClr>
-          </a:solidFill>
-          <a:ln w="12700">
-            <a:solidFill>
-              <a:srgbClr val="000000"/>
-            </a:solidFill>
-            <a:prstDash val="solid"/>
-          </a:ln>
-        </p:spPr>
-        <p:txBody>
-          <a:bodyPr/>
-          <a:lstStyle/>
-          <a:p>
-            <a:endParaRPr lang="en-US" sz="1799">
-              <a:latin typeface="Candara" panose="020E0502030303020204" pitchFamily="34" charset="0"/>
-            </a:endParaRPr>
-          </a:p>
-        </p:txBody>
-      </p:sp>
-      <p:sp>
-        <p:nvSpPr>
-          <p:cNvPr id="196" name="Shape 194"/>
-          <p:cNvSpPr/>
-          <p:nvPr/>
-        </p:nvSpPr>
-        <p:spPr>
-          <a:xfrm>
-            <a:off x="7130462" y="5120199"/>
-            <a:ext cx="2011156" cy="1133561"/>
-          </a:xfrm>
-          <a:prstGeom prst="roundRect">
-            <a:avLst>
-              <a:gd name="adj" fmla="val 6452"/>
-            </a:avLst>
-          </a:prstGeom>
-          <a:solidFill>
-            <a:srgbClr val="112B1D"/>
-          </a:solidFill>
-          <a:ln w="9525">
-            <a:solidFill>
-              <a:srgbClr val="1E3D2A"/>
-            </a:solidFill>
-            <a:prstDash val="solid"/>
-          </a:ln>
-        </p:spPr>
-        <p:txBody>
-          <a:bodyPr/>
-          <a:lstStyle/>
-          <a:p>
-            <a:endParaRPr lang="en-US" sz="1799">
-              <a:latin typeface="Candara" panose="020E0502030303020204" pitchFamily="34" charset="0"/>
-            </a:endParaRPr>
-          </a:p>
-        </p:txBody>
-      </p:sp>
-      <p:sp>
-        <p:nvSpPr>
-          <p:cNvPr id="197" name="Shape 195"/>
-          <p:cNvSpPr/>
-          <p:nvPr/>
-        </p:nvSpPr>
-        <p:spPr>
-          <a:xfrm>
-            <a:off x="7130462" y="5193332"/>
-            <a:ext cx="50279" cy="987295"/>
-          </a:xfrm>
-          <a:prstGeom prst="rect">
-            <a:avLst/>
-          </a:prstGeom>
-          <a:solidFill>
-            <a:srgbClr val="1A3D52"/>
-          </a:solidFill>
-          <a:ln w="12700">
-            <a:solidFill>
-              <a:srgbClr val="1A3D52"/>
-            </a:solidFill>
-            <a:prstDash val="solid"/>
-          </a:ln>
-        </p:spPr>
-        <p:txBody>
-          <a:bodyPr/>
-          <a:lstStyle/>
-          <a:p>
-            <a:endParaRPr lang="en-US" sz="1799">
-              <a:latin typeface="Candara" panose="020E0502030303020204" pitchFamily="34" charset="0"/>
-            </a:endParaRPr>
-          </a:p>
-        </p:txBody>
-      </p:sp>
-      <p:sp>
-        <p:nvSpPr>
-          <p:cNvPr id="198" name="Shape 196"/>
-          <p:cNvSpPr/>
-          <p:nvPr/>
-        </p:nvSpPr>
-        <p:spPr>
-          <a:xfrm>
-            <a:off x="7130462" y="5120200"/>
-            <a:ext cx="50279" cy="164549"/>
-          </a:xfrm>
-          <a:prstGeom prst="roundRect">
-            <a:avLst>
-              <a:gd name="adj" fmla="val 72727"/>
-            </a:avLst>
-          </a:prstGeom>
-          <a:solidFill>
-            <a:srgbClr val="1A3D52"/>
-          </a:solidFill>
-          <a:ln w="12700">
-            <a:solidFill>
-              <a:srgbClr val="1A3D52"/>
-            </a:solidFill>
-            <a:prstDash val="solid"/>
-          </a:ln>
-        </p:spPr>
-        <p:txBody>
-          <a:bodyPr/>
-          <a:lstStyle/>
-          <a:p>
-            <a:endParaRPr lang="en-US" sz="1799">
-              <a:latin typeface="Candara" panose="020E0502030303020204" pitchFamily="34" charset="0"/>
-            </a:endParaRPr>
-          </a:p>
-        </p:txBody>
-      </p:sp>
-      <p:sp>
-        <p:nvSpPr>
           <p:cNvPr id="199" name="Text 197"/>
           <p:cNvSpPr/>
           <p:nvPr/>
@@ -38215,13 +36088,13 @@
       </p:sp>
       <p:sp>
         <p:nvSpPr>
-          <p:cNvPr id="219" name="Text 217"/>
-          <p:cNvSpPr/>
-          <p:nvPr/>
-        </p:nvSpPr>
-        <p:spPr>
-          <a:xfrm>
-            <a:off x="7051054" y="3391098"/>
+          <p:cNvPr id="223" name="Text 221"/>
+          <p:cNvSpPr/>
+          <p:nvPr/>
+        </p:nvSpPr>
+        <p:spPr>
+          <a:xfrm>
+            <a:off x="6964236" y="4116594"/>
             <a:ext cx="420514" cy="182832"/>
           </a:xfrm>
           <a:prstGeom prst="rect">
@@ -38260,13 +36133,13 @@
       </p:sp>
       <p:sp>
         <p:nvSpPr>
-          <p:cNvPr id="220" name="Text 218"/>
-          <p:cNvSpPr/>
-          <p:nvPr/>
-        </p:nvSpPr>
-        <p:spPr>
-          <a:xfrm>
-            <a:off x="9257593" y="2909264"/>
+          <p:cNvPr id="224" name="Text 222"/>
+          <p:cNvSpPr/>
+          <p:nvPr/>
+        </p:nvSpPr>
+        <p:spPr>
+          <a:xfrm>
+            <a:off x="9344412" y="5109086"/>
             <a:ext cx="420514" cy="182832"/>
           </a:xfrm>
           <a:prstGeom prst="rect">
@@ -38305,13 +36178,13 @@
       </p:sp>
       <p:sp>
         <p:nvSpPr>
-          <p:cNvPr id="221" name="Text 219"/>
-          <p:cNvSpPr/>
-          <p:nvPr/>
-        </p:nvSpPr>
-        <p:spPr>
-          <a:xfrm>
-            <a:off x="7011109" y="3762868"/>
+          <p:cNvPr id="227" name="Text 225"/>
+          <p:cNvSpPr/>
+          <p:nvPr/>
+        </p:nvSpPr>
+        <p:spPr>
+          <a:xfrm>
+            <a:off x="5704622" y="4125171"/>
             <a:ext cx="420514" cy="182832"/>
           </a:xfrm>
           <a:prstGeom prst="rect">
@@ -38350,13 +36223,13 @@
       </p:sp>
       <p:sp>
         <p:nvSpPr>
-          <p:cNvPr id="222" name="Text 220"/>
-          <p:cNvSpPr/>
-          <p:nvPr/>
-        </p:nvSpPr>
-        <p:spPr>
-          <a:xfrm>
-            <a:off x="9297538" y="4000152"/>
+          <p:cNvPr id="228" name="Text 226"/>
+          <p:cNvSpPr/>
+          <p:nvPr/>
+        </p:nvSpPr>
+        <p:spPr>
+          <a:xfrm>
+            <a:off x="5896092" y="4871968"/>
             <a:ext cx="420514" cy="182832"/>
           </a:xfrm>
           <a:prstGeom prst="rect">
@@ -38395,13 +36268,13 @@
       </p:sp>
       <p:sp>
         <p:nvSpPr>
-          <p:cNvPr id="223" name="Text 221"/>
-          <p:cNvSpPr/>
-          <p:nvPr/>
-        </p:nvSpPr>
-        <p:spPr>
-          <a:xfrm>
-            <a:off x="6964236" y="4116594"/>
+          <p:cNvPr id="229" name="Text 227"/>
+          <p:cNvSpPr/>
+          <p:nvPr/>
+        </p:nvSpPr>
+        <p:spPr>
+          <a:xfrm>
+            <a:off x="6426119" y="4169680"/>
             <a:ext cx="420514" cy="182832"/>
           </a:xfrm>
           <a:prstGeom prst="rect">
@@ -38430,7 +36303,7 @@
                 <a:ea typeface="Calibri" pitchFamily="34" charset="-122"/>
                 <a:cs typeface="Calibri" pitchFamily="34" charset="-120"/>
               </a:rPr>
-              <a:t>1</a:t>
+              <a:t>0..1</a:t>
             </a:r>
             <a:endParaRPr lang="en-US" sz="900" dirty="0">
               <a:latin typeface="Candara" panose="020E0502030303020204" pitchFamily="34" charset="0"/>
@@ -38440,13 +36313,13 @@
       </p:sp>
       <p:sp>
         <p:nvSpPr>
-          <p:cNvPr id="224" name="Text 222"/>
-          <p:cNvSpPr/>
-          <p:nvPr/>
-        </p:nvSpPr>
-        <p:spPr>
-          <a:xfrm>
-            <a:off x="9344412" y="5109086"/>
+          <p:cNvPr id="230" name="Text 228"/>
+          <p:cNvSpPr/>
+          <p:nvPr/>
+        </p:nvSpPr>
+        <p:spPr>
+          <a:xfrm>
+            <a:off x="7368583" y="4827459"/>
             <a:ext cx="420514" cy="182832"/>
           </a:xfrm>
           <a:prstGeom prst="rect">
@@ -38485,13 +36358,13 @@
       </p:sp>
       <p:sp>
         <p:nvSpPr>
-          <p:cNvPr id="225" name="Text 223"/>
-          <p:cNvSpPr/>
-          <p:nvPr/>
-        </p:nvSpPr>
-        <p:spPr>
-          <a:xfrm>
-            <a:off x="5053388" y="3992641"/>
+          <p:cNvPr id="231" name="Text 229"/>
+          <p:cNvSpPr/>
+          <p:nvPr/>
+        </p:nvSpPr>
+        <p:spPr>
+          <a:xfrm>
+            <a:off x="2608323" y="1662357"/>
             <a:ext cx="420514" cy="182832"/>
           </a:xfrm>
           <a:prstGeom prst="rect">
@@ -38530,13 +36403,13 @@
       </p:sp>
       <p:sp>
         <p:nvSpPr>
-          <p:cNvPr id="226" name="Text 224"/>
-          <p:cNvSpPr/>
-          <p:nvPr/>
-        </p:nvSpPr>
-        <p:spPr>
-          <a:xfrm>
-            <a:off x="4307629" y="5004498"/>
+          <p:cNvPr id="232" name="Text 230"/>
+          <p:cNvSpPr/>
+          <p:nvPr/>
+        </p:nvSpPr>
+        <p:spPr>
+          <a:xfrm>
+            <a:off x="9266639" y="1255605"/>
             <a:ext cx="420514" cy="182832"/>
           </a:xfrm>
           <a:prstGeom prst="rect">
@@ -38575,13 +36448,13 @@
       </p:sp>
       <p:sp>
         <p:nvSpPr>
-          <p:cNvPr id="227" name="Text 225"/>
-          <p:cNvSpPr/>
-          <p:nvPr/>
-        </p:nvSpPr>
-        <p:spPr>
-          <a:xfrm>
-            <a:off x="5704622" y="4125171"/>
+          <p:cNvPr id="233" name="Text 231"/>
+          <p:cNvSpPr/>
+          <p:nvPr/>
+        </p:nvSpPr>
+        <p:spPr>
+          <a:xfrm>
+            <a:off x="2427079" y="2327727"/>
             <a:ext cx="420514" cy="182832"/>
           </a:xfrm>
           <a:prstGeom prst="rect">
@@ -38610,7 +36483,7 @@
                 <a:ea typeface="Calibri" pitchFamily="34" charset="-122"/>
                 <a:cs typeface="Calibri" pitchFamily="34" charset="-120"/>
               </a:rPr>
-              <a:t>1</a:t>
+              <a:t>0..1</a:t>
             </a:r>
             <a:endParaRPr lang="en-US" sz="900" dirty="0">
               <a:latin typeface="Candara" panose="020E0502030303020204" pitchFamily="34" charset="0"/>
@@ -38620,13 +36493,13 @@
       </p:sp>
       <p:sp>
         <p:nvSpPr>
-          <p:cNvPr id="228" name="Text 226"/>
-          <p:cNvSpPr/>
-          <p:nvPr/>
-        </p:nvSpPr>
-        <p:spPr>
-          <a:xfrm>
-            <a:off x="5896092" y="4871968"/>
+          <p:cNvPr id="234" name="Text 232"/>
+          <p:cNvSpPr/>
+          <p:nvPr/>
+        </p:nvSpPr>
+        <p:spPr>
+          <a:xfrm>
+            <a:off x="6933939" y="4841088"/>
             <a:ext cx="420514" cy="182832"/>
           </a:xfrm>
           <a:prstGeom prst="rect">
@@ -38665,13 +36538,13 @@
       </p:sp>
       <p:sp>
         <p:nvSpPr>
-          <p:cNvPr id="229" name="Text 227"/>
-          <p:cNvSpPr/>
-          <p:nvPr/>
-        </p:nvSpPr>
-        <p:spPr>
-          <a:xfrm>
-            <a:off x="6426119" y="4169680"/>
+          <p:cNvPr id="235" name="Text 233"/>
+          <p:cNvSpPr/>
+          <p:nvPr/>
+        </p:nvSpPr>
+        <p:spPr>
+          <a:xfrm>
+            <a:off x="2538879" y="2225681"/>
             <a:ext cx="420514" cy="182832"/>
           </a:xfrm>
           <a:prstGeom prst="rect">
@@ -38710,13 +36583,13 @@
       </p:sp>
       <p:sp>
         <p:nvSpPr>
-          <p:cNvPr id="230" name="Text 228"/>
-          <p:cNvSpPr/>
-          <p:nvPr/>
-        </p:nvSpPr>
-        <p:spPr>
-          <a:xfrm>
-            <a:off x="7368583" y="4827459"/>
+          <p:cNvPr id="236" name="Text 234"/>
+          <p:cNvSpPr/>
+          <p:nvPr/>
+        </p:nvSpPr>
+        <p:spPr>
+          <a:xfrm>
+            <a:off x="9336083" y="5171675"/>
             <a:ext cx="420514" cy="182832"/>
           </a:xfrm>
           <a:prstGeom prst="rect">
@@ -38755,13 +36628,13 @@
       </p:sp>
       <p:sp>
         <p:nvSpPr>
-          <p:cNvPr id="231" name="Text 229"/>
-          <p:cNvSpPr/>
-          <p:nvPr/>
-        </p:nvSpPr>
-        <p:spPr>
-          <a:xfrm>
-            <a:off x="2608323" y="1662357"/>
+          <p:cNvPr id="237" name="Text 235"/>
+          <p:cNvSpPr/>
+          <p:nvPr/>
+        </p:nvSpPr>
+        <p:spPr>
+          <a:xfrm>
+            <a:off x="1316393" y="2304581"/>
             <a:ext cx="420514" cy="182832"/>
           </a:xfrm>
           <a:prstGeom prst="rect">
@@ -38790,7 +36663,7 @@
                 <a:ea typeface="Calibri" pitchFamily="34" charset="-122"/>
                 <a:cs typeface="Calibri" pitchFamily="34" charset="-120"/>
               </a:rPr>
-              <a:t>1</a:t>
+              <a:t>0..1</a:t>
             </a:r>
             <a:endParaRPr lang="en-US" sz="900" dirty="0">
               <a:latin typeface="Candara" panose="020E0502030303020204" pitchFamily="34" charset="0"/>
@@ -38800,13 +36673,13 @@
       </p:sp>
       <p:sp>
         <p:nvSpPr>
-          <p:cNvPr id="232" name="Text 230"/>
-          <p:cNvSpPr/>
-          <p:nvPr/>
-        </p:nvSpPr>
-        <p:spPr>
-          <a:xfrm>
-            <a:off x="9266639" y="1255605"/>
+          <p:cNvPr id="238" name="Text 236"/>
+          <p:cNvSpPr/>
+          <p:nvPr/>
+        </p:nvSpPr>
+        <p:spPr>
+          <a:xfrm>
+            <a:off x="1554075" y="2853078"/>
             <a:ext cx="420514" cy="182832"/>
           </a:xfrm>
           <a:prstGeom prst="rect">
@@ -38845,13 +36718,13 @@
       </p:sp>
       <p:sp>
         <p:nvSpPr>
-          <p:cNvPr id="233" name="Text 231"/>
-          <p:cNvSpPr/>
-          <p:nvPr/>
-        </p:nvSpPr>
-        <p:spPr>
-          <a:xfrm>
-            <a:off x="2427079" y="2327727"/>
+          <p:cNvPr id="239" name="Text 237"/>
+          <p:cNvSpPr/>
+          <p:nvPr/>
+        </p:nvSpPr>
+        <p:spPr>
+          <a:xfrm>
+            <a:off x="9084475" y="5820230"/>
             <a:ext cx="420514" cy="182832"/>
           </a:xfrm>
           <a:prstGeom prst="rect">
@@ -38880,7 +36753,7 @@
                 <a:ea typeface="Calibri" pitchFamily="34" charset="-122"/>
                 <a:cs typeface="Calibri" pitchFamily="34" charset="-120"/>
               </a:rPr>
-              <a:t>0..1</a:t>
+              <a:t>1</a:t>
             </a:r>
             <a:endParaRPr lang="en-US" sz="900" dirty="0">
               <a:latin typeface="Candara" panose="020E0502030303020204" pitchFamily="34" charset="0"/>
@@ -38890,13 +36763,13 @@
       </p:sp>
       <p:sp>
         <p:nvSpPr>
-          <p:cNvPr id="234" name="Text 232"/>
-          <p:cNvSpPr/>
-          <p:nvPr/>
-        </p:nvSpPr>
-        <p:spPr>
-          <a:xfrm>
-            <a:off x="6933939" y="4841088"/>
+          <p:cNvPr id="240" name="Text 238"/>
+          <p:cNvSpPr/>
+          <p:nvPr/>
+        </p:nvSpPr>
+        <p:spPr>
+          <a:xfrm>
+            <a:off x="9281036" y="5599438"/>
             <a:ext cx="420514" cy="182832"/>
           </a:xfrm>
           <a:prstGeom prst="rect">
@@ -38935,13 +36808,13 @@
       </p:sp>
       <p:sp>
         <p:nvSpPr>
-          <p:cNvPr id="235" name="Text 233"/>
-          <p:cNvSpPr/>
-          <p:nvPr/>
-        </p:nvSpPr>
-        <p:spPr>
-          <a:xfrm>
-            <a:off x="2538879" y="2225681"/>
+          <p:cNvPr id="241" name="Text 239"/>
+          <p:cNvSpPr/>
+          <p:nvPr/>
+        </p:nvSpPr>
+        <p:spPr>
+          <a:xfrm>
+            <a:off x="2539461" y="4232496"/>
             <a:ext cx="420514" cy="182832"/>
           </a:xfrm>
           <a:prstGeom prst="rect">
@@ -38971,609 +36844,6 @@
                 <a:cs typeface="Calibri" pitchFamily="34" charset="-120"/>
               </a:rPr>
               <a:t>0..1</a:t>
-            </a:r>
-            <a:endParaRPr lang="en-US" sz="900" dirty="0">
-              <a:latin typeface="Candara" panose="020E0502030303020204" pitchFamily="34" charset="0"/>
-            </a:endParaRPr>
-          </a:p>
-        </p:txBody>
-      </p:sp>
-      <p:sp>
-        <p:nvSpPr>
-          <p:cNvPr id="236" name="Text 234"/>
-          <p:cNvSpPr/>
-          <p:nvPr/>
-        </p:nvSpPr>
-        <p:spPr>
-          <a:xfrm>
-            <a:off x="9336083" y="5171675"/>
-            <a:ext cx="420514" cy="182832"/>
-          </a:xfrm>
-          <a:prstGeom prst="rect">
-            <a:avLst/>
-          </a:prstGeom>
-          <a:solidFill>
-            <a:srgbClr val="0D2117"/>
-          </a:solidFill>
-          <a:ln w="6350">
-            <a:solidFill>
-              <a:srgbClr val="2A9962"/>
-            </a:solidFill>
-          </a:ln>
-        </p:spPr>
-        <p:txBody>
-          <a:bodyPr wrap="square" lIns="0" tIns="0" rIns="0" bIns="0" rtlCol="0" anchor="ctr"/>
-          <a:lstStyle/>
-          <a:p>
-            <a:pPr algn="ctr"/>
-            <a:r>
-              <a:rPr lang="en-US" sz="900" b="1" dirty="0">
-                <a:solidFill>
-                  <a:srgbClr val="3ECF80"/>
-                </a:solidFill>
-                <a:latin typeface="Candara" panose="020E0502030303020204" pitchFamily="34" charset="0"/>
-                <a:ea typeface="Calibri" pitchFamily="34" charset="-122"/>
-                <a:cs typeface="Calibri" pitchFamily="34" charset="-120"/>
-              </a:rPr>
-              <a:t>0..*</a:t>
-            </a:r>
-            <a:endParaRPr lang="en-US" sz="900" dirty="0">
-              <a:latin typeface="Candara" panose="020E0502030303020204" pitchFamily="34" charset="0"/>
-            </a:endParaRPr>
-          </a:p>
-        </p:txBody>
-      </p:sp>
-      <p:sp>
-        <p:nvSpPr>
-          <p:cNvPr id="237" name="Text 235"/>
-          <p:cNvSpPr/>
-          <p:nvPr/>
-        </p:nvSpPr>
-        <p:spPr>
-          <a:xfrm>
-            <a:off x="1316393" y="2304581"/>
-            <a:ext cx="420514" cy="182832"/>
-          </a:xfrm>
-          <a:prstGeom prst="rect">
-            <a:avLst/>
-          </a:prstGeom>
-          <a:solidFill>
-            <a:srgbClr val="0D2117"/>
-          </a:solidFill>
-          <a:ln w="6350">
-            <a:solidFill>
-              <a:srgbClr val="2A9962"/>
-            </a:solidFill>
-          </a:ln>
-        </p:spPr>
-        <p:txBody>
-          <a:bodyPr wrap="square" lIns="0" tIns="0" rIns="0" bIns="0" rtlCol="0" anchor="ctr"/>
-          <a:lstStyle/>
-          <a:p>
-            <a:pPr algn="ctr"/>
-            <a:r>
-              <a:rPr lang="en-US" sz="900" b="1" dirty="0">
-                <a:solidFill>
-                  <a:srgbClr val="3ECF80"/>
-                </a:solidFill>
-                <a:latin typeface="Candara" panose="020E0502030303020204" pitchFamily="34" charset="0"/>
-                <a:ea typeface="Calibri" pitchFamily="34" charset="-122"/>
-                <a:cs typeface="Calibri" pitchFamily="34" charset="-120"/>
-              </a:rPr>
-              <a:t>0..1</a:t>
-            </a:r>
-            <a:endParaRPr lang="en-US" sz="900" dirty="0">
-              <a:latin typeface="Candara" panose="020E0502030303020204" pitchFamily="34" charset="0"/>
-            </a:endParaRPr>
-          </a:p>
-        </p:txBody>
-      </p:sp>
-      <p:sp>
-        <p:nvSpPr>
-          <p:cNvPr id="238" name="Text 236"/>
-          <p:cNvSpPr/>
-          <p:nvPr/>
-        </p:nvSpPr>
-        <p:spPr>
-          <a:xfrm>
-            <a:off x="1554075" y="2853078"/>
-            <a:ext cx="420514" cy="182832"/>
-          </a:xfrm>
-          <a:prstGeom prst="rect">
-            <a:avLst/>
-          </a:prstGeom>
-          <a:solidFill>
-            <a:srgbClr val="0D2117"/>
-          </a:solidFill>
-          <a:ln w="6350">
-            <a:solidFill>
-              <a:srgbClr val="2A9962"/>
-            </a:solidFill>
-          </a:ln>
-        </p:spPr>
-        <p:txBody>
-          <a:bodyPr wrap="square" lIns="0" tIns="0" rIns="0" bIns="0" rtlCol="0" anchor="ctr"/>
-          <a:lstStyle/>
-          <a:p>
-            <a:pPr algn="ctr"/>
-            <a:r>
-              <a:rPr lang="en-US" sz="900" b="1" dirty="0">
-                <a:solidFill>
-                  <a:srgbClr val="3ECF80"/>
-                </a:solidFill>
-                <a:latin typeface="Candara" panose="020E0502030303020204" pitchFamily="34" charset="0"/>
-                <a:ea typeface="Calibri" pitchFamily="34" charset="-122"/>
-                <a:cs typeface="Calibri" pitchFamily="34" charset="-120"/>
-              </a:rPr>
-              <a:t>0..*</a:t>
-            </a:r>
-            <a:endParaRPr lang="en-US" sz="900" dirty="0">
-              <a:latin typeface="Candara" panose="020E0502030303020204" pitchFamily="34" charset="0"/>
-            </a:endParaRPr>
-          </a:p>
-        </p:txBody>
-      </p:sp>
-      <p:sp>
-        <p:nvSpPr>
-          <p:cNvPr id="239" name="Text 237"/>
-          <p:cNvSpPr/>
-          <p:nvPr/>
-        </p:nvSpPr>
-        <p:spPr>
-          <a:xfrm>
-            <a:off x="9084475" y="5820230"/>
-            <a:ext cx="420514" cy="182832"/>
-          </a:xfrm>
-          <a:prstGeom prst="rect">
-            <a:avLst/>
-          </a:prstGeom>
-          <a:solidFill>
-            <a:srgbClr val="0D2117"/>
-          </a:solidFill>
-          <a:ln w="6350">
-            <a:solidFill>
-              <a:srgbClr val="2A9962"/>
-            </a:solidFill>
-          </a:ln>
-        </p:spPr>
-        <p:txBody>
-          <a:bodyPr wrap="square" lIns="0" tIns="0" rIns="0" bIns="0" rtlCol="0" anchor="ctr"/>
-          <a:lstStyle/>
-          <a:p>
-            <a:pPr algn="ctr"/>
-            <a:r>
-              <a:rPr lang="en-US" sz="900" b="1" dirty="0">
-                <a:solidFill>
-                  <a:srgbClr val="3ECF80"/>
-                </a:solidFill>
-                <a:latin typeface="Candara" panose="020E0502030303020204" pitchFamily="34" charset="0"/>
-                <a:ea typeface="Calibri" pitchFamily="34" charset="-122"/>
-                <a:cs typeface="Calibri" pitchFamily="34" charset="-120"/>
-              </a:rPr>
-              <a:t>1</a:t>
-            </a:r>
-            <a:endParaRPr lang="en-US" sz="900" dirty="0">
-              <a:latin typeface="Candara" panose="020E0502030303020204" pitchFamily="34" charset="0"/>
-            </a:endParaRPr>
-          </a:p>
-        </p:txBody>
-      </p:sp>
-      <p:sp>
-        <p:nvSpPr>
-          <p:cNvPr id="240" name="Text 238"/>
-          <p:cNvSpPr/>
-          <p:nvPr/>
-        </p:nvSpPr>
-        <p:spPr>
-          <a:xfrm>
-            <a:off x="9281036" y="5599438"/>
-            <a:ext cx="420514" cy="182832"/>
-          </a:xfrm>
-          <a:prstGeom prst="rect">
-            <a:avLst/>
-          </a:prstGeom>
-          <a:solidFill>
-            <a:srgbClr val="0D2117"/>
-          </a:solidFill>
-          <a:ln w="6350">
-            <a:solidFill>
-              <a:srgbClr val="2A9962"/>
-            </a:solidFill>
-          </a:ln>
-        </p:spPr>
-        <p:txBody>
-          <a:bodyPr wrap="square" lIns="0" tIns="0" rIns="0" bIns="0" rtlCol="0" anchor="ctr"/>
-          <a:lstStyle/>
-          <a:p>
-            <a:pPr algn="ctr"/>
-            <a:r>
-              <a:rPr lang="en-US" sz="900" b="1" dirty="0">
-                <a:solidFill>
-                  <a:srgbClr val="3ECF80"/>
-                </a:solidFill>
-                <a:latin typeface="Candara" panose="020E0502030303020204" pitchFamily="34" charset="0"/>
-                <a:ea typeface="Calibri" pitchFamily="34" charset="-122"/>
-                <a:cs typeface="Calibri" pitchFamily="34" charset="-120"/>
-              </a:rPr>
-              <a:t>0..*</a:t>
-            </a:r>
-            <a:endParaRPr lang="en-US" sz="900" dirty="0">
-              <a:latin typeface="Candara" panose="020E0502030303020204" pitchFamily="34" charset="0"/>
-            </a:endParaRPr>
-          </a:p>
-        </p:txBody>
-      </p:sp>
-      <p:sp>
-        <p:nvSpPr>
-          <p:cNvPr id="241" name="Text 239"/>
-          <p:cNvSpPr/>
-          <p:nvPr/>
-        </p:nvSpPr>
-        <p:spPr>
-          <a:xfrm>
-            <a:off x="2539461" y="4232496"/>
-            <a:ext cx="420514" cy="182832"/>
-          </a:xfrm>
-          <a:prstGeom prst="rect">
-            <a:avLst/>
-          </a:prstGeom>
-          <a:solidFill>
-            <a:srgbClr val="0D2117"/>
-          </a:solidFill>
-          <a:ln w="6350">
-            <a:solidFill>
-              <a:srgbClr val="2A9962"/>
-            </a:solidFill>
-          </a:ln>
-        </p:spPr>
-        <p:txBody>
-          <a:bodyPr wrap="square" lIns="0" tIns="0" rIns="0" bIns="0" rtlCol="0" anchor="ctr"/>
-          <a:lstStyle/>
-          <a:p>
-            <a:pPr algn="ctr"/>
-            <a:r>
-              <a:rPr lang="en-US" sz="900" b="1" dirty="0">
-                <a:solidFill>
-                  <a:srgbClr val="3ECF80"/>
-                </a:solidFill>
-                <a:latin typeface="Candara" panose="020E0502030303020204" pitchFamily="34" charset="0"/>
-                <a:ea typeface="Calibri" pitchFamily="34" charset="-122"/>
-                <a:cs typeface="Calibri" pitchFamily="34" charset="-120"/>
-              </a:rPr>
-              <a:t>0..1</a:t>
-            </a:r>
-            <a:endParaRPr lang="en-US" sz="900" dirty="0">
-              <a:latin typeface="Candara" panose="020E0502030303020204" pitchFamily="34" charset="0"/>
-            </a:endParaRPr>
-          </a:p>
-        </p:txBody>
-      </p:sp>
-      <p:sp>
-        <p:nvSpPr>
-          <p:cNvPr id="242" name="Text 240"/>
-          <p:cNvSpPr/>
-          <p:nvPr/>
-        </p:nvSpPr>
-        <p:spPr>
-          <a:xfrm>
-            <a:off x="4627567" y="4947476"/>
-            <a:ext cx="420514" cy="182832"/>
-          </a:xfrm>
-          <a:prstGeom prst="rect">
-            <a:avLst/>
-          </a:prstGeom>
-          <a:solidFill>
-            <a:srgbClr val="0D2117"/>
-          </a:solidFill>
-          <a:ln w="6350">
-            <a:solidFill>
-              <a:srgbClr val="2A9962"/>
-            </a:solidFill>
-          </a:ln>
-        </p:spPr>
-        <p:txBody>
-          <a:bodyPr wrap="square" lIns="0" tIns="0" rIns="0" bIns="0" rtlCol="0" anchor="ctr"/>
-          <a:lstStyle/>
-          <a:p>
-            <a:pPr algn="ctr"/>
-            <a:r>
-              <a:rPr lang="en-US" sz="900" b="1" dirty="0">
-                <a:solidFill>
-                  <a:srgbClr val="3ECF80"/>
-                </a:solidFill>
-                <a:latin typeface="Candara" panose="020E0502030303020204" pitchFamily="34" charset="0"/>
-                <a:ea typeface="Calibri" pitchFamily="34" charset="-122"/>
-                <a:cs typeface="Calibri" pitchFamily="34" charset="-120"/>
-              </a:rPr>
-              <a:t>0..*</a:t>
-            </a:r>
-            <a:endParaRPr lang="en-US" sz="900" dirty="0">
-              <a:latin typeface="Candara" panose="020E0502030303020204" pitchFamily="34" charset="0"/>
-            </a:endParaRPr>
-          </a:p>
-        </p:txBody>
-      </p:sp>
-      <p:sp>
-        <p:nvSpPr>
-          <p:cNvPr id="243" name="Shape 241"/>
-          <p:cNvSpPr/>
-          <p:nvPr/>
-        </p:nvSpPr>
-        <p:spPr>
-          <a:xfrm>
-            <a:off x="457080" y="6619425"/>
-            <a:ext cx="50279" cy="164549"/>
-          </a:xfrm>
-          <a:prstGeom prst="rect">
-            <a:avLst/>
-          </a:prstGeom>
-          <a:solidFill>
-            <a:srgbClr val="3ECF80"/>
-          </a:solidFill>
-          <a:ln w="12700">
-            <a:solidFill>
-              <a:srgbClr val="3ECF80"/>
-            </a:solidFill>
-            <a:prstDash val="solid"/>
-          </a:ln>
-        </p:spPr>
-        <p:txBody>
-          <a:bodyPr/>
-          <a:lstStyle/>
-          <a:p>
-            <a:endParaRPr lang="en-US" sz="1799">
-              <a:latin typeface="Candara" panose="020E0502030303020204" pitchFamily="34" charset="0"/>
-            </a:endParaRPr>
-          </a:p>
-        </p:txBody>
-      </p:sp>
-      <p:sp>
-        <p:nvSpPr>
-          <p:cNvPr id="244" name="Text 242"/>
-          <p:cNvSpPr/>
-          <p:nvPr/>
-        </p:nvSpPr>
-        <p:spPr>
-          <a:xfrm>
-            <a:off x="566780" y="6601142"/>
-            <a:ext cx="1554075" cy="201116"/>
-          </a:xfrm>
-          <a:prstGeom prst="rect">
-            <a:avLst/>
-          </a:prstGeom>
-          <a:noFill/>
-          <a:ln/>
-        </p:spPr>
-        <p:txBody>
-          <a:bodyPr wrap="square" lIns="0" tIns="0" rIns="0" bIns="0" rtlCol="0" anchor="ctr"/>
-          <a:lstStyle/>
-          <a:p>
-            <a:r>
-              <a:rPr lang="en-US" sz="900" dirty="0">
-                <a:solidFill>
-                  <a:srgbClr val="7AB896"/>
-                </a:solidFill>
-                <a:latin typeface="Candara" panose="020E0502030303020204" pitchFamily="34" charset="0"/>
-                <a:ea typeface="Calibri" pitchFamily="34" charset="-122"/>
-                <a:cs typeface="Calibri" pitchFamily="34" charset="-120"/>
-              </a:rPr>
-              <a:t>Hub (Devices)</a:t>
-            </a:r>
-            <a:endParaRPr lang="en-US" sz="900" dirty="0">
-              <a:latin typeface="Candara" panose="020E0502030303020204" pitchFamily="34" charset="0"/>
-            </a:endParaRPr>
-          </a:p>
-        </p:txBody>
-      </p:sp>
-      <p:sp>
-        <p:nvSpPr>
-          <p:cNvPr id="245" name="Shape 243"/>
-          <p:cNvSpPr/>
-          <p:nvPr/>
-        </p:nvSpPr>
-        <p:spPr>
-          <a:xfrm>
-            <a:off x="2056864" y="6619425"/>
-            <a:ext cx="50279" cy="164549"/>
-          </a:xfrm>
-          <a:prstGeom prst="rect">
-            <a:avLst/>
-          </a:prstGeom>
-          <a:solidFill>
-            <a:srgbClr val="2A9962"/>
-          </a:solidFill>
-          <a:ln w="12700">
-            <a:solidFill>
-              <a:srgbClr val="2A9962"/>
-            </a:solidFill>
-            <a:prstDash val="solid"/>
-          </a:ln>
-        </p:spPr>
-        <p:txBody>
-          <a:bodyPr/>
-          <a:lstStyle/>
-          <a:p>
-            <a:endParaRPr lang="en-US" sz="1799">
-              <a:latin typeface="Candara" panose="020E0502030303020204" pitchFamily="34" charset="0"/>
-            </a:endParaRPr>
-          </a:p>
-        </p:txBody>
-      </p:sp>
-      <p:sp>
-        <p:nvSpPr>
-          <p:cNvPr id="246" name="Text 244"/>
-          <p:cNvSpPr/>
-          <p:nvPr/>
-        </p:nvSpPr>
-        <p:spPr>
-          <a:xfrm>
-            <a:off x="2166563" y="6601142"/>
-            <a:ext cx="1554075" cy="201116"/>
-          </a:xfrm>
-          <a:prstGeom prst="rect">
-            <a:avLst/>
-          </a:prstGeom>
-          <a:noFill/>
-          <a:ln/>
-        </p:spPr>
-        <p:txBody>
-          <a:bodyPr wrap="square" lIns="0" tIns="0" rIns="0" bIns="0" rtlCol="0" anchor="ctr"/>
-          <a:lstStyle/>
-          <a:p>
-            <a:r>
-              <a:rPr lang="en-US" sz="900" dirty="0">
-                <a:solidFill>
-                  <a:srgbClr val="7AB896"/>
-                </a:solidFill>
-                <a:latin typeface="Candara" panose="020E0502030303020204" pitchFamily="34" charset="0"/>
-                <a:ea typeface="Calibri" pitchFamily="34" charset="-122"/>
-                <a:cs typeface="Calibri" pitchFamily="34" charset="-120"/>
-              </a:rPr>
-              <a:t>Primary entities</a:t>
-            </a:r>
-            <a:endParaRPr lang="en-US" sz="900" dirty="0">
-              <a:latin typeface="Candara" panose="020E0502030303020204" pitchFamily="34" charset="0"/>
-            </a:endParaRPr>
-          </a:p>
-        </p:txBody>
-      </p:sp>
-      <p:sp>
-        <p:nvSpPr>
-          <p:cNvPr id="247" name="Shape 245"/>
-          <p:cNvSpPr/>
-          <p:nvPr/>
-        </p:nvSpPr>
-        <p:spPr>
-          <a:xfrm>
-            <a:off x="3793771" y="6619425"/>
-            <a:ext cx="50279" cy="164549"/>
-          </a:xfrm>
-          <a:prstGeom prst="rect">
-            <a:avLst/>
-          </a:prstGeom>
-          <a:solidFill>
-            <a:srgbClr val="1B5C3A"/>
-          </a:solidFill>
-          <a:ln w="12700">
-            <a:solidFill>
-              <a:srgbClr val="1B5C3A"/>
-            </a:solidFill>
-            <a:prstDash val="solid"/>
-          </a:ln>
-        </p:spPr>
-        <p:txBody>
-          <a:bodyPr/>
-          <a:lstStyle/>
-          <a:p>
-            <a:endParaRPr lang="en-US" sz="1799">
-              <a:latin typeface="Candara" panose="020E0502030303020204" pitchFamily="34" charset="0"/>
-            </a:endParaRPr>
-          </a:p>
-        </p:txBody>
-      </p:sp>
-      <p:sp>
-        <p:nvSpPr>
-          <p:cNvPr id="248" name="Text 246"/>
-          <p:cNvSpPr/>
-          <p:nvPr/>
-        </p:nvSpPr>
-        <p:spPr>
-          <a:xfrm>
-            <a:off x="3903471" y="6601142"/>
-            <a:ext cx="1554075" cy="201116"/>
-          </a:xfrm>
-          <a:prstGeom prst="rect">
-            <a:avLst/>
-          </a:prstGeom>
-          <a:noFill/>
-          <a:ln/>
-        </p:spPr>
-        <p:txBody>
-          <a:bodyPr wrap="square" lIns="0" tIns="0" rIns="0" bIns="0" rtlCol="0" anchor="ctr"/>
-          <a:lstStyle/>
-          <a:p>
-            <a:r>
-              <a:rPr lang="en-US" sz="900" dirty="0">
-                <a:solidFill>
-                  <a:srgbClr val="7AB896"/>
-                </a:solidFill>
-                <a:latin typeface="Candara" panose="020E0502030303020204" pitchFamily="34" charset="0"/>
-                <a:ea typeface="Calibri" pitchFamily="34" charset="-122"/>
-                <a:cs typeface="Calibri" pitchFamily="34" charset="-120"/>
-              </a:rPr>
-              <a:t>Event / log tables</a:t>
-            </a:r>
-            <a:endParaRPr lang="en-US" sz="900" dirty="0">
-              <a:latin typeface="Candara" panose="020E0502030303020204" pitchFamily="34" charset="0"/>
-            </a:endParaRPr>
-          </a:p>
-        </p:txBody>
-      </p:sp>
-      <p:sp>
-        <p:nvSpPr>
-          <p:cNvPr id="249" name="Shape 247"/>
-          <p:cNvSpPr/>
-          <p:nvPr/>
-        </p:nvSpPr>
-        <p:spPr>
-          <a:xfrm>
-            <a:off x="5667803" y="6619425"/>
-            <a:ext cx="50279" cy="164549"/>
-          </a:xfrm>
-          <a:prstGeom prst="rect">
-            <a:avLst/>
-          </a:prstGeom>
-          <a:solidFill>
-            <a:srgbClr val="1A3D52"/>
-          </a:solidFill>
-          <a:ln w="12700">
-            <a:solidFill>
-              <a:srgbClr val="1A3D52"/>
-            </a:solidFill>
-            <a:prstDash val="solid"/>
-          </a:ln>
-        </p:spPr>
-        <p:txBody>
-          <a:bodyPr/>
-          <a:lstStyle/>
-          <a:p>
-            <a:endParaRPr lang="en-US" sz="1799">
-              <a:latin typeface="Candara" panose="020E0502030303020204" pitchFamily="34" charset="0"/>
-            </a:endParaRPr>
-          </a:p>
-        </p:txBody>
-      </p:sp>
-      <p:sp>
-        <p:nvSpPr>
-          <p:cNvPr id="250" name="Text 248"/>
-          <p:cNvSpPr/>
-          <p:nvPr/>
-        </p:nvSpPr>
-        <p:spPr>
-          <a:xfrm>
-            <a:off x="5777503" y="6601142"/>
-            <a:ext cx="1554075" cy="201116"/>
-          </a:xfrm>
-          <a:prstGeom prst="rect">
-            <a:avLst/>
-          </a:prstGeom>
-          <a:noFill/>
-          <a:ln/>
-        </p:spPr>
-        <p:txBody>
-          <a:bodyPr wrap="square" lIns="0" tIns="0" rIns="0" bIns="0" rtlCol="0" anchor="ctr"/>
-          <a:lstStyle/>
-          <a:p>
-            <a:r>
-              <a:rPr lang="en-US" sz="900" dirty="0">
-                <a:solidFill>
-                  <a:srgbClr val="7AB896"/>
-                </a:solidFill>
-                <a:latin typeface="Candara" panose="020E0502030303020204" pitchFamily="34" charset="0"/>
-                <a:ea typeface="Calibri" pitchFamily="34" charset="-122"/>
-                <a:cs typeface="Calibri" pitchFamily="34" charset="-120"/>
-              </a:rPr>
-              <a:t>Configuration</a:t>
             </a:r>
             <a:endParaRPr lang="en-US" sz="900" dirty="0">
               <a:latin typeface="Candara" panose="020E0502030303020204" pitchFamily="34" charset="0"/>

--- a/Documents/Presentation/Capstone Project Presentation.pptx
+++ b/Documents/Presentation/Capstone Project Presentation.pptx
@@ -1465,6 +1465,46 @@
           <a:bodyPr/>
           <a:lstStyle/>
           <a:p>
+            <a:pPr marL="0" marR="0" lvl="0" indent="0" algn="l" defTabSz="914400" rtl="0" eaLnBrk="1" fontAlgn="auto" latinLnBrk="0" hangingPunct="1">
+              <a:lnSpc>
+                <a:spcPct val="100000"/>
+              </a:lnSpc>
+              <a:spcBef>
+                <a:spcPts val="0"/>
+              </a:spcBef>
+              <a:spcAft>
+                <a:spcPts val="0"/>
+              </a:spcAft>
+              <a:buClrTx/>
+              <a:buSzTx/>
+              <a:buFontTx/>
+              <a:buNone/>
+              <a:tabLst/>
+              <a:defRPr/>
+            </a:pPr>
+            <a:r>
+              <a:rPr lang="en-US" sz="1200" dirty="0">
+                <a:solidFill>
+                  <a:schemeClr val="bg2"/>
+                </a:solidFill>
+                <a:latin typeface="Candara" panose="020E0502030303020204" pitchFamily="34" charset="0"/>
+              </a:rPr>
+              <a:t>I would like to express my sincere gratitude to the instructors, especially Naser Chowdhury, for the guidance and support throughout the past two years. I would also like to thank RTC School for giving me the opportunity to achieve my first educational milestone in the United States, and my classmates and colleagues for their hard work, dedication, and support as we balanced work and study together to reach this achievement.</a:t>
+            </a:r>
+            <a:endParaRPr kumimoji="0" lang="en-US" sz="1200" b="0" u="none" strike="noStrike" kern="1200" cap="none" spc="0" normalizeH="0" baseline="0" noProof="0" dirty="0">
+              <a:ln>
+                <a:noFill/>
+              </a:ln>
+              <a:solidFill>
+                <a:schemeClr val="bg2"/>
+              </a:solidFill>
+              <a:effectLst/>
+              <a:uLnTx/>
+              <a:uFillTx/>
+              <a:latin typeface="Candara" panose="020E0502030303020204" pitchFamily="34" charset="0"/>
+            </a:endParaRPr>
+          </a:p>
+          <a:p>
             <a:endParaRPr lang="en-US" dirty="0"/>
           </a:p>
         </p:txBody>
@@ -1623,13 +1663,13 @@
           <a:p>
             <a:r>
               <a:rPr lang="en-US" dirty="0"/>
-              <a:t>I will start with the problem statement, explaining why real-time IoT monitoring is important in industrial environments. Then, I will introduce the project goals and scope, including what the system is designed to achieve.</a:t>
+              <a:t>1/ I will start with the problem statement, explaining why real-time IoT monitoring is important in industrial environments. 2/ Then, I will introduce the project goals and scope, including what the system is designed to achieve.</a:t>
             </a:r>
           </a:p>
           <a:p>
             <a:r>
               <a:rPr lang="en-US" dirty="0"/>
-              <a:t>Next, I will cover the technology stack and system architecture, showing how data flows from the edge device through MQTT, the API, the database, </a:t>
+              <a:t>3/ Next, I will cover the technology stack with what language, frame work, protocols are used and 4/ system architecture, showing how data flows from the edge device through MQTT, the API, the database, </a:t>
             </a:r>
             <a:r>
               <a:rPr lang="en-US" dirty="0" err="1"/>
@@ -1643,19 +1683,19 @@
           <a:p>
             <a:r>
               <a:rPr lang="en-US" dirty="0"/>
-              <a:t>After that, I will explain the database design, followed by an overview of the backend, API layer, and frontend design.</a:t>
+              <a:t>After that, 5/ I will explain the database design, followed by an overview of 6/ the backend, API layer, and 7/ frontend design.</a:t>
             </a:r>
           </a:p>
           <a:p>
             <a:r>
               <a:rPr lang="en-US" dirty="0"/>
-              <a:t>I will then highlight the key features and present a live demo, where you will see sensor data travel from the edge device to the dashboard in real time.</a:t>
+              <a:t>I will then highlight 8/the key features and 9/ present a live demo, where you will see sensor data travel from the edge device to the dashboard in real time.</a:t>
             </a:r>
           </a:p>
           <a:p>
             <a:r>
               <a:rPr lang="en-US" dirty="0"/>
-              <a:t>Finally, I will discuss the challenges we faced, the solutions we implemented, and conclude with future work.</a:t>
+              <a:t>Finally, I will discuss 10/ the challenges we faced, the solutions we implemented, and 11/ conclude with future work.</a:t>
             </a:r>
           </a:p>
           <a:p>
@@ -12486,7 +12526,7 @@
                 </a:solidFill>
                 <a:latin typeface="Candara" panose="020E0502030303020204" pitchFamily="34" charset="0"/>
               </a:rPr>
-              <a:t>CAPSTONE PROJECT</a:t>
+              <a:t>CAPSTONE PROJECT PRESENTATION</a:t>
             </a:r>
           </a:p>
           <a:p>
@@ -16950,7 +16990,7 @@
         </p:nvSpPr>
         <p:spPr>
           <a:xfrm>
-            <a:off x="1727200" y="2098163"/>
+            <a:off x="1670677" y="2195021"/>
             <a:ext cx="9225279" cy="1528957"/>
           </a:xfrm>
           <a:prstGeom prst="rect">
